--- a/自殺企図相談対応フロー図.pptx
+++ b/自殺企図相談対応フロー図.pptx
@@ -6,6 +6,8 @@
   </p:sldMasterIdLst>
   <p:sldIdLst>
     <p:sldId id="256" r:id="rId7"/>
+    <p:sldId id="257" r:id="rId8"/>
+    <p:sldId id="258" r:id="rId9"/>
   </p:sldIdLst>
   <p:sldSz cx="7560000" cy="10692000" type="screen4x3"/>
   <p:notesSz cx="6858000" cy="9144000"/>
@@ -3096,8 +3098,8 @@
         </p:nvSpPr>
         <p:spPr>
           <a:xfrm>
-            <a:off x="251999" y="125999"/>
-            <a:ext cx="7056000" cy="503999"/>
+            <a:off x="360000" y="144000"/>
+            <a:ext cx="6840000" cy="360000"/>
           </a:xfrm>
           <a:prstGeom prst="rect">
             <a:avLst/>
@@ -3105,103 +3107,42 @@
           <a:noFill/>
         </p:spPr>
         <p:txBody>
-          <a:bodyPr wrap="square" anchor="ctr" lIns="18000" rIns="18000" tIns="10800" bIns="10800">
+          <a:bodyPr wrap="square" anchor="t" lIns="54000" rIns="54000" tIns="28800" bIns="28800">
             <a:spAutoFit/>
           </a:bodyPr>
           <a:lstStyle/>
           <a:p>
             <a:pPr algn="ctr">
               <a:lnSpc>
-                <a:spcPct val="100000"/>
-              </a:lnSpc>
-            </a:pPr>
-            <a:r>
-              <a:rPr sz="1500" b="1">
+                <a:spcPct val="105000"/>
+              </a:lnSpc>
+              <a:spcAft>
+                <a:spcPts val="200"/>
+              </a:spcAft>
+            </a:pPr>
+            <a:r>
+              <a:rPr sz="1600" b="1">
                 <a:solidFill>
                   <a:srgbClr val="1F2937"/>
                 </a:solidFill>
                 <a:latin typeface="Meiryo UI"/>
                 <a:ea typeface="Meiryo UI"/>
               </a:rPr>
-              <a:t>児童生徒の自殺企図に関する相談への対応フロー</a:t>
-            </a:r>
-          </a:p>
-          <a:p>
-            <a:pPr algn="ctr">
-              <a:lnSpc>
-                <a:spcPct val="100000"/>
-              </a:lnSpc>
-            </a:pPr>
-            <a:r>
-              <a:rPr sz="1000" b="0">
-                <a:solidFill>
-                  <a:srgbClr val="1F2937"/>
-                </a:solidFill>
-                <a:latin typeface="Meiryo UI"/>
-                <a:ea typeface="Meiryo UI"/>
-              </a:rPr>
-              <a:t>（こたエールにメールで相談が入った場合）</a:t>
-            </a:r>
-          </a:p>
-        </p:txBody>
-      </p:sp>
-      <p:sp>
-        <p:nvSpPr>
-          <p:cNvPr id="3" name="Rounded Rectangle 2"/>
-          <p:cNvSpPr/>
-          <p:nvPr/>
-        </p:nvSpPr>
-        <p:spPr>
-          <a:xfrm>
-            <a:off x="288000" y="2632909"/>
-            <a:ext cx="6984000" cy="2074909"/>
-          </a:xfrm>
-          <a:prstGeom prst="roundRect">
-            <a:avLst>
-              <a:gd name="adj" fmla="val 5000"/>
-            </a:avLst>
-          </a:prstGeom>
-          <a:noFill/>
-          <a:ln w="12700">
-            <a:solidFill>
-              <a:srgbClr val="C0630C"/>
-            </a:solidFill>
-            <a:prstDash val="dash"/>
-          </a:ln>
-          <a:effectLst/>
-        </p:spPr>
-        <p:style>
-          <a:lnRef idx="1">
-            <a:schemeClr val="accent1"/>
-          </a:lnRef>
-          <a:fillRef idx="3">
-            <a:schemeClr val="accent1"/>
-          </a:fillRef>
-          <a:effectRef idx="2">
-            <a:schemeClr val="accent1"/>
-          </a:effectRef>
-          <a:fontRef idx="minor">
-            <a:schemeClr val="lt1"/>
-          </a:fontRef>
-        </p:style>
-        <p:txBody>
-          <a:bodyPr rtlCol="0" anchor="ctr"/>
-          <a:lstStyle/>
-          <a:p>
-            <a:pPr algn="ctr"/>
-          </a:p>
-        </p:txBody>
-      </p:sp>
-      <p:sp>
-        <p:nvSpPr>
-          <p:cNvPr id="4" name="TextBox 3"/>
+              <a:t>児童生徒の自殺企図に関する相談対応フロー</a:t>
+            </a:r>
+          </a:p>
+        </p:txBody>
+      </p:sp>
+      <p:sp>
+        <p:nvSpPr>
+          <p:cNvPr id="3" name="TextBox 2"/>
           <p:cNvSpPr txBox="1"/>
           <p:nvPr/>
         </p:nvSpPr>
         <p:spPr>
           <a:xfrm>
-            <a:off x="342000" y="2643709"/>
-            <a:ext cx="1080000" cy="180000"/>
+            <a:off x="360000" y="486000"/>
+            <a:ext cx="6840000" cy="216000"/>
           </a:xfrm>
           <a:prstGeom prst="rect">
             <a:avLst/>
@@ -3209,835 +3150,44 @@
           <a:noFill/>
         </p:spPr>
         <p:txBody>
-          <a:bodyPr wrap="square" anchor="t" lIns="18000" rIns="18000" tIns="10800" bIns="10800">
+          <a:bodyPr wrap="square" anchor="t" lIns="54000" rIns="54000" tIns="28800" bIns="28800">
             <a:spAutoFit/>
           </a:bodyPr>
           <a:lstStyle/>
           <a:p>
-            <a:pPr algn="l">
-              <a:lnSpc>
-                <a:spcPct val="100000"/>
-              </a:lnSpc>
-            </a:pPr>
-            <a:r>
-              <a:rPr sz="850" b="1">
-                <a:solidFill>
-                  <a:srgbClr val="C0630C"/>
-                </a:solidFill>
-                <a:latin typeface="Meiryo UI"/>
-                <a:ea typeface="Meiryo UI"/>
-              </a:rPr>
-              <a:t>【同時進行】</a:t>
-            </a:r>
-          </a:p>
-        </p:txBody>
-      </p:sp>
-      <p:cxnSp>
-        <p:nvCxnSpPr>
-          <p:cNvPr id="5" name="Connector 4"/>
-          <p:cNvCxnSpPr/>
-          <p:nvPr/>
-        </p:nvCxnSpPr>
-        <p:spPr>
-          <a:xfrm>
-            <a:off x="840000" y="1224000"/>
-            <a:ext cx="0" cy="8460000"/>
-          </a:xfrm>
-          <a:prstGeom prst="line">
-            <a:avLst/>
-          </a:prstGeom>
-          <a:ln w="12700">
-            <a:solidFill>
-              <a:srgbClr val="AAB4BE"/>
-            </a:solidFill>
-            <a:prstDash val="dash"/>
-          </a:ln>
-          <a:effectLst/>
-        </p:spPr>
-        <p:style>
-          <a:lnRef idx="2">
-            <a:schemeClr val="accent1"/>
-          </a:lnRef>
-          <a:fillRef idx="0">
-            <a:schemeClr val="accent1"/>
-          </a:fillRef>
-          <a:effectRef idx="1">
-            <a:schemeClr val="accent1"/>
-          </a:effectRef>
-          <a:fontRef idx="minor">
-            <a:schemeClr val="tx1"/>
-          </a:fontRef>
-        </p:style>
-      </p:cxnSp>
-      <p:sp>
-        <p:nvSpPr>
-          <p:cNvPr id="6" name="Rounded Rectangle 5"/>
+            <a:pPr algn="ctr">
+              <a:lnSpc>
+                <a:spcPct val="105000"/>
+              </a:lnSpc>
+              <a:spcAft>
+                <a:spcPts val="200"/>
+              </a:spcAft>
+            </a:pPr>
+            <a:r>
+              <a:rPr sz="1000" b="0">
+                <a:solidFill>
+                  <a:srgbClr val="1F2937"/>
+                </a:solidFill>
+                <a:latin typeface="Meiryo UI"/>
+                <a:ea typeface="Meiryo UI"/>
+              </a:rPr>
+              <a:t>〜こたエール（東京都）にメールで相談が入った場合〜</a:t>
+            </a:r>
+          </a:p>
+        </p:txBody>
+      </p:sp>
+      <p:sp>
+        <p:nvSpPr>
+          <p:cNvPr id="4" name="Rectangle 3"/>
           <p:cNvSpPr/>
           <p:nvPr/>
         </p:nvSpPr>
         <p:spPr>
           <a:xfrm>
-            <a:off x="278999" y="684000"/>
-            <a:ext cx="1122000" cy="540000"/>
-          </a:xfrm>
-          <a:prstGeom prst="roundRect">
-            <a:avLst/>
-          </a:prstGeom>
-          <a:solidFill>
-            <a:srgbClr val="FDEBD0"/>
-          </a:solidFill>
-          <a:ln w="15875">
-            <a:solidFill>
-              <a:srgbClr val="B9770E"/>
-            </a:solidFill>
-          </a:ln>
-          <a:effectLst/>
-        </p:spPr>
-        <p:style>
-          <a:lnRef idx="1">
-            <a:schemeClr val="accent1"/>
-          </a:lnRef>
-          <a:fillRef idx="3">
-            <a:schemeClr val="accent1"/>
-          </a:fillRef>
-          <a:effectRef idx="2">
-            <a:schemeClr val="accent1"/>
-          </a:effectRef>
-          <a:fontRef idx="minor">
-            <a:schemeClr val="lt1"/>
-          </a:fontRef>
-        </p:style>
-        <p:txBody>
-          <a:bodyPr rtlCol="0" anchor="ctr" wrap="square" lIns="18000" rIns="18000" tIns="10800" bIns="10800"/>
-          <a:lstStyle/>
-          <a:p>
-            <a:pPr algn="ctr">
-              <a:lnSpc>
-                <a:spcPct val="100000"/>
-              </a:lnSpc>
-            </a:pPr>
-            <a:r>
-              <a:rPr sz="950" b="1">
-                <a:solidFill>
-                  <a:srgbClr val="1F2937"/>
-                </a:solidFill>
-                <a:latin typeface="Meiryo UI"/>
-                <a:ea typeface="Meiryo UI"/>
-              </a:rPr>
-              <a:t>児童生徒</a:t>
-            </a:r>
-            <a:br/>
-            <a:r>
-              <a:rPr sz="950" b="1">
-                <a:solidFill>
-                  <a:srgbClr val="1F2937"/>
-                </a:solidFill>
-                <a:latin typeface="Meiryo UI"/>
-                <a:ea typeface="Meiryo UI"/>
-              </a:rPr>
-              <a:t>（自宅）</a:t>
-            </a:r>
-          </a:p>
-          <a:p>
-            <a:pPr algn="ctr">
-              <a:lnSpc>
-                <a:spcPct val="100000"/>
-              </a:lnSpc>
-            </a:pPr>
-            <a:r>
-              <a:rPr sz="700" b="0">
-                <a:solidFill>
-                  <a:srgbClr val="1F2937"/>
-                </a:solidFill>
-                <a:latin typeface="Meiryo UI"/>
-                <a:ea typeface="Meiryo UI"/>
-              </a:rPr>
-              <a:t>（区立小中学校）</a:t>
-            </a:r>
-          </a:p>
-        </p:txBody>
-      </p:sp>
-      <p:cxnSp>
-        <p:nvCxnSpPr>
-          <p:cNvPr id="7" name="Connector 6"/>
-          <p:cNvCxnSpPr/>
-          <p:nvPr/>
-        </p:nvCxnSpPr>
-        <p:spPr>
-          <a:xfrm>
-            <a:off x="2016000" y="1224000"/>
-            <a:ext cx="0" cy="8460000"/>
-          </a:xfrm>
-          <a:prstGeom prst="line">
-            <a:avLst/>
-          </a:prstGeom>
-          <a:ln w="12700">
-            <a:solidFill>
-              <a:srgbClr val="AAB4BE"/>
-            </a:solidFill>
-            <a:prstDash val="dash"/>
-          </a:ln>
-          <a:effectLst/>
-        </p:spPr>
-        <p:style>
-          <a:lnRef idx="2">
-            <a:schemeClr val="accent1"/>
-          </a:lnRef>
-          <a:fillRef idx="0">
-            <a:schemeClr val="accent1"/>
-          </a:fillRef>
-          <a:effectRef idx="1">
-            <a:schemeClr val="accent1"/>
-          </a:effectRef>
-          <a:fontRef idx="minor">
-            <a:schemeClr val="tx1"/>
-          </a:fontRef>
-        </p:style>
-      </p:cxnSp>
-      <p:sp>
-        <p:nvSpPr>
-          <p:cNvPr id="8" name="Rounded Rectangle 7"/>
-          <p:cNvSpPr/>
-          <p:nvPr/>
-        </p:nvSpPr>
-        <p:spPr>
-          <a:xfrm>
-            <a:off x="1455000" y="684000"/>
-            <a:ext cx="1122000" cy="540000"/>
-          </a:xfrm>
-          <a:prstGeom prst="roundRect">
-            <a:avLst/>
-          </a:prstGeom>
-          <a:solidFill>
-            <a:srgbClr val="D6EAF8"/>
-          </a:solidFill>
-          <a:ln w="15875">
-            <a:solidFill>
-              <a:srgbClr val="21618C"/>
-            </a:solidFill>
-          </a:ln>
-          <a:effectLst/>
-        </p:spPr>
-        <p:style>
-          <a:lnRef idx="1">
-            <a:schemeClr val="accent1"/>
-          </a:lnRef>
-          <a:fillRef idx="3">
-            <a:schemeClr val="accent1"/>
-          </a:fillRef>
-          <a:effectRef idx="2">
-            <a:schemeClr val="accent1"/>
-          </a:effectRef>
-          <a:fontRef idx="minor">
-            <a:schemeClr val="lt1"/>
-          </a:fontRef>
-        </p:style>
-        <p:txBody>
-          <a:bodyPr rtlCol="0" anchor="ctr" wrap="square" lIns="18000" rIns="18000" tIns="10800" bIns="10800"/>
-          <a:lstStyle/>
-          <a:p>
-            <a:pPr algn="ctr">
-              <a:lnSpc>
-                <a:spcPct val="100000"/>
-              </a:lnSpc>
-            </a:pPr>
-            <a:r>
-              <a:rPr sz="950" b="1">
-                <a:solidFill>
-                  <a:srgbClr val="1F2937"/>
-                </a:solidFill>
-                <a:latin typeface="Meiryo UI"/>
-                <a:ea typeface="Meiryo UI"/>
-              </a:rPr>
-              <a:t>こたエール</a:t>
-            </a:r>
-          </a:p>
-          <a:p>
-            <a:pPr algn="ctr">
-              <a:lnSpc>
-                <a:spcPct val="100000"/>
-              </a:lnSpc>
-            </a:pPr>
-            <a:r>
-              <a:rPr sz="700" b="0">
-                <a:solidFill>
-                  <a:srgbClr val="1F2937"/>
-                </a:solidFill>
-                <a:latin typeface="Meiryo UI"/>
-                <a:ea typeface="Meiryo UI"/>
-              </a:rPr>
-              <a:t>（東京都の相談窓口）</a:t>
-            </a:r>
-          </a:p>
-        </p:txBody>
-      </p:sp>
-      <p:cxnSp>
-        <p:nvCxnSpPr>
-          <p:cNvPr id="9" name="Connector 8"/>
-          <p:cNvCxnSpPr/>
-          <p:nvPr/>
-        </p:nvCxnSpPr>
-        <p:spPr>
-          <a:xfrm>
-            <a:off x="3192000" y="1224000"/>
-            <a:ext cx="0" cy="8460000"/>
-          </a:xfrm>
-          <a:prstGeom prst="line">
-            <a:avLst/>
-          </a:prstGeom>
-          <a:ln w="12700">
-            <a:solidFill>
-              <a:srgbClr val="AAB4BE"/>
-            </a:solidFill>
-            <a:prstDash val="dash"/>
-          </a:ln>
-          <a:effectLst/>
-        </p:spPr>
-        <p:style>
-          <a:lnRef idx="2">
-            <a:schemeClr val="accent1"/>
-          </a:lnRef>
-          <a:fillRef idx="0">
-            <a:schemeClr val="accent1"/>
-          </a:fillRef>
-          <a:effectRef idx="1">
-            <a:schemeClr val="accent1"/>
-          </a:effectRef>
-          <a:fontRef idx="minor">
-            <a:schemeClr val="tx1"/>
-          </a:fontRef>
-        </p:style>
-      </p:cxnSp>
-      <p:sp>
-        <p:nvSpPr>
-          <p:cNvPr id="10" name="Rounded Rectangle 9"/>
-          <p:cNvSpPr/>
-          <p:nvPr/>
-        </p:nvSpPr>
-        <p:spPr>
-          <a:xfrm>
-            <a:off x="2631000" y="684000"/>
-            <a:ext cx="1122000" cy="540000"/>
-          </a:xfrm>
-          <a:prstGeom prst="roundRect">
-            <a:avLst/>
-          </a:prstGeom>
-          <a:solidFill>
-            <a:srgbClr val="D1E7DD"/>
-          </a:solidFill>
-          <a:ln w="15875">
-            <a:solidFill>
-              <a:srgbClr val="1E6641"/>
-            </a:solidFill>
-          </a:ln>
-          <a:effectLst/>
-        </p:spPr>
-        <p:style>
-          <a:lnRef idx="1">
-            <a:schemeClr val="accent1"/>
-          </a:lnRef>
-          <a:fillRef idx="3">
-            <a:schemeClr val="accent1"/>
-          </a:fillRef>
-          <a:effectRef idx="2">
-            <a:schemeClr val="accent1"/>
-          </a:effectRef>
-          <a:fontRef idx="minor">
-            <a:schemeClr val="lt1"/>
-          </a:fontRef>
-        </p:style>
-        <p:txBody>
-          <a:bodyPr rtlCol="0" anchor="ctr" wrap="square" lIns="18000" rIns="18000" tIns="10800" bIns="10800"/>
-          <a:lstStyle/>
-          <a:p>
-            <a:pPr algn="ctr">
-              <a:lnSpc>
-                <a:spcPct val="100000"/>
-              </a:lnSpc>
-            </a:pPr>
-            <a:r>
-              <a:rPr sz="950" b="1">
-                <a:solidFill>
-                  <a:srgbClr val="1F2937"/>
-                </a:solidFill>
-                <a:latin typeface="Meiryo UI"/>
-                <a:ea typeface="Meiryo UI"/>
-              </a:rPr>
-              <a:t>警察署</a:t>
-            </a:r>
-          </a:p>
-          <a:p>
-            <a:pPr algn="ctr">
-              <a:lnSpc>
-                <a:spcPct val="100000"/>
-              </a:lnSpc>
-            </a:pPr>
-            <a:r>
-              <a:rPr sz="700" b="0">
-                <a:solidFill>
-                  <a:srgbClr val="1F2937"/>
-                </a:solidFill>
-                <a:latin typeface="Meiryo UI"/>
-                <a:ea typeface="Meiryo UI"/>
-              </a:rPr>
-              <a:t>（練馬区内管轄）</a:t>
-            </a:r>
-          </a:p>
-        </p:txBody>
-      </p:sp>
-      <p:cxnSp>
-        <p:nvCxnSpPr>
-          <p:cNvPr id="11" name="Connector 10"/>
-          <p:cNvCxnSpPr/>
-          <p:nvPr/>
-        </p:nvCxnSpPr>
-        <p:spPr>
-          <a:xfrm>
-            <a:off x="4368000" y="1224000"/>
-            <a:ext cx="0" cy="8460000"/>
-          </a:xfrm>
-          <a:prstGeom prst="line">
-            <a:avLst/>
-          </a:prstGeom>
-          <a:ln w="12700">
-            <a:solidFill>
-              <a:srgbClr val="AAB4BE"/>
-            </a:solidFill>
-            <a:prstDash val="dash"/>
-          </a:ln>
-          <a:effectLst/>
-        </p:spPr>
-        <p:style>
-          <a:lnRef idx="2">
-            <a:schemeClr val="accent1"/>
-          </a:lnRef>
-          <a:fillRef idx="0">
-            <a:schemeClr val="accent1"/>
-          </a:fillRef>
-          <a:effectRef idx="1">
-            <a:schemeClr val="accent1"/>
-          </a:effectRef>
-          <a:fontRef idx="minor">
-            <a:schemeClr val="tx1"/>
-          </a:fontRef>
-        </p:style>
-      </p:cxnSp>
-      <p:sp>
-        <p:nvSpPr>
-          <p:cNvPr id="12" name="Rounded Rectangle 11"/>
-          <p:cNvSpPr/>
-          <p:nvPr/>
-        </p:nvSpPr>
-        <p:spPr>
-          <a:xfrm>
-            <a:off x="3807000" y="684000"/>
-            <a:ext cx="1122000" cy="540000"/>
-          </a:xfrm>
-          <a:prstGeom prst="roundRect">
-            <a:avLst/>
-          </a:prstGeom>
-          <a:solidFill>
-            <a:srgbClr val="FCF3CF"/>
-          </a:solidFill>
-          <a:ln w="15875">
-            <a:solidFill>
-              <a:srgbClr val="9A760A"/>
-            </a:solidFill>
-          </a:ln>
-          <a:effectLst/>
-        </p:spPr>
-        <p:style>
-          <a:lnRef idx="1">
-            <a:schemeClr val="accent1"/>
-          </a:lnRef>
-          <a:fillRef idx="3">
-            <a:schemeClr val="accent1"/>
-          </a:fillRef>
-          <a:effectRef idx="2">
-            <a:schemeClr val="accent1"/>
-          </a:effectRef>
-          <a:fontRef idx="minor">
-            <a:schemeClr val="lt1"/>
-          </a:fontRef>
-        </p:style>
-        <p:txBody>
-          <a:bodyPr rtlCol="0" anchor="ctr" wrap="square" lIns="18000" rIns="18000" tIns="10800" bIns="10800"/>
-          <a:lstStyle/>
-          <a:p>
-            <a:pPr algn="ctr">
-              <a:lnSpc>
-                <a:spcPct val="100000"/>
-              </a:lnSpc>
-            </a:pPr>
-            <a:r>
-              <a:rPr sz="950" b="1">
-                <a:solidFill>
-                  <a:srgbClr val="1F2937"/>
-                </a:solidFill>
-                <a:latin typeface="Meiryo UI"/>
-                <a:ea typeface="Meiryo UI"/>
-              </a:rPr>
-              <a:t>当該校</a:t>
-            </a:r>
-          </a:p>
-          <a:p>
-            <a:pPr algn="ctr">
-              <a:lnSpc>
-                <a:spcPct val="100000"/>
-              </a:lnSpc>
-            </a:pPr>
-            <a:r>
-              <a:rPr sz="700" b="0">
-                <a:solidFill>
-                  <a:srgbClr val="1F2937"/>
-                </a:solidFill>
-                <a:latin typeface="Meiryo UI"/>
-                <a:ea typeface="Meiryo UI"/>
-              </a:rPr>
-              <a:t>（児童生徒の在籍校）</a:t>
-            </a:r>
-          </a:p>
-        </p:txBody>
-      </p:sp>
-      <p:cxnSp>
-        <p:nvCxnSpPr>
-          <p:cNvPr id="13" name="Connector 12"/>
-          <p:cNvCxnSpPr/>
-          <p:nvPr/>
-        </p:nvCxnSpPr>
-        <p:spPr>
-          <a:xfrm>
-            <a:off x="5544000" y="1224000"/>
-            <a:ext cx="0" cy="8460000"/>
-          </a:xfrm>
-          <a:prstGeom prst="line">
-            <a:avLst/>
-          </a:prstGeom>
-          <a:ln w="12700">
-            <a:solidFill>
-              <a:srgbClr val="AAB4BE"/>
-            </a:solidFill>
-            <a:prstDash val="dash"/>
-          </a:ln>
-          <a:effectLst/>
-        </p:spPr>
-        <p:style>
-          <a:lnRef idx="2">
-            <a:schemeClr val="accent1"/>
-          </a:lnRef>
-          <a:fillRef idx="0">
-            <a:schemeClr val="accent1"/>
-          </a:fillRef>
-          <a:effectRef idx="1">
-            <a:schemeClr val="accent1"/>
-          </a:effectRef>
-          <a:fontRef idx="minor">
-            <a:schemeClr val="tx1"/>
-          </a:fontRef>
-        </p:style>
-      </p:cxnSp>
-      <p:sp>
-        <p:nvSpPr>
-          <p:cNvPr id="14" name="Rounded Rectangle 13"/>
-          <p:cNvSpPr/>
-          <p:nvPr/>
-        </p:nvSpPr>
-        <p:spPr>
-          <a:xfrm>
-            <a:off x="4983000" y="684000"/>
-            <a:ext cx="1122000" cy="540000"/>
-          </a:xfrm>
-          <a:prstGeom prst="roundRect">
-            <a:avLst/>
-          </a:prstGeom>
-          <a:solidFill>
-            <a:srgbClr val="E8DAEF"/>
-          </a:solidFill>
-          <a:ln w="15875">
-            <a:solidFill>
-              <a:srgbClr val="6C3483"/>
-            </a:solidFill>
-          </a:ln>
-          <a:effectLst/>
-        </p:spPr>
-        <p:style>
-          <a:lnRef idx="1">
-            <a:schemeClr val="accent1"/>
-          </a:lnRef>
-          <a:fillRef idx="3">
-            <a:schemeClr val="accent1"/>
-          </a:fillRef>
-          <a:effectRef idx="2">
-            <a:schemeClr val="accent1"/>
-          </a:effectRef>
-          <a:fontRef idx="minor">
-            <a:schemeClr val="lt1"/>
-          </a:fontRef>
-        </p:style>
-        <p:txBody>
-          <a:bodyPr rtlCol="0" anchor="ctr" wrap="square" lIns="18000" rIns="18000" tIns="10800" bIns="10800"/>
-          <a:lstStyle/>
-          <a:p>
-            <a:pPr algn="ctr">
-              <a:lnSpc>
-                <a:spcPct val="100000"/>
-              </a:lnSpc>
-            </a:pPr>
-            <a:r>
-              <a:rPr sz="950" b="1">
-                <a:solidFill>
-                  <a:srgbClr val="1F2937"/>
-                </a:solidFill>
-                <a:latin typeface="Meiryo UI"/>
-                <a:ea typeface="Meiryo UI"/>
-              </a:rPr>
-              <a:t>教育指導課</a:t>
-            </a:r>
-            <a:br/>
-            <a:r>
-              <a:rPr sz="950" b="1">
-                <a:solidFill>
-                  <a:srgbClr val="1F2937"/>
-                </a:solidFill>
-                <a:latin typeface="Meiryo UI"/>
-                <a:ea typeface="Meiryo UI"/>
-              </a:rPr>
-              <a:t>指導主事</a:t>
-            </a:r>
-          </a:p>
-          <a:p>
-            <a:pPr algn="ctr">
-              <a:lnSpc>
-                <a:spcPct val="100000"/>
-              </a:lnSpc>
-            </a:pPr>
-            <a:r>
-              <a:rPr sz="700" b="0">
-                <a:solidFill>
-                  <a:srgbClr val="1F2937"/>
-                </a:solidFill>
-                <a:latin typeface="Meiryo UI"/>
-                <a:ea typeface="Meiryo UI"/>
-              </a:rPr>
-              <a:t>（練馬区教育委員会）</a:t>
-            </a:r>
-          </a:p>
-        </p:txBody>
-      </p:sp>
-      <p:cxnSp>
-        <p:nvCxnSpPr>
-          <p:cNvPr id="15" name="Connector 14"/>
-          <p:cNvCxnSpPr/>
-          <p:nvPr/>
-        </p:nvCxnSpPr>
-        <p:spPr>
-          <a:xfrm>
-            <a:off x="6720000" y="1224000"/>
-            <a:ext cx="0" cy="8460000"/>
-          </a:xfrm>
-          <a:prstGeom prst="line">
-            <a:avLst/>
-          </a:prstGeom>
-          <a:ln w="12700">
-            <a:solidFill>
-              <a:srgbClr val="AAB4BE"/>
-            </a:solidFill>
-            <a:prstDash val="dash"/>
-          </a:ln>
-          <a:effectLst/>
-        </p:spPr>
-        <p:style>
-          <a:lnRef idx="2">
-            <a:schemeClr val="accent1"/>
-          </a:lnRef>
-          <a:fillRef idx="0">
-            <a:schemeClr val="accent1"/>
-          </a:fillRef>
-          <a:effectRef idx="1">
-            <a:schemeClr val="accent1"/>
-          </a:effectRef>
-          <a:fontRef idx="minor">
-            <a:schemeClr val="tx1"/>
-          </a:fontRef>
-        </p:style>
-      </p:cxnSp>
-      <p:sp>
-        <p:nvSpPr>
-          <p:cNvPr id="16" name="Rounded Rectangle 15"/>
-          <p:cNvSpPr/>
-          <p:nvPr/>
-        </p:nvSpPr>
-        <p:spPr>
-          <a:xfrm>
-            <a:off x="6159000" y="684000"/>
-            <a:ext cx="1122000" cy="540000"/>
-          </a:xfrm>
-          <a:prstGeom prst="roundRect">
-            <a:avLst/>
-          </a:prstGeom>
-          <a:solidFill>
-            <a:srgbClr val="E5E8E8"/>
-          </a:solidFill>
-          <a:ln w="15875">
-            <a:solidFill>
-              <a:srgbClr val="515A5A"/>
-            </a:solidFill>
-          </a:ln>
-          <a:effectLst/>
-        </p:spPr>
-        <p:style>
-          <a:lnRef idx="1">
-            <a:schemeClr val="accent1"/>
-          </a:lnRef>
-          <a:fillRef idx="3">
-            <a:schemeClr val="accent1"/>
-          </a:fillRef>
-          <a:effectRef idx="2">
-            <a:schemeClr val="accent1"/>
-          </a:effectRef>
-          <a:fontRef idx="minor">
-            <a:schemeClr val="lt1"/>
-          </a:fontRef>
-        </p:style>
-        <p:txBody>
-          <a:bodyPr rtlCol="0" anchor="ctr" wrap="square" lIns="18000" rIns="18000" tIns="10800" bIns="10800"/>
-          <a:lstStyle/>
-          <a:p>
-            <a:pPr algn="ctr">
-              <a:lnSpc>
-                <a:spcPct val="100000"/>
-              </a:lnSpc>
-            </a:pPr>
-            <a:r>
-              <a:rPr sz="950" b="1">
-                <a:solidFill>
-                  <a:srgbClr val="1F2937"/>
-                </a:solidFill>
-                <a:latin typeface="Meiryo UI"/>
-                <a:ea typeface="Meiryo UI"/>
-              </a:rPr>
-              <a:t>教育ICT</a:t>
-            </a:r>
-            <a:br/>
-            <a:r>
-              <a:rPr sz="950" b="1">
-                <a:solidFill>
-                  <a:srgbClr val="1F2937"/>
-                </a:solidFill>
-                <a:latin typeface="Meiryo UI"/>
-                <a:ea typeface="Meiryo UI"/>
-              </a:rPr>
-              <a:t>環境整備係</a:t>
-            </a:r>
-          </a:p>
-          <a:p>
-            <a:pPr algn="ctr">
-              <a:lnSpc>
-                <a:spcPct val="100000"/>
-              </a:lnSpc>
-            </a:pPr>
-            <a:r>
-              <a:rPr sz="700" b="0">
-                <a:solidFill>
-                  <a:srgbClr val="1F2937"/>
-                </a:solidFill>
-                <a:latin typeface="Meiryo UI"/>
-                <a:ea typeface="Meiryo UI"/>
-              </a:rPr>
-              <a:t>（教育施設課）</a:t>
-            </a:r>
-          </a:p>
-        </p:txBody>
-      </p:sp>
-      <p:cxnSp>
-        <p:nvCxnSpPr>
-          <p:cNvPr id="17" name="Connector 16"/>
-          <p:cNvCxnSpPr/>
-          <p:nvPr/>
-        </p:nvCxnSpPr>
-        <p:spPr>
-          <a:xfrm>
-            <a:off x="840000" y="1692000"/>
-            <a:ext cx="1176000" cy="0"/>
-          </a:xfrm>
-          <a:prstGeom prst="line">
-            <a:avLst/>
-          </a:prstGeom>
-          <a:ln w="19050">
-            <a:solidFill>
-              <a:srgbClr val="37475A"/>
-            </a:solidFill>
-            <a:tailEnd type="triangle" w="med" len="med"/>
-          </a:ln>
-          <a:effectLst/>
-        </p:spPr>
-        <p:style>
-          <a:lnRef idx="2">
-            <a:schemeClr val="accent1"/>
-          </a:lnRef>
-          <a:fillRef idx="0">
-            <a:schemeClr val="accent1"/>
-          </a:fillRef>
-          <a:effectRef idx="1">
-            <a:schemeClr val="accent1"/>
-          </a:effectRef>
-          <a:fontRef idx="minor">
-            <a:schemeClr val="tx1"/>
-          </a:fontRef>
-        </p:style>
-      </p:cxnSp>
-      <p:sp>
-        <p:nvSpPr>
-          <p:cNvPr id="18" name="TextBox 17"/>
-          <p:cNvSpPr txBox="1"/>
-          <p:nvPr/>
-        </p:nvSpPr>
-        <p:spPr>
-          <a:xfrm>
-            <a:off x="492000" y="1159200"/>
-            <a:ext cx="1872000" cy="413999"/>
+            <a:off x="360000" y="737999"/>
+            <a:ext cx="6840000" cy="342000"/>
           </a:xfrm>
           <a:prstGeom prst="rect">
-            <a:avLst/>
-          </a:prstGeom>
-          <a:noFill/>
-        </p:spPr>
-        <p:txBody>
-          <a:bodyPr wrap="square" anchor="b" lIns="18000" rIns="18000" tIns="10800" bIns="10800">
-            <a:spAutoFit/>
-          </a:bodyPr>
-          <a:lstStyle/>
-          <a:p>
-            <a:pPr algn="ctr">
-              <a:lnSpc>
-                <a:spcPct val="100000"/>
-              </a:lnSpc>
-            </a:pPr>
-            <a:r>
-              <a:rPr sz="800" b="0">
-                <a:solidFill>
-                  <a:srgbClr val="1F2937"/>
-                </a:solidFill>
-                <a:latin typeface="Meiryo UI"/>
-                <a:ea typeface="Meiryo UI"/>
-              </a:rPr>
-              <a:t>自殺企図に関する相談（メール）</a:t>
-            </a:r>
-          </a:p>
-        </p:txBody>
-      </p:sp>
-      <p:sp>
-        <p:nvSpPr>
-          <p:cNvPr id="19" name="Oval 18"/>
-          <p:cNvSpPr/>
-          <p:nvPr/>
-        </p:nvSpPr>
-        <p:spPr>
-          <a:xfrm>
-            <a:off x="732000" y="1584000"/>
-            <a:ext cx="216000" cy="216000"/>
-          </a:xfrm>
-          <a:prstGeom prst="ellipse">
             <a:avLst/>
           </a:prstGeom>
           <a:solidFill>
@@ -4063,42 +3213,582 @@
           </a:fontRef>
         </p:style>
         <p:txBody>
-          <a:bodyPr rtlCol="0" anchor="ctr" wrap="none" lIns="18000" rIns="18000" tIns="10800" bIns="10800"/>
+          <a:bodyPr rtlCol="0" anchor="ctr" wrap="square" lIns="54000" rIns="54000" tIns="28800" bIns="28800"/>
           <a:lstStyle/>
           <a:p>
             <a:pPr algn="ctr">
               <a:lnSpc>
-                <a:spcPct val="100000"/>
-              </a:lnSpc>
+                <a:spcPct val="105000"/>
+              </a:lnSpc>
+              <a:spcAft>
+                <a:spcPts val="200"/>
+              </a:spcAft>
+            </a:pPr>
+            <a:r>
+              <a:rPr sz="1250" b="1">
+                <a:solidFill>
+                  <a:srgbClr val="FFFFFF"/>
+                </a:solidFill>
+                <a:latin typeface="Meiryo UI"/>
+                <a:ea typeface="Meiryo UI"/>
+              </a:rPr>
+              <a:t>フェーズ1　覚知 〜 児童生徒の特定</a:t>
+            </a:r>
+          </a:p>
+        </p:txBody>
+      </p:sp>
+      <p:sp>
+        <p:nvSpPr>
+          <p:cNvPr id="5" name="Rounded Rectangle 4"/>
+          <p:cNvSpPr/>
+          <p:nvPr/>
+        </p:nvSpPr>
+        <p:spPr>
+          <a:xfrm>
+            <a:off x="5903999" y="792000"/>
+            <a:ext cx="1224000" cy="234000"/>
+          </a:xfrm>
+          <a:prstGeom prst="roundRect">
+            <a:avLst/>
+          </a:prstGeom>
+          <a:solidFill>
+            <a:srgbClr val="FFFFFF"/>
+          </a:solidFill>
+          <a:ln w="12700">
+            <a:solidFill>
+              <a:srgbClr val="2F5496"/>
+            </a:solidFill>
+          </a:ln>
+          <a:effectLst/>
+        </p:spPr>
+        <p:style>
+          <a:lnRef idx="1">
+            <a:schemeClr val="accent1"/>
+          </a:lnRef>
+          <a:fillRef idx="3">
+            <a:schemeClr val="accent1"/>
+          </a:fillRef>
+          <a:effectRef idx="2">
+            <a:schemeClr val="accent1"/>
+          </a:effectRef>
+          <a:fontRef idx="minor">
+            <a:schemeClr val="lt1"/>
+          </a:fontRef>
+        </p:style>
+        <p:txBody>
+          <a:bodyPr rtlCol="0" anchor="ctr" wrap="none" lIns="54000" rIns="54000" tIns="28800" bIns="28800"/>
+          <a:lstStyle/>
+          <a:p>
+            <a:pPr algn="ctr">
+              <a:lnSpc>
+                <a:spcPct val="105000"/>
+              </a:lnSpc>
+              <a:spcAft>
+                <a:spcPts val="200"/>
+              </a:spcAft>
             </a:pPr>
             <a:r>
               <a:rPr sz="850" b="1">
                 <a:solidFill>
+                  <a:srgbClr val="2F5496"/>
+                </a:solidFill>
+                <a:latin typeface="Meiryo UI"/>
+                <a:ea typeface="Meiryo UI"/>
+              </a:rPr>
+              <a:t>覚知後 直ちに</a:t>
+            </a:r>
+          </a:p>
+        </p:txBody>
+      </p:sp>
+      <p:sp>
+        <p:nvSpPr>
+          <p:cNvPr id="6" name="TextBox 5"/>
+          <p:cNvSpPr txBox="1"/>
+          <p:nvPr/>
+        </p:nvSpPr>
+        <p:spPr>
+          <a:xfrm>
+            <a:off x="360000" y="10404000"/>
+            <a:ext cx="6840000" cy="216000"/>
+          </a:xfrm>
+          <a:prstGeom prst="rect">
+            <a:avLst/>
+          </a:prstGeom>
+          <a:noFill/>
+        </p:spPr>
+        <p:txBody>
+          <a:bodyPr wrap="square" anchor="t" lIns="54000" rIns="54000" tIns="28800" bIns="28800">
+            <a:spAutoFit/>
+          </a:bodyPr>
+          <a:lstStyle/>
+          <a:p>
+            <a:pPr algn="r">
+              <a:lnSpc>
+                <a:spcPct val="105000"/>
+              </a:lnSpc>
+              <a:spcAft>
+                <a:spcPts val="200"/>
+              </a:spcAft>
+            </a:pPr>
+            <a:r>
+              <a:rPr sz="850" b="0">
+                <a:solidFill>
+                  <a:srgbClr val="8A939E"/>
+                </a:solidFill>
+                <a:latin typeface="Meiryo UI"/>
+                <a:ea typeface="Meiryo UI"/>
+              </a:rPr>
+              <a:t>練馬区教育委員会 教育指導課　　1 / 3</a:t>
+            </a:r>
+          </a:p>
+        </p:txBody>
+      </p:sp>
+      <p:sp>
+        <p:nvSpPr>
+          <p:cNvPr id="7" name="Rounded Rectangle 6"/>
+          <p:cNvSpPr/>
+          <p:nvPr/>
+        </p:nvSpPr>
+        <p:spPr>
+          <a:xfrm>
+            <a:off x="360000" y="1170000"/>
+            <a:ext cx="6840000" cy="378000"/>
+          </a:xfrm>
+          <a:prstGeom prst="roundRect">
+            <a:avLst>
+              <a:gd name="adj" fmla="val 12000"/>
+            </a:avLst>
+          </a:prstGeom>
+          <a:solidFill>
+            <a:srgbClr val="EAF0F8"/>
+          </a:solidFill>
+          <a:ln w="15875">
+            <a:solidFill>
+              <a:srgbClr val="2F5496"/>
+            </a:solidFill>
+          </a:ln>
+          <a:effectLst/>
+        </p:spPr>
+        <p:style>
+          <a:lnRef idx="1">
+            <a:schemeClr val="accent1"/>
+          </a:lnRef>
+          <a:fillRef idx="3">
+            <a:schemeClr val="accent1"/>
+          </a:fillRef>
+          <a:effectRef idx="2">
+            <a:schemeClr val="accent1"/>
+          </a:effectRef>
+          <a:fontRef idx="minor">
+            <a:schemeClr val="lt1"/>
+          </a:fontRef>
+        </p:style>
+        <p:txBody>
+          <a:bodyPr rtlCol="0" anchor="ctr" wrap="square" lIns="54000" rIns="54000" tIns="28800" bIns="28800"/>
+          <a:lstStyle/>
+          <a:p>
+            <a:pPr algn="ctr">
+              <a:lnSpc>
+                <a:spcPct val="105000"/>
+              </a:lnSpc>
+              <a:spcAft>
+                <a:spcPts val="200"/>
+              </a:spcAft>
+            </a:pPr>
+            <a:r>
+              <a:rPr sz="1050" b="1">
+                <a:solidFill>
+                  <a:srgbClr val="2F5496"/>
+                </a:solidFill>
+                <a:latin typeface="Meiryo UI"/>
+                <a:ea typeface="Meiryo UI"/>
+              </a:rPr>
+              <a:t>対応の3原則　① 最優先で即時対応　② 一人で抱え込まず組織で対応　③ 時系列で記録（日時・相手・内容）</a:t>
+            </a:r>
+          </a:p>
+        </p:txBody>
+      </p:sp>
+      <p:sp>
+        <p:nvSpPr>
+          <p:cNvPr id="8" name="Rounded Rectangle 7"/>
+          <p:cNvSpPr/>
+          <p:nvPr/>
+        </p:nvSpPr>
+        <p:spPr>
+          <a:xfrm>
+            <a:off x="360000" y="1638000"/>
+            <a:ext cx="6840000" cy="413999"/>
+          </a:xfrm>
+          <a:prstGeom prst="roundRect">
+            <a:avLst>
+              <a:gd name="adj" fmla="val 10000"/>
+            </a:avLst>
+          </a:prstGeom>
+          <a:solidFill>
+            <a:srgbClr val="FDECEC"/>
+          </a:solidFill>
+          <a:ln w="19050">
+            <a:solidFill>
+              <a:srgbClr val="B02121"/>
+            </a:solidFill>
+          </a:ln>
+          <a:effectLst/>
+        </p:spPr>
+        <p:style>
+          <a:lnRef idx="1">
+            <a:schemeClr val="accent1"/>
+          </a:lnRef>
+          <a:fillRef idx="3">
+            <a:schemeClr val="accent1"/>
+          </a:fillRef>
+          <a:effectRef idx="2">
+            <a:schemeClr val="accent1"/>
+          </a:effectRef>
+          <a:fontRef idx="minor">
+            <a:schemeClr val="lt1"/>
+          </a:fontRef>
+        </p:style>
+        <p:txBody>
+          <a:bodyPr rtlCol="0" anchor="ctr" wrap="square" lIns="54000" rIns="54000" tIns="28800" bIns="28800"/>
+          <a:lstStyle/>
+          <a:p>
+            <a:pPr algn="ctr">
+              <a:lnSpc>
+                <a:spcPct val="105000"/>
+              </a:lnSpc>
+              <a:spcAft>
+                <a:spcPts val="200"/>
+              </a:spcAft>
+            </a:pPr>
+            <a:r>
+              <a:rPr sz="1000" b="1">
+                <a:solidFill>
+                  <a:srgbClr val="B02121"/>
+                </a:solidFill>
+                <a:latin typeface="Meiryo UI"/>
+                <a:ea typeface="Meiryo UI"/>
+              </a:rPr>
+              <a:t>⚠ 相談内容から切迫した危険（今まさに実行するおそれ・具体的な方法や日時の記載）が読み取れる場合は、</a:t>
+            </a:r>
+            <a:br/>
+            <a:r>
+              <a:rPr sz="1000" b="1">
+                <a:solidFill>
+                  <a:srgbClr val="B02121"/>
+                </a:solidFill>
+                <a:latin typeface="Meiryo UI"/>
+                <a:ea typeface="Meiryo UI"/>
+              </a:rPr>
+              <a:t>以下のフローと並行して、直ちに警察（110番）へ通報する。</a:t>
+            </a:r>
+          </a:p>
+        </p:txBody>
+      </p:sp>
+      <p:sp>
+        <p:nvSpPr>
+          <p:cNvPr id="9" name="Rounded Rectangle 8"/>
+          <p:cNvSpPr/>
+          <p:nvPr/>
+        </p:nvSpPr>
+        <p:spPr>
+          <a:xfrm>
+            <a:off x="360000" y="2196000"/>
+            <a:ext cx="4104000" cy="792000"/>
+          </a:xfrm>
+          <a:prstGeom prst="roundRect">
+            <a:avLst>
+              <a:gd name="adj" fmla="val 8000"/>
+            </a:avLst>
+          </a:prstGeom>
+          <a:solidFill>
+            <a:srgbClr val="FDEBD0"/>
+          </a:solidFill>
+          <a:ln w="19050">
+            <a:solidFill>
+              <a:srgbClr val="B9770E"/>
+            </a:solidFill>
+          </a:ln>
+          <a:effectLst/>
+        </p:spPr>
+        <p:style>
+          <a:lnRef idx="1">
+            <a:schemeClr val="accent1"/>
+          </a:lnRef>
+          <a:fillRef idx="3">
+            <a:schemeClr val="accent1"/>
+          </a:fillRef>
+          <a:effectRef idx="2">
+            <a:schemeClr val="accent1"/>
+          </a:effectRef>
+          <a:fontRef idx="minor">
+            <a:schemeClr val="lt1"/>
+          </a:fontRef>
+        </p:style>
+        <p:txBody>
+          <a:bodyPr rtlCol="0" anchor="ctr" wrap="square" lIns="54000" rIns="54000" tIns="28800" bIns="28800"/>
+          <a:lstStyle/>
+          <a:p>
+            <a:pPr algn="l">
+              <a:lnSpc>
+                <a:spcPct val="105000"/>
+              </a:lnSpc>
+              <a:spcAft>
+                <a:spcPts val="200"/>
+              </a:spcAft>
+            </a:pPr>
+            <a:r>
+              <a:rPr sz="950" b="1">
+                <a:solidFill>
+                  <a:srgbClr val="B9770E"/>
+                </a:solidFill>
+                <a:latin typeface="Meiryo UI"/>
+                <a:ea typeface="Meiryo UI"/>
+              </a:rPr>
+              <a:t>【児童生徒（区立小中学校）】</a:t>
+            </a:r>
+          </a:p>
+          <a:p>
+            <a:pPr algn="l">
+              <a:lnSpc>
+                <a:spcPct val="105000"/>
+              </a:lnSpc>
+              <a:spcAft>
+                <a:spcPts val="200"/>
+              </a:spcAft>
+            </a:pPr>
+            <a:r>
+              <a:rPr sz="1100" b="1">
+                <a:solidFill>
+                  <a:srgbClr val="1F2937"/>
+                </a:solidFill>
+                <a:latin typeface="Meiryo UI"/>
+                <a:ea typeface="Meiryo UI"/>
+              </a:rPr>
+              <a:t>こたエール（東京都）に自殺企図に関する相談メールを送信</a:t>
+            </a:r>
+          </a:p>
+          <a:p>
+            <a:pPr algn="l">
+              <a:lnSpc>
+                <a:spcPct val="105000"/>
+              </a:lnSpc>
+              <a:spcAft>
+                <a:spcPts val="200"/>
+              </a:spcAft>
+            </a:pPr>
+            <a:r>
+              <a:rPr sz="1000" b="0">
+                <a:solidFill>
+                  <a:srgbClr val="1F2937"/>
+                </a:solidFill>
+                <a:latin typeface="Meiryo UI"/>
+                <a:ea typeface="Meiryo UI"/>
+              </a:rPr>
+              <a:t>区が貸与している学習用アカウント（メールアドレス）から送信される。</a:t>
+            </a:r>
+          </a:p>
+        </p:txBody>
+      </p:sp>
+      <p:sp>
+        <p:nvSpPr>
+          <p:cNvPr id="10" name="Oval 9"/>
+          <p:cNvSpPr/>
+          <p:nvPr/>
+        </p:nvSpPr>
+        <p:spPr>
+          <a:xfrm>
+            <a:off x="32399" y="2451600"/>
+            <a:ext cx="280800" cy="280800"/>
+          </a:xfrm>
+          <a:prstGeom prst="ellipse">
+            <a:avLst/>
+          </a:prstGeom>
+          <a:solidFill>
+            <a:srgbClr val="2F5496"/>
+          </a:solidFill>
+          <a:ln w="19050">
+            <a:solidFill>
+              <a:srgbClr val="FFFFFF"/>
+            </a:solidFill>
+          </a:ln>
+          <a:effectLst/>
+        </p:spPr>
+        <p:style>
+          <a:lnRef idx="1">
+            <a:schemeClr val="accent1"/>
+          </a:lnRef>
+          <a:fillRef idx="3">
+            <a:schemeClr val="accent1"/>
+          </a:fillRef>
+          <a:effectRef idx="2">
+            <a:schemeClr val="accent1"/>
+          </a:effectRef>
+          <a:fontRef idx="minor">
+            <a:schemeClr val="lt1"/>
+          </a:fontRef>
+        </p:style>
+        <p:txBody>
+          <a:bodyPr rtlCol="0" anchor="ctr" wrap="none" lIns="54000" rIns="54000" tIns="28800" bIns="28800"/>
+          <a:lstStyle/>
+          <a:p>
+            <a:pPr algn="ctr">
+              <a:lnSpc>
+                <a:spcPct val="105000"/>
+              </a:lnSpc>
+              <a:spcAft>
+                <a:spcPts val="200"/>
+              </a:spcAft>
+            </a:pPr>
+            <a:r>
+              <a:rPr sz="1200" b="1">
+                <a:solidFill>
                   <a:srgbClr val="FFFFFF"/>
                 </a:solidFill>
                 <a:latin typeface="Meiryo UI"/>
                 <a:ea typeface="Meiryo UI"/>
               </a:rPr>
               <a:t>1</a:t>
+            </a:r>
+          </a:p>
+        </p:txBody>
+      </p:sp>
+      <p:sp>
+        <p:nvSpPr>
+          <p:cNvPr id="11" name="Rounded Rectangle 10"/>
+          <p:cNvSpPr/>
+          <p:nvPr/>
+        </p:nvSpPr>
+        <p:spPr>
+          <a:xfrm>
+            <a:off x="4644000" y="2196000"/>
+            <a:ext cx="2556000" cy="792000"/>
+          </a:xfrm>
+          <a:prstGeom prst="roundRect">
+            <a:avLst>
+              <a:gd name="adj" fmla="val 6000"/>
+            </a:avLst>
+          </a:prstGeom>
+          <a:solidFill>
+            <a:srgbClr val="F4F6F8"/>
+          </a:solidFill>
+          <a:ln w="12700">
+            <a:solidFill>
+              <a:srgbClr val="8A939E"/>
+            </a:solidFill>
+          </a:ln>
+          <a:effectLst/>
+        </p:spPr>
+        <p:style>
+          <a:lnRef idx="1">
+            <a:schemeClr val="accent1"/>
+          </a:lnRef>
+          <a:fillRef idx="3">
+            <a:schemeClr val="accent1"/>
+          </a:fillRef>
+          <a:effectRef idx="2">
+            <a:schemeClr val="accent1"/>
+          </a:effectRef>
+          <a:fontRef idx="minor">
+            <a:schemeClr val="lt1"/>
+          </a:fontRef>
+        </p:style>
+        <p:txBody>
+          <a:bodyPr rtlCol="0" anchor="ctr" wrap="square" lIns="54000" rIns="54000" tIns="28800" bIns="28800"/>
+          <a:lstStyle/>
+          <a:p>
+            <a:pPr algn="l">
+              <a:lnSpc>
+                <a:spcPct val="105000"/>
+              </a:lnSpc>
+              <a:spcAft>
+                <a:spcPts val="200"/>
+              </a:spcAft>
+            </a:pPr>
+            <a:r>
+              <a:rPr sz="900" b="1">
+                <a:solidFill>
+                  <a:srgbClr val="1F2937"/>
+                </a:solidFill>
+                <a:latin typeface="Meiryo UI"/>
+                <a:ea typeface="Meiryo UI"/>
+              </a:rPr>
+              <a:t>こたエール＝東京都のネット・スマホ</a:t>
+            </a:r>
+          </a:p>
+          <a:p>
+            <a:pPr algn="l">
+              <a:lnSpc>
+                <a:spcPct val="105000"/>
+              </a:lnSpc>
+              <a:spcAft>
+                <a:spcPts val="200"/>
+              </a:spcAft>
+            </a:pPr>
+            <a:r>
+              <a:rPr sz="900" b="0">
+                <a:solidFill>
+                  <a:srgbClr val="1F2937"/>
+                </a:solidFill>
+                <a:latin typeface="Meiryo UI"/>
+                <a:ea typeface="Meiryo UI"/>
+              </a:rPr>
+              <a:t>トラブル相談窓口。都内在住・在学・在勤の子供等が電話・メール・LINEで相談できる。</a:t>
             </a:r>
           </a:p>
         </p:txBody>
       </p:sp>
       <p:cxnSp>
         <p:nvCxnSpPr>
-          <p:cNvPr id="20" name="Connector 19"/>
+          <p:cNvPr id="12" name="Connector 11"/>
           <p:cNvCxnSpPr/>
           <p:nvPr/>
         </p:nvCxnSpPr>
         <p:spPr>
           <a:xfrm>
-            <a:off x="2016000" y="2405454"/>
-            <a:ext cx="3528000" cy="0"/>
+            <a:off x="4464000" y="2591999"/>
+            <a:ext cx="180000" cy="0"/>
           </a:xfrm>
           <a:prstGeom prst="line">
             <a:avLst/>
           </a:prstGeom>
-          <a:ln w="19050">
+          <a:ln w="12700">
+            <a:solidFill>
+              <a:srgbClr val="8A939E"/>
+            </a:solidFill>
+            <a:prstDash val="dash"/>
+          </a:ln>
+          <a:effectLst/>
+        </p:spPr>
+        <p:style>
+          <a:lnRef idx="2">
+            <a:schemeClr val="accent1"/>
+          </a:lnRef>
+          <a:fillRef idx="0">
+            <a:schemeClr val="accent1"/>
+          </a:fillRef>
+          <a:effectRef idx="1">
+            <a:schemeClr val="accent1"/>
+          </a:effectRef>
+          <a:fontRef idx="minor">
+            <a:schemeClr val="tx1"/>
+          </a:fontRef>
+        </p:style>
+      </p:cxnSp>
+      <p:cxnSp>
+        <p:nvCxnSpPr>
+          <p:cNvPr id="13" name="Connector 12"/>
+          <p:cNvCxnSpPr/>
+          <p:nvPr/>
+        </p:nvCxnSpPr>
+        <p:spPr>
+          <a:xfrm>
+            <a:off x="2412000" y="2988000"/>
+            <a:ext cx="0" cy="162000"/>
+          </a:xfrm>
+          <a:prstGeom prst="line">
+            <a:avLst/>
+          </a:prstGeom>
+          <a:ln w="25400">
             <a:solidFill>
               <a:srgbClr val="37475A"/>
             </a:solidFill>
@@ -4123,14 +3813,1428 @@
       </p:cxnSp>
       <p:sp>
         <p:nvSpPr>
-          <p:cNvPr id="21" name="TextBox 20"/>
+          <p:cNvPr id="14" name="Rounded Rectangle 13"/>
+          <p:cNvSpPr/>
+          <p:nvPr/>
+        </p:nvSpPr>
+        <p:spPr>
+          <a:xfrm>
+            <a:off x="360000" y="3150000"/>
+            <a:ext cx="4104000" cy="972000"/>
+          </a:xfrm>
+          <a:prstGeom prst="roundRect">
+            <a:avLst>
+              <a:gd name="adj" fmla="val 8000"/>
+            </a:avLst>
+          </a:prstGeom>
+          <a:solidFill>
+            <a:srgbClr val="D6EAF8"/>
+          </a:solidFill>
+          <a:ln w="19050">
+            <a:solidFill>
+              <a:srgbClr val="21618C"/>
+            </a:solidFill>
+          </a:ln>
+          <a:effectLst/>
+        </p:spPr>
+        <p:style>
+          <a:lnRef idx="1">
+            <a:schemeClr val="accent1"/>
+          </a:lnRef>
+          <a:fillRef idx="3">
+            <a:schemeClr val="accent1"/>
+          </a:fillRef>
+          <a:effectRef idx="2">
+            <a:schemeClr val="accent1"/>
+          </a:effectRef>
+          <a:fontRef idx="minor">
+            <a:schemeClr val="lt1"/>
+          </a:fontRef>
+        </p:style>
+        <p:txBody>
+          <a:bodyPr rtlCol="0" anchor="ctr" wrap="square" lIns="54000" rIns="54000" tIns="28800" bIns="28800"/>
+          <a:lstStyle/>
+          <a:p>
+            <a:pPr algn="l">
+              <a:lnSpc>
+                <a:spcPct val="105000"/>
+              </a:lnSpc>
+              <a:spcAft>
+                <a:spcPts val="200"/>
+              </a:spcAft>
+            </a:pPr>
+            <a:r>
+              <a:rPr sz="950" b="1">
+                <a:solidFill>
+                  <a:srgbClr val="21618C"/>
+                </a:solidFill>
+                <a:latin typeface="Meiryo UI"/>
+                <a:ea typeface="Meiryo UI"/>
+              </a:rPr>
+              <a:t>【こたエール職員】</a:t>
+            </a:r>
+          </a:p>
+          <a:p>
+            <a:pPr algn="l">
+              <a:lnSpc>
+                <a:spcPct val="105000"/>
+              </a:lnSpc>
+              <a:spcAft>
+                <a:spcPts val="200"/>
+              </a:spcAft>
+            </a:pPr>
+            <a:r>
+              <a:rPr sz="1100" b="1">
+                <a:solidFill>
+                  <a:srgbClr val="1F2937"/>
+                </a:solidFill>
+                <a:latin typeface="Meiryo UI"/>
+                <a:ea typeface="Meiryo UI"/>
+              </a:rPr>
+              <a:t>教育指導課の指導主事へ電話で情報提供</a:t>
+            </a:r>
+          </a:p>
+          <a:p>
+            <a:pPr algn="l">
+              <a:lnSpc>
+                <a:spcPct val="105000"/>
+              </a:lnSpc>
+              <a:spcAft>
+                <a:spcPts val="200"/>
+              </a:spcAft>
+            </a:pPr>
+            <a:r>
+              <a:rPr sz="1000" b="0">
+                <a:solidFill>
+                  <a:srgbClr val="1F2937"/>
+                </a:solidFill>
+                <a:latin typeface="Meiryo UI"/>
+                <a:ea typeface="Meiryo UI"/>
+              </a:rPr>
+              <a:t>※区貸与アカウントは外部からのメール受信が制限されており、こたエールから本人に返信できないため、教育委員会へ連絡が入る。</a:t>
+            </a:r>
+          </a:p>
+        </p:txBody>
+      </p:sp>
+      <p:sp>
+        <p:nvSpPr>
+          <p:cNvPr id="15" name="Oval 14"/>
+          <p:cNvSpPr/>
+          <p:nvPr/>
+        </p:nvSpPr>
+        <p:spPr>
+          <a:xfrm>
+            <a:off x="32399" y="3495599"/>
+            <a:ext cx="280800" cy="280800"/>
+          </a:xfrm>
+          <a:prstGeom prst="ellipse">
+            <a:avLst/>
+          </a:prstGeom>
+          <a:solidFill>
+            <a:srgbClr val="2F5496"/>
+          </a:solidFill>
+          <a:ln w="19050">
+            <a:solidFill>
+              <a:srgbClr val="FFFFFF"/>
+            </a:solidFill>
+          </a:ln>
+          <a:effectLst/>
+        </p:spPr>
+        <p:style>
+          <a:lnRef idx="1">
+            <a:schemeClr val="accent1"/>
+          </a:lnRef>
+          <a:fillRef idx="3">
+            <a:schemeClr val="accent1"/>
+          </a:fillRef>
+          <a:effectRef idx="2">
+            <a:schemeClr val="accent1"/>
+          </a:effectRef>
+          <a:fontRef idx="minor">
+            <a:schemeClr val="lt1"/>
+          </a:fontRef>
+        </p:style>
+        <p:txBody>
+          <a:bodyPr rtlCol="0" anchor="ctr" wrap="none" lIns="54000" rIns="54000" tIns="28800" bIns="28800"/>
+          <a:lstStyle/>
+          <a:p>
+            <a:pPr algn="ctr">
+              <a:lnSpc>
+                <a:spcPct val="105000"/>
+              </a:lnSpc>
+              <a:spcAft>
+                <a:spcPts val="200"/>
+              </a:spcAft>
+            </a:pPr>
+            <a:r>
+              <a:rPr sz="1200" b="1">
+                <a:solidFill>
+                  <a:srgbClr val="FFFFFF"/>
+                </a:solidFill>
+                <a:latin typeface="Meiryo UI"/>
+                <a:ea typeface="Meiryo UI"/>
+              </a:rPr>
+              <a:t>2</a:t>
+            </a:r>
+          </a:p>
+        </p:txBody>
+      </p:sp>
+      <p:sp>
+        <p:nvSpPr>
+          <p:cNvPr id="16" name="Rounded Rectangle 15"/>
+          <p:cNvSpPr/>
+          <p:nvPr/>
+        </p:nvSpPr>
+        <p:spPr>
+          <a:xfrm>
+            <a:off x="4644000" y="3150000"/>
+            <a:ext cx="2556000" cy="1116000"/>
+          </a:xfrm>
+          <a:prstGeom prst="roundRect">
+            <a:avLst>
+              <a:gd name="adj" fmla="val 6000"/>
+            </a:avLst>
+          </a:prstGeom>
+          <a:solidFill>
+            <a:srgbClr val="F4F6F8"/>
+          </a:solidFill>
+          <a:ln w="12700">
+            <a:solidFill>
+              <a:srgbClr val="8A939E"/>
+            </a:solidFill>
+          </a:ln>
+          <a:effectLst/>
+        </p:spPr>
+        <p:style>
+          <a:lnRef idx="1">
+            <a:schemeClr val="accent1"/>
+          </a:lnRef>
+          <a:fillRef idx="3">
+            <a:schemeClr val="accent1"/>
+          </a:fillRef>
+          <a:effectRef idx="2">
+            <a:schemeClr val="accent1"/>
+          </a:effectRef>
+          <a:fontRef idx="minor">
+            <a:schemeClr val="lt1"/>
+          </a:fontRef>
+        </p:style>
+        <p:txBody>
+          <a:bodyPr rtlCol="0" anchor="ctr" wrap="square" lIns="54000" rIns="54000" tIns="28800" bIns="28800"/>
+          <a:lstStyle/>
+          <a:p>
+            <a:pPr algn="l">
+              <a:lnSpc>
+                <a:spcPct val="105000"/>
+              </a:lnSpc>
+              <a:spcAft>
+                <a:spcPts val="200"/>
+              </a:spcAft>
+            </a:pPr>
+            <a:r>
+              <a:rPr sz="950" b="1">
+                <a:solidFill>
+                  <a:srgbClr val="2F5496"/>
+                </a:solidFill>
+                <a:latin typeface="Meiryo UI"/>
+                <a:ea typeface="Meiryo UI"/>
+              </a:rPr>
+              <a:t>指導主事が聞き取ること</a:t>
+            </a:r>
+          </a:p>
+          <a:p>
+            <a:pPr algn="l">
+              <a:lnSpc>
+                <a:spcPct val="105000"/>
+              </a:lnSpc>
+              <a:spcAft>
+                <a:spcPts val="200"/>
+              </a:spcAft>
+            </a:pPr>
+            <a:r>
+              <a:rPr sz="900" b="0">
+                <a:solidFill>
+                  <a:srgbClr val="1F2937"/>
+                </a:solidFill>
+                <a:latin typeface="Meiryo UI"/>
+                <a:ea typeface="Meiryo UI"/>
+              </a:rPr>
+              <a:t>□ 相談メールのアドレス</a:t>
+            </a:r>
+            <a:br/>
+            <a:r>
+              <a:rPr sz="900" b="0">
+                <a:solidFill>
+                  <a:srgbClr val="1F2937"/>
+                </a:solidFill>
+                <a:latin typeface="Meiryo UI"/>
+                <a:ea typeface="Meiryo UI"/>
+              </a:rPr>
+              <a:t>□ 受信日時</a:t>
+            </a:r>
+            <a:br/>
+            <a:r>
+              <a:rPr sz="900" b="0">
+                <a:solidFill>
+                  <a:srgbClr val="1F2937"/>
+                </a:solidFill>
+                <a:latin typeface="Meiryo UI"/>
+                <a:ea typeface="Meiryo UI"/>
+              </a:rPr>
+              <a:t>□ 相談内容（方法・時期の具体性＝切迫度）</a:t>
+            </a:r>
+            <a:br/>
+            <a:r>
+              <a:rPr sz="900" b="0">
+                <a:solidFill>
+                  <a:srgbClr val="1F2937"/>
+                </a:solidFill>
+                <a:latin typeface="Meiryo UI"/>
+                <a:ea typeface="Meiryo UI"/>
+              </a:rPr>
+              <a:t>□ 氏名・学校名等の手がかり</a:t>
+            </a:r>
+            <a:br/>
+            <a:r>
+              <a:rPr sz="900" b="0">
+                <a:solidFill>
+                  <a:srgbClr val="1F2937"/>
+                </a:solidFill>
+                <a:latin typeface="Meiryo UI"/>
+                <a:ea typeface="Meiryo UI"/>
+              </a:rPr>
+              <a:t>□ こたエールの対応状況・折返し連絡先</a:t>
+            </a:r>
+          </a:p>
+        </p:txBody>
+      </p:sp>
+      <p:cxnSp>
+        <p:nvCxnSpPr>
+          <p:cNvPr id="17" name="Connector 16"/>
+          <p:cNvCxnSpPr/>
+          <p:nvPr/>
+        </p:nvCxnSpPr>
+        <p:spPr>
+          <a:xfrm>
+            <a:off x="4464000" y="3636000"/>
+            <a:ext cx="180000" cy="0"/>
+          </a:xfrm>
+          <a:prstGeom prst="line">
+            <a:avLst/>
+          </a:prstGeom>
+          <a:ln w="12700">
+            <a:solidFill>
+              <a:srgbClr val="8A939E"/>
+            </a:solidFill>
+            <a:prstDash val="dash"/>
+          </a:ln>
+          <a:effectLst/>
+        </p:spPr>
+        <p:style>
+          <a:lnRef idx="2">
+            <a:schemeClr val="accent1"/>
+          </a:lnRef>
+          <a:fillRef idx="0">
+            <a:schemeClr val="accent1"/>
+          </a:fillRef>
+          <a:effectRef idx="1">
+            <a:schemeClr val="accent1"/>
+          </a:effectRef>
+          <a:fontRef idx="minor">
+            <a:schemeClr val="tx1"/>
+          </a:fontRef>
+        </p:style>
+      </p:cxnSp>
+      <p:cxnSp>
+        <p:nvCxnSpPr>
+          <p:cNvPr id="18" name="Connector 17"/>
+          <p:cNvCxnSpPr/>
+          <p:nvPr/>
+        </p:nvCxnSpPr>
+        <p:spPr>
+          <a:xfrm>
+            <a:off x="2412000" y="4266000"/>
+            <a:ext cx="0" cy="162000"/>
+          </a:xfrm>
+          <a:prstGeom prst="line">
+            <a:avLst/>
+          </a:prstGeom>
+          <a:ln w="25400">
+            <a:solidFill>
+              <a:srgbClr val="37475A"/>
+            </a:solidFill>
+            <a:tailEnd type="triangle" w="med" len="med"/>
+          </a:ln>
+          <a:effectLst/>
+        </p:spPr>
+        <p:style>
+          <a:lnRef idx="2">
+            <a:schemeClr val="accent1"/>
+          </a:lnRef>
+          <a:fillRef idx="0">
+            <a:schemeClr val="accent1"/>
+          </a:fillRef>
+          <a:effectRef idx="1">
+            <a:schemeClr val="accent1"/>
+          </a:effectRef>
+          <a:fontRef idx="minor">
+            <a:schemeClr val="tx1"/>
+          </a:fontRef>
+        </p:style>
+      </p:cxnSp>
+      <p:sp>
+        <p:nvSpPr>
+          <p:cNvPr id="19" name="Rounded Rectangle 18"/>
+          <p:cNvSpPr/>
+          <p:nvPr/>
+        </p:nvSpPr>
+        <p:spPr>
+          <a:xfrm>
+            <a:off x="360000" y="4428000"/>
+            <a:ext cx="4104000" cy="936000"/>
+          </a:xfrm>
+          <a:prstGeom prst="roundRect">
+            <a:avLst>
+              <a:gd name="adj" fmla="val 8000"/>
+            </a:avLst>
+          </a:prstGeom>
+          <a:solidFill>
+            <a:srgbClr val="E8DAEF"/>
+          </a:solidFill>
+          <a:ln w="19050">
+            <a:solidFill>
+              <a:srgbClr val="6C3483"/>
+            </a:solidFill>
+          </a:ln>
+          <a:effectLst/>
+        </p:spPr>
+        <p:style>
+          <a:lnRef idx="1">
+            <a:schemeClr val="accent1"/>
+          </a:lnRef>
+          <a:fillRef idx="3">
+            <a:schemeClr val="accent1"/>
+          </a:fillRef>
+          <a:effectRef idx="2">
+            <a:schemeClr val="accent1"/>
+          </a:effectRef>
+          <a:fontRef idx="minor">
+            <a:schemeClr val="lt1"/>
+          </a:fontRef>
+        </p:style>
+        <p:txBody>
+          <a:bodyPr rtlCol="0" anchor="ctr" wrap="square" lIns="54000" rIns="54000" tIns="28800" bIns="28800"/>
+          <a:lstStyle/>
+          <a:p>
+            <a:pPr algn="l">
+              <a:lnSpc>
+                <a:spcPct val="105000"/>
+              </a:lnSpc>
+              <a:spcAft>
+                <a:spcPts val="200"/>
+              </a:spcAft>
+            </a:pPr>
+            <a:r>
+              <a:rPr sz="950" b="1">
+                <a:solidFill>
+                  <a:srgbClr val="6C3483"/>
+                </a:solidFill>
+                <a:latin typeface="Meiryo UI"/>
+                <a:ea typeface="Meiryo UI"/>
+              </a:rPr>
+              <a:t>【教育指導課 指導主事】</a:t>
+            </a:r>
+          </a:p>
+          <a:p>
+            <a:pPr algn="l">
+              <a:lnSpc>
+                <a:spcPct val="105000"/>
+              </a:lnSpc>
+              <a:spcAft>
+                <a:spcPts val="200"/>
+              </a:spcAft>
+            </a:pPr>
+            <a:r>
+              <a:rPr sz="1100" b="1">
+                <a:solidFill>
+                  <a:srgbClr val="1F2937"/>
+                </a:solidFill>
+                <a:latin typeface="Meiryo UI"/>
+                <a:ea typeface="Meiryo UI"/>
+              </a:rPr>
+              <a:t>直ちに課内で共有（課長・統括指導主事へ報告）し、時系列記録を開始</a:t>
+            </a:r>
+          </a:p>
+          <a:p>
+            <a:pPr algn="l">
+              <a:lnSpc>
+                <a:spcPct val="105000"/>
+              </a:lnSpc>
+              <a:spcAft>
+                <a:spcPts val="200"/>
+              </a:spcAft>
+            </a:pPr>
+            <a:r>
+              <a:rPr sz="1000" b="0">
+                <a:solidFill>
+                  <a:srgbClr val="1F2937"/>
+                </a:solidFill>
+                <a:latin typeface="Meiryo UI"/>
+                <a:ea typeface="Meiryo UI"/>
+              </a:rPr>
+              <a:t>以後の全てのやり取り（日時・相手・内容）を記録する。対応は必ず複数人で行う。</a:t>
+            </a:r>
+          </a:p>
+        </p:txBody>
+      </p:sp>
+      <p:sp>
+        <p:nvSpPr>
+          <p:cNvPr id="20" name="Oval 19"/>
+          <p:cNvSpPr/>
+          <p:nvPr/>
+        </p:nvSpPr>
+        <p:spPr>
+          <a:xfrm>
+            <a:off x="32399" y="4755600"/>
+            <a:ext cx="280800" cy="280800"/>
+          </a:xfrm>
+          <a:prstGeom prst="ellipse">
+            <a:avLst/>
+          </a:prstGeom>
+          <a:solidFill>
+            <a:srgbClr val="2F5496"/>
+          </a:solidFill>
+          <a:ln w="19050">
+            <a:solidFill>
+              <a:srgbClr val="FFFFFF"/>
+            </a:solidFill>
+          </a:ln>
+          <a:effectLst/>
+        </p:spPr>
+        <p:style>
+          <a:lnRef idx="1">
+            <a:schemeClr val="accent1"/>
+          </a:lnRef>
+          <a:fillRef idx="3">
+            <a:schemeClr val="accent1"/>
+          </a:fillRef>
+          <a:effectRef idx="2">
+            <a:schemeClr val="accent1"/>
+          </a:effectRef>
+          <a:fontRef idx="minor">
+            <a:schemeClr val="lt1"/>
+          </a:fontRef>
+        </p:style>
+        <p:txBody>
+          <a:bodyPr rtlCol="0" anchor="ctr" wrap="none" lIns="54000" rIns="54000" tIns="28800" bIns="28800"/>
+          <a:lstStyle/>
+          <a:p>
+            <a:pPr algn="ctr">
+              <a:lnSpc>
+                <a:spcPct val="105000"/>
+              </a:lnSpc>
+              <a:spcAft>
+                <a:spcPts val="200"/>
+              </a:spcAft>
+            </a:pPr>
+            <a:r>
+              <a:rPr sz="1200" b="1">
+                <a:solidFill>
+                  <a:srgbClr val="FFFFFF"/>
+                </a:solidFill>
+                <a:latin typeface="Meiryo UI"/>
+                <a:ea typeface="Meiryo UI"/>
+              </a:rPr>
+              <a:t>3</a:t>
+            </a:r>
+          </a:p>
+        </p:txBody>
+      </p:sp>
+      <p:sp>
+        <p:nvSpPr>
+          <p:cNvPr id="21" name="Rounded Rectangle 20"/>
+          <p:cNvSpPr/>
+          <p:nvPr/>
+        </p:nvSpPr>
+        <p:spPr>
+          <a:xfrm>
+            <a:off x="4644000" y="4428000"/>
+            <a:ext cx="2556000" cy="936000"/>
+          </a:xfrm>
+          <a:prstGeom prst="roundRect">
+            <a:avLst>
+              <a:gd name="adj" fmla="val 6000"/>
+            </a:avLst>
+          </a:prstGeom>
+          <a:solidFill>
+            <a:srgbClr val="F4F6F8"/>
+          </a:solidFill>
+          <a:ln w="12700">
+            <a:solidFill>
+              <a:srgbClr val="8A939E"/>
+            </a:solidFill>
+          </a:ln>
+          <a:effectLst/>
+        </p:spPr>
+        <p:style>
+          <a:lnRef idx="1">
+            <a:schemeClr val="accent1"/>
+          </a:lnRef>
+          <a:fillRef idx="3">
+            <a:schemeClr val="accent1"/>
+          </a:fillRef>
+          <a:effectRef idx="2">
+            <a:schemeClr val="accent1"/>
+          </a:effectRef>
+          <a:fontRef idx="minor">
+            <a:schemeClr val="lt1"/>
+          </a:fontRef>
+        </p:style>
+        <p:txBody>
+          <a:bodyPr rtlCol="0" anchor="ctr" wrap="square" lIns="54000" rIns="54000" tIns="28800" bIns="28800"/>
+          <a:lstStyle/>
+          <a:p>
+            <a:pPr algn="l">
+              <a:lnSpc>
+                <a:spcPct val="105000"/>
+              </a:lnSpc>
+              <a:spcAft>
+                <a:spcPts val="200"/>
+              </a:spcAft>
+            </a:pPr>
+            <a:r>
+              <a:rPr sz="950" b="1">
+                <a:solidFill>
+                  <a:srgbClr val="2F5496"/>
+                </a:solidFill>
+                <a:latin typeface="Meiryo UI"/>
+                <a:ea typeface="Meiryo UI"/>
+              </a:rPr>
+              <a:t>個人情報の共有はためらわない</a:t>
+            </a:r>
+          </a:p>
+          <a:p>
+            <a:pPr algn="l">
+              <a:lnSpc>
+                <a:spcPct val="105000"/>
+              </a:lnSpc>
+              <a:spcAft>
+                <a:spcPts val="200"/>
+              </a:spcAft>
+            </a:pPr>
+            <a:r>
+              <a:rPr sz="900" b="0">
+                <a:solidFill>
+                  <a:srgbClr val="1F2937"/>
+                </a:solidFill>
+                <a:latin typeface="Meiryo UI"/>
+                <a:ea typeface="Meiryo UI"/>
+              </a:rPr>
+              <a:t>人の生命・身体の保護のために必要がある場合、本人（保護者）の同意なく個人情報を提供・取得できる（個人情報保護法第27条第1項第2号）。</a:t>
+            </a:r>
+          </a:p>
+        </p:txBody>
+      </p:sp>
+      <p:cxnSp>
+        <p:nvCxnSpPr>
+          <p:cNvPr id="22" name="Connector 21"/>
+          <p:cNvCxnSpPr/>
+          <p:nvPr/>
+        </p:nvCxnSpPr>
+        <p:spPr>
+          <a:xfrm>
+            <a:off x="4464000" y="4896000"/>
+            <a:ext cx="180000" cy="0"/>
+          </a:xfrm>
+          <a:prstGeom prst="line">
+            <a:avLst/>
+          </a:prstGeom>
+          <a:ln w="12700">
+            <a:solidFill>
+              <a:srgbClr val="8A939E"/>
+            </a:solidFill>
+            <a:prstDash val="dash"/>
+          </a:ln>
+          <a:effectLst/>
+        </p:spPr>
+        <p:style>
+          <a:lnRef idx="2">
+            <a:schemeClr val="accent1"/>
+          </a:lnRef>
+          <a:fillRef idx="0">
+            <a:schemeClr val="accent1"/>
+          </a:fillRef>
+          <a:effectRef idx="1">
+            <a:schemeClr val="accent1"/>
+          </a:effectRef>
+          <a:fontRef idx="minor">
+            <a:schemeClr val="tx1"/>
+          </a:fontRef>
+        </p:style>
+      </p:cxnSp>
+      <p:cxnSp>
+        <p:nvCxnSpPr>
+          <p:cNvPr id="23" name="Connector 22"/>
+          <p:cNvCxnSpPr/>
+          <p:nvPr/>
+        </p:nvCxnSpPr>
+        <p:spPr>
+          <a:xfrm>
+            <a:off x="2412000" y="5364000"/>
+            <a:ext cx="0" cy="162000"/>
+          </a:xfrm>
+          <a:prstGeom prst="line">
+            <a:avLst/>
+          </a:prstGeom>
+          <a:ln w="25400">
+            <a:solidFill>
+              <a:srgbClr val="37475A"/>
+            </a:solidFill>
+            <a:tailEnd type="triangle" w="med" len="med"/>
+          </a:ln>
+          <a:effectLst/>
+        </p:spPr>
+        <p:style>
+          <a:lnRef idx="2">
+            <a:schemeClr val="accent1"/>
+          </a:lnRef>
+          <a:fillRef idx="0">
+            <a:schemeClr val="accent1"/>
+          </a:fillRef>
+          <a:effectRef idx="1">
+            <a:schemeClr val="accent1"/>
+          </a:effectRef>
+          <a:fontRef idx="minor">
+            <a:schemeClr val="tx1"/>
+          </a:fontRef>
+        </p:style>
+      </p:cxnSp>
+      <p:sp>
+        <p:nvSpPr>
+          <p:cNvPr id="24" name="Rounded Rectangle 23"/>
+          <p:cNvSpPr/>
+          <p:nvPr/>
+        </p:nvSpPr>
+        <p:spPr>
+          <a:xfrm>
+            <a:off x="306000" y="5580000"/>
+            <a:ext cx="6948000" cy="1620000"/>
+          </a:xfrm>
+          <a:prstGeom prst="roundRect">
+            <a:avLst>
+              <a:gd name="adj" fmla="val 4000"/>
+            </a:avLst>
+          </a:prstGeom>
+          <a:noFill/>
+          <a:ln w="15875">
+            <a:solidFill>
+              <a:srgbClr val="C0630C"/>
+            </a:solidFill>
+            <a:prstDash val="dash"/>
+          </a:ln>
+          <a:effectLst/>
+        </p:spPr>
+        <p:style>
+          <a:lnRef idx="1">
+            <a:schemeClr val="accent1"/>
+          </a:lnRef>
+          <a:fillRef idx="3">
+            <a:schemeClr val="accent1"/>
+          </a:fillRef>
+          <a:effectRef idx="2">
+            <a:schemeClr val="accent1"/>
+          </a:effectRef>
+          <a:fontRef idx="minor">
+            <a:schemeClr val="lt1"/>
+          </a:fontRef>
+        </p:style>
+        <p:txBody>
+          <a:bodyPr rtlCol="0" anchor="ctr"/>
+          <a:lstStyle/>
+          <a:p>
+            <a:pPr algn="ctr"/>
+          </a:p>
+        </p:txBody>
+      </p:sp>
+      <p:sp>
+        <p:nvSpPr>
+          <p:cNvPr id="25" name="Rounded Rectangle 24"/>
+          <p:cNvSpPr/>
+          <p:nvPr/>
+        </p:nvSpPr>
+        <p:spPr>
+          <a:xfrm>
+            <a:off x="468000" y="5454000"/>
+            <a:ext cx="1152000" cy="251999"/>
+          </a:xfrm>
+          <a:prstGeom prst="roundRect">
+            <a:avLst/>
+          </a:prstGeom>
+          <a:solidFill>
+            <a:srgbClr val="FFFFFF"/>
+          </a:solidFill>
+          <a:ln w="15875">
+            <a:solidFill>
+              <a:srgbClr val="C0630C"/>
+            </a:solidFill>
+          </a:ln>
+          <a:effectLst/>
+        </p:spPr>
+        <p:style>
+          <a:lnRef idx="1">
+            <a:schemeClr val="accent1"/>
+          </a:lnRef>
+          <a:fillRef idx="3">
+            <a:schemeClr val="accent1"/>
+          </a:fillRef>
+          <a:effectRef idx="2">
+            <a:schemeClr val="accent1"/>
+          </a:effectRef>
+          <a:fontRef idx="minor">
+            <a:schemeClr val="lt1"/>
+          </a:fontRef>
+        </p:style>
+        <p:txBody>
+          <a:bodyPr rtlCol="0" anchor="ctr" wrap="none" lIns="54000" rIns="54000" tIns="28800" bIns="28800"/>
+          <a:lstStyle/>
+          <a:p>
+            <a:pPr algn="ctr">
+              <a:lnSpc>
+                <a:spcPct val="105000"/>
+              </a:lnSpc>
+              <a:spcAft>
+                <a:spcPts val="200"/>
+              </a:spcAft>
+            </a:pPr>
+            <a:r>
+              <a:rPr sz="1050" b="1">
+                <a:solidFill>
+                  <a:srgbClr val="C0630C"/>
+                </a:solidFill>
+                <a:latin typeface="Meiryo UI"/>
+                <a:ea typeface="Meiryo UI"/>
+              </a:rPr>
+              <a:t>【同時進行】</a:t>
+            </a:r>
+          </a:p>
+        </p:txBody>
+      </p:sp>
+      <p:sp>
+        <p:nvSpPr>
+          <p:cNvPr id="26" name="Rounded Rectangle 25"/>
+          <p:cNvSpPr/>
+          <p:nvPr/>
+        </p:nvSpPr>
+        <p:spPr>
+          <a:xfrm>
+            <a:off x="450000" y="5832000"/>
+            <a:ext cx="3114000" cy="1224000"/>
+          </a:xfrm>
+          <a:prstGeom prst="roundRect">
+            <a:avLst>
+              <a:gd name="adj" fmla="val 8000"/>
+            </a:avLst>
+          </a:prstGeom>
+          <a:solidFill>
+            <a:srgbClr val="E8DAEF"/>
+          </a:solidFill>
+          <a:ln w="19050">
+            <a:solidFill>
+              <a:srgbClr val="6C3483"/>
+            </a:solidFill>
+          </a:ln>
+          <a:effectLst/>
+        </p:spPr>
+        <p:style>
+          <a:lnRef idx="1">
+            <a:schemeClr val="accent1"/>
+          </a:lnRef>
+          <a:fillRef idx="3">
+            <a:schemeClr val="accent1"/>
+          </a:fillRef>
+          <a:effectRef idx="2">
+            <a:schemeClr val="accent1"/>
+          </a:effectRef>
+          <a:fontRef idx="minor">
+            <a:schemeClr val="lt1"/>
+          </a:fontRef>
+        </p:style>
+        <p:txBody>
+          <a:bodyPr rtlCol="0" anchor="ctr" wrap="square" lIns="54000" rIns="54000" tIns="28800" bIns="28800"/>
+          <a:lstStyle/>
+          <a:p>
+            <a:pPr algn="l">
+              <a:lnSpc>
+                <a:spcPct val="105000"/>
+              </a:lnSpc>
+              <a:spcAft>
+                <a:spcPts val="200"/>
+              </a:spcAft>
+            </a:pPr>
+            <a:r>
+              <a:rPr sz="950" b="1">
+                <a:solidFill>
+                  <a:srgbClr val="6C3483"/>
+                </a:solidFill>
+                <a:latin typeface="Meiryo UI"/>
+                <a:ea typeface="Meiryo UI"/>
+              </a:rPr>
+              <a:t>【教育指導課 指導主事】</a:t>
+            </a:r>
+          </a:p>
+          <a:p>
+            <a:pPr algn="l">
+              <a:lnSpc>
+                <a:spcPct val="105000"/>
+              </a:lnSpc>
+              <a:spcAft>
+                <a:spcPts val="200"/>
+              </a:spcAft>
+            </a:pPr>
+            <a:r>
+              <a:rPr sz="1050" b="1">
+                <a:solidFill>
+                  <a:srgbClr val="1F2937"/>
+                </a:solidFill>
+                <a:latin typeface="Meiryo UI"/>
+                <a:ea typeface="Meiryo UI"/>
+              </a:rPr>
+              <a:t>教育ICT環境整備係（教育施設課）へ児童生徒の照会を依頼</a:t>
+            </a:r>
+          </a:p>
+          <a:p>
+            <a:pPr algn="l">
+              <a:lnSpc>
+                <a:spcPct val="105000"/>
+              </a:lnSpc>
+              <a:spcAft>
+                <a:spcPts val="200"/>
+              </a:spcAft>
+            </a:pPr>
+            <a:r>
+              <a:rPr sz="950" b="0">
+                <a:solidFill>
+                  <a:srgbClr val="1F2937"/>
+                </a:solidFill>
+                <a:latin typeface="Meiryo UI"/>
+                <a:ea typeface="Meiryo UI"/>
+              </a:rPr>
+              <a:t>こたエールから聞き取ったメールアドレスを伝える。区貸与アカウントのため、在籍校・学年・氏名を特定できる。</a:t>
+            </a:r>
+          </a:p>
+        </p:txBody>
+      </p:sp>
+      <p:sp>
+        <p:nvSpPr>
+          <p:cNvPr id="27" name="Oval 26"/>
+          <p:cNvSpPr/>
+          <p:nvPr/>
+        </p:nvSpPr>
+        <p:spPr>
+          <a:xfrm>
+            <a:off x="122399" y="6303599"/>
+            <a:ext cx="280800" cy="280800"/>
+          </a:xfrm>
+          <a:prstGeom prst="ellipse">
+            <a:avLst/>
+          </a:prstGeom>
+          <a:solidFill>
+            <a:srgbClr val="2F5496"/>
+          </a:solidFill>
+          <a:ln w="19050">
+            <a:solidFill>
+              <a:srgbClr val="FFFFFF"/>
+            </a:solidFill>
+          </a:ln>
+          <a:effectLst/>
+        </p:spPr>
+        <p:style>
+          <a:lnRef idx="1">
+            <a:schemeClr val="accent1"/>
+          </a:lnRef>
+          <a:fillRef idx="3">
+            <a:schemeClr val="accent1"/>
+          </a:fillRef>
+          <a:effectRef idx="2">
+            <a:schemeClr val="accent1"/>
+          </a:effectRef>
+          <a:fontRef idx="minor">
+            <a:schemeClr val="lt1"/>
+          </a:fontRef>
+        </p:style>
+        <p:txBody>
+          <a:bodyPr rtlCol="0" anchor="ctr" wrap="none" lIns="54000" rIns="54000" tIns="28800" bIns="28800"/>
+          <a:lstStyle/>
+          <a:p>
+            <a:pPr algn="ctr">
+              <a:lnSpc>
+                <a:spcPct val="105000"/>
+              </a:lnSpc>
+              <a:spcAft>
+                <a:spcPts val="200"/>
+              </a:spcAft>
+            </a:pPr>
+            <a:r>
+              <a:rPr sz="1200" b="1">
+                <a:solidFill>
+                  <a:srgbClr val="FFFFFF"/>
+                </a:solidFill>
+                <a:latin typeface="Meiryo UI"/>
+                <a:ea typeface="Meiryo UI"/>
+              </a:rPr>
+              <a:t>4</a:t>
+            </a:r>
+          </a:p>
+        </p:txBody>
+      </p:sp>
+      <p:sp>
+        <p:nvSpPr>
+          <p:cNvPr id="28" name="Rounded Rectangle 27"/>
+          <p:cNvSpPr/>
+          <p:nvPr/>
+        </p:nvSpPr>
+        <p:spPr>
+          <a:xfrm>
+            <a:off x="3996000" y="5832000"/>
+            <a:ext cx="3114000" cy="1224000"/>
+          </a:xfrm>
+          <a:prstGeom prst="roundRect">
+            <a:avLst>
+              <a:gd name="adj" fmla="val 8000"/>
+            </a:avLst>
+          </a:prstGeom>
+          <a:solidFill>
+            <a:srgbClr val="D1E7DD"/>
+          </a:solidFill>
+          <a:ln w="19050">
+            <a:solidFill>
+              <a:srgbClr val="1E6641"/>
+            </a:solidFill>
+          </a:ln>
+          <a:effectLst/>
+        </p:spPr>
+        <p:style>
+          <a:lnRef idx="1">
+            <a:schemeClr val="accent1"/>
+          </a:lnRef>
+          <a:fillRef idx="3">
+            <a:schemeClr val="accent1"/>
+          </a:fillRef>
+          <a:effectRef idx="2">
+            <a:schemeClr val="accent1"/>
+          </a:effectRef>
+          <a:fontRef idx="minor">
+            <a:schemeClr val="lt1"/>
+          </a:fontRef>
+        </p:style>
+        <p:txBody>
+          <a:bodyPr rtlCol="0" anchor="ctr" wrap="square" lIns="54000" rIns="54000" tIns="28800" bIns="28800"/>
+          <a:lstStyle/>
+          <a:p>
+            <a:pPr algn="l">
+              <a:lnSpc>
+                <a:spcPct val="105000"/>
+              </a:lnSpc>
+              <a:spcAft>
+                <a:spcPts val="200"/>
+              </a:spcAft>
+            </a:pPr>
+            <a:r>
+              <a:rPr sz="950" b="1">
+                <a:solidFill>
+                  <a:srgbClr val="1E6641"/>
+                </a:solidFill>
+                <a:latin typeface="Meiryo UI"/>
+                <a:ea typeface="Meiryo UI"/>
+              </a:rPr>
+              <a:t>【警察署（練馬区内管轄）】</a:t>
+            </a:r>
+          </a:p>
+          <a:p>
+            <a:pPr algn="l">
+              <a:lnSpc>
+                <a:spcPct val="105000"/>
+              </a:lnSpc>
+              <a:spcAft>
+                <a:spcPts val="200"/>
+              </a:spcAft>
+            </a:pPr>
+            <a:r>
+              <a:rPr sz="1050" b="1">
+                <a:solidFill>
+                  <a:srgbClr val="1F2937"/>
+                </a:solidFill>
+                <a:latin typeface="Meiryo UI"/>
+                <a:ea typeface="Meiryo UI"/>
+              </a:rPr>
+              <a:t>警察署から指導主事へ、当該児童生徒の照会の連絡が入る</a:t>
+            </a:r>
+          </a:p>
+          <a:p>
+            <a:pPr algn="l">
+              <a:lnSpc>
+                <a:spcPct val="105000"/>
+              </a:lnSpc>
+              <a:spcAft>
+                <a:spcPts val="200"/>
+              </a:spcAft>
+            </a:pPr>
+            <a:r>
+              <a:rPr sz="950" b="0">
+                <a:solidFill>
+                  <a:srgbClr val="1F2937"/>
+                </a:solidFill>
+                <a:latin typeface="Meiryo UI"/>
+                <a:ea typeface="Meiryo UI"/>
+              </a:rPr>
+              <a:t>こたエールは警察にも情報提供している。担当係・担当者名・折返し先を必ず控える。</a:t>
+            </a:r>
+          </a:p>
+        </p:txBody>
+      </p:sp>
+      <p:sp>
+        <p:nvSpPr>
+          <p:cNvPr id="29" name="Oval 28"/>
+          <p:cNvSpPr/>
+          <p:nvPr/>
+        </p:nvSpPr>
+        <p:spPr>
+          <a:xfrm>
+            <a:off x="3668400" y="6303599"/>
+            <a:ext cx="280800" cy="280800"/>
+          </a:xfrm>
+          <a:prstGeom prst="ellipse">
+            <a:avLst/>
+          </a:prstGeom>
+          <a:solidFill>
+            <a:srgbClr val="2F5496"/>
+          </a:solidFill>
+          <a:ln w="19050">
+            <a:solidFill>
+              <a:srgbClr val="FFFFFF"/>
+            </a:solidFill>
+          </a:ln>
+          <a:effectLst/>
+        </p:spPr>
+        <p:style>
+          <a:lnRef idx="1">
+            <a:schemeClr val="accent1"/>
+          </a:lnRef>
+          <a:fillRef idx="3">
+            <a:schemeClr val="accent1"/>
+          </a:fillRef>
+          <a:effectRef idx="2">
+            <a:schemeClr val="accent1"/>
+          </a:effectRef>
+          <a:fontRef idx="minor">
+            <a:schemeClr val="lt1"/>
+          </a:fontRef>
+        </p:style>
+        <p:txBody>
+          <a:bodyPr rtlCol="0" anchor="ctr" wrap="none" lIns="54000" rIns="54000" tIns="28800" bIns="28800"/>
+          <a:lstStyle/>
+          <a:p>
+            <a:pPr algn="ctr">
+              <a:lnSpc>
+                <a:spcPct val="105000"/>
+              </a:lnSpc>
+              <a:spcAft>
+                <a:spcPts val="200"/>
+              </a:spcAft>
+            </a:pPr>
+            <a:r>
+              <a:rPr sz="1200" b="1">
+                <a:solidFill>
+                  <a:srgbClr val="FFFFFF"/>
+                </a:solidFill>
+                <a:latin typeface="Meiryo UI"/>
+                <a:ea typeface="Meiryo UI"/>
+              </a:rPr>
+              <a:t>5</a:t>
+            </a:r>
+          </a:p>
+        </p:txBody>
+      </p:sp>
+      <p:cxnSp>
+        <p:nvCxnSpPr>
+          <p:cNvPr id="30" name="Connector 29"/>
+          <p:cNvCxnSpPr/>
+          <p:nvPr/>
+        </p:nvCxnSpPr>
+        <p:spPr>
+          <a:xfrm flipH="1">
+            <a:off x="1980000" y="7200000"/>
+            <a:ext cx="27000" cy="324000"/>
+          </a:xfrm>
+          <a:prstGeom prst="line">
+            <a:avLst/>
+          </a:prstGeom>
+          <a:ln w="25400">
+            <a:solidFill>
+              <a:srgbClr val="37475A"/>
+            </a:solidFill>
+            <a:tailEnd type="triangle" w="med" len="med"/>
+          </a:ln>
+          <a:effectLst/>
+        </p:spPr>
+        <p:style>
+          <a:lnRef idx="2">
+            <a:schemeClr val="accent1"/>
+          </a:lnRef>
+          <a:fillRef idx="0">
+            <a:schemeClr val="accent1"/>
+          </a:fillRef>
+          <a:effectRef idx="1">
+            <a:schemeClr val="accent1"/>
+          </a:effectRef>
+          <a:fontRef idx="minor">
+            <a:schemeClr val="tx1"/>
+          </a:fontRef>
+        </p:style>
+      </p:cxnSp>
+      <p:cxnSp>
+        <p:nvCxnSpPr>
+          <p:cNvPr id="31" name="Connector 30"/>
+          <p:cNvCxnSpPr/>
+          <p:nvPr/>
+        </p:nvCxnSpPr>
+        <p:spPr>
+          <a:xfrm flipH="1">
+            <a:off x="2844000" y="7200000"/>
+            <a:ext cx="2709000" cy="324000"/>
+          </a:xfrm>
+          <a:prstGeom prst="line">
+            <a:avLst/>
+          </a:prstGeom>
+          <a:ln w="25400">
+            <a:solidFill>
+              <a:srgbClr val="37475A"/>
+            </a:solidFill>
+            <a:tailEnd type="triangle" w="med" len="med"/>
+          </a:ln>
+          <a:effectLst/>
+        </p:spPr>
+        <p:style>
+          <a:lnRef idx="2">
+            <a:schemeClr val="accent1"/>
+          </a:lnRef>
+          <a:fillRef idx="0">
+            <a:schemeClr val="accent1"/>
+          </a:fillRef>
+          <a:effectRef idx="1">
+            <a:schemeClr val="accent1"/>
+          </a:effectRef>
+          <a:fontRef idx="minor">
+            <a:schemeClr val="tx1"/>
+          </a:fontRef>
+        </p:style>
+      </p:cxnSp>
+      <p:sp>
+        <p:nvSpPr>
+          <p:cNvPr id="32" name="Diamond 31"/>
+          <p:cNvSpPr/>
+          <p:nvPr/>
+        </p:nvSpPr>
+        <p:spPr>
+          <a:xfrm>
+            <a:off x="720000" y="7398000"/>
+            <a:ext cx="3384000" cy="972000"/>
+          </a:xfrm>
+          <a:prstGeom prst="diamond">
+            <a:avLst/>
+          </a:prstGeom>
+          <a:solidFill>
+            <a:srgbClr val="FFFFFF"/>
+          </a:solidFill>
+          <a:ln w="22225">
+            <a:solidFill>
+              <a:srgbClr val="37475A"/>
+            </a:solidFill>
+          </a:ln>
+          <a:effectLst/>
+        </p:spPr>
+        <p:style>
+          <a:lnRef idx="1">
+            <a:schemeClr val="accent1"/>
+          </a:lnRef>
+          <a:fillRef idx="3">
+            <a:schemeClr val="accent1"/>
+          </a:fillRef>
+          <a:effectRef idx="2">
+            <a:schemeClr val="accent1"/>
+          </a:effectRef>
+          <a:fontRef idx="minor">
+            <a:schemeClr val="lt1"/>
+          </a:fontRef>
+        </p:style>
+        <p:txBody>
+          <a:bodyPr rtlCol="0" anchor="ctr" wrap="square" lIns="54000" rIns="54000" tIns="28800" bIns="28800"/>
+          <a:lstStyle/>
+          <a:p>
+            <a:pPr algn="ctr">
+              <a:lnSpc>
+                <a:spcPct val="105000"/>
+              </a:lnSpc>
+              <a:spcAft>
+                <a:spcPts val="200"/>
+              </a:spcAft>
+            </a:pPr>
+            <a:r>
+              <a:rPr sz="1100" b="1">
+                <a:solidFill>
+                  <a:srgbClr val="1F2937"/>
+                </a:solidFill>
+                <a:latin typeface="Meiryo UI"/>
+                <a:ea typeface="Meiryo UI"/>
+              </a:rPr>
+              <a:t>この時点で児童生徒を</a:t>
+            </a:r>
+            <a:br/>
+            <a:r>
+              <a:rPr sz="1100" b="1">
+                <a:solidFill>
+                  <a:srgbClr val="1F2937"/>
+                </a:solidFill>
+                <a:latin typeface="Meiryo UI"/>
+                <a:ea typeface="Meiryo UI"/>
+              </a:rPr>
+              <a:t>特定できているか</a:t>
+            </a:r>
+          </a:p>
+        </p:txBody>
+      </p:sp>
+      <p:sp>
+        <p:nvSpPr>
+          <p:cNvPr id="33" name="Rounded Rectangle 32"/>
+          <p:cNvSpPr/>
+          <p:nvPr/>
+        </p:nvSpPr>
+        <p:spPr>
+          <a:xfrm>
+            <a:off x="5580000" y="7452000"/>
+            <a:ext cx="1620000" cy="864000"/>
+          </a:xfrm>
+          <a:prstGeom prst="roundRect">
+            <a:avLst>
+              <a:gd name="adj" fmla="val 8000"/>
+            </a:avLst>
+          </a:prstGeom>
+          <a:solidFill>
+            <a:srgbClr val="F4F6F8"/>
+          </a:solidFill>
+          <a:ln w="15875">
+            <a:solidFill>
+              <a:srgbClr val="37475A"/>
+            </a:solidFill>
+          </a:ln>
+          <a:effectLst/>
+        </p:spPr>
+        <p:style>
+          <a:lnRef idx="1">
+            <a:schemeClr val="accent1"/>
+          </a:lnRef>
+          <a:fillRef idx="3">
+            <a:schemeClr val="accent1"/>
+          </a:fillRef>
+          <a:effectRef idx="2">
+            <a:schemeClr val="accent1"/>
+          </a:effectRef>
+          <a:fontRef idx="minor">
+            <a:schemeClr val="lt1"/>
+          </a:fontRef>
+        </p:style>
+        <p:txBody>
+          <a:bodyPr rtlCol="0" anchor="ctr" wrap="square" lIns="54000" rIns="54000" tIns="28800" bIns="28800"/>
+          <a:lstStyle/>
+          <a:p>
+            <a:pPr algn="l">
+              <a:lnSpc>
+                <a:spcPct val="105000"/>
+              </a:lnSpc>
+              <a:spcAft>
+                <a:spcPts val="200"/>
+              </a:spcAft>
+            </a:pPr>
+            <a:r>
+              <a:rPr sz="1050" b="1">
+                <a:solidFill>
+                  <a:srgbClr val="1F2937"/>
+                </a:solidFill>
+                <a:latin typeface="Meiryo UI"/>
+                <a:ea typeface="Meiryo UI"/>
+              </a:rPr>
+              <a:t>照会結果を待つ</a:t>
+            </a:r>
+          </a:p>
+          <a:p>
+            <a:pPr algn="l">
+              <a:lnSpc>
+                <a:spcPct val="105000"/>
+              </a:lnSpc>
+              <a:spcAft>
+                <a:spcPts val="200"/>
+              </a:spcAft>
+            </a:pPr>
+            <a:r>
+              <a:rPr sz="950" b="0">
+                <a:solidFill>
+                  <a:srgbClr val="1F2937"/>
+                </a:solidFill>
+                <a:latin typeface="Meiryo UI"/>
+                <a:ea typeface="Meiryo UI"/>
+              </a:rPr>
+              <a:t>判明し次第、直ちに警察の担当者へ連絡する。</a:t>
+            </a:r>
+          </a:p>
+        </p:txBody>
+      </p:sp>
+      <p:cxnSp>
+        <p:nvCxnSpPr>
+          <p:cNvPr id="34" name="Connector 33"/>
+          <p:cNvCxnSpPr/>
+          <p:nvPr/>
+        </p:nvCxnSpPr>
+        <p:spPr>
+          <a:xfrm>
+            <a:off x="4104000" y="7884000"/>
+            <a:ext cx="1476000" cy="0"/>
+          </a:xfrm>
+          <a:prstGeom prst="line">
+            <a:avLst/>
+          </a:prstGeom>
+          <a:ln w="25400">
+            <a:solidFill>
+              <a:srgbClr val="37475A"/>
+            </a:solidFill>
+            <a:tailEnd type="triangle" w="med" len="med"/>
+          </a:ln>
+          <a:effectLst/>
+        </p:spPr>
+        <p:style>
+          <a:lnRef idx="2">
+            <a:schemeClr val="accent1"/>
+          </a:lnRef>
+          <a:fillRef idx="0">
+            <a:schemeClr val="accent1"/>
+          </a:fillRef>
+          <a:effectRef idx="1">
+            <a:schemeClr val="accent1"/>
+          </a:effectRef>
+          <a:fontRef idx="minor">
+            <a:schemeClr val="tx1"/>
+          </a:fontRef>
+        </p:style>
+      </p:cxnSp>
+      <p:sp>
+        <p:nvSpPr>
+          <p:cNvPr id="35" name="TextBox 34"/>
           <p:cNvSpPr txBox="1"/>
           <p:nvPr/>
         </p:nvSpPr>
         <p:spPr>
           <a:xfrm>
-            <a:off x="2016000" y="1872654"/>
-            <a:ext cx="3528000" cy="413999"/>
+            <a:off x="4140000" y="7614000"/>
+            <a:ext cx="720000" cy="198000"/>
           </a:xfrm>
           <a:prstGeom prst="rect">
             <a:avLst/>
@@ -4138,41 +5242,389 @@
           <a:noFill/>
         </p:spPr>
         <p:txBody>
-          <a:bodyPr wrap="square" anchor="b" lIns="18000" rIns="18000" tIns="10800" bIns="10800">
+          <a:bodyPr wrap="none" anchor="t" lIns="54000" rIns="54000" tIns="28800" bIns="28800">
             <a:spAutoFit/>
           </a:bodyPr>
           <a:lstStyle/>
           <a:p>
-            <a:pPr algn="ctr">
-              <a:lnSpc>
-                <a:spcPct val="100000"/>
-              </a:lnSpc>
-            </a:pPr>
-            <a:r>
-              <a:rPr sz="800" b="0">
+            <a:pPr algn="l">
+              <a:lnSpc>
+                <a:spcPct val="105000"/>
+              </a:lnSpc>
+              <a:spcAft>
+                <a:spcPts val="200"/>
+              </a:spcAft>
+            </a:pPr>
+            <a:r>
+              <a:rPr sz="1000" b="1">
                 <a:solidFill>
                   <a:srgbClr val="1F2937"/>
                 </a:solidFill>
                 <a:latin typeface="Meiryo UI"/>
                 <a:ea typeface="Meiryo UI"/>
               </a:rPr>
-              <a:t>情報提供 ※1</a:t>
-            </a:r>
-          </a:p>
-        </p:txBody>
-      </p:sp>
-      <p:sp>
-        <p:nvSpPr>
-          <p:cNvPr id="22" name="Oval 21"/>
+              <a:t>いいえ</a:t>
+            </a:r>
+          </a:p>
+        </p:txBody>
+      </p:sp>
+      <p:cxnSp>
+        <p:nvCxnSpPr>
+          <p:cNvPr id="36" name="Connector 35"/>
+          <p:cNvCxnSpPr/>
+          <p:nvPr/>
+        </p:nvCxnSpPr>
+        <p:spPr>
+          <a:xfrm>
+            <a:off x="2412000" y="8370000"/>
+            <a:ext cx="0" cy="324000"/>
+          </a:xfrm>
+          <a:prstGeom prst="line">
+            <a:avLst/>
+          </a:prstGeom>
+          <a:ln w="25400">
+            <a:solidFill>
+              <a:srgbClr val="37475A"/>
+            </a:solidFill>
+            <a:tailEnd type="triangle" w="med" len="med"/>
+          </a:ln>
+          <a:effectLst/>
+        </p:spPr>
+        <p:style>
+          <a:lnRef idx="2">
+            <a:schemeClr val="accent1"/>
+          </a:lnRef>
+          <a:fillRef idx="0">
+            <a:schemeClr val="accent1"/>
+          </a:fillRef>
+          <a:effectRef idx="1">
+            <a:schemeClr val="accent1"/>
+          </a:effectRef>
+          <a:fontRef idx="minor">
+            <a:schemeClr val="tx1"/>
+          </a:fontRef>
+        </p:style>
+      </p:cxnSp>
+      <p:sp>
+        <p:nvSpPr>
+          <p:cNvPr id="37" name="TextBox 36"/>
+          <p:cNvSpPr txBox="1"/>
+          <p:nvPr/>
+        </p:nvSpPr>
+        <p:spPr>
+          <a:xfrm>
+            <a:off x="2466000" y="8406000"/>
+            <a:ext cx="900000" cy="216000"/>
+          </a:xfrm>
+          <a:prstGeom prst="rect">
+            <a:avLst/>
+          </a:prstGeom>
+          <a:noFill/>
+        </p:spPr>
+        <p:txBody>
+          <a:bodyPr wrap="none" anchor="t" lIns="54000" rIns="54000" tIns="28800" bIns="28800">
+            <a:spAutoFit/>
+          </a:bodyPr>
+          <a:lstStyle/>
+          <a:p>
+            <a:pPr algn="l">
+              <a:lnSpc>
+                <a:spcPct val="105000"/>
+              </a:lnSpc>
+              <a:spcAft>
+                <a:spcPts val="200"/>
+              </a:spcAft>
+            </a:pPr>
+            <a:r>
+              <a:rPr sz="1000" b="1">
+                <a:solidFill>
+                  <a:srgbClr val="1F2937"/>
+                </a:solidFill>
+                <a:latin typeface="Meiryo UI"/>
+                <a:ea typeface="Meiryo UI"/>
+              </a:rPr>
+              <a:t>はい</a:t>
+            </a:r>
+          </a:p>
+        </p:txBody>
+      </p:sp>
+      <p:cxnSp>
+        <p:nvCxnSpPr>
+          <p:cNvPr id="38" name="Connector 37"/>
+          <p:cNvCxnSpPr/>
+          <p:nvPr/>
+        </p:nvCxnSpPr>
+        <p:spPr>
+          <a:xfrm flipH="1">
+            <a:off x="4031999" y="8316000"/>
+            <a:ext cx="2358001" cy="360000"/>
+          </a:xfrm>
+          <a:prstGeom prst="line">
+            <a:avLst/>
+          </a:prstGeom>
+          <a:ln w="25400">
+            <a:solidFill>
+              <a:srgbClr val="37475A"/>
+            </a:solidFill>
+            <a:tailEnd type="triangle" w="med" len="med"/>
+          </a:ln>
+          <a:effectLst/>
+        </p:spPr>
+        <p:style>
+          <a:lnRef idx="2">
+            <a:schemeClr val="accent1"/>
+          </a:lnRef>
+          <a:fillRef idx="0">
+            <a:schemeClr val="accent1"/>
+          </a:fillRef>
+          <a:effectRef idx="1">
+            <a:schemeClr val="accent1"/>
+          </a:effectRef>
+          <a:fontRef idx="minor">
+            <a:schemeClr val="tx1"/>
+          </a:fontRef>
+        </p:style>
+      </p:cxnSp>
+      <p:sp>
+        <p:nvSpPr>
+          <p:cNvPr id="39" name="Pentagon 38"/>
           <p:cNvSpPr/>
           <p:nvPr/>
         </p:nvSpPr>
         <p:spPr>
           <a:xfrm>
-            <a:off x="1908000" y="2297454"/>
-            <a:ext cx="216000" cy="216000"/>
-          </a:xfrm>
-          <a:prstGeom prst="ellipse">
+            <a:off x="432000" y="8694000"/>
+            <a:ext cx="3960000" cy="413999"/>
+          </a:xfrm>
+          <a:prstGeom prst="homePlate">
+            <a:avLst/>
+          </a:prstGeom>
+          <a:solidFill>
+            <a:srgbClr val="37475A"/>
+          </a:solidFill>
+          <a:ln>
+            <a:noFill/>
+          </a:ln>
+          <a:effectLst/>
+        </p:spPr>
+        <p:style>
+          <a:lnRef idx="1">
+            <a:schemeClr val="accent1"/>
+          </a:lnRef>
+          <a:fillRef idx="3">
+            <a:schemeClr val="accent1"/>
+          </a:fillRef>
+          <a:effectRef idx="2">
+            <a:schemeClr val="accent1"/>
+          </a:effectRef>
+          <a:fontRef idx="minor">
+            <a:schemeClr val="lt1"/>
+          </a:fontRef>
+        </p:style>
+        <p:txBody>
+          <a:bodyPr rtlCol="0" anchor="ctr" wrap="square" lIns="54000" rIns="54000" tIns="28800" bIns="28800"/>
+          <a:lstStyle/>
+          <a:p>
+            <a:pPr algn="ctr">
+              <a:lnSpc>
+                <a:spcPct val="105000"/>
+              </a:lnSpc>
+              <a:spcAft>
+                <a:spcPts val="200"/>
+              </a:spcAft>
+            </a:pPr>
+            <a:r>
+              <a:rPr sz="1150" b="1">
+                <a:solidFill>
+                  <a:srgbClr val="FFFFFF"/>
+                </a:solidFill>
+                <a:latin typeface="Meiryo UI"/>
+                <a:ea typeface="Meiryo UI"/>
+              </a:rPr>
+              <a:t>特定できたら → フェーズ2（次ページ）へ</a:t>
+            </a:r>
+          </a:p>
+        </p:txBody>
+      </p:sp>
+      <p:sp>
+        <p:nvSpPr>
+          <p:cNvPr id="40" name="TextBox 39"/>
+          <p:cNvSpPr txBox="1"/>
+          <p:nvPr/>
+        </p:nvSpPr>
+        <p:spPr>
+          <a:xfrm>
+            <a:off x="360000" y="9252000"/>
+            <a:ext cx="6840000" cy="936000"/>
+          </a:xfrm>
+          <a:prstGeom prst="rect">
+            <a:avLst/>
+          </a:prstGeom>
+          <a:noFill/>
+        </p:spPr>
+        <p:txBody>
+          <a:bodyPr wrap="square" anchor="t" lIns="54000" rIns="54000" tIns="28800" bIns="28800">
+            <a:spAutoFit/>
+          </a:bodyPr>
+          <a:lstStyle/>
+          <a:p>
+            <a:pPr algn="l">
+              <a:lnSpc>
+                <a:spcPct val="105000"/>
+              </a:lnSpc>
+              <a:spcAft>
+                <a:spcPts val="200"/>
+              </a:spcAft>
+            </a:pPr>
+            <a:r>
+              <a:rPr sz="950" b="0">
+                <a:solidFill>
+                  <a:srgbClr val="1F2937"/>
+                </a:solidFill>
+                <a:latin typeface="Meiryo UI"/>
+                <a:ea typeface="Meiryo UI"/>
+              </a:rPr>
+              <a:t>※ 児童生徒の特定を待つ間も、警察・こたエールとの連絡体制を維持する。特定に時間を要する場合は、その旨を警察に伝える。</a:t>
+            </a:r>
+          </a:p>
+          <a:p>
+            <a:pPr algn="l">
+              <a:lnSpc>
+                <a:spcPct val="105000"/>
+              </a:lnSpc>
+              <a:spcAft>
+                <a:spcPts val="200"/>
+              </a:spcAft>
+            </a:pPr>
+            <a:r>
+              <a:rPr sz="950" b="0">
+                <a:solidFill>
+                  <a:srgbClr val="1F2937"/>
+                </a:solidFill>
+                <a:latin typeface="Meiryo UI"/>
+                <a:ea typeface="Meiryo UI"/>
+              </a:rPr>
+              <a:t>※ 電話でのやり取りは、聞き取った内容を復唱して確認し、直後に記録する。</a:t>
+            </a:r>
+          </a:p>
+        </p:txBody>
+      </p:sp>
+    </p:spTree>
+  </p:cSld>
+  <p:clrMapOvr>
+    <a:masterClrMapping/>
+  </p:clrMapOvr>
+</p:sld>
+</file>
+
+<file path=ppt/slides/slide2.xml><?xml version="1.0" encoding="utf-8"?>
+<p:sld xmlns:a="http://schemas.openxmlformats.org/drawingml/2006/main" xmlns:p="http://schemas.openxmlformats.org/presentationml/2006/main" xmlns:r="http://schemas.openxmlformats.org/officeDocument/2006/relationships">
+  <p:cSld>
+    <p:spTree>
+      <p:nvGrpSpPr>
+        <p:cNvPr id="1" name=""/>
+        <p:cNvGrpSpPr/>
+        <p:nvPr/>
+      </p:nvGrpSpPr>
+      <p:grpSpPr/>
+      <p:sp>
+        <p:nvSpPr>
+          <p:cNvPr id="2" name="TextBox 1"/>
+          <p:cNvSpPr txBox="1"/>
+          <p:nvPr/>
+        </p:nvSpPr>
+        <p:spPr>
+          <a:xfrm>
+            <a:off x="360000" y="144000"/>
+            <a:ext cx="6840000" cy="360000"/>
+          </a:xfrm>
+          <a:prstGeom prst="rect">
+            <a:avLst/>
+          </a:prstGeom>
+          <a:noFill/>
+        </p:spPr>
+        <p:txBody>
+          <a:bodyPr wrap="square" anchor="t" lIns="54000" rIns="54000" tIns="28800" bIns="28800">
+            <a:spAutoFit/>
+          </a:bodyPr>
+          <a:lstStyle/>
+          <a:p>
+            <a:pPr algn="ctr">
+              <a:lnSpc>
+                <a:spcPct val="105000"/>
+              </a:lnSpc>
+              <a:spcAft>
+                <a:spcPts val="200"/>
+              </a:spcAft>
+            </a:pPr>
+            <a:r>
+              <a:rPr sz="1600" b="1">
+                <a:solidFill>
+                  <a:srgbClr val="1F2937"/>
+                </a:solidFill>
+                <a:latin typeface="Meiryo UI"/>
+                <a:ea typeface="Meiryo UI"/>
+              </a:rPr>
+              <a:t>児童生徒の自殺企図に関する相談対応フロー</a:t>
+            </a:r>
+          </a:p>
+        </p:txBody>
+      </p:sp>
+      <p:sp>
+        <p:nvSpPr>
+          <p:cNvPr id="3" name="TextBox 2"/>
+          <p:cNvSpPr txBox="1"/>
+          <p:nvPr/>
+        </p:nvSpPr>
+        <p:spPr>
+          <a:xfrm>
+            <a:off x="360000" y="486000"/>
+            <a:ext cx="6840000" cy="216000"/>
+          </a:xfrm>
+          <a:prstGeom prst="rect">
+            <a:avLst/>
+          </a:prstGeom>
+          <a:noFill/>
+        </p:spPr>
+        <p:txBody>
+          <a:bodyPr wrap="square" anchor="t" lIns="54000" rIns="54000" tIns="28800" bIns="28800">
+            <a:spAutoFit/>
+          </a:bodyPr>
+          <a:lstStyle/>
+          <a:p>
+            <a:pPr algn="ctr">
+              <a:lnSpc>
+                <a:spcPct val="105000"/>
+              </a:lnSpc>
+              <a:spcAft>
+                <a:spcPts val="200"/>
+              </a:spcAft>
+            </a:pPr>
+            <a:r>
+              <a:rPr sz="1000" b="0">
+                <a:solidFill>
+                  <a:srgbClr val="1F2937"/>
+                </a:solidFill>
+                <a:latin typeface="Meiryo UI"/>
+                <a:ea typeface="Meiryo UI"/>
+              </a:rPr>
+              <a:t>〜こたエール（東京都）にメールで相談が入った場合〜</a:t>
+            </a:r>
+          </a:p>
+        </p:txBody>
+      </p:sp>
+      <p:sp>
+        <p:nvSpPr>
+          <p:cNvPr id="4" name="Rectangle 3"/>
+          <p:cNvSpPr/>
+          <p:nvPr/>
+        </p:nvSpPr>
+        <p:spPr>
+          <a:xfrm>
+            <a:off x="360000" y="737999"/>
+            <a:ext cx="6840000" cy="342000"/>
+          </a:xfrm>
+          <a:prstGeom prst="rect">
             <a:avLst/>
           </a:prstGeom>
           <a:solidFill>
@@ -4198,42 +5650,463 @@
           </a:fontRef>
         </p:style>
         <p:txBody>
-          <a:bodyPr rtlCol="0" anchor="ctr" wrap="none" lIns="18000" rIns="18000" tIns="10800" bIns="10800"/>
+          <a:bodyPr rtlCol="0" anchor="ctr" wrap="square" lIns="54000" rIns="54000" tIns="28800" bIns="28800"/>
           <a:lstStyle/>
           <a:p>
             <a:pPr algn="ctr">
               <a:lnSpc>
-                <a:spcPct val="100000"/>
-              </a:lnSpc>
+                <a:spcPct val="105000"/>
+              </a:lnSpc>
+              <a:spcAft>
+                <a:spcPts val="200"/>
+              </a:spcAft>
+            </a:pPr>
+            <a:r>
+              <a:rPr sz="1250" b="1">
+                <a:solidFill>
+                  <a:srgbClr val="FFFFFF"/>
+                </a:solidFill>
+                <a:latin typeface="Meiryo UI"/>
+                <a:ea typeface="Meiryo UI"/>
+              </a:rPr>
+              <a:t>フェーズ2　警察との連携 〜 安否確認</a:t>
+            </a:r>
+          </a:p>
+        </p:txBody>
+      </p:sp>
+      <p:sp>
+        <p:nvSpPr>
+          <p:cNvPr id="5" name="Rounded Rectangle 4"/>
+          <p:cNvSpPr/>
+          <p:nvPr/>
+        </p:nvSpPr>
+        <p:spPr>
+          <a:xfrm>
+            <a:off x="5903999" y="792000"/>
+            <a:ext cx="1224000" cy="234000"/>
+          </a:xfrm>
+          <a:prstGeom prst="roundRect">
+            <a:avLst/>
+          </a:prstGeom>
+          <a:solidFill>
+            <a:srgbClr val="FFFFFF"/>
+          </a:solidFill>
+          <a:ln w="12700">
+            <a:solidFill>
+              <a:srgbClr val="2F5496"/>
+            </a:solidFill>
+          </a:ln>
+          <a:effectLst/>
+        </p:spPr>
+        <p:style>
+          <a:lnRef idx="1">
+            <a:schemeClr val="accent1"/>
+          </a:lnRef>
+          <a:fillRef idx="3">
+            <a:schemeClr val="accent1"/>
+          </a:fillRef>
+          <a:effectRef idx="2">
+            <a:schemeClr val="accent1"/>
+          </a:effectRef>
+          <a:fontRef idx="minor">
+            <a:schemeClr val="lt1"/>
+          </a:fontRef>
+        </p:style>
+        <p:txBody>
+          <a:bodyPr rtlCol="0" anchor="ctr" wrap="none" lIns="54000" rIns="54000" tIns="28800" bIns="28800"/>
+          <a:lstStyle/>
+          <a:p>
+            <a:pPr algn="ctr">
+              <a:lnSpc>
+                <a:spcPct val="105000"/>
+              </a:lnSpc>
+              <a:spcAft>
+                <a:spcPts val="200"/>
+              </a:spcAft>
             </a:pPr>
             <a:r>
               <a:rPr sz="850" b="1">
                 <a:solidFill>
+                  <a:srgbClr val="2F5496"/>
+                </a:solidFill>
+                <a:latin typeface="Meiryo UI"/>
+                <a:ea typeface="Meiryo UI"/>
+              </a:rPr>
+              <a:t>特定後 直ちに</a:t>
+            </a:r>
+          </a:p>
+        </p:txBody>
+      </p:sp>
+      <p:sp>
+        <p:nvSpPr>
+          <p:cNvPr id="6" name="TextBox 5"/>
+          <p:cNvSpPr txBox="1"/>
+          <p:nvPr/>
+        </p:nvSpPr>
+        <p:spPr>
+          <a:xfrm>
+            <a:off x="360000" y="10404000"/>
+            <a:ext cx="6840000" cy="216000"/>
+          </a:xfrm>
+          <a:prstGeom prst="rect">
+            <a:avLst/>
+          </a:prstGeom>
+          <a:noFill/>
+        </p:spPr>
+        <p:txBody>
+          <a:bodyPr wrap="square" anchor="t" lIns="54000" rIns="54000" tIns="28800" bIns="28800">
+            <a:spAutoFit/>
+          </a:bodyPr>
+          <a:lstStyle/>
+          <a:p>
+            <a:pPr algn="r">
+              <a:lnSpc>
+                <a:spcPct val="105000"/>
+              </a:lnSpc>
+              <a:spcAft>
+                <a:spcPts val="200"/>
+              </a:spcAft>
+            </a:pPr>
+            <a:r>
+              <a:rPr sz="850" b="0">
+                <a:solidFill>
+                  <a:srgbClr val="8A939E"/>
+                </a:solidFill>
+                <a:latin typeface="Meiryo UI"/>
+                <a:ea typeface="Meiryo UI"/>
+              </a:rPr>
+              <a:t>練馬区教育委員会 教育指導課　　2 / 3</a:t>
+            </a:r>
+          </a:p>
+        </p:txBody>
+      </p:sp>
+      <p:sp>
+        <p:nvSpPr>
+          <p:cNvPr id="7" name="Rounded Rectangle 6"/>
+          <p:cNvSpPr/>
+          <p:nvPr/>
+        </p:nvSpPr>
+        <p:spPr>
+          <a:xfrm>
+            <a:off x="360000" y="1260000"/>
+            <a:ext cx="4104000" cy="1080000"/>
+          </a:xfrm>
+          <a:prstGeom prst="roundRect">
+            <a:avLst>
+              <a:gd name="adj" fmla="val 8000"/>
+            </a:avLst>
+          </a:prstGeom>
+          <a:solidFill>
+            <a:srgbClr val="E8DAEF"/>
+          </a:solidFill>
+          <a:ln w="19050">
+            <a:solidFill>
+              <a:srgbClr val="6C3483"/>
+            </a:solidFill>
+          </a:ln>
+          <a:effectLst/>
+        </p:spPr>
+        <p:style>
+          <a:lnRef idx="1">
+            <a:schemeClr val="accent1"/>
+          </a:lnRef>
+          <a:fillRef idx="3">
+            <a:schemeClr val="accent1"/>
+          </a:fillRef>
+          <a:effectRef idx="2">
+            <a:schemeClr val="accent1"/>
+          </a:effectRef>
+          <a:fontRef idx="minor">
+            <a:schemeClr val="lt1"/>
+          </a:fontRef>
+        </p:style>
+        <p:txBody>
+          <a:bodyPr rtlCol="0" anchor="ctr" wrap="square" lIns="54000" rIns="54000" tIns="28800" bIns="28800"/>
+          <a:lstStyle/>
+          <a:p>
+            <a:pPr algn="l">
+              <a:lnSpc>
+                <a:spcPct val="105000"/>
+              </a:lnSpc>
+              <a:spcAft>
+                <a:spcPts val="200"/>
+              </a:spcAft>
+            </a:pPr>
+            <a:r>
+              <a:rPr sz="950" b="1">
+                <a:solidFill>
+                  <a:srgbClr val="6C3483"/>
+                </a:solidFill>
+                <a:latin typeface="Meiryo UI"/>
+                <a:ea typeface="Meiryo UI"/>
+              </a:rPr>
+              <a:t>【教育指導課 指導主事】</a:t>
+            </a:r>
+          </a:p>
+          <a:p>
+            <a:pPr algn="l">
+              <a:lnSpc>
+                <a:spcPct val="105000"/>
+              </a:lnSpc>
+              <a:spcAft>
+                <a:spcPts val="200"/>
+              </a:spcAft>
+            </a:pPr>
+            <a:r>
+              <a:rPr sz="1100" b="1">
+                <a:solidFill>
+                  <a:srgbClr val="1F2937"/>
+                </a:solidFill>
+                <a:latin typeface="Meiryo UI"/>
+                <a:ea typeface="Meiryo UI"/>
+              </a:rPr>
+              <a:t>警察へ ①学校名 ②学年 ③氏名 を伝える</a:t>
+            </a:r>
+          </a:p>
+          <a:p>
+            <a:pPr algn="l">
+              <a:lnSpc>
+                <a:spcPct val="105000"/>
+              </a:lnSpc>
+              <a:spcAft>
+                <a:spcPts val="200"/>
+              </a:spcAft>
+            </a:pPr>
+            <a:r>
+              <a:rPr sz="1000" b="0">
+                <a:solidFill>
+                  <a:srgbClr val="1F2937"/>
+                </a:solidFill>
+                <a:latin typeface="Meiryo UI"/>
+                <a:ea typeface="Meiryo UI"/>
+              </a:rPr>
+              <a:t>あわせて、警察が当該校へ連絡する前に、指導主事から当該校へ事前連絡することを警察に伝え、当該校に何を伝えるべきか助言をもらう。</a:t>
+            </a:r>
+          </a:p>
+        </p:txBody>
+      </p:sp>
+      <p:sp>
+        <p:nvSpPr>
+          <p:cNvPr id="8" name="Oval 7"/>
+          <p:cNvSpPr/>
+          <p:nvPr/>
+        </p:nvSpPr>
+        <p:spPr>
+          <a:xfrm>
+            <a:off x="32399" y="1659600"/>
+            <a:ext cx="280800" cy="280800"/>
+          </a:xfrm>
+          <a:prstGeom prst="ellipse">
+            <a:avLst/>
+          </a:prstGeom>
+          <a:solidFill>
+            <a:srgbClr val="2F5496"/>
+          </a:solidFill>
+          <a:ln w="19050">
+            <a:solidFill>
+              <a:srgbClr val="FFFFFF"/>
+            </a:solidFill>
+          </a:ln>
+          <a:effectLst/>
+        </p:spPr>
+        <p:style>
+          <a:lnRef idx="1">
+            <a:schemeClr val="accent1"/>
+          </a:lnRef>
+          <a:fillRef idx="3">
+            <a:schemeClr val="accent1"/>
+          </a:fillRef>
+          <a:effectRef idx="2">
+            <a:schemeClr val="accent1"/>
+          </a:effectRef>
+          <a:fontRef idx="minor">
+            <a:schemeClr val="lt1"/>
+          </a:fontRef>
+        </p:style>
+        <p:txBody>
+          <a:bodyPr rtlCol="0" anchor="ctr" wrap="none" lIns="54000" rIns="54000" tIns="28800" bIns="28800"/>
+          <a:lstStyle/>
+          <a:p>
+            <a:pPr algn="ctr">
+              <a:lnSpc>
+                <a:spcPct val="105000"/>
+              </a:lnSpc>
+              <a:spcAft>
+                <a:spcPts val="200"/>
+              </a:spcAft>
+            </a:pPr>
+            <a:r>
+              <a:rPr sz="1200" b="1">
+                <a:solidFill>
                   <a:srgbClr val="FFFFFF"/>
                 </a:solidFill>
                 <a:latin typeface="Meiryo UI"/>
                 <a:ea typeface="Meiryo UI"/>
               </a:rPr>
-              <a:t>2</a:t>
+              <a:t>6</a:t>
+            </a:r>
+          </a:p>
+        </p:txBody>
+      </p:sp>
+      <p:sp>
+        <p:nvSpPr>
+          <p:cNvPr id="9" name="Rounded Rectangle 8"/>
+          <p:cNvSpPr/>
+          <p:nvPr/>
+        </p:nvSpPr>
+        <p:spPr>
+          <a:xfrm>
+            <a:off x="4644000" y="1260000"/>
+            <a:ext cx="2556000" cy="1080000"/>
+          </a:xfrm>
+          <a:prstGeom prst="roundRect">
+            <a:avLst>
+              <a:gd name="adj" fmla="val 6000"/>
+            </a:avLst>
+          </a:prstGeom>
+          <a:solidFill>
+            <a:srgbClr val="F4F6F8"/>
+          </a:solidFill>
+          <a:ln w="12700">
+            <a:solidFill>
+              <a:srgbClr val="8A939E"/>
+            </a:solidFill>
+          </a:ln>
+          <a:effectLst/>
+        </p:spPr>
+        <p:style>
+          <a:lnRef idx="1">
+            <a:schemeClr val="accent1"/>
+          </a:lnRef>
+          <a:fillRef idx="3">
+            <a:schemeClr val="accent1"/>
+          </a:fillRef>
+          <a:effectRef idx="2">
+            <a:schemeClr val="accent1"/>
+          </a:effectRef>
+          <a:fontRef idx="minor">
+            <a:schemeClr val="lt1"/>
+          </a:fontRef>
+        </p:style>
+        <p:txBody>
+          <a:bodyPr rtlCol="0" anchor="ctr" wrap="square" lIns="54000" rIns="54000" tIns="28800" bIns="28800"/>
+          <a:lstStyle/>
+          <a:p>
+            <a:pPr algn="l">
+              <a:lnSpc>
+                <a:spcPct val="105000"/>
+              </a:lnSpc>
+              <a:spcAft>
+                <a:spcPts val="200"/>
+              </a:spcAft>
+            </a:pPr>
+            <a:r>
+              <a:rPr sz="950" b="1">
+                <a:solidFill>
+                  <a:srgbClr val="C0630C"/>
+                </a:solidFill>
+                <a:latin typeface="Meiryo UI"/>
+                <a:ea typeface="Meiryo UI"/>
+              </a:rPr>
+              <a:t>警察からの助言の例</a:t>
+            </a:r>
+          </a:p>
+          <a:p>
+            <a:pPr algn="l">
+              <a:lnSpc>
+                <a:spcPct val="105000"/>
+              </a:lnSpc>
+              <a:spcAft>
+                <a:spcPts val="200"/>
+              </a:spcAft>
+            </a:pPr>
+            <a:r>
+              <a:rPr sz="900" b="0">
+                <a:solidFill>
+                  <a:srgbClr val="1F2937"/>
+                </a:solidFill>
+                <a:latin typeface="Meiryo UI"/>
+                <a:ea typeface="Meiryo UI"/>
+              </a:rPr>
+              <a:t>・事前に保護者に連絡しておく</a:t>
+            </a:r>
+            <a:br/>
+            <a:r>
+              <a:rPr sz="900" b="0">
+                <a:solidFill>
+                  <a:srgbClr val="1F2937"/>
+                </a:solidFill>
+                <a:latin typeface="Meiryo UI"/>
+                <a:ea typeface="Meiryo UI"/>
+              </a:rPr>
+              <a:t>・保護者からの虐待が疑われるため、警察が連絡するまでは何もしない　等</a:t>
+            </a:r>
+            <a:br/>
+            <a:r>
+              <a:rPr sz="900" b="0">
+                <a:solidFill>
+                  <a:srgbClr val="1F2937"/>
+                </a:solidFill>
+                <a:latin typeface="Meiryo UI"/>
+                <a:ea typeface="Meiryo UI"/>
+              </a:rPr>
+              <a:t>→ 助言内容をそのまま記録し、当該校に正確に伝える。</a:t>
             </a:r>
           </a:p>
         </p:txBody>
       </p:sp>
       <p:cxnSp>
         <p:nvCxnSpPr>
-          <p:cNvPr id="23" name="Connector 22"/>
+          <p:cNvPr id="10" name="Connector 9"/>
           <p:cNvCxnSpPr/>
           <p:nvPr/>
         </p:nvCxnSpPr>
         <p:spPr>
           <a:xfrm>
-            <a:off x="5544000" y="3118909"/>
-            <a:ext cx="1176000" cy="0"/>
+            <a:off x="4464000" y="1800000"/>
+            <a:ext cx="180000" cy="0"/>
           </a:xfrm>
           <a:prstGeom prst="line">
             <a:avLst/>
           </a:prstGeom>
-          <a:ln w="19050">
+          <a:ln w="12700">
+            <a:solidFill>
+              <a:srgbClr val="8A939E"/>
+            </a:solidFill>
+            <a:prstDash val="dash"/>
+          </a:ln>
+          <a:effectLst/>
+        </p:spPr>
+        <p:style>
+          <a:lnRef idx="2">
+            <a:schemeClr val="accent1"/>
+          </a:lnRef>
+          <a:fillRef idx="0">
+            <a:schemeClr val="accent1"/>
+          </a:fillRef>
+          <a:effectRef idx="1">
+            <a:schemeClr val="accent1"/>
+          </a:effectRef>
+          <a:fontRef idx="minor">
+            <a:schemeClr val="tx1"/>
+          </a:fontRef>
+        </p:style>
+      </p:cxnSp>
+      <p:cxnSp>
+        <p:nvCxnSpPr>
+          <p:cNvPr id="11" name="Connector 10"/>
+          <p:cNvCxnSpPr/>
+          <p:nvPr/>
+        </p:nvCxnSpPr>
+        <p:spPr>
+          <a:xfrm>
+            <a:off x="2412000" y="2340000"/>
+            <a:ext cx="0" cy="162000"/>
+          </a:xfrm>
+          <a:prstGeom prst="line">
+            <a:avLst/>
+          </a:prstGeom>
+          <a:ln w="25400">
             <a:solidFill>
               <a:srgbClr val="37475A"/>
             </a:solidFill>
@@ -4258,14 +6131,1601 @@
       </p:cxnSp>
       <p:sp>
         <p:nvSpPr>
-          <p:cNvPr id="24" name="TextBox 23"/>
+          <p:cNvPr id="12" name="Rounded Rectangle 11"/>
+          <p:cNvSpPr/>
+          <p:nvPr/>
+        </p:nvSpPr>
+        <p:spPr>
+          <a:xfrm>
+            <a:off x="360000" y="2502000"/>
+            <a:ext cx="4104000" cy="1044000"/>
+          </a:xfrm>
+          <a:prstGeom prst="roundRect">
+            <a:avLst>
+              <a:gd name="adj" fmla="val 8000"/>
+            </a:avLst>
+          </a:prstGeom>
+          <a:solidFill>
+            <a:srgbClr val="E8DAEF"/>
+          </a:solidFill>
+          <a:ln w="19050">
+            <a:solidFill>
+              <a:srgbClr val="6C3483"/>
+            </a:solidFill>
+          </a:ln>
+          <a:effectLst/>
+        </p:spPr>
+        <p:style>
+          <a:lnRef idx="1">
+            <a:schemeClr val="accent1"/>
+          </a:lnRef>
+          <a:fillRef idx="3">
+            <a:schemeClr val="accent1"/>
+          </a:fillRef>
+          <a:effectRef idx="2">
+            <a:schemeClr val="accent1"/>
+          </a:effectRef>
+          <a:fontRef idx="minor">
+            <a:schemeClr val="lt1"/>
+          </a:fontRef>
+        </p:style>
+        <p:txBody>
+          <a:bodyPr rtlCol="0" anchor="ctr" wrap="square" lIns="54000" rIns="54000" tIns="28800" bIns="28800"/>
+          <a:lstStyle/>
+          <a:p>
+            <a:pPr algn="l">
+              <a:lnSpc>
+                <a:spcPct val="105000"/>
+              </a:lnSpc>
+              <a:spcAft>
+                <a:spcPts val="200"/>
+              </a:spcAft>
+            </a:pPr>
+            <a:r>
+              <a:rPr sz="950" b="1">
+                <a:solidFill>
+                  <a:srgbClr val="6C3483"/>
+                </a:solidFill>
+                <a:latin typeface="Meiryo UI"/>
+                <a:ea typeface="Meiryo UI"/>
+              </a:rPr>
+              <a:t>【教育指導課 指導主事】</a:t>
+            </a:r>
+          </a:p>
+          <a:p>
+            <a:pPr algn="l">
+              <a:lnSpc>
+                <a:spcPct val="105000"/>
+              </a:lnSpc>
+              <a:spcAft>
+                <a:spcPts val="200"/>
+              </a:spcAft>
+            </a:pPr>
+            <a:r>
+              <a:rPr sz="1100" b="1">
+                <a:solidFill>
+                  <a:srgbClr val="1F2937"/>
+                </a:solidFill>
+                <a:latin typeface="Meiryo UI"/>
+                <a:ea typeface="Meiryo UI"/>
+              </a:rPr>
+              <a:t>当該校の校長（不在時は副校長）へ電話で事前連絡</a:t>
+            </a:r>
+          </a:p>
+          <a:p>
+            <a:pPr algn="l">
+              <a:lnSpc>
+                <a:spcPct val="105000"/>
+              </a:lnSpc>
+              <a:spcAft>
+                <a:spcPts val="200"/>
+              </a:spcAft>
+            </a:pPr>
+            <a:r>
+              <a:rPr sz="1000" b="0">
+                <a:solidFill>
+                  <a:srgbClr val="1F2937"/>
+                </a:solidFill>
+                <a:latin typeface="Meiryo UI"/>
+                <a:ea typeface="Meiryo UI"/>
+              </a:rPr>
+              <a:t>・警察から在籍確認の連絡が入ること</a:t>
+            </a:r>
+            <a:br/>
+            <a:r>
+              <a:rPr sz="1000" b="0">
+                <a:solidFill>
+                  <a:srgbClr val="1F2937"/>
+                </a:solidFill>
+                <a:latin typeface="Meiryo UI"/>
+                <a:ea typeface="Meiryo UI"/>
+              </a:rPr>
+              <a:t>・警察の助言に基づく対応方法（保護者への連絡の要否 等）</a:t>
+            </a:r>
+            <a:br/>
+            <a:r>
+              <a:rPr sz="1000" b="0">
+                <a:solidFill>
+                  <a:srgbClr val="1F2937"/>
+                </a:solidFill>
+                <a:latin typeface="Meiryo UI"/>
+                <a:ea typeface="Meiryo UI"/>
+              </a:rPr>
+              <a:t>・校内で知る教職員は必要最小限にとどめること</a:t>
+            </a:r>
+          </a:p>
+        </p:txBody>
+      </p:sp>
+      <p:sp>
+        <p:nvSpPr>
+          <p:cNvPr id="13" name="Oval 12"/>
+          <p:cNvSpPr/>
+          <p:nvPr/>
+        </p:nvSpPr>
+        <p:spPr>
+          <a:xfrm>
+            <a:off x="32399" y="2883600"/>
+            <a:ext cx="280800" cy="280800"/>
+          </a:xfrm>
+          <a:prstGeom prst="ellipse">
+            <a:avLst/>
+          </a:prstGeom>
+          <a:solidFill>
+            <a:srgbClr val="2F5496"/>
+          </a:solidFill>
+          <a:ln w="19050">
+            <a:solidFill>
+              <a:srgbClr val="FFFFFF"/>
+            </a:solidFill>
+          </a:ln>
+          <a:effectLst/>
+        </p:spPr>
+        <p:style>
+          <a:lnRef idx="1">
+            <a:schemeClr val="accent1"/>
+          </a:lnRef>
+          <a:fillRef idx="3">
+            <a:schemeClr val="accent1"/>
+          </a:fillRef>
+          <a:effectRef idx="2">
+            <a:schemeClr val="accent1"/>
+          </a:effectRef>
+          <a:fontRef idx="minor">
+            <a:schemeClr val="lt1"/>
+          </a:fontRef>
+        </p:style>
+        <p:txBody>
+          <a:bodyPr rtlCol="0" anchor="ctr" wrap="none" lIns="54000" rIns="54000" tIns="28800" bIns="28800"/>
+          <a:lstStyle/>
+          <a:p>
+            <a:pPr algn="ctr">
+              <a:lnSpc>
+                <a:spcPct val="105000"/>
+              </a:lnSpc>
+              <a:spcAft>
+                <a:spcPts val="200"/>
+              </a:spcAft>
+            </a:pPr>
+            <a:r>
+              <a:rPr sz="1200" b="1">
+                <a:solidFill>
+                  <a:srgbClr val="FFFFFF"/>
+                </a:solidFill>
+                <a:latin typeface="Meiryo UI"/>
+                <a:ea typeface="Meiryo UI"/>
+              </a:rPr>
+              <a:t>7</a:t>
+            </a:r>
+          </a:p>
+        </p:txBody>
+      </p:sp>
+      <p:sp>
+        <p:nvSpPr>
+          <p:cNvPr id="14" name="Rounded Rectangle 13"/>
+          <p:cNvSpPr/>
+          <p:nvPr/>
+        </p:nvSpPr>
+        <p:spPr>
+          <a:xfrm>
+            <a:off x="4644000" y="2502000"/>
+            <a:ext cx="2556000" cy="1044000"/>
+          </a:xfrm>
+          <a:prstGeom prst="roundRect">
+            <a:avLst>
+              <a:gd name="adj" fmla="val 6000"/>
+            </a:avLst>
+          </a:prstGeom>
+          <a:solidFill>
+            <a:srgbClr val="F4F6F8"/>
+          </a:solidFill>
+          <a:ln w="12700">
+            <a:solidFill>
+              <a:srgbClr val="8A939E"/>
+            </a:solidFill>
+          </a:ln>
+          <a:effectLst/>
+        </p:spPr>
+        <p:style>
+          <a:lnRef idx="1">
+            <a:schemeClr val="accent1"/>
+          </a:lnRef>
+          <a:fillRef idx="3">
+            <a:schemeClr val="accent1"/>
+          </a:fillRef>
+          <a:effectRef idx="2">
+            <a:schemeClr val="accent1"/>
+          </a:effectRef>
+          <a:fontRef idx="minor">
+            <a:schemeClr val="lt1"/>
+          </a:fontRef>
+        </p:style>
+        <p:txBody>
+          <a:bodyPr rtlCol="0" anchor="ctr" wrap="square" lIns="54000" rIns="54000" tIns="28800" bIns="28800"/>
+          <a:lstStyle/>
+          <a:p>
+            <a:pPr algn="l">
+              <a:lnSpc>
+                <a:spcPct val="105000"/>
+              </a:lnSpc>
+              <a:spcAft>
+                <a:spcPts val="200"/>
+              </a:spcAft>
+            </a:pPr>
+            <a:r>
+              <a:rPr sz="950" b="1">
+                <a:solidFill>
+                  <a:srgbClr val="B02121"/>
+                </a:solidFill>
+                <a:latin typeface="Meiryo UI"/>
+                <a:ea typeface="Meiryo UI"/>
+              </a:rPr>
+              <a:t>虐待が疑われる場合</a:t>
+            </a:r>
+          </a:p>
+          <a:p>
+            <a:pPr algn="l">
+              <a:lnSpc>
+                <a:spcPct val="105000"/>
+              </a:lnSpc>
+              <a:spcAft>
+                <a:spcPts val="200"/>
+              </a:spcAft>
+            </a:pPr>
+            <a:r>
+              <a:rPr sz="900" b="0">
+                <a:solidFill>
+                  <a:srgbClr val="1F2937"/>
+                </a:solidFill>
+                <a:latin typeface="Meiryo UI"/>
+                <a:ea typeface="Meiryo UI"/>
+              </a:rPr>
+              <a:t>保護者への連絡は行わない。学校・教育委員会は子供家庭支援センター・児童相談所へ通告する（児童虐待防止法第6条）。</a:t>
+            </a:r>
+          </a:p>
+        </p:txBody>
+      </p:sp>
+      <p:cxnSp>
+        <p:nvCxnSpPr>
+          <p:cNvPr id="15" name="Connector 14"/>
+          <p:cNvCxnSpPr/>
+          <p:nvPr/>
+        </p:nvCxnSpPr>
+        <p:spPr>
+          <a:xfrm>
+            <a:off x="4464000" y="3024000"/>
+            <a:ext cx="180000" cy="0"/>
+          </a:xfrm>
+          <a:prstGeom prst="line">
+            <a:avLst/>
+          </a:prstGeom>
+          <a:ln w="12700">
+            <a:solidFill>
+              <a:srgbClr val="8A939E"/>
+            </a:solidFill>
+            <a:prstDash val="dash"/>
+          </a:ln>
+          <a:effectLst/>
+        </p:spPr>
+        <p:style>
+          <a:lnRef idx="2">
+            <a:schemeClr val="accent1"/>
+          </a:lnRef>
+          <a:fillRef idx="0">
+            <a:schemeClr val="accent1"/>
+          </a:fillRef>
+          <a:effectRef idx="1">
+            <a:schemeClr val="accent1"/>
+          </a:effectRef>
+          <a:fontRef idx="minor">
+            <a:schemeClr val="tx1"/>
+          </a:fontRef>
+        </p:style>
+      </p:cxnSp>
+      <p:cxnSp>
+        <p:nvCxnSpPr>
+          <p:cNvPr id="16" name="Connector 15"/>
+          <p:cNvCxnSpPr/>
+          <p:nvPr/>
+        </p:nvCxnSpPr>
+        <p:spPr>
+          <a:xfrm>
+            <a:off x="2412000" y="3546000"/>
+            <a:ext cx="0" cy="162000"/>
+          </a:xfrm>
+          <a:prstGeom prst="line">
+            <a:avLst/>
+          </a:prstGeom>
+          <a:ln w="25400">
+            <a:solidFill>
+              <a:srgbClr val="37475A"/>
+            </a:solidFill>
+            <a:tailEnd type="triangle" w="med" len="med"/>
+          </a:ln>
+          <a:effectLst/>
+        </p:spPr>
+        <p:style>
+          <a:lnRef idx="2">
+            <a:schemeClr val="accent1"/>
+          </a:lnRef>
+          <a:fillRef idx="0">
+            <a:schemeClr val="accent1"/>
+          </a:fillRef>
+          <a:effectRef idx="1">
+            <a:schemeClr val="accent1"/>
+          </a:effectRef>
+          <a:fontRef idx="minor">
+            <a:schemeClr val="tx1"/>
+          </a:fontRef>
+        </p:style>
+      </p:cxnSp>
+      <p:sp>
+        <p:nvSpPr>
+          <p:cNvPr id="17" name="Rounded Rectangle 16"/>
+          <p:cNvSpPr/>
+          <p:nvPr/>
+        </p:nvSpPr>
+        <p:spPr>
+          <a:xfrm>
+            <a:off x="360000" y="3708000"/>
+            <a:ext cx="4104000" cy="827999"/>
+          </a:xfrm>
+          <a:prstGeom prst="roundRect">
+            <a:avLst>
+              <a:gd name="adj" fmla="val 8000"/>
+            </a:avLst>
+          </a:prstGeom>
+          <a:solidFill>
+            <a:srgbClr val="D1E7DD"/>
+          </a:solidFill>
+          <a:ln w="19050">
+            <a:solidFill>
+              <a:srgbClr val="1E6641"/>
+            </a:solidFill>
+          </a:ln>
+          <a:effectLst/>
+        </p:spPr>
+        <p:style>
+          <a:lnRef idx="1">
+            <a:schemeClr val="accent1"/>
+          </a:lnRef>
+          <a:fillRef idx="3">
+            <a:schemeClr val="accent1"/>
+          </a:fillRef>
+          <a:effectRef idx="2">
+            <a:schemeClr val="accent1"/>
+          </a:effectRef>
+          <a:fontRef idx="minor">
+            <a:schemeClr val="lt1"/>
+          </a:fontRef>
+        </p:style>
+        <p:txBody>
+          <a:bodyPr rtlCol="0" anchor="ctr" wrap="square" lIns="54000" rIns="54000" tIns="28800" bIns="28800"/>
+          <a:lstStyle/>
+          <a:p>
+            <a:pPr algn="l">
+              <a:lnSpc>
+                <a:spcPct val="105000"/>
+              </a:lnSpc>
+              <a:spcAft>
+                <a:spcPts val="200"/>
+              </a:spcAft>
+            </a:pPr>
+            <a:r>
+              <a:rPr sz="950" b="1">
+                <a:solidFill>
+                  <a:srgbClr val="1E6641"/>
+                </a:solidFill>
+                <a:latin typeface="Meiryo UI"/>
+                <a:ea typeface="Meiryo UI"/>
+              </a:rPr>
+              <a:t>【警察署（練馬区内管轄）】</a:t>
+            </a:r>
+          </a:p>
+          <a:p>
+            <a:pPr algn="l">
+              <a:lnSpc>
+                <a:spcPct val="105000"/>
+              </a:lnSpc>
+              <a:spcAft>
+                <a:spcPts val="200"/>
+              </a:spcAft>
+            </a:pPr>
+            <a:r>
+              <a:rPr sz="1100" b="1">
+                <a:solidFill>
+                  <a:srgbClr val="1F2937"/>
+                </a:solidFill>
+                <a:latin typeface="Meiryo UI"/>
+                <a:ea typeface="Meiryo UI"/>
+              </a:rPr>
+              <a:t>当該校へ連絡し、在籍確認</a:t>
+            </a:r>
+          </a:p>
+          <a:p>
+            <a:pPr algn="l">
+              <a:lnSpc>
+                <a:spcPct val="105000"/>
+              </a:lnSpc>
+              <a:spcAft>
+                <a:spcPts val="200"/>
+              </a:spcAft>
+            </a:pPr>
+            <a:r>
+              <a:rPr sz="1000" b="0">
+                <a:solidFill>
+                  <a:srgbClr val="1F2937"/>
+                </a:solidFill>
+                <a:latin typeface="Meiryo UI"/>
+                <a:ea typeface="Meiryo UI"/>
+              </a:rPr>
+              <a:t>在籍していれば ①氏名 ②保護者の連絡先 ③住所 を確認する。</a:t>
+            </a:r>
+          </a:p>
+        </p:txBody>
+      </p:sp>
+      <p:sp>
+        <p:nvSpPr>
+          <p:cNvPr id="18" name="Oval 17"/>
+          <p:cNvSpPr/>
+          <p:nvPr/>
+        </p:nvSpPr>
+        <p:spPr>
+          <a:xfrm>
+            <a:off x="32399" y="3981600"/>
+            <a:ext cx="280800" cy="280800"/>
+          </a:xfrm>
+          <a:prstGeom prst="ellipse">
+            <a:avLst/>
+          </a:prstGeom>
+          <a:solidFill>
+            <a:srgbClr val="2F5496"/>
+          </a:solidFill>
+          <a:ln w="19050">
+            <a:solidFill>
+              <a:srgbClr val="FFFFFF"/>
+            </a:solidFill>
+          </a:ln>
+          <a:effectLst/>
+        </p:spPr>
+        <p:style>
+          <a:lnRef idx="1">
+            <a:schemeClr val="accent1"/>
+          </a:lnRef>
+          <a:fillRef idx="3">
+            <a:schemeClr val="accent1"/>
+          </a:fillRef>
+          <a:effectRef idx="2">
+            <a:schemeClr val="accent1"/>
+          </a:effectRef>
+          <a:fontRef idx="minor">
+            <a:schemeClr val="lt1"/>
+          </a:fontRef>
+        </p:style>
+        <p:txBody>
+          <a:bodyPr rtlCol="0" anchor="ctr" wrap="none" lIns="54000" rIns="54000" tIns="28800" bIns="28800"/>
+          <a:lstStyle/>
+          <a:p>
+            <a:pPr algn="ctr">
+              <a:lnSpc>
+                <a:spcPct val="105000"/>
+              </a:lnSpc>
+              <a:spcAft>
+                <a:spcPts val="200"/>
+              </a:spcAft>
+            </a:pPr>
+            <a:r>
+              <a:rPr sz="1200" b="1">
+                <a:solidFill>
+                  <a:srgbClr val="FFFFFF"/>
+                </a:solidFill>
+                <a:latin typeface="Meiryo UI"/>
+                <a:ea typeface="Meiryo UI"/>
+              </a:rPr>
+              <a:t>8</a:t>
+            </a:r>
+          </a:p>
+        </p:txBody>
+      </p:sp>
+      <p:sp>
+        <p:nvSpPr>
+          <p:cNvPr id="19" name="Rounded Rectangle 18"/>
+          <p:cNvSpPr/>
+          <p:nvPr/>
+        </p:nvSpPr>
+        <p:spPr>
+          <a:xfrm>
+            <a:off x="4644000" y="3708000"/>
+            <a:ext cx="2556000" cy="827999"/>
+          </a:xfrm>
+          <a:prstGeom prst="roundRect">
+            <a:avLst>
+              <a:gd name="adj" fmla="val 6000"/>
+            </a:avLst>
+          </a:prstGeom>
+          <a:solidFill>
+            <a:srgbClr val="F4F6F8"/>
+          </a:solidFill>
+          <a:ln w="12700">
+            <a:solidFill>
+              <a:srgbClr val="8A939E"/>
+            </a:solidFill>
+          </a:ln>
+          <a:effectLst/>
+        </p:spPr>
+        <p:style>
+          <a:lnRef idx="1">
+            <a:schemeClr val="accent1"/>
+          </a:lnRef>
+          <a:fillRef idx="3">
+            <a:schemeClr val="accent1"/>
+          </a:fillRef>
+          <a:effectRef idx="2">
+            <a:schemeClr val="accent1"/>
+          </a:effectRef>
+          <a:fontRef idx="minor">
+            <a:schemeClr val="lt1"/>
+          </a:fontRef>
+        </p:style>
+        <p:txBody>
+          <a:bodyPr rtlCol="0" anchor="ctr" wrap="square" lIns="54000" rIns="54000" tIns="28800" bIns="28800"/>
+          <a:lstStyle/>
+          <a:p>
+            <a:pPr algn="l">
+              <a:lnSpc>
+                <a:spcPct val="105000"/>
+              </a:lnSpc>
+              <a:spcAft>
+                <a:spcPts val="200"/>
+              </a:spcAft>
+            </a:pPr>
+            <a:r>
+              <a:rPr sz="950" b="1">
+                <a:solidFill>
+                  <a:srgbClr val="2F5496"/>
+                </a:solidFill>
+                <a:latin typeface="Meiryo UI"/>
+                <a:ea typeface="Meiryo UI"/>
+              </a:rPr>
+              <a:t>学校側の準備</a:t>
+            </a:r>
+          </a:p>
+          <a:p>
+            <a:pPr algn="l">
+              <a:lnSpc>
+                <a:spcPct val="105000"/>
+              </a:lnSpc>
+              <a:spcAft>
+                <a:spcPts val="200"/>
+              </a:spcAft>
+            </a:pPr>
+            <a:r>
+              <a:rPr sz="900" b="0">
+                <a:solidFill>
+                  <a:srgbClr val="1F2937"/>
+                </a:solidFill>
+                <a:latin typeface="Meiryo UI"/>
+                <a:ea typeface="Meiryo UI"/>
+              </a:rPr>
+              <a:t>指名された対応者（管理職）が指導要録・学籍情報をすぐ出せるよう手元に準備しておく。</a:t>
+            </a:r>
+          </a:p>
+        </p:txBody>
+      </p:sp>
+      <p:cxnSp>
+        <p:nvCxnSpPr>
+          <p:cNvPr id="20" name="Connector 19"/>
+          <p:cNvCxnSpPr/>
+          <p:nvPr/>
+        </p:nvCxnSpPr>
+        <p:spPr>
+          <a:xfrm>
+            <a:off x="4464000" y="4122000"/>
+            <a:ext cx="180000" cy="0"/>
+          </a:xfrm>
+          <a:prstGeom prst="line">
+            <a:avLst/>
+          </a:prstGeom>
+          <a:ln w="12700">
+            <a:solidFill>
+              <a:srgbClr val="8A939E"/>
+            </a:solidFill>
+            <a:prstDash val="dash"/>
+          </a:ln>
+          <a:effectLst/>
+        </p:spPr>
+        <p:style>
+          <a:lnRef idx="2">
+            <a:schemeClr val="accent1"/>
+          </a:lnRef>
+          <a:fillRef idx="0">
+            <a:schemeClr val="accent1"/>
+          </a:fillRef>
+          <a:effectRef idx="1">
+            <a:schemeClr val="accent1"/>
+          </a:effectRef>
+          <a:fontRef idx="minor">
+            <a:schemeClr val="tx1"/>
+          </a:fontRef>
+        </p:style>
+      </p:cxnSp>
+      <p:cxnSp>
+        <p:nvCxnSpPr>
+          <p:cNvPr id="21" name="Connector 20"/>
+          <p:cNvCxnSpPr/>
+          <p:nvPr/>
+        </p:nvCxnSpPr>
+        <p:spPr>
+          <a:xfrm>
+            <a:off x="2412000" y="4536000"/>
+            <a:ext cx="0" cy="162000"/>
+          </a:xfrm>
+          <a:prstGeom prst="line">
+            <a:avLst/>
+          </a:prstGeom>
+          <a:ln w="25400">
+            <a:solidFill>
+              <a:srgbClr val="37475A"/>
+            </a:solidFill>
+            <a:tailEnd type="triangle" w="med" len="med"/>
+          </a:ln>
+          <a:effectLst/>
+        </p:spPr>
+        <p:style>
+          <a:lnRef idx="2">
+            <a:schemeClr val="accent1"/>
+          </a:lnRef>
+          <a:fillRef idx="0">
+            <a:schemeClr val="accent1"/>
+          </a:fillRef>
+          <a:effectRef idx="1">
+            <a:schemeClr val="accent1"/>
+          </a:effectRef>
+          <a:fontRef idx="minor">
+            <a:schemeClr val="tx1"/>
+          </a:fontRef>
+        </p:style>
+      </p:cxnSp>
+      <p:sp>
+        <p:nvSpPr>
+          <p:cNvPr id="22" name="Rounded Rectangle 21"/>
+          <p:cNvSpPr/>
+          <p:nvPr/>
+        </p:nvSpPr>
+        <p:spPr>
+          <a:xfrm>
+            <a:off x="360000" y="4698000"/>
+            <a:ext cx="4104000" cy="792000"/>
+          </a:xfrm>
+          <a:prstGeom prst="roundRect">
+            <a:avLst>
+              <a:gd name="adj" fmla="val 8000"/>
+            </a:avLst>
+          </a:prstGeom>
+          <a:solidFill>
+            <a:srgbClr val="D1E7DD"/>
+          </a:solidFill>
+          <a:ln w="19050">
+            <a:solidFill>
+              <a:srgbClr val="1E6641"/>
+            </a:solidFill>
+          </a:ln>
+          <a:effectLst/>
+        </p:spPr>
+        <p:style>
+          <a:lnRef idx="1">
+            <a:schemeClr val="accent1"/>
+          </a:lnRef>
+          <a:fillRef idx="3">
+            <a:schemeClr val="accent1"/>
+          </a:fillRef>
+          <a:effectRef idx="2">
+            <a:schemeClr val="accent1"/>
+          </a:effectRef>
+          <a:fontRef idx="minor">
+            <a:schemeClr val="lt1"/>
+          </a:fontRef>
+        </p:style>
+        <p:txBody>
+          <a:bodyPr rtlCol="0" anchor="ctr" wrap="square" lIns="54000" rIns="54000" tIns="28800" bIns="28800"/>
+          <a:lstStyle/>
+          <a:p>
+            <a:pPr algn="l">
+              <a:lnSpc>
+                <a:spcPct val="105000"/>
+              </a:lnSpc>
+              <a:spcAft>
+                <a:spcPts val="200"/>
+              </a:spcAft>
+            </a:pPr>
+            <a:r>
+              <a:rPr sz="950" b="1">
+                <a:solidFill>
+                  <a:srgbClr val="1E6641"/>
+                </a:solidFill>
+                <a:latin typeface="Meiryo UI"/>
+                <a:ea typeface="Meiryo UI"/>
+              </a:rPr>
+              <a:t>【警察署（練馬区内管轄）】</a:t>
+            </a:r>
+          </a:p>
+          <a:p>
+            <a:pPr algn="l">
+              <a:lnSpc>
+                <a:spcPct val="105000"/>
+              </a:lnSpc>
+              <a:spcAft>
+                <a:spcPts val="200"/>
+              </a:spcAft>
+            </a:pPr>
+            <a:r>
+              <a:rPr sz="1100" b="1">
+                <a:solidFill>
+                  <a:srgbClr val="1F2937"/>
+                </a:solidFill>
+                <a:latin typeface="Meiryo UI"/>
+                <a:ea typeface="Meiryo UI"/>
+              </a:rPr>
+              <a:t>当該児童生徒の自宅を訪問し、安否確認</a:t>
+            </a:r>
+          </a:p>
+          <a:p>
+            <a:pPr algn="l">
+              <a:lnSpc>
+                <a:spcPct val="105000"/>
+              </a:lnSpc>
+              <a:spcAft>
+                <a:spcPts val="200"/>
+              </a:spcAft>
+            </a:pPr>
+            <a:r>
+              <a:rPr sz="1000" b="0">
+                <a:solidFill>
+                  <a:srgbClr val="1F2937"/>
+                </a:solidFill>
+                <a:latin typeface="Meiryo UI"/>
+                <a:ea typeface="Meiryo UI"/>
+              </a:rPr>
+              <a:t>必要に応じて保護・救急要請等の措置がとられる。</a:t>
+            </a:r>
+          </a:p>
+        </p:txBody>
+      </p:sp>
+      <p:sp>
+        <p:nvSpPr>
+          <p:cNvPr id="23" name="Oval 22"/>
+          <p:cNvSpPr/>
+          <p:nvPr/>
+        </p:nvSpPr>
+        <p:spPr>
+          <a:xfrm>
+            <a:off x="32399" y="4953600"/>
+            <a:ext cx="280800" cy="280800"/>
+          </a:xfrm>
+          <a:prstGeom prst="ellipse">
+            <a:avLst/>
+          </a:prstGeom>
+          <a:solidFill>
+            <a:srgbClr val="2F5496"/>
+          </a:solidFill>
+          <a:ln w="19050">
+            <a:solidFill>
+              <a:srgbClr val="FFFFFF"/>
+            </a:solidFill>
+          </a:ln>
+          <a:effectLst/>
+        </p:spPr>
+        <p:style>
+          <a:lnRef idx="1">
+            <a:schemeClr val="accent1"/>
+          </a:lnRef>
+          <a:fillRef idx="3">
+            <a:schemeClr val="accent1"/>
+          </a:fillRef>
+          <a:effectRef idx="2">
+            <a:schemeClr val="accent1"/>
+          </a:effectRef>
+          <a:fontRef idx="minor">
+            <a:schemeClr val="lt1"/>
+          </a:fontRef>
+        </p:style>
+        <p:txBody>
+          <a:bodyPr rtlCol="0" anchor="ctr" wrap="none" lIns="54000" rIns="54000" tIns="28800" bIns="28800"/>
+          <a:lstStyle/>
+          <a:p>
+            <a:pPr algn="ctr">
+              <a:lnSpc>
+                <a:spcPct val="105000"/>
+              </a:lnSpc>
+              <a:spcAft>
+                <a:spcPts val="200"/>
+              </a:spcAft>
+            </a:pPr>
+            <a:r>
+              <a:rPr sz="1200" b="1">
+                <a:solidFill>
+                  <a:srgbClr val="FFFFFF"/>
+                </a:solidFill>
+                <a:latin typeface="Meiryo UI"/>
+                <a:ea typeface="Meiryo UI"/>
+              </a:rPr>
+              <a:t>9</a:t>
+            </a:r>
+          </a:p>
+        </p:txBody>
+      </p:sp>
+      <p:sp>
+        <p:nvSpPr>
+          <p:cNvPr id="24" name="Rounded Rectangle 23"/>
+          <p:cNvSpPr/>
+          <p:nvPr/>
+        </p:nvSpPr>
+        <p:spPr>
+          <a:xfrm>
+            <a:off x="4644000" y="4698000"/>
+            <a:ext cx="2556000" cy="936000"/>
+          </a:xfrm>
+          <a:prstGeom prst="roundRect">
+            <a:avLst>
+              <a:gd name="adj" fmla="val 6000"/>
+            </a:avLst>
+          </a:prstGeom>
+          <a:solidFill>
+            <a:srgbClr val="F4F6F8"/>
+          </a:solidFill>
+          <a:ln w="12700">
+            <a:solidFill>
+              <a:srgbClr val="8A939E"/>
+            </a:solidFill>
+          </a:ln>
+          <a:effectLst/>
+        </p:spPr>
+        <p:style>
+          <a:lnRef idx="1">
+            <a:schemeClr val="accent1"/>
+          </a:lnRef>
+          <a:fillRef idx="3">
+            <a:schemeClr val="accent1"/>
+          </a:fillRef>
+          <a:effectRef idx="2">
+            <a:schemeClr val="accent1"/>
+          </a:effectRef>
+          <a:fontRef idx="minor">
+            <a:schemeClr val="lt1"/>
+          </a:fontRef>
+        </p:style>
+        <p:txBody>
+          <a:bodyPr rtlCol="0" anchor="ctr" wrap="square" lIns="54000" rIns="54000" tIns="28800" bIns="28800"/>
+          <a:lstStyle/>
+          <a:p>
+            <a:pPr algn="l">
+              <a:lnSpc>
+                <a:spcPct val="105000"/>
+              </a:lnSpc>
+              <a:spcAft>
+                <a:spcPts val="200"/>
+              </a:spcAft>
+            </a:pPr>
+            <a:r>
+              <a:rPr sz="950" b="1">
+                <a:solidFill>
+                  <a:srgbClr val="2F5496"/>
+                </a:solidFill>
+                <a:latin typeface="Meiryo UI"/>
+                <a:ea typeface="Meiryo UI"/>
+              </a:rPr>
+              <a:t>根拠</a:t>
+            </a:r>
+          </a:p>
+          <a:p>
+            <a:pPr algn="l">
+              <a:lnSpc>
+                <a:spcPct val="105000"/>
+              </a:lnSpc>
+              <a:spcAft>
+                <a:spcPts val="200"/>
+              </a:spcAft>
+            </a:pPr>
+            <a:r>
+              <a:rPr sz="900" b="0">
+                <a:solidFill>
+                  <a:srgbClr val="1F2937"/>
+                </a:solidFill>
+                <a:latin typeface="Meiryo UI"/>
+                <a:ea typeface="Meiryo UI"/>
+              </a:rPr>
+              <a:t>自殺企図のおそれのある者の保護は、警察官職務執行法第3条に基づき警察が行う。学校・教委は警察の活動を妨げない。</a:t>
+            </a:r>
+          </a:p>
+        </p:txBody>
+      </p:sp>
+      <p:cxnSp>
+        <p:nvCxnSpPr>
+          <p:cNvPr id="25" name="Connector 24"/>
+          <p:cNvCxnSpPr/>
+          <p:nvPr/>
+        </p:nvCxnSpPr>
+        <p:spPr>
+          <a:xfrm>
+            <a:off x="4464000" y="5094000"/>
+            <a:ext cx="180000" cy="0"/>
+          </a:xfrm>
+          <a:prstGeom prst="line">
+            <a:avLst/>
+          </a:prstGeom>
+          <a:ln w="12700">
+            <a:solidFill>
+              <a:srgbClr val="8A939E"/>
+            </a:solidFill>
+            <a:prstDash val="dash"/>
+          </a:ln>
+          <a:effectLst/>
+        </p:spPr>
+        <p:style>
+          <a:lnRef idx="2">
+            <a:schemeClr val="accent1"/>
+          </a:lnRef>
+          <a:fillRef idx="0">
+            <a:schemeClr val="accent1"/>
+          </a:fillRef>
+          <a:effectRef idx="1">
+            <a:schemeClr val="accent1"/>
+          </a:effectRef>
+          <a:fontRef idx="minor">
+            <a:schemeClr val="tx1"/>
+          </a:fontRef>
+        </p:style>
+      </p:cxnSp>
+      <p:cxnSp>
+        <p:nvCxnSpPr>
+          <p:cNvPr id="26" name="Connector 25"/>
+          <p:cNvCxnSpPr/>
+          <p:nvPr/>
+        </p:nvCxnSpPr>
+        <p:spPr>
+          <a:xfrm>
+            <a:off x="2412000" y="5634000"/>
+            <a:ext cx="0" cy="162000"/>
+          </a:xfrm>
+          <a:prstGeom prst="line">
+            <a:avLst/>
+          </a:prstGeom>
+          <a:ln w="25400">
+            <a:solidFill>
+              <a:srgbClr val="37475A"/>
+            </a:solidFill>
+            <a:tailEnd type="triangle" w="med" len="med"/>
+          </a:ln>
+          <a:effectLst/>
+        </p:spPr>
+        <p:style>
+          <a:lnRef idx="2">
+            <a:schemeClr val="accent1"/>
+          </a:lnRef>
+          <a:fillRef idx="0">
+            <a:schemeClr val="accent1"/>
+          </a:fillRef>
+          <a:effectRef idx="1">
+            <a:schemeClr val="accent1"/>
+          </a:effectRef>
+          <a:fontRef idx="minor">
+            <a:schemeClr val="tx1"/>
+          </a:fontRef>
+        </p:style>
+      </p:cxnSp>
+      <p:sp>
+        <p:nvSpPr>
+          <p:cNvPr id="27" name="Rounded Rectangle 26"/>
+          <p:cNvSpPr/>
+          <p:nvPr/>
+        </p:nvSpPr>
+        <p:spPr>
+          <a:xfrm>
+            <a:off x="360000" y="5796000"/>
+            <a:ext cx="4104000" cy="684000"/>
+          </a:xfrm>
+          <a:prstGeom prst="roundRect">
+            <a:avLst>
+              <a:gd name="adj" fmla="val 8000"/>
+            </a:avLst>
+          </a:prstGeom>
+          <a:solidFill>
+            <a:srgbClr val="D1E7DD"/>
+          </a:solidFill>
+          <a:ln w="19050">
+            <a:solidFill>
+              <a:srgbClr val="1E6641"/>
+            </a:solidFill>
+          </a:ln>
+          <a:effectLst/>
+        </p:spPr>
+        <p:style>
+          <a:lnRef idx="1">
+            <a:schemeClr val="accent1"/>
+          </a:lnRef>
+          <a:fillRef idx="3">
+            <a:schemeClr val="accent1"/>
+          </a:fillRef>
+          <a:effectRef idx="2">
+            <a:schemeClr val="accent1"/>
+          </a:effectRef>
+          <a:fontRef idx="minor">
+            <a:schemeClr val="lt1"/>
+          </a:fontRef>
+        </p:style>
+        <p:txBody>
+          <a:bodyPr rtlCol="0" anchor="ctr" wrap="square" lIns="54000" rIns="54000" tIns="28800" bIns="28800"/>
+          <a:lstStyle/>
+          <a:p>
+            <a:pPr algn="l">
+              <a:lnSpc>
+                <a:spcPct val="105000"/>
+              </a:lnSpc>
+              <a:spcAft>
+                <a:spcPts val="200"/>
+              </a:spcAft>
+            </a:pPr>
+            <a:r>
+              <a:rPr sz="950" b="1">
+                <a:solidFill>
+                  <a:srgbClr val="1E6641"/>
+                </a:solidFill>
+                <a:latin typeface="Meiryo UI"/>
+                <a:ea typeface="Meiryo UI"/>
+              </a:rPr>
+              <a:t>【警察署（練馬区内管轄）】</a:t>
+            </a:r>
+          </a:p>
+          <a:p>
+            <a:pPr algn="l">
+              <a:lnSpc>
+                <a:spcPct val="105000"/>
+              </a:lnSpc>
+              <a:spcAft>
+                <a:spcPts val="200"/>
+              </a:spcAft>
+            </a:pPr>
+            <a:r>
+              <a:rPr sz="1100" b="1">
+                <a:solidFill>
+                  <a:srgbClr val="1F2937"/>
+                </a:solidFill>
+                <a:latin typeface="Meiryo UI"/>
+                <a:ea typeface="Meiryo UI"/>
+              </a:rPr>
+              <a:t>安否確認の結果を当該校へ連絡</a:t>
+            </a:r>
+          </a:p>
+        </p:txBody>
+      </p:sp>
+      <p:sp>
+        <p:nvSpPr>
+          <p:cNvPr id="28" name="Oval 27"/>
+          <p:cNvSpPr/>
+          <p:nvPr/>
+        </p:nvSpPr>
+        <p:spPr>
+          <a:xfrm>
+            <a:off x="32399" y="5997600"/>
+            <a:ext cx="280800" cy="280800"/>
+          </a:xfrm>
+          <a:prstGeom prst="ellipse">
+            <a:avLst/>
+          </a:prstGeom>
+          <a:solidFill>
+            <a:srgbClr val="2F5496"/>
+          </a:solidFill>
+          <a:ln w="19050">
+            <a:solidFill>
+              <a:srgbClr val="FFFFFF"/>
+            </a:solidFill>
+          </a:ln>
+          <a:effectLst/>
+        </p:spPr>
+        <p:style>
+          <a:lnRef idx="1">
+            <a:schemeClr val="accent1"/>
+          </a:lnRef>
+          <a:fillRef idx="3">
+            <a:schemeClr val="accent1"/>
+          </a:fillRef>
+          <a:effectRef idx="2">
+            <a:schemeClr val="accent1"/>
+          </a:effectRef>
+          <a:fontRef idx="minor">
+            <a:schemeClr val="lt1"/>
+          </a:fontRef>
+        </p:style>
+        <p:txBody>
+          <a:bodyPr rtlCol="0" anchor="ctr" wrap="none" lIns="54000" rIns="54000" tIns="28800" bIns="28800"/>
+          <a:lstStyle/>
+          <a:p>
+            <a:pPr algn="ctr">
+              <a:lnSpc>
+                <a:spcPct val="105000"/>
+              </a:lnSpc>
+              <a:spcAft>
+                <a:spcPts val="200"/>
+              </a:spcAft>
+            </a:pPr>
+            <a:r>
+              <a:rPr sz="1200" b="1">
+                <a:solidFill>
+                  <a:srgbClr val="FFFFFF"/>
+                </a:solidFill>
+                <a:latin typeface="Meiryo UI"/>
+                <a:ea typeface="Meiryo UI"/>
+              </a:rPr>
+              <a:t>10</a:t>
+            </a:r>
+          </a:p>
+        </p:txBody>
+      </p:sp>
+      <p:cxnSp>
+        <p:nvCxnSpPr>
+          <p:cNvPr id="29" name="Connector 28"/>
+          <p:cNvCxnSpPr/>
+          <p:nvPr/>
+        </p:nvCxnSpPr>
+        <p:spPr>
+          <a:xfrm>
+            <a:off x="2412000" y="6480000"/>
+            <a:ext cx="0" cy="162000"/>
+          </a:xfrm>
+          <a:prstGeom prst="line">
+            <a:avLst/>
+          </a:prstGeom>
+          <a:ln w="25400">
+            <a:solidFill>
+              <a:srgbClr val="37475A"/>
+            </a:solidFill>
+            <a:tailEnd type="triangle" w="med" len="med"/>
+          </a:ln>
+          <a:effectLst/>
+        </p:spPr>
+        <p:style>
+          <a:lnRef idx="2">
+            <a:schemeClr val="accent1"/>
+          </a:lnRef>
+          <a:fillRef idx="0">
+            <a:schemeClr val="accent1"/>
+          </a:fillRef>
+          <a:effectRef idx="1">
+            <a:schemeClr val="accent1"/>
+          </a:effectRef>
+          <a:fontRef idx="minor">
+            <a:schemeClr val="tx1"/>
+          </a:fontRef>
+        </p:style>
+      </p:cxnSp>
+      <p:sp>
+        <p:nvSpPr>
+          <p:cNvPr id="30" name="Rounded Rectangle 29"/>
+          <p:cNvSpPr/>
+          <p:nvPr/>
+        </p:nvSpPr>
+        <p:spPr>
+          <a:xfrm>
+            <a:off x="360000" y="6642000"/>
+            <a:ext cx="4104000" cy="1116000"/>
+          </a:xfrm>
+          <a:prstGeom prst="roundRect">
+            <a:avLst>
+              <a:gd name="adj" fmla="val 8000"/>
+            </a:avLst>
+          </a:prstGeom>
+          <a:solidFill>
+            <a:srgbClr val="FCF3CF"/>
+          </a:solidFill>
+          <a:ln w="19050">
+            <a:solidFill>
+              <a:srgbClr val="9A760A"/>
+            </a:solidFill>
+          </a:ln>
+          <a:effectLst/>
+        </p:spPr>
+        <p:style>
+          <a:lnRef idx="1">
+            <a:schemeClr val="accent1"/>
+          </a:lnRef>
+          <a:fillRef idx="3">
+            <a:schemeClr val="accent1"/>
+          </a:fillRef>
+          <a:effectRef idx="2">
+            <a:schemeClr val="accent1"/>
+          </a:effectRef>
+          <a:fontRef idx="minor">
+            <a:schemeClr val="lt1"/>
+          </a:fontRef>
+        </p:style>
+        <p:txBody>
+          <a:bodyPr rtlCol="0" anchor="ctr" wrap="square" lIns="54000" rIns="54000" tIns="28800" bIns="28800"/>
+          <a:lstStyle/>
+          <a:p>
+            <a:pPr algn="l">
+              <a:lnSpc>
+                <a:spcPct val="105000"/>
+              </a:lnSpc>
+              <a:spcAft>
+                <a:spcPts val="200"/>
+              </a:spcAft>
+            </a:pPr>
+            <a:r>
+              <a:rPr sz="950" b="1">
+                <a:solidFill>
+                  <a:srgbClr val="9A760A"/>
+                </a:solidFill>
+                <a:latin typeface="Meiryo UI"/>
+                <a:ea typeface="Meiryo UI"/>
+              </a:rPr>
+              <a:t>【当該校（校長・副校長）】</a:t>
+            </a:r>
+          </a:p>
+          <a:p>
+            <a:pPr algn="l">
+              <a:lnSpc>
+                <a:spcPct val="105000"/>
+              </a:lnSpc>
+              <a:spcAft>
+                <a:spcPts val="200"/>
+              </a:spcAft>
+            </a:pPr>
+            <a:r>
+              <a:rPr sz="1100" b="1">
+                <a:solidFill>
+                  <a:srgbClr val="1F2937"/>
+                </a:solidFill>
+                <a:latin typeface="Meiryo UI"/>
+                <a:ea typeface="Meiryo UI"/>
+              </a:rPr>
+              <a:t>警察からの情報を教育指導課へ報告</a:t>
+            </a:r>
+          </a:p>
+          <a:p>
+            <a:pPr algn="l">
+              <a:lnSpc>
+                <a:spcPct val="105000"/>
+              </a:lnSpc>
+              <a:spcAft>
+                <a:spcPts val="200"/>
+              </a:spcAft>
+            </a:pPr>
+            <a:r>
+              <a:rPr sz="1000" b="0">
+                <a:solidFill>
+                  <a:srgbClr val="1F2937"/>
+                </a:solidFill>
+                <a:latin typeface="Meiryo UI"/>
+                <a:ea typeface="Meiryo UI"/>
+              </a:rPr>
+              <a:t>①安否・現在の状況　②警察がとった措置　③保護者の状況・受け止め</a:t>
+            </a:r>
+            <a:br/>
+            <a:r>
+              <a:rPr sz="1000" b="0">
+                <a:solidFill>
+                  <a:srgbClr val="1F2937"/>
+                </a:solidFill>
+                <a:latin typeface="Meiryo UI"/>
+                <a:ea typeface="Meiryo UI"/>
+              </a:rPr>
+              <a:t>④学校が把握している本人の様子（欠席・友人関係・いじめの有無 等）</a:t>
+            </a:r>
+          </a:p>
+        </p:txBody>
+      </p:sp>
+      <p:sp>
+        <p:nvSpPr>
+          <p:cNvPr id="31" name="Oval 30"/>
+          <p:cNvSpPr/>
+          <p:nvPr/>
+        </p:nvSpPr>
+        <p:spPr>
+          <a:xfrm>
+            <a:off x="32399" y="7059600"/>
+            <a:ext cx="280800" cy="280800"/>
+          </a:xfrm>
+          <a:prstGeom prst="ellipse">
+            <a:avLst/>
+          </a:prstGeom>
+          <a:solidFill>
+            <a:srgbClr val="2F5496"/>
+          </a:solidFill>
+          <a:ln w="19050">
+            <a:solidFill>
+              <a:srgbClr val="FFFFFF"/>
+            </a:solidFill>
+          </a:ln>
+          <a:effectLst/>
+        </p:spPr>
+        <p:style>
+          <a:lnRef idx="1">
+            <a:schemeClr val="accent1"/>
+          </a:lnRef>
+          <a:fillRef idx="3">
+            <a:schemeClr val="accent1"/>
+          </a:fillRef>
+          <a:effectRef idx="2">
+            <a:schemeClr val="accent1"/>
+          </a:effectRef>
+          <a:fontRef idx="minor">
+            <a:schemeClr val="lt1"/>
+          </a:fontRef>
+        </p:style>
+        <p:txBody>
+          <a:bodyPr rtlCol="0" anchor="ctr" wrap="none" lIns="54000" rIns="54000" tIns="28800" bIns="28800"/>
+          <a:lstStyle/>
+          <a:p>
+            <a:pPr algn="ctr">
+              <a:lnSpc>
+                <a:spcPct val="105000"/>
+              </a:lnSpc>
+              <a:spcAft>
+                <a:spcPts val="200"/>
+              </a:spcAft>
+            </a:pPr>
+            <a:r>
+              <a:rPr sz="1200" b="1">
+                <a:solidFill>
+                  <a:srgbClr val="FFFFFF"/>
+                </a:solidFill>
+                <a:latin typeface="Meiryo UI"/>
+                <a:ea typeface="Meiryo UI"/>
+              </a:rPr>
+              <a:t>11</a:t>
+            </a:r>
+          </a:p>
+        </p:txBody>
+      </p:sp>
+      <p:sp>
+        <p:nvSpPr>
+          <p:cNvPr id="32" name="Rounded Rectangle 31"/>
+          <p:cNvSpPr/>
+          <p:nvPr/>
+        </p:nvSpPr>
+        <p:spPr>
+          <a:xfrm>
+            <a:off x="4644000" y="6642000"/>
+            <a:ext cx="2556000" cy="936000"/>
+          </a:xfrm>
+          <a:prstGeom prst="roundRect">
+            <a:avLst>
+              <a:gd name="adj" fmla="val 6000"/>
+            </a:avLst>
+          </a:prstGeom>
+          <a:solidFill>
+            <a:srgbClr val="F4F6F8"/>
+          </a:solidFill>
+          <a:ln w="12700">
+            <a:solidFill>
+              <a:srgbClr val="8A939E"/>
+            </a:solidFill>
+          </a:ln>
+          <a:effectLst/>
+        </p:spPr>
+        <p:style>
+          <a:lnRef idx="1">
+            <a:schemeClr val="accent1"/>
+          </a:lnRef>
+          <a:fillRef idx="3">
+            <a:schemeClr val="accent1"/>
+          </a:fillRef>
+          <a:effectRef idx="2">
+            <a:schemeClr val="accent1"/>
+          </a:effectRef>
+          <a:fontRef idx="minor">
+            <a:schemeClr val="lt1"/>
+          </a:fontRef>
+        </p:style>
+        <p:txBody>
+          <a:bodyPr rtlCol="0" anchor="ctr" wrap="square" lIns="54000" rIns="54000" tIns="28800" bIns="28800"/>
+          <a:lstStyle/>
+          <a:p>
+            <a:pPr algn="l">
+              <a:lnSpc>
+                <a:spcPct val="105000"/>
+              </a:lnSpc>
+              <a:spcAft>
+                <a:spcPts val="200"/>
+              </a:spcAft>
+            </a:pPr>
+            <a:r>
+              <a:rPr sz="950" b="1">
+                <a:solidFill>
+                  <a:srgbClr val="2F5496"/>
+                </a:solidFill>
+                <a:latin typeface="Meiryo UI"/>
+                <a:ea typeface="Meiryo UI"/>
+              </a:rPr>
+              <a:t>報告を受けた指導主事は</a:t>
+            </a:r>
+          </a:p>
+          <a:p>
+            <a:pPr algn="l">
+              <a:lnSpc>
+                <a:spcPct val="105000"/>
+              </a:lnSpc>
+              <a:spcAft>
+                <a:spcPts val="200"/>
+              </a:spcAft>
+            </a:pPr>
+            <a:r>
+              <a:rPr sz="900" b="0">
+                <a:solidFill>
+                  <a:srgbClr val="1F2937"/>
+                </a:solidFill>
+                <a:latin typeface="Meiryo UI"/>
+                <a:ea typeface="Meiryo UI"/>
+              </a:rPr>
+              <a:t>課長へ報告し、記録を整理。学校の翌日以降の対応（フェーズ3）を校長と確認する。</a:t>
+            </a:r>
+          </a:p>
+        </p:txBody>
+      </p:sp>
+      <p:cxnSp>
+        <p:nvCxnSpPr>
+          <p:cNvPr id="33" name="Connector 32"/>
+          <p:cNvCxnSpPr/>
+          <p:nvPr/>
+        </p:nvCxnSpPr>
+        <p:spPr>
+          <a:xfrm>
+            <a:off x="4464000" y="7110000"/>
+            <a:ext cx="180000" cy="0"/>
+          </a:xfrm>
+          <a:prstGeom prst="line">
+            <a:avLst/>
+          </a:prstGeom>
+          <a:ln w="12700">
+            <a:solidFill>
+              <a:srgbClr val="8A939E"/>
+            </a:solidFill>
+            <a:prstDash val="dash"/>
+          </a:ln>
+          <a:effectLst/>
+        </p:spPr>
+        <p:style>
+          <a:lnRef idx="2">
+            <a:schemeClr val="accent1"/>
+          </a:lnRef>
+          <a:fillRef idx="0">
+            <a:schemeClr val="accent1"/>
+          </a:fillRef>
+          <a:effectRef idx="1">
+            <a:schemeClr val="accent1"/>
+          </a:effectRef>
+          <a:fontRef idx="minor">
+            <a:schemeClr val="tx1"/>
+          </a:fontRef>
+        </p:style>
+      </p:cxnSp>
+      <p:cxnSp>
+        <p:nvCxnSpPr>
+          <p:cNvPr id="34" name="Connector 33"/>
+          <p:cNvCxnSpPr/>
+          <p:nvPr/>
+        </p:nvCxnSpPr>
+        <p:spPr>
+          <a:xfrm>
+            <a:off x="2412000" y="7758000"/>
+            <a:ext cx="0" cy="180000"/>
+          </a:xfrm>
+          <a:prstGeom prst="line">
+            <a:avLst/>
+          </a:prstGeom>
+          <a:ln w="25400">
+            <a:solidFill>
+              <a:srgbClr val="37475A"/>
+            </a:solidFill>
+            <a:tailEnd type="triangle" w="med" len="med"/>
+          </a:ln>
+          <a:effectLst/>
+        </p:spPr>
+        <p:style>
+          <a:lnRef idx="2">
+            <a:schemeClr val="accent1"/>
+          </a:lnRef>
+          <a:fillRef idx="0">
+            <a:schemeClr val="accent1"/>
+          </a:fillRef>
+          <a:effectRef idx="1">
+            <a:schemeClr val="accent1"/>
+          </a:effectRef>
+          <a:fontRef idx="minor">
+            <a:schemeClr val="tx1"/>
+          </a:fontRef>
+        </p:style>
+      </p:cxnSp>
+      <p:sp>
+        <p:nvSpPr>
+          <p:cNvPr id="35" name="Pentagon 34"/>
+          <p:cNvSpPr/>
+          <p:nvPr/>
+        </p:nvSpPr>
+        <p:spPr>
+          <a:xfrm>
+            <a:off x="432000" y="7938000"/>
+            <a:ext cx="3960000" cy="413999"/>
+          </a:xfrm>
+          <a:prstGeom prst="homePlate">
+            <a:avLst/>
+          </a:prstGeom>
+          <a:solidFill>
+            <a:srgbClr val="37475A"/>
+          </a:solidFill>
+          <a:ln>
+            <a:noFill/>
+          </a:ln>
+          <a:effectLst/>
+        </p:spPr>
+        <p:style>
+          <a:lnRef idx="1">
+            <a:schemeClr val="accent1"/>
+          </a:lnRef>
+          <a:fillRef idx="3">
+            <a:schemeClr val="accent1"/>
+          </a:fillRef>
+          <a:effectRef idx="2">
+            <a:schemeClr val="accent1"/>
+          </a:effectRef>
+          <a:fontRef idx="minor">
+            <a:schemeClr val="lt1"/>
+          </a:fontRef>
+        </p:style>
+        <p:txBody>
+          <a:bodyPr rtlCol="0" anchor="ctr" wrap="square" lIns="54000" rIns="54000" tIns="28800" bIns="28800"/>
+          <a:lstStyle/>
+          <a:p>
+            <a:pPr algn="ctr">
+              <a:lnSpc>
+                <a:spcPct val="105000"/>
+              </a:lnSpc>
+              <a:spcAft>
+                <a:spcPts val="200"/>
+              </a:spcAft>
+            </a:pPr>
+            <a:r>
+              <a:rPr sz="1150" b="1">
+                <a:solidFill>
+                  <a:srgbClr val="FFFFFF"/>
+                </a:solidFill>
+                <a:latin typeface="Meiryo UI"/>
+                <a:ea typeface="Meiryo UI"/>
+              </a:rPr>
+              <a:t>フェーズ3（次ページ：事後の支援）へ</a:t>
+            </a:r>
+          </a:p>
+        </p:txBody>
+      </p:sp>
+      <p:sp>
+        <p:nvSpPr>
+          <p:cNvPr id="36" name="TextBox 35"/>
           <p:cNvSpPr txBox="1"/>
           <p:nvPr/>
         </p:nvSpPr>
         <p:spPr>
           <a:xfrm>
-            <a:off x="5196000" y="2586109"/>
-            <a:ext cx="1872000" cy="413999"/>
+            <a:off x="360000" y="8568000"/>
+            <a:ext cx="6840000" cy="1260000"/>
           </a:xfrm>
           <a:prstGeom prst="rect">
             <a:avLst/>
@@ -4273,52 +7733,188 @@
           <a:noFill/>
         </p:spPr>
         <p:txBody>
-          <a:bodyPr wrap="square" anchor="b" lIns="18000" rIns="18000" tIns="10800" bIns="10800">
+          <a:bodyPr wrap="square" anchor="t" lIns="54000" rIns="54000" tIns="28800" bIns="28800">
             <a:spAutoFit/>
           </a:bodyPr>
           <a:lstStyle/>
           <a:p>
+            <a:pPr algn="l">
+              <a:lnSpc>
+                <a:spcPct val="105000"/>
+              </a:lnSpc>
+              <a:spcAft>
+                <a:spcPts val="200"/>
+              </a:spcAft>
+            </a:pPr>
+            <a:r>
+              <a:rPr sz="950" b="0">
+                <a:solidFill>
+                  <a:srgbClr val="1F2937"/>
+                </a:solidFill>
+                <a:latin typeface="Meiryo UI"/>
+                <a:ea typeface="Meiryo UI"/>
+              </a:rPr>
+              <a:t>※ 安否確認が完了するまでは、指導主事・当該校とも電話が受けられる体制を維持する（勤務時間外に及ぶ場合は連絡先を警察・相互に共有）。</a:t>
+            </a:r>
+          </a:p>
+          <a:p>
+            <a:pPr algn="l">
+              <a:lnSpc>
+                <a:spcPct val="105000"/>
+              </a:lnSpc>
+              <a:spcAft>
+                <a:spcPts val="200"/>
+              </a:spcAft>
+            </a:pPr>
+            <a:r>
+              <a:rPr sz="950" b="0">
+                <a:solidFill>
+                  <a:srgbClr val="1F2937"/>
+                </a:solidFill>
+                <a:latin typeface="Meiryo UI"/>
+                <a:ea typeface="Meiryo UI"/>
+              </a:rPr>
+              <a:t>※ 本人・保護者への学校からの接触は、必ず警察の助言（手順6）に従う。独自の判断で先に連絡しない。</a:t>
+            </a:r>
+          </a:p>
+          <a:p>
+            <a:pPr algn="l">
+              <a:lnSpc>
+                <a:spcPct val="105000"/>
+              </a:lnSpc>
+              <a:spcAft>
+                <a:spcPts val="200"/>
+              </a:spcAft>
+            </a:pPr>
+            <a:r>
+              <a:rPr sz="950" b="0">
+                <a:solidFill>
+                  <a:srgbClr val="1F2937"/>
+                </a:solidFill>
+                <a:latin typeface="Meiryo UI"/>
+                <a:ea typeface="Meiryo UI"/>
+              </a:rPr>
+              <a:t>※ 校内・課内とも、情報は「知る必要のある者」に限定して共有し、憶測が広がらないよう管理する。</a:t>
+            </a:r>
+          </a:p>
+        </p:txBody>
+      </p:sp>
+    </p:spTree>
+  </p:cSld>
+  <p:clrMapOvr>
+    <a:masterClrMapping/>
+  </p:clrMapOvr>
+</p:sld>
+</file>
+
+<file path=ppt/slides/slide3.xml><?xml version="1.0" encoding="utf-8"?>
+<p:sld xmlns:a="http://schemas.openxmlformats.org/drawingml/2006/main" xmlns:p="http://schemas.openxmlformats.org/presentationml/2006/main" xmlns:r="http://schemas.openxmlformats.org/officeDocument/2006/relationships">
+  <p:cSld>
+    <p:spTree>
+      <p:nvGrpSpPr>
+        <p:cNvPr id="1" name=""/>
+        <p:cNvGrpSpPr/>
+        <p:nvPr/>
+      </p:nvGrpSpPr>
+      <p:grpSpPr/>
+      <p:sp>
+        <p:nvSpPr>
+          <p:cNvPr id="2" name="TextBox 1"/>
+          <p:cNvSpPr txBox="1"/>
+          <p:nvPr/>
+        </p:nvSpPr>
+        <p:spPr>
+          <a:xfrm>
+            <a:off x="360000" y="144000"/>
+            <a:ext cx="6840000" cy="360000"/>
+          </a:xfrm>
+          <a:prstGeom prst="rect">
+            <a:avLst/>
+          </a:prstGeom>
+          <a:noFill/>
+        </p:spPr>
+        <p:txBody>
+          <a:bodyPr wrap="square" anchor="t" lIns="54000" rIns="54000" tIns="28800" bIns="28800">
+            <a:spAutoFit/>
+          </a:bodyPr>
+          <a:lstStyle/>
+          <a:p>
             <a:pPr algn="ctr">
               <a:lnSpc>
-                <a:spcPct val="100000"/>
-              </a:lnSpc>
-            </a:pPr>
-            <a:r>
-              <a:rPr sz="800" b="0">
+                <a:spcPct val="105000"/>
+              </a:lnSpc>
+              <a:spcAft>
+                <a:spcPts val="200"/>
+              </a:spcAft>
+            </a:pPr>
+            <a:r>
+              <a:rPr sz="1600" b="1">
                 <a:solidFill>
                   <a:srgbClr val="1F2937"/>
                 </a:solidFill>
                 <a:latin typeface="Meiryo UI"/>
                 <a:ea typeface="Meiryo UI"/>
               </a:rPr>
-              <a:t>メールアドレスによる</a:t>
-            </a:r>
-            <a:br/>
-            <a:r>
-              <a:rPr sz="800" b="0">
+              <a:t>児童生徒の自殺企図に関する相談対応フロー</a:t>
+            </a:r>
+          </a:p>
+        </p:txBody>
+      </p:sp>
+      <p:sp>
+        <p:nvSpPr>
+          <p:cNvPr id="3" name="TextBox 2"/>
+          <p:cNvSpPr txBox="1"/>
+          <p:nvPr/>
+        </p:nvSpPr>
+        <p:spPr>
+          <a:xfrm>
+            <a:off x="360000" y="486000"/>
+            <a:ext cx="6840000" cy="216000"/>
+          </a:xfrm>
+          <a:prstGeom prst="rect">
+            <a:avLst/>
+          </a:prstGeom>
+          <a:noFill/>
+        </p:spPr>
+        <p:txBody>
+          <a:bodyPr wrap="square" anchor="t" lIns="54000" rIns="54000" tIns="28800" bIns="28800">
+            <a:spAutoFit/>
+          </a:bodyPr>
+          <a:lstStyle/>
+          <a:p>
+            <a:pPr algn="ctr">
+              <a:lnSpc>
+                <a:spcPct val="105000"/>
+              </a:lnSpc>
+              <a:spcAft>
+                <a:spcPts val="200"/>
+              </a:spcAft>
+            </a:pPr>
+            <a:r>
+              <a:rPr sz="1000" b="0">
                 <a:solidFill>
                   <a:srgbClr val="1F2937"/>
                 </a:solidFill>
                 <a:latin typeface="Meiryo UI"/>
                 <a:ea typeface="Meiryo UI"/>
               </a:rPr>
-              <a:t>児童生徒の照会依頼</a:t>
-            </a:r>
-          </a:p>
-        </p:txBody>
-      </p:sp>
-      <p:sp>
-        <p:nvSpPr>
-          <p:cNvPr id="25" name="Oval 24"/>
+              <a:t>〜こたエール（東京都）にメールで相談が入った場合〜</a:t>
+            </a:r>
+          </a:p>
+        </p:txBody>
+      </p:sp>
+      <p:sp>
+        <p:nvSpPr>
+          <p:cNvPr id="4" name="Rectangle 3"/>
           <p:cNvSpPr/>
           <p:nvPr/>
         </p:nvSpPr>
         <p:spPr>
           <a:xfrm>
-            <a:off x="5436000" y="3010909"/>
-            <a:ext cx="216000" cy="216000"/>
-          </a:xfrm>
-          <a:prstGeom prst="ellipse">
+            <a:off x="360000" y="737999"/>
+            <a:ext cx="6840000" cy="342000"/>
+          </a:xfrm>
+          <a:prstGeom prst="rect">
             <a:avLst/>
           </a:prstGeom>
           <a:solidFill>
@@ -4344,46 +7940,474 @@
           </a:fontRef>
         </p:style>
         <p:txBody>
-          <a:bodyPr rtlCol="0" anchor="ctr" wrap="none" lIns="18000" rIns="18000" tIns="10800" bIns="10800"/>
+          <a:bodyPr rtlCol="0" anchor="ctr" wrap="square" lIns="54000" rIns="54000" tIns="28800" bIns="28800"/>
           <a:lstStyle/>
           <a:p>
             <a:pPr algn="ctr">
               <a:lnSpc>
-                <a:spcPct val="100000"/>
-              </a:lnSpc>
+                <a:spcPct val="105000"/>
+              </a:lnSpc>
+              <a:spcAft>
+                <a:spcPts val="200"/>
+              </a:spcAft>
+            </a:pPr>
+            <a:r>
+              <a:rPr sz="1250" b="1">
+                <a:solidFill>
+                  <a:srgbClr val="FFFFFF"/>
+                </a:solidFill>
+                <a:latin typeface="Meiryo UI"/>
+                <a:ea typeface="Meiryo UI"/>
+              </a:rPr>
+              <a:t>フェーズ3　事後の支援・継続的な見守り</a:t>
+            </a:r>
+          </a:p>
+        </p:txBody>
+      </p:sp>
+      <p:sp>
+        <p:nvSpPr>
+          <p:cNvPr id="5" name="Rounded Rectangle 4"/>
+          <p:cNvSpPr/>
+          <p:nvPr/>
+        </p:nvSpPr>
+        <p:spPr>
+          <a:xfrm>
+            <a:off x="5903999" y="792000"/>
+            <a:ext cx="1224000" cy="234000"/>
+          </a:xfrm>
+          <a:prstGeom prst="roundRect">
+            <a:avLst/>
+          </a:prstGeom>
+          <a:solidFill>
+            <a:srgbClr val="FFFFFF"/>
+          </a:solidFill>
+          <a:ln w="12700">
+            <a:solidFill>
+              <a:srgbClr val="2F5496"/>
+            </a:solidFill>
+          </a:ln>
+          <a:effectLst/>
+        </p:spPr>
+        <p:style>
+          <a:lnRef idx="1">
+            <a:schemeClr val="accent1"/>
+          </a:lnRef>
+          <a:fillRef idx="3">
+            <a:schemeClr val="accent1"/>
+          </a:fillRef>
+          <a:effectRef idx="2">
+            <a:schemeClr val="accent1"/>
+          </a:effectRef>
+          <a:fontRef idx="minor">
+            <a:schemeClr val="lt1"/>
+          </a:fontRef>
+        </p:style>
+        <p:txBody>
+          <a:bodyPr rtlCol="0" anchor="ctr" wrap="none" lIns="54000" rIns="54000" tIns="28800" bIns="28800"/>
+          <a:lstStyle/>
+          <a:p>
+            <a:pPr algn="ctr">
+              <a:lnSpc>
+                <a:spcPct val="105000"/>
+              </a:lnSpc>
+              <a:spcAft>
+                <a:spcPts val="200"/>
+              </a:spcAft>
             </a:pPr>
             <a:r>
               <a:rPr sz="850" b="1">
                 <a:solidFill>
+                  <a:srgbClr val="2F5496"/>
+                </a:solidFill>
+                <a:latin typeface="Meiryo UI"/>
+                <a:ea typeface="Meiryo UI"/>
+              </a:rPr>
+              <a:t>翌日以降 継続</a:t>
+            </a:r>
+          </a:p>
+        </p:txBody>
+      </p:sp>
+      <p:sp>
+        <p:nvSpPr>
+          <p:cNvPr id="6" name="TextBox 5"/>
+          <p:cNvSpPr txBox="1"/>
+          <p:nvPr/>
+        </p:nvSpPr>
+        <p:spPr>
+          <a:xfrm>
+            <a:off x="360000" y="10404000"/>
+            <a:ext cx="6840000" cy="216000"/>
+          </a:xfrm>
+          <a:prstGeom prst="rect">
+            <a:avLst/>
+          </a:prstGeom>
+          <a:noFill/>
+        </p:spPr>
+        <p:txBody>
+          <a:bodyPr wrap="square" anchor="t" lIns="54000" rIns="54000" tIns="28800" bIns="28800">
+            <a:spAutoFit/>
+          </a:bodyPr>
+          <a:lstStyle/>
+          <a:p>
+            <a:pPr algn="r">
+              <a:lnSpc>
+                <a:spcPct val="105000"/>
+              </a:lnSpc>
+              <a:spcAft>
+                <a:spcPts val="200"/>
+              </a:spcAft>
+            </a:pPr>
+            <a:r>
+              <a:rPr sz="850" b="0">
+                <a:solidFill>
+                  <a:srgbClr val="8A939E"/>
+                </a:solidFill>
+                <a:latin typeface="Meiryo UI"/>
+                <a:ea typeface="Meiryo UI"/>
+              </a:rPr>
+              <a:t>練馬区教育委員会 教育指導課　　3 / 3</a:t>
+            </a:r>
+          </a:p>
+        </p:txBody>
+      </p:sp>
+      <p:sp>
+        <p:nvSpPr>
+          <p:cNvPr id="7" name="Rounded Rectangle 6"/>
+          <p:cNvSpPr/>
+          <p:nvPr/>
+        </p:nvSpPr>
+        <p:spPr>
+          <a:xfrm>
+            <a:off x="360000" y="1224000"/>
+            <a:ext cx="4104000" cy="1908000"/>
+          </a:xfrm>
+          <a:prstGeom prst="roundRect">
+            <a:avLst>
+              <a:gd name="adj" fmla="val 8000"/>
+            </a:avLst>
+          </a:prstGeom>
+          <a:solidFill>
+            <a:srgbClr val="E8DAEF"/>
+          </a:solidFill>
+          <a:ln w="19050">
+            <a:solidFill>
+              <a:srgbClr val="6C3483"/>
+            </a:solidFill>
+          </a:ln>
+          <a:effectLst/>
+        </p:spPr>
+        <p:style>
+          <a:lnRef idx="1">
+            <a:schemeClr val="accent1"/>
+          </a:lnRef>
+          <a:fillRef idx="3">
+            <a:schemeClr val="accent1"/>
+          </a:fillRef>
+          <a:effectRef idx="2">
+            <a:schemeClr val="accent1"/>
+          </a:effectRef>
+          <a:fontRef idx="minor">
+            <a:schemeClr val="lt1"/>
+          </a:fontRef>
+        </p:style>
+        <p:txBody>
+          <a:bodyPr rtlCol="0" anchor="ctr" wrap="square" lIns="54000" rIns="54000" tIns="28800" bIns="28800"/>
+          <a:lstStyle/>
+          <a:p>
+            <a:pPr algn="l">
+              <a:lnSpc>
+                <a:spcPct val="105000"/>
+              </a:lnSpc>
+              <a:spcAft>
+                <a:spcPts val="200"/>
+              </a:spcAft>
+            </a:pPr>
+            <a:r>
+              <a:rPr sz="950" b="1">
+                <a:solidFill>
+                  <a:srgbClr val="6C3483"/>
+                </a:solidFill>
+                <a:latin typeface="Meiryo UI"/>
+                <a:ea typeface="Meiryo UI"/>
+              </a:rPr>
+              <a:t>【当該校・教育指導課】</a:t>
+            </a:r>
+          </a:p>
+          <a:p>
+            <a:pPr algn="l">
+              <a:lnSpc>
+                <a:spcPct val="105000"/>
+              </a:lnSpc>
+              <a:spcAft>
+                <a:spcPts val="200"/>
+              </a:spcAft>
+            </a:pPr>
+            <a:r>
+              <a:rPr sz="1100" b="1">
+                <a:solidFill>
+                  <a:srgbClr val="1F2937"/>
+                </a:solidFill>
+                <a:latin typeface="Meiryo UI"/>
+                <a:ea typeface="Meiryo UI"/>
+              </a:rPr>
+              <a:t>校内支援体制を立ち上げ、継続的に支援する</a:t>
+            </a:r>
+          </a:p>
+          <a:p>
+            <a:pPr algn="l">
+              <a:lnSpc>
+                <a:spcPct val="105000"/>
+              </a:lnSpc>
+              <a:spcAft>
+                <a:spcPts val="200"/>
+              </a:spcAft>
+            </a:pPr>
+            <a:r>
+              <a:rPr sz="1000" b="0">
+                <a:solidFill>
+                  <a:srgbClr val="1F2937"/>
+                </a:solidFill>
+                <a:latin typeface="Meiryo UI"/>
+                <a:ea typeface="Meiryo UI"/>
+              </a:rPr>
+              <a:t>・校内委員会（管理職・担任・養護教諭・SC・SSW）で支援方針を決定</a:t>
+            </a:r>
+            <a:br/>
+            <a:r>
+              <a:rPr sz="1000" b="0">
+                <a:solidFill>
+                  <a:srgbClr val="1F2937"/>
+                </a:solidFill>
+                <a:latin typeface="Meiryo UI"/>
+                <a:ea typeface="Meiryo UI"/>
+              </a:rPr>
+              <a:t>・本人との面接（SC等）、保護者との連携、必要に応じ医療機関へ接続</a:t>
+            </a:r>
+            <a:br/>
+            <a:r>
+              <a:rPr sz="1000" b="0">
+                <a:solidFill>
+                  <a:srgbClr val="1F2937"/>
+                </a:solidFill>
+                <a:latin typeface="Meiryo UI"/>
+                <a:ea typeface="Meiryo UI"/>
+              </a:rPr>
+              <a:t>・背景にいじめ等が疑われる場合は、いじめ防止対策推進法に基づく対応を並行</a:t>
+            </a:r>
+            <a:br/>
+            <a:r>
+              <a:rPr sz="1000" b="0">
+                <a:solidFill>
+                  <a:srgbClr val="1F2937"/>
+                </a:solidFill>
+                <a:latin typeface="Meiryo UI"/>
+                <a:ea typeface="Meiryo UI"/>
+              </a:rPr>
+              <a:t>・経過を教育指導課へ定期的に報告（当面は毎日→安定後は週次など）</a:t>
+            </a:r>
+          </a:p>
+        </p:txBody>
+      </p:sp>
+      <p:sp>
+        <p:nvSpPr>
+          <p:cNvPr id="8" name="Oval 7"/>
+          <p:cNvSpPr/>
+          <p:nvPr/>
+        </p:nvSpPr>
+        <p:spPr>
+          <a:xfrm>
+            <a:off x="32399" y="2037600"/>
+            <a:ext cx="280800" cy="280800"/>
+          </a:xfrm>
+          <a:prstGeom prst="ellipse">
+            <a:avLst/>
+          </a:prstGeom>
+          <a:solidFill>
+            <a:srgbClr val="2F5496"/>
+          </a:solidFill>
+          <a:ln w="19050">
+            <a:solidFill>
+              <a:srgbClr val="FFFFFF"/>
+            </a:solidFill>
+          </a:ln>
+          <a:effectLst/>
+        </p:spPr>
+        <p:style>
+          <a:lnRef idx="1">
+            <a:schemeClr val="accent1"/>
+          </a:lnRef>
+          <a:fillRef idx="3">
+            <a:schemeClr val="accent1"/>
+          </a:fillRef>
+          <a:effectRef idx="2">
+            <a:schemeClr val="accent1"/>
+          </a:effectRef>
+          <a:fontRef idx="minor">
+            <a:schemeClr val="lt1"/>
+          </a:fontRef>
+        </p:style>
+        <p:txBody>
+          <a:bodyPr rtlCol="0" anchor="ctr" wrap="none" lIns="54000" rIns="54000" tIns="28800" bIns="28800"/>
+          <a:lstStyle/>
+          <a:p>
+            <a:pPr algn="ctr">
+              <a:lnSpc>
+                <a:spcPct val="105000"/>
+              </a:lnSpc>
+              <a:spcAft>
+                <a:spcPts val="200"/>
+              </a:spcAft>
+            </a:pPr>
+            <a:r>
+              <a:rPr sz="1200" b="1">
+                <a:solidFill>
                   <a:srgbClr val="FFFFFF"/>
                 </a:solidFill>
                 <a:latin typeface="Meiryo UI"/>
                 <a:ea typeface="Meiryo UI"/>
               </a:rPr>
-              <a:t>3</a:t>
+              <a:t>12</a:t>
+            </a:r>
+          </a:p>
+        </p:txBody>
+      </p:sp>
+      <p:sp>
+        <p:nvSpPr>
+          <p:cNvPr id="9" name="Rounded Rectangle 8"/>
+          <p:cNvSpPr/>
+          <p:nvPr/>
+        </p:nvSpPr>
+        <p:spPr>
+          <a:xfrm>
+            <a:off x="4644000" y="1224000"/>
+            <a:ext cx="2556000" cy="1224000"/>
+          </a:xfrm>
+          <a:prstGeom prst="roundRect">
+            <a:avLst>
+              <a:gd name="adj" fmla="val 6000"/>
+            </a:avLst>
+          </a:prstGeom>
+          <a:solidFill>
+            <a:srgbClr val="F4F6F8"/>
+          </a:solidFill>
+          <a:ln w="12700">
+            <a:solidFill>
+              <a:srgbClr val="8A939E"/>
+            </a:solidFill>
+          </a:ln>
+          <a:effectLst/>
+        </p:spPr>
+        <p:style>
+          <a:lnRef idx="1">
+            <a:schemeClr val="accent1"/>
+          </a:lnRef>
+          <a:fillRef idx="3">
+            <a:schemeClr val="accent1"/>
+          </a:fillRef>
+          <a:effectRef idx="2">
+            <a:schemeClr val="accent1"/>
+          </a:effectRef>
+          <a:fontRef idx="minor">
+            <a:schemeClr val="lt1"/>
+          </a:fontRef>
+        </p:style>
+        <p:txBody>
+          <a:bodyPr rtlCol="0" anchor="ctr" wrap="square" lIns="54000" rIns="54000" tIns="28800" bIns="28800"/>
+          <a:lstStyle/>
+          <a:p>
+            <a:pPr algn="l">
+              <a:lnSpc>
+                <a:spcPct val="105000"/>
+              </a:lnSpc>
+              <a:spcAft>
+                <a:spcPts val="200"/>
+              </a:spcAft>
+            </a:pPr>
+            <a:r>
+              <a:rPr sz="950" b="1">
+                <a:solidFill>
+                  <a:srgbClr val="2F5496"/>
+                </a:solidFill>
+                <a:latin typeface="Meiryo UI"/>
+                <a:ea typeface="Meiryo UI"/>
+              </a:rPr>
+              <a:t>TALKの原則（本人への関わり方）</a:t>
+            </a:r>
+          </a:p>
+          <a:p>
+            <a:pPr algn="l">
+              <a:lnSpc>
+                <a:spcPct val="105000"/>
+              </a:lnSpc>
+              <a:spcAft>
+                <a:spcPts val="200"/>
+              </a:spcAft>
+            </a:pPr>
+            <a:r>
+              <a:rPr sz="900" b="0">
+                <a:solidFill>
+                  <a:srgbClr val="1F2937"/>
+                </a:solidFill>
+                <a:latin typeface="Meiryo UI"/>
+                <a:ea typeface="Meiryo UI"/>
+              </a:rPr>
+              <a:t>Tell：心配していることを言葉で伝える</a:t>
+            </a:r>
+            <a:br/>
+            <a:r>
+              <a:rPr sz="900" b="0">
+                <a:solidFill>
+                  <a:srgbClr val="1F2937"/>
+                </a:solidFill>
+                <a:latin typeface="Meiryo UI"/>
+                <a:ea typeface="Meiryo UI"/>
+              </a:rPr>
+              <a:t>Ask：死にたい気持ちの有無を率直に尋ねる</a:t>
+            </a:r>
+            <a:br/>
+            <a:r>
+              <a:rPr sz="900" b="0">
+                <a:solidFill>
+                  <a:srgbClr val="1F2937"/>
+                </a:solidFill>
+                <a:latin typeface="Meiryo UI"/>
+                <a:ea typeface="Meiryo UI"/>
+              </a:rPr>
+              <a:t>Listen：批判せず、訴えを傾聴する</a:t>
+            </a:r>
+            <a:br/>
+            <a:r>
+              <a:rPr sz="900" b="0">
+                <a:solidFill>
+                  <a:srgbClr val="1F2937"/>
+                </a:solidFill>
+                <a:latin typeface="Meiryo UI"/>
+                <a:ea typeface="Meiryo UI"/>
+              </a:rPr>
+              <a:t>Keep safe：一人にせず、安全を確保する</a:t>
             </a:r>
           </a:p>
         </p:txBody>
       </p:sp>
       <p:cxnSp>
         <p:nvCxnSpPr>
-          <p:cNvPr id="26" name="Connector 25"/>
+          <p:cNvPr id="10" name="Connector 9"/>
           <p:cNvCxnSpPr/>
           <p:nvPr/>
         </p:nvCxnSpPr>
         <p:spPr>
           <a:xfrm>
-            <a:off x="2016000" y="3832363"/>
-            <a:ext cx="1176000" cy="0"/>
+            <a:off x="4464000" y="1835999"/>
+            <a:ext cx="180000" cy="0"/>
           </a:xfrm>
           <a:prstGeom prst="line">
             <a:avLst/>
           </a:prstGeom>
-          <a:ln w="19050">
+          <a:ln w="12700">
             <a:solidFill>
-              <a:srgbClr val="37475A"/>
+              <a:srgbClr val="8A939E"/>
             </a:solidFill>
-            <a:tailEnd type="triangle" w="med" len="med"/>
+            <a:prstDash val="dash"/>
           </a:ln>
           <a:effectLst/>
         </p:spPr>
@@ -4404,63 +8428,25 @@
       </p:cxnSp>
       <p:sp>
         <p:nvSpPr>
-          <p:cNvPr id="27" name="TextBox 26"/>
-          <p:cNvSpPr txBox="1"/>
+          <p:cNvPr id="11" name="Rectangle 10"/>
+          <p:cNvSpPr/>
           <p:nvPr/>
         </p:nvSpPr>
         <p:spPr>
           <a:xfrm>
-            <a:off x="1668000" y="3299563"/>
-            <a:ext cx="1872000" cy="413999"/>
+            <a:off x="360000" y="3276000"/>
+            <a:ext cx="6840000" cy="288000"/>
           </a:xfrm>
           <a:prstGeom prst="rect">
             <a:avLst/>
           </a:prstGeom>
-          <a:noFill/>
-        </p:spPr>
-        <p:txBody>
-          <a:bodyPr wrap="square" anchor="b" lIns="18000" rIns="18000" tIns="10800" bIns="10800">
-            <a:spAutoFit/>
-          </a:bodyPr>
-          <a:lstStyle/>
-          <a:p>
-            <a:pPr algn="ctr">
-              <a:lnSpc>
-                <a:spcPct val="100000"/>
-              </a:lnSpc>
-            </a:pPr>
-            <a:r>
-              <a:rPr sz="800" b="0">
-                <a:solidFill>
-                  <a:srgbClr val="1F2937"/>
-                </a:solidFill>
-                <a:latin typeface="Meiryo UI"/>
-                <a:ea typeface="Meiryo UI"/>
-              </a:rPr>
-              <a:t>情報提供</a:t>
-            </a:r>
-          </a:p>
-        </p:txBody>
-      </p:sp>
-      <p:sp>
-        <p:nvSpPr>
-          <p:cNvPr id="28" name="Oval 27"/>
-          <p:cNvSpPr/>
-          <p:nvPr/>
-        </p:nvSpPr>
-        <p:spPr>
-          <a:xfrm>
-            <a:off x="1908000" y="3724363"/>
-            <a:ext cx="216000" cy="216000"/>
-          </a:xfrm>
-          <a:prstGeom prst="ellipse">
-            <a:avLst/>
-          </a:prstGeom>
           <a:solidFill>
-            <a:srgbClr val="2F5496"/>
+            <a:srgbClr val="EAF0F8"/>
           </a:solidFill>
-          <a:ln>
-            <a:noFill/>
+          <a:ln w="15875">
+            <a:solidFill>
+              <a:srgbClr val="2F5496"/>
+            </a:solidFill>
           </a:ln>
           <a:effectLst/>
         </p:spPr>
@@ -4479,123 +8465,51 @@
           </a:fontRef>
         </p:style>
         <p:txBody>
-          <a:bodyPr rtlCol="0" anchor="ctr" wrap="none" lIns="18000" rIns="18000" tIns="10800" bIns="10800"/>
+          <a:bodyPr rtlCol="0" anchor="ctr" wrap="square" lIns="54000" rIns="54000" tIns="28800" bIns="28800"/>
           <a:lstStyle/>
           <a:p>
             <a:pPr algn="ctr">
               <a:lnSpc>
-                <a:spcPct val="100000"/>
-              </a:lnSpc>
-            </a:pPr>
-            <a:r>
-              <a:rPr sz="850" b="1">
-                <a:solidFill>
-                  <a:srgbClr val="FFFFFF"/>
-                </a:solidFill>
-                <a:latin typeface="Meiryo UI"/>
-                <a:ea typeface="Meiryo UI"/>
-              </a:rPr>
-              <a:t>4</a:t>
-            </a:r>
-          </a:p>
-        </p:txBody>
-      </p:sp>
-      <p:cxnSp>
-        <p:nvCxnSpPr>
-          <p:cNvPr id="29" name="Connector 28"/>
-          <p:cNvCxnSpPr/>
+                <a:spcPct val="105000"/>
+              </a:lnSpc>
+              <a:spcAft>
+                <a:spcPts val="200"/>
+              </a:spcAft>
+            </a:pPr>
+            <a:r>
+              <a:rPr sz="1200" b="1">
+                <a:solidFill>
+                  <a:srgbClr val="2F5496"/>
+                </a:solidFill>
+                <a:latin typeface="Meiryo UI"/>
+                <a:ea typeface="Meiryo UI"/>
+              </a:rPr>
+              <a:t>根拠・参考資料</a:t>
+            </a:r>
+          </a:p>
+        </p:txBody>
+      </p:sp>
+      <p:sp>
+        <p:nvSpPr>
+          <p:cNvPr id="12" name="Rectangle 11"/>
+          <p:cNvSpPr/>
           <p:nvPr/>
-        </p:nvCxnSpPr>
-        <p:spPr>
-          <a:xfrm>
-            <a:off x="3192000" y="4545818"/>
-            <a:ext cx="2352000" cy="0"/>
-          </a:xfrm>
-          <a:prstGeom prst="line">
-            <a:avLst/>
-          </a:prstGeom>
-          <a:ln w="19050">
-            <a:solidFill>
-              <a:srgbClr val="37475A"/>
-            </a:solidFill>
-            <a:tailEnd type="triangle" w="med" len="med"/>
-          </a:ln>
-          <a:effectLst/>
-        </p:spPr>
-        <p:style>
-          <a:lnRef idx="2">
-            <a:schemeClr val="accent1"/>
-          </a:lnRef>
-          <a:fillRef idx="0">
-            <a:schemeClr val="accent1"/>
-          </a:fillRef>
-          <a:effectRef idx="1">
-            <a:schemeClr val="accent1"/>
-          </a:effectRef>
-          <a:fontRef idx="minor">
-            <a:schemeClr val="tx1"/>
-          </a:fontRef>
-        </p:style>
-      </p:cxnSp>
-      <p:sp>
-        <p:nvSpPr>
-          <p:cNvPr id="30" name="TextBox 29"/>
-          <p:cNvSpPr txBox="1"/>
-          <p:nvPr/>
-        </p:nvSpPr>
-        <p:spPr>
-          <a:xfrm>
-            <a:off x="3192000" y="4013018"/>
-            <a:ext cx="2352000" cy="413999"/>
+        </p:nvSpPr>
+        <p:spPr>
+          <a:xfrm>
+            <a:off x="360000" y="3564000"/>
+            <a:ext cx="6840000" cy="2664000"/>
           </a:xfrm>
           <a:prstGeom prst="rect">
             <a:avLst/>
           </a:prstGeom>
-          <a:noFill/>
-        </p:spPr>
-        <p:txBody>
-          <a:bodyPr wrap="square" anchor="b" lIns="18000" rIns="18000" tIns="10800" bIns="10800">
-            <a:spAutoFit/>
-          </a:bodyPr>
-          <a:lstStyle/>
-          <a:p>
-            <a:pPr algn="ctr">
-              <a:lnSpc>
-                <a:spcPct val="100000"/>
-              </a:lnSpc>
-            </a:pPr>
-            <a:r>
-              <a:rPr sz="800" b="0">
-                <a:solidFill>
-                  <a:srgbClr val="1F2937"/>
-                </a:solidFill>
-                <a:latin typeface="Meiryo UI"/>
-                <a:ea typeface="Meiryo UI"/>
-              </a:rPr>
-              <a:t>当該児童生徒の照会連絡</a:t>
-            </a:r>
-          </a:p>
-        </p:txBody>
-      </p:sp>
-      <p:sp>
-        <p:nvSpPr>
-          <p:cNvPr id="31" name="Oval 30"/>
-          <p:cNvSpPr/>
-          <p:nvPr/>
-        </p:nvSpPr>
-        <p:spPr>
-          <a:xfrm>
-            <a:off x="3084000" y="4437818"/>
-            <a:ext cx="216000" cy="216000"/>
-          </a:xfrm>
-          <a:prstGeom prst="ellipse">
-            <a:avLst/>
-          </a:prstGeom>
           <a:solidFill>
-            <a:srgbClr val="2F5496"/>
+            <a:srgbClr val="FFFFFF"/>
           </a:solidFill>
-          <a:ln>
-            <a:noFill/>
+          <a:ln w="15875">
+            <a:solidFill>
+              <a:srgbClr val="2F5496"/>
+            </a:solidFill>
           </a:ln>
           <a:effectLst/>
         </p:spPr>
@@ -4614,145 +8528,271 @@
           </a:fontRef>
         </p:style>
         <p:txBody>
-          <a:bodyPr rtlCol="0" anchor="ctr" wrap="none" lIns="18000" rIns="18000" tIns="10800" bIns="10800"/>
-          <a:lstStyle/>
-          <a:p>
-            <a:pPr algn="ctr">
-              <a:lnSpc>
-                <a:spcPct val="100000"/>
-              </a:lnSpc>
-            </a:pPr>
-            <a:r>
-              <a:rPr sz="850" b="1">
-                <a:solidFill>
-                  <a:srgbClr val="FFFFFF"/>
-                </a:solidFill>
-                <a:latin typeface="Meiryo UI"/>
-                <a:ea typeface="Meiryo UI"/>
-              </a:rPr>
-              <a:t>5</a:t>
-            </a:r>
-          </a:p>
-        </p:txBody>
-      </p:sp>
-      <p:cxnSp>
-        <p:nvCxnSpPr>
-          <p:cNvPr id="32" name="Connector 31"/>
-          <p:cNvCxnSpPr/>
+          <a:bodyPr rtlCol="0" anchor="t" wrap="square" lIns="54000" rIns="54000" tIns="28800" bIns="28800"/>
+          <a:lstStyle/>
+          <a:p>
+            <a:pPr algn="l">
+              <a:lnSpc>
+                <a:spcPct val="105000"/>
+              </a:lnSpc>
+              <a:spcAft>
+                <a:spcPts val="300"/>
+              </a:spcAft>
+            </a:pPr>
+            <a:r>
+              <a:rPr sz="1000" b="1">
+                <a:solidFill>
+                  <a:srgbClr val="1F2937"/>
+                </a:solidFill>
+                <a:latin typeface="Meiryo UI"/>
+                <a:ea typeface="Meiryo UI"/>
+              </a:rPr>
+              <a:t>【国の手引き・計画】</a:t>
+            </a:r>
+          </a:p>
+          <a:p>
+            <a:pPr algn="l">
+              <a:lnSpc>
+                <a:spcPct val="105000"/>
+              </a:lnSpc>
+              <a:spcAft>
+                <a:spcPts val="300"/>
+              </a:spcAft>
+            </a:pPr>
+            <a:r>
+              <a:rPr sz="950" b="0">
+                <a:solidFill>
+                  <a:srgbClr val="1F2937"/>
+                </a:solidFill>
+                <a:latin typeface="Meiryo UI"/>
+                <a:ea typeface="Meiryo UI"/>
+              </a:rPr>
+              <a:t>・文部科学省「教師が知っておきたい子どもの自殺予防」（平成21年3月）…TALKの原則、組織的対応、記録の重要性</a:t>
+            </a:r>
+          </a:p>
+          <a:p>
+            <a:pPr algn="l">
+              <a:lnSpc>
+                <a:spcPct val="105000"/>
+              </a:lnSpc>
+              <a:spcAft>
+                <a:spcPts val="300"/>
+              </a:spcAft>
+            </a:pPr>
+            <a:r>
+              <a:rPr sz="950" b="0">
+                <a:solidFill>
+                  <a:srgbClr val="1F2937"/>
+                </a:solidFill>
+                <a:latin typeface="Meiryo UI"/>
+                <a:ea typeface="Meiryo UI"/>
+              </a:rPr>
+              <a:t>・文部科学省「子供に伝えたい自殺予防（学校における自殺予防教育導入の手引）」（平成26年7月）</a:t>
+            </a:r>
+          </a:p>
+          <a:p>
+            <a:pPr algn="l">
+              <a:lnSpc>
+                <a:spcPct val="105000"/>
+              </a:lnSpc>
+              <a:spcAft>
+                <a:spcPts val="300"/>
+              </a:spcAft>
+            </a:pPr>
+            <a:r>
+              <a:rPr sz="950" b="0">
+                <a:solidFill>
+                  <a:srgbClr val="1F2937"/>
+                </a:solidFill>
+                <a:latin typeface="Meiryo UI"/>
+                <a:ea typeface="Meiryo UI"/>
+              </a:rPr>
+              <a:t>・自殺総合対策大綱（令和4年10月 閣議決定）</a:t>
+            </a:r>
+          </a:p>
+          <a:p>
+            <a:pPr algn="l">
+              <a:lnSpc>
+                <a:spcPct val="105000"/>
+              </a:lnSpc>
+              <a:spcAft>
+                <a:spcPts val="300"/>
+              </a:spcAft>
+            </a:pPr>
+            <a:r>
+              <a:rPr sz="950" b="0">
+                <a:solidFill>
+                  <a:srgbClr val="1F2937"/>
+                </a:solidFill>
+                <a:latin typeface="Meiryo UI"/>
+                <a:ea typeface="Meiryo UI"/>
+              </a:rPr>
+              <a:t>・こども家庭庁ほか「こどもの自殺対策緊急強化プラン」（令和5年6月）</a:t>
+            </a:r>
+          </a:p>
+          <a:p>
+            <a:pPr algn="l">
+              <a:lnSpc>
+                <a:spcPct val="105000"/>
+              </a:lnSpc>
+              <a:spcAft>
+                <a:spcPts val="300"/>
+              </a:spcAft>
+            </a:pPr>
+            <a:r>
+              <a:rPr sz="1000" b="1">
+                <a:solidFill>
+                  <a:srgbClr val="1F2937"/>
+                </a:solidFill>
+                <a:latin typeface="Meiryo UI"/>
+                <a:ea typeface="Meiryo UI"/>
+              </a:rPr>
+              <a:t>【法令】</a:t>
+            </a:r>
+          </a:p>
+          <a:p>
+            <a:pPr algn="l">
+              <a:lnSpc>
+                <a:spcPct val="105000"/>
+              </a:lnSpc>
+              <a:spcAft>
+                <a:spcPts val="300"/>
+              </a:spcAft>
+            </a:pPr>
+            <a:r>
+              <a:rPr sz="950" b="0">
+                <a:solidFill>
+                  <a:srgbClr val="1F2937"/>
+                </a:solidFill>
+                <a:latin typeface="Meiryo UI"/>
+                <a:ea typeface="Meiryo UI"/>
+              </a:rPr>
+              <a:t>・個人情報の保護に関する法律 第27条第1項第2号 …生命・身体の保護に必要な場合、本人同意なく第三者提供が可能</a:t>
+            </a:r>
+          </a:p>
+          <a:p>
+            <a:pPr algn="l">
+              <a:lnSpc>
+                <a:spcPct val="105000"/>
+              </a:lnSpc>
+              <a:spcAft>
+                <a:spcPts val="300"/>
+              </a:spcAft>
+            </a:pPr>
+            <a:r>
+              <a:rPr sz="950" b="0">
+                <a:solidFill>
+                  <a:srgbClr val="1F2937"/>
+                </a:solidFill>
+                <a:latin typeface="Meiryo UI"/>
+                <a:ea typeface="Meiryo UI"/>
+              </a:rPr>
+              <a:t>・児童虐待の防止等に関する法律 第6条 …虐待が疑われる場合の通告義務（子供家庭支援センター・児童相談所等へ）</a:t>
+            </a:r>
+          </a:p>
+          <a:p>
+            <a:pPr algn="l">
+              <a:lnSpc>
+                <a:spcPct val="105000"/>
+              </a:lnSpc>
+              <a:spcAft>
+                <a:spcPts val="300"/>
+              </a:spcAft>
+            </a:pPr>
+            <a:r>
+              <a:rPr sz="950" b="0">
+                <a:solidFill>
+                  <a:srgbClr val="1F2937"/>
+                </a:solidFill>
+                <a:latin typeface="Meiryo UI"/>
+                <a:ea typeface="Meiryo UI"/>
+              </a:rPr>
+              <a:t>・警察官職務執行法 第3条 …自殺企図のおそれのある者の保護</a:t>
+            </a:r>
+          </a:p>
+          <a:p>
+            <a:pPr algn="l">
+              <a:lnSpc>
+                <a:spcPct val="105000"/>
+              </a:lnSpc>
+              <a:spcAft>
+                <a:spcPts val="300"/>
+              </a:spcAft>
+            </a:pPr>
+            <a:r>
+              <a:rPr sz="950" b="0">
+                <a:solidFill>
+                  <a:srgbClr val="1F2937"/>
+                </a:solidFill>
+                <a:latin typeface="Meiryo UI"/>
+                <a:ea typeface="Meiryo UI"/>
+              </a:rPr>
+              <a:t>・自殺対策基本法（平成18年法律第85号）</a:t>
+            </a:r>
+          </a:p>
+          <a:p>
+            <a:pPr algn="l">
+              <a:lnSpc>
+                <a:spcPct val="105000"/>
+              </a:lnSpc>
+              <a:spcAft>
+                <a:spcPts val="300"/>
+              </a:spcAft>
+            </a:pPr>
+            <a:r>
+              <a:rPr sz="1000" b="1">
+                <a:solidFill>
+                  <a:srgbClr val="1F2937"/>
+                </a:solidFill>
+                <a:latin typeface="Meiryo UI"/>
+                <a:ea typeface="Meiryo UI"/>
+              </a:rPr>
+              <a:t>【相談窓口】</a:t>
+            </a:r>
+          </a:p>
+          <a:p>
+            <a:pPr algn="l">
+              <a:lnSpc>
+                <a:spcPct val="105000"/>
+              </a:lnSpc>
+              <a:spcAft>
+                <a:spcPts val="300"/>
+              </a:spcAft>
+            </a:pPr>
+            <a:r>
+              <a:rPr sz="950" b="0">
+                <a:solidFill>
+                  <a:srgbClr val="1F2937"/>
+                </a:solidFill>
+                <a:latin typeface="Meiryo UI"/>
+                <a:ea typeface="Meiryo UI"/>
+              </a:rPr>
+              <a:t>・こたエール（東京こどもネット・ケータイヘルプデスク）…東京都のネット・スマホトラブル相談窓口</a:t>
+            </a:r>
+          </a:p>
+        </p:txBody>
+      </p:sp>
+      <p:sp>
+        <p:nvSpPr>
+          <p:cNvPr id="13" name="Rectangle 12"/>
+          <p:cNvSpPr/>
           <p:nvPr/>
-        </p:nvCxnSpPr>
-        <p:spPr>
-          <a:xfrm flipH="1">
-            <a:off x="3192000" y="5259272"/>
-            <a:ext cx="2352000" cy="0"/>
-          </a:xfrm>
-          <a:prstGeom prst="line">
-            <a:avLst/>
-          </a:prstGeom>
-          <a:ln w="19050">
-            <a:solidFill>
-              <a:srgbClr val="37475A"/>
-            </a:solidFill>
-            <a:tailEnd type="triangle" w="med" len="med"/>
-          </a:ln>
-          <a:effectLst/>
-        </p:spPr>
-        <p:style>
-          <a:lnRef idx="2">
-            <a:schemeClr val="accent1"/>
-          </a:lnRef>
-          <a:fillRef idx="0">
-            <a:schemeClr val="accent1"/>
-          </a:fillRef>
-          <a:effectRef idx="1">
-            <a:schemeClr val="accent1"/>
-          </a:effectRef>
-          <a:fontRef idx="minor">
-            <a:schemeClr val="tx1"/>
-          </a:fontRef>
-        </p:style>
-      </p:cxnSp>
-      <p:sp>
-        <p:nvSpPr>
-          <p:cNvPr id="33" name="TextBox 32"/>
-          <p:cNvSpPr txBox="1"/>
-          <p:nvPr/>
-        </p:nvSpPr>
-        <p:spPr>
-          <a:xfrm>
-            <a:off x="3192000" y="4726472"/>
-            <a:ext cx="2352000" cy="413999"/>
+        </p:nvSpPr>
+        <p:spPr>
+          <a:xfrm>
+            <a:off x="360000" y="6443999"/>
+            <a:ext cx="6840000" cy="288000"/>
           </a:xfrm>
           <a:prstGeom prst="rect">
             <a:avLst/>
           </a:prstGeom>
-          <a:noFill/>
-        </p:spPr>
-        <p:txBody>
-          <a:bodyPr wrap="square" anchor="b" lIns="18000" rIns="18000" tIns="10800" bIns="10800">
-            <a:spAutoFit/>
-          </a:bodyPr>
-          <a:lstStyle/>
-          <a:p>
-            <a:pPr algn="ctr">
-              <a:lnSpc>
-                <a:spcPct val="100000"/>
-              </a:lnSpc>
-            </a:pPr>
-            <a:r>
-              <a:rPr sz="750" b="0">
-                <a:solidFill>
-                  <a:srgbClr val="1F2937"/>
-                </a:solidFill>
-                <a:latin typeface="Meiryo UI"/>
-                <a:ea typeface="Meiryo UI"/>
-              </a:rPr>
-              <a:t>児童生徒が判明している場合、</a:t>
-            </a:r>
-            <a:br/>
-            <a:r>
-              <a:rPr sz="750" b="0">
-                <a:solidFill>
-                  <a:srgbClr val="1F2937"/>
-                </a:solidFill>
-                <a:latin typeface="Meiryo UI"/>
-                <a:ea typeface="Meiryo UI"/>
-              </a:rPr>
-              <a:t>①学校名 ②学年 ③氏名を伝達</a:t>
-            </a:r>
-            <a:br/>
-            <a:r>
-              <a:rPr sz="750" b="0">
-                <a:solidFill>
-                  <a:srgbClr val="1F2937"/>
-                </a:solidFill>
-                <a:latin typeface="Meiryo UI"/>
-                <a:ea typeface="Meiryo UI"/>
-              </a:rPr>
-              <a:t>＋当該校へ事前連絡する旨を伝える</a:t>
-            </a:r>
-          </a:p>
-        </p:txBody>
-      </p:sp>
-      <p:sp>
-        <p:nvSpPr>
-          <p:cNvPr id="34" name="Oval 33"/>
-          <p:cNvSpPr/>
-          <p:nvPr/>
-        </p:nvSpPr>
-        <p:spPr>
-          <a:xfrm>
-            <a:off x="5436000" y="5151272"/>
-            <a:ext cx="216000" cy="216000"/>
-          </a:xfrm>
-          <a:prstGeom prst="ellipse">
-            <a:avLst/>
-          </a:prstGeom>
           <a:solidFill>
-            <a:srgbClr val="2F5496"/>
+            <a:srgbClr val="FDF3E7"/>
           </a:solidFill>
-          <a:ln>
-            <a:noFill/>
+          <a:ln w="15875">
+            <a:solidFill>
+              <a:srgbClr val="C0630C"/>
+            </a:solidFill>
           </a:ln>
           <a:effectLst/>
         </p:spPr>
@@ -4771,123 +8811,51 @@
           </a:fontRef>
         </p:style>
         <p:txBody>
-          <a:bodyPr rtlCol="0" anchor="ctr" wrap="none" lIns="18000" rIns="18000" tIns="10800" bIns="10800"/>
+          <a:bodyPr rtlCol="0" anchor="ctr" wrap="square" lIns="54000" rIns="54000" tIns="28800" bIns="28800"/>
           <a:lstStyle/>
           <a:p>
             <a:pPr algn="ctr">
               <a:lnSpc>
-                <a:spcPct val="100000"/>
-              </a:lnSpc>
-            </a:pPr>
-            <a:r>
-              <a:rPr sz="850" b="1">
-                <a:solidFill>
-                  <a:srgbClr val="FFFFFF"/>
-                </a:solidFill>
-                <a:latin typeface="Meiryo UI"/>
-                <a:ea typeface="Meiryo UI"/>
-              </a:rPr>
-              <a:t>6</a:t>
-            </a:r>
-          </a:p>
-        </p:txBody>
-      </p:sp>
-      <p:cxnSp>
-        <p:nvCxnSpPr>
-          <p:cNvPr id="35" name="Connector 34"/>
-          <p:cNvCxnSpPr/>
+                <a:spcPct val="105000"/>
+              </a:lnSpc>
+              <a:spcAft>
+                <a:spcPts val="200"/>
+              </a:spcAft>
+            </a:pPr>
+            <a:r>
+              <a:rPr sz="1200" b="1">
+                <a:solidFill>
+                  <a:srgbClr val="C0630C"/>
+                </a:solidFill>
+                <a:latin typeface="Meiryo UI"/>
+                <a:ea typeface="Meiryo UI"/>
+              </a:rPr>
+              <a:t>主な連絡先（年度当初に記入し、課内で共有しておく）</a:t>
+            </a:r>
+          </a:p>
+        </p:txBody>
+      </p:sp>
+      <p:sp>
+        <p:nvSpPr>
+          <p:cNvPr id="14" name="Rectangle 13"/>
+          <p:cNvSpPr/>
           <p:nvPr/>
-        </p:nvCxnSpPr>
-        <p:spPr>
-          <a:xfrm>
-            <a:off x="3192000" y="5972727"/>
-            <a:ext cx="2352000" cy="0"/>
-          </a:xfrm>
-          <a:prstGeom prst="line">
-            <a:avLst/>
-          </a:prstGeom>
-          <a:ln w="19050">
-            <a:solidFill>
-              <a:srgbClr val="37475A"/>
-            </a:solidFill>
-            <a:tailEnd type="triangle" w="med" len="med"/>
-          </a:ln>
-          <a:effectLst/>
-        </p:spPr>
-        <p:style>
-          <a:lnRef idx="2">
-            <a:schemeClr val="accent1"/>
-          </a:lnRef>
-          <a:fillRef idx="0">
-            <a:schemeClr val="accent1"/>
-          </a:fillRef>
-          <a:effectRef idx="1">
-            <a:schemeClr val="accent1"/>
-          </a:effectRef>
-          <a:fontRef idx="minor">
-            <a:schemeClr val="tx1"/>
-          </a:fontRef>
-        </p:style>
-      </p:cxnSp>
-      <p:sp>
-        <p:nvSpPr>
-          <p:cNvPr id="36" name="TextBox 35"/>
-          <p:cNvSpPr txBox="1"/>
-          <p:nvPr/>
-        </p:nvSpPr>
-        <p:spPr>
-          <a:xfrm>
-            <a:off x="3192000" y="5439927"/>
-            <a:ext cx="2352000" cy="413999"/>
+        </p:nvSpPr>
+        <p:spPr>
+          <a:xfrm>
+            <a:off x="360000" y="6732000"/>
+            <a:ext cx="6840000" cy="1655999"/>
           </a:xfrm>
           <a:prstGeom prst="rect">
             <a:avLst/>
           </a:prstGeom>
-          <a:noFill/>
-        </p:spPr>
-        <p:txBody>
-          <a:bodyPr wrap="square" anchor="b" lIns="18000" rIns="18000" tIns="10800" bIns="10800">
-            <a:spAutoFit/>
-          </a:bodyPr>
-          <a:lstStyle/>
-          <a:p>
-            <a:pPr algn="ctr">
-              <a:lnSpc>
-                <a:spcPct val="100000"/>
-              </a:lnSpc>
-            </a:pPr>
-            <a:r>
-              <a:rPr sz="800" b="0">
-                <a:solidFill>
-                  <a:srgbClr val="1F2937"/>
-                </a:solidFill>
-                <a:latin typeface="Meiryo UI"/>
-                <a:ea typeface="Meiryo UI"/>
-              </a:rPr>
-              <a:t>当該校へ伝える内容の助言 ※2</a:t>
-            </a:r>
-          </a:p>
-        </p:txBody>
-      </p:sp>
-      <p:sp>
-        <p:nvSpPr>
-          <p:cNvPr id="37" name="Oval 36"/>
-          <p:cNvSpPr/>
-          <p:nvPr/>
-        </p:nvSpPr>
-        <p:spPr>
-          <a:xfrm>
-            <a:off x="3084000" y="5864727"/>
-            <a:ext cx="216000" cy="216000"/>
-          </a:xfrm>
-          <a:prstGeom prst="ellipse">
-            <a:avLst/>
-          </a:prstGeom>
           <a:solidFill>
-            <a:srgbClr val="2F5496"/>
+            <a:srgbClr val="FFFFFF"/>
           </a:solidFill>
-          <a:ln>
-            <a:noFill/>
+          <a:ln w="15875">
+            <a:solidFill>
+              <a:srgbClr val="C0630C"/>
+            </a:solidFill>
           </a:ln>
           <a:effectLst/>
         </p:spPr>
@@ -4906,788 +8874,126 @@
           </a:fontRef>
         </p:style>
         <p:txBody>
-          <a:bodyPr rtlCol="0" anchor="ctr" wrap="none" lIns="18000" rIns="18000" tIns="10800" bIns="10800"/>
-          <a:lstStyle/>
-          <a:p>
-            <a:pPr algn="ctr">
-              <a:lnSpc>
-                <a:spcPct val="100000"/>
-              </a:lnSpc>
-            </a:pPr>
-            <a:r>
-              <a:rPr sz="850" b="1">
-                <a:solidFill>
-                  <a:srgbClr val="FFFFFF"/>
-                </a:solidFill>
-                <a:latin typeface="Meiryo UI"/>
-                <a:ea typeface="Meiryo UI"/>
-              </a:rPr>
-              <a:t>7</a:t>
-            </a:r>
-          </a:p>
-        </p:txBody>
-      </p:sp>
-      <p:cxnSp>
-        <p:nvCxnSpPr>
-          <p:cNvPr id="38" name="Connector 37"/>
-          <p:cNvCxnSpPr/>
-          <p:nvPr/>
-        </p:nvCxnSpPr>
-        <p:spPr>
-          <a:xfrm flipH="1">
-            <a:off x="4368000" y="6686181"/>
-            <a:ext cx="1176000" cy="0"/>
-          </a:xfrm>
-          <a:prstGeom prst="line">
-            <a:avLst/>
-          </a:prstGeom>
-          <a:ln w="19050">
-            <a:solidFill>
-              <a:srgbClr val="37475A"/>
-            </a:solidFill>
-            <a:tailEnd type="triangle" w="med" len="med"/>
-          </a:ln>
-          <a:effectLst/>
-        </p:spPr>
-        <p:style>
-          <a:lnRef idx="2">
-            <a:schemeClr val="accent1"/>
-          </a:lnRef>
-          <a:fillRef idx="0">
-            <a:schemeClr val="accent1"/>
-          </a:fillRef>
-          <a:effectRef idx="1">
-            <a:schemeClr val="accent1"/>
-          </a:effectRef>
-          <a:fontRef idx="minor">
-            <a:schemeClr val="tx1"/>
-          </a:fontRef>
-        </p:style>
-      </p:cxnSp>
-      <p:sp>
-        <p:nvSpPr>
-          <p:cNvPr id="39" name="TextBox 38"/>
-          <p:cNvSpPr txBox="1"/>
-          <p:nvPr/>
-        </p:nvSpPr>
-        <p:spPr>
-          <a:xfrm>
-            <a:off x="4020000" y="6153381"/>
-            <a:ext cx="1872000" cy="413999"/>
-          </a:xfrm>
-          <a:prstGeom prst="rect">
-            <a:avLst/>
-          </a:prstGeom>
-          <a:noFill/>
-        </p:spPr>
-        <p:txBody>
-          <a:bodyPr wrap="square" anchor="b" lIns="18000" rIns="18000" tIns="10800" bIns="10800">
-            <a:spAutoFit/>
-          </a:bodyPr>
-          <a:lstStyle/>
-          <a:p>
-            <a:pPr algn="ctr">
-              <a:lnSpc>
-                <a:spcPct val="100000"/>
-              </a:lnSpc>
-            </a:pPr>
-            <a:r>
-              <a:rPr sz="800" b="0">
+          <a:bodyPr rtlCol="0" anchor="t" wrap="square" lIns="54000" rIns="54000" tIns="28800" bIns="28800"/>
+          <a:lstStyle/>
+          <a:p>
+            <a:pPr algn="l">
+              <a:lnSpc>
+                <a:spcPct val="105000"/>
+              </a:lnSpc>
+              <a:spcAft>
+                <a:spcPts val="600"/>
+              </a:spcAft>
+            </a:pPr>
+            <a:r>
+              <a:rPr sz="1000" b="0">
                 <a:solidFill>
                   <a:srgbClr val="1F2937"/>
                 </a:solidFill>
                 <a:latin typeface="Meiryo UI"/>
                 <a:ea typeface="Meiryo UI"/>
               </a:rPr>
-              <a:t>事前連絡</a:t>
-            </a:r>
-            <a:br/>
-            <a:r>
-              <a:rPr sz="800" b="0">
+              <a:t>・こたエール　　　　　　　　　　　　　　TEL：　　　　　　　　　　担当：</a:t>
+            </a:r>
+          </a:p>
+          <a:p>
+            <a:pPr algn="l">
+              <a:lnSpc>
+                <a:spcPct val="105000"/>
+              </a:lnSpc>
+              <a:spcAft>
+                <a:spcPts val="600"/>
+              </a:spcAft>
+            </a:pPr>
+            <a:r>
+              <a:rPr sz="1000" b="0">
                 <a:solidFill>
                   <a:srgbClr val="1F2937"/>
                 </a:solidFill>
                 <a:latin typeface="Meiryo UI"/>
                 <a:ea typeface="Meiryo UI"/>
               </a:rPr>
-              <a:t>（警察から連絡が入る旨・対応方法）</a:t>
-            </a:r>
-          </a:p>
-        </p:txBody>
-      </p:sp>
-      <p:sp>
-        <p:nvSpPr>
-          <p:cNvPr id="40" name="Oval 39"/>
-          <p:cNvSpPr/>
-          <p:nvPr/>
-        </p:nvSpPr>
-        <p:spPr>
-          <a:xfrm>
-            <a:off x="5436000" y="6578181"/>
-            <a:ext cx="216000" cy="216000"/>
-          </a:xfrm>
-          <a:prstGeom prst="ellipse">
-            <a:avLst/>
-          </a:prstGeom>
-          <a:solidFill>
-            <a:srgbClr val="2F5496"/>
-          </a:solidFill>
-          <a:ln>
-            <a:noFill/>
-          </a:ln>
-          <a:effectLst/>
-        </p:spPr>
-        <p:style>
-          <a:lnRef idx="1">
-            <a:schemeClr val="accent1"/>
-          </a:lnRef>
-          <a:fillRef idx="3">
-            <a:schemeClr val="accent1"/>
-          </a:fillRef>
-          <a:effectRef idx="2">
-            <a:schemeClr val="accent1"/>
-          </a:effectRef>
-          <a:fontRef idx="minor">
-            <a:schemeClr val="lt1"/>
-          </a:fontRef>
-        </p:style>
-        <p:txBody>
-          <a:bodyPr rtlCol="0" anchor="ctr" wrap="none" lIns="18000" rIns="18000" tIns="10800" bIns="10800"/>
-          <a:lstStyle/>
-          <a:p>
-            <a:pPr algn="ctr">
-              <a:lnSpc>
-                <a:spcPct val="100000"/>
-              </a:lnSpc>
-            </a:pPr>
-            <a:r>
-              <a:rPr sz="850" b="1">
-                <a:solidFill>
-                  <a:srgbClr val="FFFFFF"/>
-                </a:solidFill>
-                <a:latin typeface="Meiryo UI"/>
-                <a:ea typeface="Meiryo UI"/>
-              </a:rPr>
-              <a:t>8</a:t>
-            </a:r>
-          </a:p>
-        </p:txBody>
-      </p:sp>
-      <p:cxnSp>
-        <p:nvCxnSpPr>
-          <p:cNvPr id="41" name="Connector 40"/>
-          <p:cNvCxnSpPr/>
-          <p:nvPr/>
-        </p:nvCxnSpPr>
-        <p:spPr>
-          <a:xfrm>
-            <a:off x="3192000" y="7399636"/>
-            <a:ext cx="1176000" cy="0"/>
-          </a:xfrm>
-          <a:prstGeom prst="line">
-            <a:avLst/>
-          </a:prstGeom>
-          <a:ln w="19050">
-            <a:solidFill>
-              <a:srgbClr val="37475A"/>
-            </a:solidFill>
-            <a:tailEnd type="triangle" w="med" len="med"/>
-          </a:ln>
-          <a:effectLst/>
-        </p:spPr>
-        <p:style>
-          <a:lnRef idx="2">
-            <a:schemeClr val="accent1"/>
-          </a:lnRef>
-          <a:fillRef idx="0">
-            <a:schemeClr val="accent1"/>
-          </a:fillRef>
-          <a:effectRef idx="1">
-            <a:schemeClr val="accent1"/>
-          </a:effectRef>
-          <a:fontRef idx="minor">
-            <a:schemeClr val="tx1"/>
-          </a:fontRef>
-        </p:style>
-      </p:cxnSp>
-      <p:sp>
-        <p:nvSpPr>
-          <p:cNvPr id="42" name="TextBox 41"/>
-          <p:cNvSpPr txBox="1"/>
-          <p:nvPr/>
-        </p:nvSpPr>
-        <p:spPr>
-          <a:xfrm>
-            <a:off x="2844000" y="6866836"/>
-            <a:ext cx="1872000" cy="413999"/>
-          </a:xfrm>
-          <a:prstGeom prst="rect">
-            <a:avLst/>
-          </a:prstGeom>
-          <a:noFill/>
-        </p:spPr>
-        <p:txBody>
-          <a:bodyPr wrap="square" anchor="b" lIns="18000" rIns="18000" tIns="10800" bIns="10800">
-            <a:spAutoFit/>
-          </a:bodyPr>
-          <a:lstStyle/>
-          <a:p>
-            <a:pPr algn="ctr">
-              <a:lnSpc>
-                <a:spcPct val="100000"/>
-              </a:lnSpc>
-            </a:pPr>
-            <a:r>
-              <a:rPr sz="750" b="0">
+              <a:t>・管轄警察署（生活安全課等）　　　　　　TEL：　　　　　　　　　　担当：</a:t>
+            </a:r>
+          </a:p>
+          <a:p>
+            <a:pPr algn="l">
+              <a:lnSpc>
+                <a:spcPct val="105000"/>
+              </a:lnSpc>
+              <a:spcAft>
+                <a:spcPts val="600"/>
+              </a:spcAft>
+            </a:pPr>
+            <a:r>
+              <a:rPr sz="1000" b="0">
                 <a:solidFill>
                   <a:srgbClr val="1F2937"/>
                 </a:solidFill>
                 <a:latin typeface="Meiryo UI"/>
                 <a:ea typeface="Meiryo UI"/>
               </a:rPr>
-              <a:t>連絡・在籍確認</a:t>
-            </a:r>
-            <a:br/>
-            <a:r>
-              <a:rPr sz="750" b="0">
+              <a:t>・教育ICT環境整備係（教育施設課）　　　 内線：　　　　　　　　　 担当：</a:t>
+            </a:r>
+          </a:p>
+          <a:p>
+            <a:pPr algn="l">
+              <a:lnSpc>
+                <a:spcPct val="105000"/>
+              </a:lnSpc>
+              <a:spcAft>
+                <a:spcPts val="600"/>
+              </a:spcAft>
+            </a:pPr>
+            <a:r>
+              <a:rPr sz="1000" b="0">
                 <a:solidFill>
                   <a:srgbClr val="1F2937"/>
                 </a:solidFill>
                 <a:latin typeface="Meiryo UI"/>
                 <a:ea typeface="Meiryo UI"/>
               </a:rPr>
-              <a:t>（在籍していれば ①氏名</a:t>
-            </a:r>
-            <a:br/>
-            <a:r>
-              <a:rPr sz="750" b="0">
+              <a:t>・子供家庭支援センター　　　　　　　　　TEL：　　　　　　　　　　担当：</a:t>
+            </a:r>
+          </a:p>
+          <a:p>
+            <a:pPr algn="l">
+              <a:lnSpc>
+                <a:spcPct val="105000"/>
+              </a:lnSpc>
+              <a:spcAft>
+                <a:spcPts val="600"/>
+              </a:spcAft>
+            </a:pPr>
+            <a:r>
+              <a:rPr sz="1000" b="0">
                 <a:solidFill>
                   <a:srgbClr val="1F2937"/>
                 </a:solidFill>
                 <a:latin typeface="Meiryo UI"/>
                 <a:ea typeface="Meiryo UI"/>
               </a:rPr>
-              <a:t>②保護者の連絡先 ③住所を確認）</a:t>
-            </a:r>
-          </a:p>
-        </p:txBody>
-      </p:sp>
-      <p:sp>
-        <p:nvSpPr>
-          <p:cNvPr id="43" name="Oval 42"/>
-          <p:cNvSpPr/>
-          <p:nvPr/>
-        </p:nvSpPr>
-        <p:spPr>
-          <a:xfrm>
-            <a:off x="3084000" y="7291636"/>
-            <a:ext cx="216000" cy="216000"/>
-          </a:xfrm>
-          <a:prstGeom prst="ellipse">
-            <a:avLst/>
-          </a:prstGeom>
-          <a:solidFill>
-            <a:srgbClr val="2F5496"/>
-          </a:solidFill>
-          <a:ln>
-            <a:noFill/>
-          </a:ln>
-          <a:effectLst/>
-        </p:spPr>
-        <p:style>
-          <a:lnRef idx="1">
-            <a:schemeClr val="accent1"/>
-          </a:lnRef>
-          <a:fillRef idx="3">
-            <a:schemeClr val="accent1"/>
-          </a:fillRef>
-          <a:effectRef idx="2">
-            <a:schemeClr val="accent1"/>
-          </a:effectRef>
-          <a:fontRef idx="minor">
-            <a:schemeClr val="lt1"/>
-          </a:fontRef>
-        </p:style>
-        <p:txBody>
-          <a:bodyPr rtlCol="0" anchor="ctr" wrap="none" lIns="18000" rIns="18000" tIns="10800" bIns="10800"/>
-          <a:lstStyle/>
-          <a:p>
-            <a:pPr algn="ctr">
-              <a:lnSpc>
-                <a:spcPct val="100000"/>
-              </a:lnSpc>
-            </a:pPr>
-            <a:r>
-              <a:rPr sz="850" b="1">
-                <a:solidFill>
-                  <a:srgbClr val="FFFFFF"/>
-                </a:solidFill>
-                <a:latin typeface="Meiryo UI"/>
-                <a:ea typeface="Meiryo UI"/>
-              </a:rPr>
-              <a:t>9</a:t>
-            </a:r>
-          </a:p>
-        </p:txBody>
-      </p:sp>
-      <p:cxnSp>
-        <p:nvCxnSpPr>
-          <p:cNvPr id="44" name="Connector 43"/>
-          <p:cNvCxnSpPr/>
-          <p:nvPr/>
-        </p:nvCxnSpPr>
-        <p:spPr>
-          <a:xfrm flipH="1">
-            <a:off x="840000" y="8113090"/>
-            <a:ext cx="2352000" cy="0"/>
-          </a:xfrm>
-          <a:prstGeom prst="line">
-            <a:avLst/>
-          </a:prstGeom>
-          <a:ln w="19050">
-            <a:solidFill>
-              <a:srgbClr val="37475A"/>
-            </a:solidFill>
-            <a:tailEnd type="triangle" w="med" len="med"/>
-          </a:ln>
-          <a:effectLst/>
-        </p:spPr>
-        <p:style>
-          <a:lnRef idx="2">
-            <a:schemeClr val="accent1"/>
-          </a:lnRef>
-          <a:fillRef idx="0">
-            <a:schemeClr val="accent1"/>
-          </a:fillRef>
-          <a:effectRef idx="1">
-            <a:schemeClr val="accent1"/>
-          </a:effectRef>
-          <a:fontRef idx="minor">
-            <a:schemeClr val="tx1"/>
-          </a:fontRef>
-        </p:style>
-      </p:cxnSp>
-      <p:sp>
-        <p:nvSpPr>
-          <p:cNvPr id="45" name="TextBox 44"/>
-          <p:cNvSpPr txBox="1"/>
-          <p:nvPr/>
-        </p:nvSpPr>
-        <p:spPr>
-          <a:xfrm>
-            <a:off x="840000" y="7580290"/>
-            <a:ext cx="2352000" cy="413999"/>
-          </a:xfrm>
-          <a:prstGeom prst="rect">
-            <a:avLst/>
-          </a:prstGeom>
-          <a:noFill/>
-        </p:spPr>
-        <p:txBody>
-          <a:bodyPr wrap="square" anchor="b" lIns="18000" rIns="18000" tIns="10800" bIns="10800">
-            <a:spAutoFit/>
-          </a:bodyPr>
-          <a:lstStyle/>
-          <a:p>
-            <a:pPr algn="ctr">
-              <a:lnSpc>
-                <a:spcPct val="100000"/>
-              </a:lnSpc>
-            </a:pPr>
-            <a:r>
-              <a:rPr sz="800" b="0">
+              <a:t>・児童相談所　　　　　　　　　　　　　　TEL：　　　　　　　　　　担当：</a:t>
+            </a:r>
+          </a:p>
+          <a:p>
+            <a:pPr algn="l">
+              <a:lnSpc>
+                <a:spcPct val="105000"/>
+              </a:lnSpc>
+              <a:spcAft>
+                <a:spcPts val="600"/>
+              </a:spcAft>
+            </a:pPr>
+            <a:r>
+              <a:rPr sz="1000" b="0">
                 <a:solidFill>
                   <a:srgbClr val="1F2937"/>
                 </a:solidFill>
                 <a:latin typeface="Meiryo UI"/>
                 <a:ea typeface="Meiryo UI"/>
               </a:rPr>
-              <a:t>自宅を訪問し、安否確認</a:t>
-            </a:r>
-          </a:p>
-        </p:txBody>
-      </p:sp>
-      <p:sp>
-        <p:nvSpPr>
-          <p:cNvPr id="46" name="Oval 45"/>
-          <p:cNvSpPr/>
-          <p:nvPr/>
-        </p:nvSpPr>
-        <p:spPr>
-          <a:xfrm>
-            <a:off x="3062400" y="8005090"/>
-            <a:ext cx="259200" cy="216000"/>
-          </a:xfrm>
-          <a:prstGeom prst="ellipse">
-            <a:avLst/>
-          </a:prstGeom>
-          <a:solidFill>
-            <a:srgbClr val="2F5496"/>
-          </a:solidFill>
-          <a:ln>
-            <a:noFill/>
-          </a:ln>
-          <a:effectLst/>
-        </p:spPr>
-        <p:style>
-          <a:lnRef idx="1">
-            <a:schemeClr val="accent1"/>
-          </a:lnRef>
-          <a:fillRef idx="3">
-            <a:schemeClr val="accent1"/>
-          </a:fillRef>
-          <a:effectRef idx="2">
-            <a:schemeClr val="accent1"/>
-          </a:effectRef>
-          <a:fontRef idx="minor">
-            <a:schemeClr val="lt1"/>
-          </a:fontRef>
-        </p:style>
-        <p:txBody>
-          <a:bodyPr rtlCol="0" anchor="ctr" wrap="none" lIns="18000" rIns="18000" tIns="10800" bIns="10800"/>
-          <a:lstStyle/>
-          <a:p>
-            <a:pPr algn="ctr">
-              <a:lnSpc>
-                <a:spcPct val="100000"/>
-              </a:lnSpc>
-            </a:pPr>
-            <a:r>
-              <a:rPr sz="850" b="1">
-                <a:solidFill>
-                  <a:srgbClr val="FFFFFF"/>
-                </a:solidFill>
-                <a:latin typeface="Meiryo UI"/>
-                <a:ea typeface="Meiryo UI"/>
-              </a:rPr>
-              <a:t>10</a:t>
-            </a:r>
-          </a:p>
-        </p:txBody>
-      </p:sp>
-      <p:cxnSp>
-        <p:nvCxnSpPr>
-          <p:cNvPr id="47" name="Connector 46"/>
-          <p:cNvCxnSpPr/>
-          <p:nvPr/>
-        </p:nvCxnSpPr>
-        <p:spPr>
-          <a:xfrm>
-            <a:off x="3192000" y="8826545"/>
-            <a:ext cx="1176000" cy="0"/>
-          </a:xfrm>
-          <a:prstGeom prst="line">
-            <a:avLst/>
-          </a:prstGeom>
-          <a:ln w="19050">
-            <a:solidFill>
-              <a:srgbClr val="37475A"/>
-            </a:solidFill>
-            <a:tailEnd type="triangle" w="med" len="med"/>
-          </a:ln>
-          <a:effectLst/>
-        </p:spPr>
-        <p:style>
-          <a:lnRef idx="2">
-            <a:schemeClr val="accent1"/>
-          </a:lnRef>
-          <a:fillRef idx="0">
-            <a:schemeClr val="accent1"/>
-          </a:fillRef>
-          <a:effectRef idx="1">
-            <a:schemeClr val="accent1"/>
-          </a:effectRef>
-          <a:fontRef idx="minor">
-            <a:schemeClr val="tx1"/>
-          </a:fontRef>
-        </p:style>
-      </p:cxnSp>
-      <p:sp>
-        <p:nvSpPr>
-          <p:cNvPr id="48" name="TextBox 47"/>
-          <p:cNvSpPr txBox="1"/>
-          <p:nvPr/>
-        </p:nvSpPr>
-        <p:spPr>
-          <a:xfrm>
-            <a:off x="2844000" y="8293745"/>
-            <a:ext cx="1872000" cy="413999"/>
-          </a:xfrm>
-          <a:prstGeom prst="rect">
-            <a:avLst/>
-          </a:prstGeom>
-          <a:noFill/>
-        </p:spPr>
-        <p:txBody>
-          <a:bodyPr wrap="square" anchor="b" lIns="18000" rIns="18000" tIns="10800" bIns="10800">
-            <a:spAutoFit/>
-          </a:bodyPr>
-          <a:lstStyle/>
-          <a:p>
-            <a:pPr algn="ctr">
-              <a:lnSpc>
-                <a:spcPct val="100000"/>
-              </a:lnSpc>
-            </a:pPr>
-            <a:r>
-              <a:rPr sz="800" b="0">
-                <a:solidFill>
-                  <a:srgbClr val="1F2937"/>
-                </a:solidFill>
-                <a:latin typeface="Meiryo UI"/>
-                <a:ea typeface="Meiryo UI"/>
-              </a:rPr>
-              <a:t>安否確認の結果を連絡</a:t>
-            </a:r>
-          </a:p>
-        </p:txBody>
-      </p:sp>
-      <p:sp>
-        <p:nvSpPr>
-          <p:cNvPr id="49" name="Oval 48"/>
-          <p:cNvSpPr/>
-          <p:nvPr/>
-        </p:nvSpPr>
-        <p:spPr>
-          <a:xfrm>
-            <a:off x="3062400" y="8718545"/>
-            <a:ext cx="259200" cy="216000"/>
-          </a:xfrm>
-          <a:prstGeom prst="ellipse">
-            <a:avLst/>
-          </a:prstGeom>
-          <a:solidFill>
-            <a:srgbClr val="2F5496"/>
-          </a:solidFill>
-          <a:ln>
-            <a:noFill/>
-          </a:ln>
-          <a:effectLst/>
-        </p:spPr>
-        <p:style>
-          <a:lnRef idx="1">
-            <a:schemeClr val="accent1"/>
-          </a:lnRef>
-          <a:fillRef idx="3">
-            <a:schemeClr val="accent1"/>
-          </a:fillRef>
-          <a:effectRef idx="2">
-            <a:schemeClr val="accent1"/>
-          </a:effectRef>
-          <a:fontRef idx="minor">
-            <a:schemeClr val="lt1"/>
-          </a:fontRef>
-        </p:style>
-        <p:txBody>
-          <a:bodyPr rtlCol="0" anchor="ctr" wrap="none" lIns="18000" rIns="18000" tIns="10800" bIns="10800"/>
-          <a:lstStyle/>
-          <a:p>
-            <a:pPr algn="ctr">
-              <a:lnSpc>
-                <a:spcPct val="100000"/>
-              </a:lnSpc>
-            </a:pPr>
-            <a:r>
-              <a:rPr sz="850" b="1">
-                <a:solidFill>
-                  <a:srgbClr val="FFFFFF"/>
-                </a:solidFill>
-                <a:latin typeface="Meiryo UI"/>
-                <a:ea typeface="Meiryo UI"/>
-              </a:rPr>
-              <a:t>11</a:t>
-            </a:r>
-          </a:p>
-        </p:txBody>
-      </p:sp>
-      <p:cxnSp>
-        <p:nvCxnSpPr>
-          <p:cNvPr id="50" name="Connector 49"/>
-          <p:cNvCxnSpPr/>
-          <p:nvPr/>
-        </p:nvCxnSpPr>
-        <p:spPr>
-          <a:xfrm>
-            <a:off x="4368000" y="9540000"/>
-            <a:ext cx="1176000" cy="0"/>
-          </a:xfrm>
-          <a:prstGeom prst="line">
-            <a:avLst/>
-          </a:prstGeom>
-          <a:ln w="19050">
-            <a:solidFill>
-              <a:srgbClr val="37475A"/>
-            </a:solidFill>
-            <a:tailEnd type="triangle" w="med" len="med"/>
-          </a:ln>
-          <a:effectLst/>
-        </p:spPr>
-        <p:style>
-          <a:lnRef idx="2">
-            <a:schemeClr val="accent1"/>
-          </a:lnRef>
-          <a:fillRef idx="0">
-            <a:schemeClr val="accent1"/>
-          </a:fillRef>
-          <a:effectRef idx="1">
-            <a:schemeClr val="accent1"/>
-          </a:effectRef>
-          <a:fontRef idx="minor">
-            <a:schemeClr val="tx1"/>
-          </a:fontRef>
-        </p:style>
-      </p:cxnSp>
-      <p:sp>
-        <p:nvSpPr>
-          <p:cNvPr id="51" name="TextBox 50"/>
-          <p:cNvSpPr txBox="1"/>
-          <p:nvPr/>
-        </p:nvSpPr>
-        <p:spPr>
-          <a:xfrm>
-            <a:off x="4020000" y="9007200"/>
-            <a:ext cx="1872000" cy="413999"/>
-          </a:xfrm>
-          <a:prstGeom prst="rect">
-            <a:avLst/>
-          </a:prstGeom>
-          <a:noFill/>
-        </p:spPr>
-        <p:txBody>
-          <a:bodyPr wrap="square" anchor="b" lIns="18000" rIns="18000" tIns="10800" bIns="10800">
-            <a:spAutoFit/>
-          </a:bodyPr>
-          <a:lstStyle/>
-          <a:p>
-            <a:pPr algn="ctr">
-              <a:lnSpc>
-                <a:spcPct val="100000"/>
-              </a:lnSpc>
-            </a:pPr>
-            <a:r>
-              <a:rPr sz="800" b="0">
-                <a:solidFill>
-                  <a:srgbClr val="1F2937"/>
-                </a:solidFill>
-                <a:latin typeface="Meiryo UI"/>
-                <a:ea typeface="Meiryo UI"/>
-              </a:rPr>
-              <a:t>教育指導課へ報告</a:t>
-            </a:r>
-          </a:p>
-        </p:txBody>
-      </p:sp>
-      <p:sp>
-        <p:nvSpPr>
-          <p:cNvPr id="52" name="Oval 51"/>
-          <p:cNvSpPr/>
-          <p:nvPr/>
-        </p:nvSpPr>
-        <p:spPr>
-          <a:xfrm>
-            <a:off x="4238400" y="9432000"/>
-            <a:ext cx="259200" cy="216000"/>
-          </a:xfrm>
-          <a:prstGeom prst="ellipse">
-            <a:avLst/>
-          </a:prstGeom>
-          <a:solidFill>
-            <a:srgbClr val="2F5496"/>
-          </a:solidFill>
-          <a:ln>
-            <a:noFill/>
-          </a:ln>
-          <a:effectLst/>
-        </p:spPr>
-        <p:style>
-          <a:lnRef idx="1">
-            <a:schemeClr val="accent1"/>
-          </a:lnRef>
-          <a:fillRef idx="3">
-            <a:schemeClr val="accent1"/>
-          </a:fillRef>
-          <a:effectRef idx="2">
-            <a:schemeClr val="accent1"/>
-          </a:effectRef>
-          <a:fontRef idx="minor">
-            <a:schemeClr val="lt1"/>
-          </a:fontRef>
-        </p:style>
-        <p:txBody>
-          <a:bodyPr rtlCol="0" anchor="ctr" wrap="none" lIns="18000" rIns="18000" tIns="10800" bIns="10800"/>
-          <a:lstStyle/>
-          <a:p>
-            <a:pPr algn="ctr">
-              <a:lnSpc>
-                <a:spcPct val="100000"/>
-              </a:lnSpc>
-            </a:pPr>
-            <a:r>
-              <a:rPr sz="850" b="1">
-                <a:solidFill>
-                  <a:srgbClr val="FFFFFF"/>
-                </a:solidFill>
-                <a:latin typeface="Meiryo UI"/>
-                <a:ea typeface="Meiryo UI"/>
-              </a:rPr>
-              <a:t>12</a:t>
-            </a:r>
-          </a:p>
-        </p:txBody>
-      </p:sp>
-      <p:sp>
-        <p:nvSpPr>
-          <p:cNvPr id="53" name="TextBox 52"/>
-          <p:cNvSpPr txBox="1"/>
-          <p:nvPr/>
-        </p:nvSpPr>
-        <p:spPr>
-          <a:xfrm>
-            <a:off x="251999" y="9828000"/>
-            <a:ext cx="7056000" cy="792000"/>
-          </a:xfrm>
-          <a:prstGeom prst="rect">
-            <a:avLst/>
-          </a:prstGeom>
-          <a:noFill/>
-        </p:spPr>
-        <p:txBody>
-          <a:bodyPr wrap="square" anchor="t" lIns="18000" rIns="18000" tIns="10800" bIns="10800">
-            <a:spAutoFit/>
-          </a:bodyPr>
-          <a:lstStyle/>
-          <a:p>
-            <a:pPr algn="l">
-              <a:lnSpc>
-                <a:spcPct val="100000"/>
-              </a:lnSpc>
-            </a:pPr>
-            <a:r>
-              <a:rPr sz="750" b="0">
-                <a:solidFill>
-                  <a:srgbClr val="1F2937"/>
-                </a:solidFill>
-                <a:latin typeface="Meiryo UI"/>
-                <a:ea typeface="Meiryo UI"/>
-              </a:rPr>
-              <a:t>※1　児童生徒が相談に用いたメールアドレスには、こたエール職員から返信することができないため、教育委員会へ情報提供を行う。</a:t>
-            </a:r>
-          </a:p>
-          <a:p>
-            <a:pPr algn="l">
-              <a:lnSpc>
-                <a:spcPct val="100000"/>
-              </a:lnSpc>
-            </a:pPr>
-            <a:r>
-              <a:rPr sz="750" b="0">
-                <a:solidFill>
-                  <a:srgbClr val="1F2937"/>
-                </a:solidFill>
-                <a:latin typeface="Meiryo UI"/>
-                <a:ea typeface="Meiryo UI"/>
-              </a:rPr>
-              <a:t>※2　助言の例：事前に保護者に連絡しておく／保護者からの虐待が疑われるため、警察が連絡するまでは何もしない　等</a:t>
+              <a:t>・課長・統括指導主事（勤務時間外）　　　TEL：</a:t>
             </a:r>
           </a:p>
         </p:txBody>

--- a/自殺企図相談対応フロー図.pptx
+++ b/自殺企図相談対応フロー図.pptx
@@ -6,8 +6,6 @@
   </p:sldMasterIdLst>
   <p:sldIdLst>
     <p:sldId id="256" r:id="rId7"/>
-    <p:sldId id="257" r:id="rId8"/>
-    <p:sldId id="258" r:id="rId9"/>
   </p:sldIdLst>
   <p:sldSz cx="7560000" cy="10692000" type="screen4x3"/>
   <p:notesSz cx="6858000" cy="9144000"/>
@@ -3098,8 +3096,8 @@
         </p:nvSpPr>
         <p:spPr>
           <a:xfrm>
-            <a:off x="360000" y="144000"/>
-            <a:ext cx="6840000" cy="360000"/>
+            <a:off x="306000" y="90000"/>
+            <a:ext cx="6966000" cy="324000"/>
           </a:xfrm>
           <a:prstGeom prst="rect">
             <a:avLst/>
@@ -3107,21 +3105,21 @@
           <a:noFill/>
         </p:spPr>
         <p:txBody>
-          <a:bodyPr wrap="square" anchor="t" lIns="54000" rIns="54000" tIns="28800" bIns="28800">
+          <a:bodyPr wrap="square" anchor="t" lIns="46800" rIns="46800" tIns="21600" bIns="21600">
             <a:spAutoFit/>
           </a:bodyPr>
           <a:lstStyle/>
           <a:p>
             <a:pPr algn="ctr">
               <a:lnSpc>
-                <a:spcPct val="105000"/>
+                <a:spcPct val="102000"/>
               </a:lnSpc>
               <a:spcAft>
                 <a:spcPts val="200"/>
               </a:spcAft>
             </a:pPr>
             <a:r>
-              <a:rPr sz="1600" b="1">
+              <a:rPr sz="1500" b="1">
                 <a:solidFill>
                   <a:srgbClr val="1F2937"/>
                 </a:solidFill>
@@ -3141,8 +3139,8 @@
         </p:nvSpPr>
         <p:spPr>
           <a:xfrm>
-            <a:off x="360000" y="486000"/>
-            <a:ext cx="6840000" cy="216000"/>
+            <a:off x="306000" y="360000"/>
+            <a:ext cx="6966000" cy="180000"/>
           </a:xfrm>
           <a:prstGeom prst="rect">
             <a:avLst/>
@@ -3150,42 +3148,172 @@
           <a:noFill/>
         </p:spPr>
         <p:txBody>
-          <a:bodyPr wrap="square" anchor="t" lIns="54000" rIns="54000" tIns="28800" bIns="28800">
+          <a:bodyPr wrap="square" anchor="t" lIns="46800" rIns="46800" tIns="21600" bIns="21600">
             <a:spAutoFit/>
           </a:bodyPr>
           <a:lstStyle/>
           <a:p>
             <a:pPr algn="ctr">
               <a:lnSpc>
-                <a:spcPct val="105000"/>
+                <a:spcPct val="102000"/>
               </a:lnSpc>
               <a:spcAft>
                 <a:spcPts val="200"/>
               </a:spcAft>
             </a:pPr>
             <a:r>
-              <a:rPr sz="1000" b="0">
+              <a:rPr sz="900" b="0">
                 <a:solidFill>
                   <a:srgbClr val="1F2937"/>
                 </a:solidFill>
                 <a:latin typeface="Meiryo UI"/>
                 <a:ea typeface="Meiryo UI"/>
               </a:rPr>
-              <a:t>〜こたエール（東京都）にメールで相談が入った場合〜</a:t>
-            </a:r>
-          </a:p>
-        </p:txBody>
-      </p:sp>
-      <p:sp>
-        <p:nvSpPr>
-          <p:cNvPr id="4" name="Rectangle 3"/>
+              <a:t>〜こたエール（東京都のネット・スマホトラブル相談窓口）にメールで相談が入った場合〜</a:t>
+            </a:r>
+          </a:p>
+        </p:txBody>
+      </p:sp>
+      <p:sp>
+        <p:nvSpPr>
+          <p:cNvPr id="4" name="Rounded Rectangle 3"/>
           <p:cNvSpPr/>
           <p:nvPr/>
         </p:nvSpPr>
         <p:spPr>
           <a:xfrm>
-            <a:off x="360000" y="737999"/>
-            <a:ext cx="6840000" cy="342000"/>
+            <a:off x="306000" y="576000"/>
+            <a:ext cx="6966000" cy="270000"/>
+          </a:xfrm>
+          <a:prstGeom prst="roundRect">
+            <a:avLst>
+              <a:gd name="adj" fmla="val 16000"/>
+            </a:avLst>
+          </a:prstGeom>
+          <a:solidFill>
+            <a:srgbClr val="EAF0F8"/>
+          </a:solidFill>
+          <a:ln w="12700">
+            <a:solidFill>
+              <a:srgbClr val="2F5496"/>
+            </a:solidFill>
+          </a:ln>
+          <a:effectLst/>
+        </p:spPr>
+        <p:style>
+          <a:lnRef idx="1">
+            <a:schemeClr val="accent1"/>
+          </a:lnRef>
+          <a:fillRef idx="3">
+            <a:schemeClr val="accent1"/>
+          </a:fillRef>
+          <a:effectRef idx="2">
+            <a:schemeClr val="accent1"/>
+          </a:effectRef>
+          <a:fontRef idx="minor">
+            <a:schemeClr val="lt1"/>
+          </a:fontRef>
+        </p:style>
+        <p:txBody>
+          <a:bodyPr rtlCol="0" anchor="ctr" wrap="square" lIns="46800" rIns="46800" tIns="21600" bIns="21600"/>
+          <a:lstStyle/>
+          <a:p>
+            <a:pPr algn="ctr">
+              <a:lnSpc>
+                <a:spcPct val="102000"/>
+              </a:lnSpc>
+              <a:spcAft>
+                <a:spcPts val="200"/>
+              </a:spcAft>
+            </a:pPr>
+            <a:r>
+              <a:rPr sz="950" b="1">
+                <a:solidFill>
+                  <a:srgbClr val="2F5496"/>
+                </a:solidFill>
+                <a:latin typeface="Meiryo UI"/>
+                <a:ea typeface="Meiryo UI"/>
+              </a:rPr>
+              <a:t>対応の3原則　① 最優先で即時対応　② 一人で抱え込まず組織で対応　③ 時系列で記録（日時・相手・内容）</a:t>
+            </a:r>
+          </a:p>
+        </p:txBody>
+      </p:sp>
+      <p:sp>
+        <p:nvSpPr>
+          <p:cNvPr id="5" name="Rounded Rectangle 4"/>
+          <p:cNvSpPr/>
+          <p:nvPr/>
+        </p:nvSpPr>
+        <p:spPr>
+          <a:xfrm>
+            <a:off x="306000" y="900000"/>
+            <a:ext cx="6966000" cy="270000"/>
+          </a:xfrm>
+          <a:prstGeom prst="roundRect">
+            <a:avLst>
+              <a:gd name="adj" fmla="val 16000"/>
+            </a:avLst>
+          </a:prstGeom>
+          <a:solidFill>
+            <a:srgbClr val="FDECEC"/>
+          </a:solidFill>
+          <a:ln w="15875">
+            <a:solidFill>
+              <a:srgbClr val="B02121"/>
+            </a:solidFill>
+          </a:ln>
+          <a:effectLst/>
+        </p:spPr>
+        <p:style>
+          <a:lnRef idx="1">
+            <a:schemeClr val="accent1"/>
+          </a:lnRef>
+          <a:fillRef idx="3">
+            <a:schemeClr val="accent1"/>
+          </a:fillRef>
+          <a:effectRef idx="2">
+            <a:schemeClr val="accent1"/>
+          </a:effectRef>
+          <a:fontRef idx="minor">
+            <a:schemeClr val="lt1"/>
+          </a:fontRef>
+        </p:style>
+        <p:txBody>
+          <a:bodyPr rtlCol="0" anchor="ctr" wrap="square" lIns="46800" rIns="46800" tIns="21600" bIns="21600"/>
+          <a:lstStyle/>
+          <a:p>
+            <a:pPr algn="ctr">
+              <a:lnSpc>
+                <a:spcPct val="102000"/>
+              </a:lnSpc>
+              <a:spcAft>
+                <a:spcPts val="200"/>
+              </a:spcAft>
+            </a:pPr>
+            <a:r>
+              <a:rPr sz="950" b="1">
+                <a:solidFill>
+                  <a:srgbClr val="B02121"/>
+                </a:solidFill>
+                <a:latin typeface="Meiryo UI"/>
+                <a:ea typeface="Meiryo UI"/>
+              </a:rPr>
+              <a:t>⚠ 切迫した危険（今まさに実行するおそれ等）が読み取れる場合は、フローと並行して直ちに110番通報</a:t>
+            </a:r>
+          </a:p>
+        </p:txBody>
+      </p:sp>
+      <p:sp>
+        <p:nvSpPr>
+          <p:cNvPr id="6" name="Rectangle 5"/>
+          <p:cNvSpPr/>
+          <p:nvPr/>
+        </p:nvSpPr>
+        <p:spPr>
+          <a:xfrm>
+            <a:off x="306000" y="1278000"/>
+            <a:ext cx="3258000" cy="270000"/>
           </a:xfrm>
           <a:prstGeom prst="rect">
             <a:avLst/>
@@ -3213,132 +3341,26 @@
           </a:fontRef>
         </p:style>
         <p:txBody>
-          <a:bodyPr rtlCol="0" anchor="ctr" wrap="square" lIns="54000" rIns="54000" tIns="28800" bIns="28800"/>
+          <a:bodyPr rtlCol="0" anchor="ctr" wrap="none" lIns="46800" rIns="46800" tIns="21600" bIns="21600"/>
           <a:lstStyle/>
           <a:p>
             <a:pPr algn="ctr">
               <a:lnSpc>
-                <a:spcPct val="105000"/>
+                <a:spcPct val="102000"/>
               </a:lnSpc>
               <a:spcAft>
                 <a:spcPts val="200"/>
               </a:spcAft>
             </a:pPr>
             <a:r>
-              <a:rPr sz="1250" b="1">
+              <a:rPr sz="1000" b="1">
                 <a:solidFill>
                   <a:srgbClr val="FFFFFF"/>
                 </a:solidFill>
                 <a:latin typeface="Meiryo UI"/>
                 <a:ea typeface="Meiryo UI"/>
               </a:rPr>
-              <a:t>フェーズ1　覚知 〜 児童生徒の特定</a:t>
-            </a:r>
-          </a:p>
-        </p:txBody>
-      </p:sp>
-      <p:sp>
-        <p:nvSpPr>
-          <p:cNvPr id="5" name="Rounded Rectangle 4"/>
-          <p:cNvSpPr/>
-          <p:nvPr/>
-        </p:nvSpPr>
-        <p:spPr>
-          <a:xfrm>
-            <a:off x="5903999" y="792000"/>
-            <a:ext cx="1224000" cy="234000"/>
-          </a:xfrm>
-          <a:prstGeom prst="roundRect">
-            <a:avLst/>
-          </a:prstGeom>
-          <a:solidFill>
-            <a:srgbClr val="FFFFFF"/>
-          </a:solidFill>
-          <a:ln w="12700">
-            <a:solidFill>
-              <a:srgbClr val="2F5496"/>
-            </a:solidFill>
-          </a:ln>
-          <a:effectLst/>
-        </p:spPr>
-        <p:style>
-          <a:lnRef idx="1">
-            <a:schemeClr val="accent1"/>
-          </a:lnRef>
-          <a:fillRef idx="3">
-            <a:schemeClr val="accent1"/>
-          </a:fillRef>
-          <a:effectRef idx="2">
-            <a:schemeClr val="accent1"/>
-          </a:effectRef>
-          <a:fontRef idx="minor">
-            <a:schemeClr val="lt1"/>
-          </a:fontRef>
-        </p:style>
-        <p:txBody>
-          <a:bodyPr rtlCol="0" anchor="ctr" wrap="none" lIns="54000" rIns="54000" tIns="28800" bIns="28800"/>
-          <a:lstStyle/>
-          <a:p>
-            <a:pPr algn="ctr">
-              <a:lnSpc>
-                <a:spcPct val="105000"/>
-              </a:lnSpc>
-              <a:spcAft>
-                <a:spcPts val="200"/>
-              </a:spcAft>
-            </a:pPr>
-            <a:r>
-              <a:rPr sz="850" b="1">
-                <a:solidFill>
-                  <a:srgbClr val="2F5496"/>
-                </a:solidFill>
-                <a:latin typeface="Meiryo UI"/>
-                <a:ea typeface="Meiryo UI"/>
-              </a:rPr>
-              <a:t>覚知後 直ちに</a:t>
-            </a:r>
-          </a:p>
-        </p:txBody>
-      </p:sp>
-      <p:sp>
-        <p:nvSpPr>
-          <p:cNvPr id="6" name="TextBox 5"/>
-          <p:cNvSpPr txBox="1"/>
-          <p:nvPr/>
-        </p:nvSpPr>
-        <p:spPr>
-          <a:xfrm>
-            <a:off x="360000" y="10404000"/>
-            <a:ext cx="6840000" cy="216000"/>
-          </a:xfrm>
-          <a:prstGeom prst="rect">
-            <a:avLst/>
-          </a:prstGeom>
-          <a:noFill/>
-        </p:spPr>
-        <p:txBody>
-          <a:bodyPr wrap="square" anchor="t" lIns="54000" rIns="54000" tIns="28800" bIns="28800">
-            <a:spAutoFit/>
-          </a:bodyPr>
-          <a:lstStyle/>
-          <a:p>
-            <a:pPr algn="r">
-              <a:lnSpc>
-                <a:spcPct val="105000"/>
-              </a:lnSpc>
-              <a:spcAft>
-                <a:spcPts val="200"/>
-              </a:spcAft>
-            </a:pPr>
-            <a:r>
-              <a:rPr sz="850" b="0">
-                <a:solidFill>
-                  <a:srgbClr val="8A939E"/>
-                </a:solidFill>
-                <a:latin typeface="Meiryo UI"/>
-                <a:ea typeface="Meiryo UI"/>
-              </a:rPr>
-              <a:t>練馬区教育委員会 教育指導課　　1 / 3</a:t>
+              <a:t>フェーズ1　覚知 〜 児童生徒の特定（覚知後 直ちに）</a:t>
             </a:r>
           </a:p>
         </p:txBody>
@@ -3351,153 +3373,12 @@
         </p:nvSpPr>
         <p:spPr>
           <a:xfrm>
-            <a:off x="360000" y="1170000"/>
-            <a:ext cx="6840000" cy="378000"/>
+            <a:off x="306000" y="1655999"/>
+            <a:ext cx="3258000" cy="684000"/>
           </a:xfrm>
           <a:prstGeom prst="roundRect">
             <a:avLst>
-              <a:gd name="adj" fmla="val 12000"/>
-            </a:avLst>
-          </a:prstGeom>
-          <a:solidFill>
-            <a:srgbClr val="EAF0F8"/>
-          </a:solidFill>
-          <a:ln w="15875">
-            <a:solidFill>
-              <a:srgbClr val="2F5496"/>
-            </a:solidFill>
-          </a:ln>
-          <a:effectLst/>
-        </p:spPr>
-        <p:style>
-          <a:lnRef idx="1">
-            <a:schemeClr val="accent1"/>
-          </a:lnRef>
-          <a:fillRef idx="3">
-            <a:schemeClr val="accent1"/>
-          </a:fillRef>
-          <a:effectRef idx="2">
-            <a:schemeClr val="accent1"/>
-          </a:effectRef>
-          <a:fontRef idx="minor">
-            <a:schemeClr val="lt1"/>
-          </a:fontRef>
-        </p:style>
-        <p:txBody>
-          <a:bodyPr rtlCol="0" anchor="ctr" wrap="square" lIns="54000" rIns="54000" tIns="28800" bIns="28800"/>
-          <a:lstStyle/>
-          <a:p>
-            <a:pPr algn="ctr">
-              <a:lnSpc>
-                <a:spcPct val="105000"/>
-              </a:lnSpc>
-              <a:spcAft>
-                <a:spcPts val="200"/>
-              </a:spcAft>
-            </a:pPr>
-            <a:r>
-              <a:rPr sz="1050" b="1">
-                <a:solidFill>
-                  <a:srgbClr val="2F5496"/>
-                </a:solidFill>
-                <a:latin typeface="Meiryo UI"/>
-                <a:ea typeface="Meiryo UI"/>
-              </a:rPr>
-              <a:t>対応の3原則　① 最優先で即時対応　② 一人で抱え込まず組織で対応　③ 時系列で記録（日時・相手・内容）</a:t>
-            </a:r>
-          </a:p>
-        </p:txBody>
-      </p:sp>
-      <p:sp>
-        <p:nvSpPr>
-          <p:cNvPr id="8" name="Rounded Rectangle 7"/>
-          <p:cNvSpPr/>
-          <p:nvPr/>
-        </p:nvSpPr>
-        <p:spPr>
-          <a:xfrm>
-            <a:off x="360000" y="1638000"/>
-            <a:ext cx="6840000" cy="413999"/>
-          </a:xfrm>
-          <a:prstGeom prst="roundRect">
-            <a:avLst>
-              <a:gd name="adj" fmla="val 10000"/>
-            </a:avLst>
-          </a:prstGeom>
-          <a:solidFill>
-            <a:srgbClr val="FDECEC"/>
-          </a:solidFill>
-          <a:ln w="19050">
-            <a:solidFill>
-              <a:srgbClr val="B02121"/>
-            </a:solidFill>
-          </a:ln>
-          <a:effectLst/>
-        </p:spPr>
-        <p:style>
-          <a:lnRef idx="1">
-            <a:schemeClr val="accent1"/>
-          </a:lnRef>
-          <a:fillRef idx="3">
-            <a:schemeClr val="accent1"/>
-          </a:fillRef>
-          <a:effectRef idx="2">
-            <a:schemeClr val="accent1"/>
-          </a:effectRef>
-          <a:fontRef idx="minor">
-            <a:schemeClr val="lt1"/>
-          </a:fontRef>
-        </p:style>
-        <p:txBody>
-          <a:bodyPr rtlCol="0" anchor="ctr" wrap="square" lIns="54000" rIns="54000" tIns="28800" bIns="28800"/>
-          <a:lstStyle/>
-          <a:p>
-            <a:pPr algn="ctr">
-              <a:lnSpc>
-                <a:spcPct val="105000"/>
-              </a:lnSpc>
-              <a:spcAft>
-                <a:spcPts val="200"/>
-              </a:spcAft>
-            </a:pPr>
-            <a:r>
-              <a:rPr sz="1000" b="1">
-                <a:solidFill>
-                  <a:srgbClr val="B02121"/>
-                </a:solidFill>
-                <a:latin typeface="Meiryo UI"/>
-                <a:ea typeface="Meiryo UI"/>
-              </a:rPr>
-              <a:t>⚠ 相談内容から切迫した危険（今まさに実行するおそれ・具体的な方法や日時の記載）が読み取れる場合は、</a:t>
-            </a:r>
-            <a:br/>
-            <a:r>
-              <a:rPr sz="1000" b="1">
-                <a:solidFill>
-                  <a:srgbClr val="B02121"/>
-                </a:solidFill>
-                <a:latin typeface="Meiryo UI"/>
-                <a:ea typeface="Meiryo UI"/>
-              </a:rPr>
-              <a:t>以下のフローと並行して、直ちに警察（110番）へ通報する。</a:t>
-            </a:r>
-          </a:p>
-        </p:txBody>
-      </p:sp>
-      <p:sp>
-        <p:nvSpPr>
-          <p:cNvPr id="9" name="Rounded Rectangle 8"/>
-          <p:cNvSpPr/>
-          <p:nvPr/>
-        </p:nvSpPr>
-        <p:spPr>
-          <a:xfrm>
-            <a:off x="360000" y="2196000"/>
-            <a:ext cx="4104000" cy="792000"/>
-          </a:xfrm>
-          <a:prstGeom prst="roundRect">
-            <a:avLst>
-              <a:gd name="adj" fmla="val 8000"/>
+              <a:gd name="adj" fmla="val 9000"/>
             </a:avLst>
           </a:prstGeom>
           <a:solidFill>
@@ -3525,19 +3406,19 @@
           </a:fontRef>
         </p:style>
         <p:txBody>
-          <a:bodyPr rtlCol="0" anchor="ctr" wrap="square" lIns="54000" rIns="54000" tIns="28800" bIns="28800"/>
+          <a:bodyPr rtlCol="0" anchor="ctr" wrap="square" lIns="46800" rIns="46800" tIns="21600" bIns="21600"/>
           <a:lstStyle/>
           <a:p>
             <a:pPr algn="l">
               <a:lnSpc>
-                <a:spcPct val="105000"/>
+                <a:spcPct val="102000"/>
               </a:lnSpc>
               <a:spcAft>
-                <a:spcPts val="200"/>
+                <a:spcPts val="100"/>
               </a:spcAft>
             </a:pPr>
             <a:r>
-              <a:rPr sz="950" b="1">
+              <a:rPr sz="850" b="1">
                 <a:solidFill>
                   <a:srgbClr val="B9770E"/>
                 </a:solidFill>
@@ -3550,34 +3431,34 @@
           <a:p>
             <a:pPr algn="l">
               <a:lnSpc>
-                <a:spcPct val="105000"/>
+                <a:spcPct val="102000"/>
               </a:lnSpc>
               <a:spcAft>
-                <a:spcPts val="200"/>
+                <a:spcPts val="100"/>
               </a:spcAft>
             </a:pPr>
             <a:r>
-              <a:rPr sz="1100" b="1">
+              <a:rPr sz="1000" b="1">
                 <a:solidFill>
                   <a:srgbClr val="1F2937"/>
                 </a:solidFill>
                 <a:latin typeface="Meiryo UI"/>
                 <a:ea typeface="Meiryo UI"/>
               </a:rPr>
-              <a:t>こたエール（東京都）に自殺企図に関する相談メールを送信</a:t>
+              <a:t>こたエールに自殺企図に関する相談メールを送信</a:t>
             </a:r>
           </a:p>
           <a:p>
             <a:pPr algn="l">
               <a:lnSpc>
-                <a:spcPct val="105000"/>
+                <a:spcPct val="102000"/>
               </a:lnSpc>
               <a:spcAft>
-                <a:spcPts val="200"/>
+                <a:spcPts val="100"/>
               </a:spcAft>
             </a:pPr>
             <a:r>
-              <a:rPr sz="1000" b="0">
+              <a:rPr sz="900" b="0">
                 <a:solidFill>
                   <a:srgbClr val="1F2937"/>
                 </a:solidFill>
@@ -3591,14 +3472,14 @@
       </p:sp>
       <p:sp>
         <p:nvSpPr>
-          <p:cNvPr id="10" name="Oval 9"/>
+          <p:cNvPr id="8" name="Oval 7"/>
           <p:cNvSpPr/>
           <p:nvPr/>
         </p:nvSpPr>
         <p:spPr>
           <a:xfrm>
-            <a:off x="32399" y="2451600"/>
-            <a:ext cx="280800" cy="280800"/>
+            <a:off x="35999" y="1886400"/>
+            <a:ext cx="223200" cy="223200"/>
           </a:xfrm>
           <a:prstGeom prst="ellipse">
             <a:avLst/>
@@ -3606,7 +3487,7 @@
           <a:solidFill>
             <a:srgbClr val="2F5496"/>
           </a:solidFill>
-          <a:ln w="19050">
+          <a:ln w="15875">
             <a:solidFill>
               <a:srgbClr val="FFFFFF"/>
             </a:solidFill>
@@ -3628,19 +3509,19 @@
           </a:fontRef>
         </p:style>
         <p:txBody>
-          <a:bodyPr rtlCol="0" anchor="ctr" wrap="none" lIns="54000" rIns="54000" tIns="28800" bIns="28800"/>
+          <a:bodyPr rtlCol="0" anchor="ctr" wrap="none" lIns="46800" rIns="46800" tIns="21600" bIns="21600"/>
           <a:lstStyle/>
           <a:p>
             <a:pPr algn="ctr">
               <a:lnSpc>
-                <a:spcPct val="105000"/>
+                <a:spcPct val="102000"/>
               </a:lnSpc>
               <a:spcAft>
                 <a:spcPts val="200"/>
               </a:spcAft>
             </a:pPr>
             <a:r>
-              <a:rPr sz="1200" b="1">
+              <a:rPr sz="1000" b="1">
                 <a:solidFill>
                   <a:srgbClr val="FFFFFF"/>
                 </a:solidFill>
@@ -3648,114 +3529,29 @@
                 <a:ea typeface="Meiryo UI"/>
               </a:rPr>
               <a:t>1</a:t>
-            </a:r>
-          </a:p>
-        </p:txBody>
-      </p:sp>
-      <p:sp>
-        <p:nvSpPr>
-          <p:cNvPr id="11" name="Rounded Rectangle 10"/>
-          <p:cNvSpPr/>
-          <p:nvPr/>
-        </p:nvSpPr>
-        <p:spPr>
-          <a:xfrm>
-            <a:off x="4644000" y="2196000"/>
-            <a:ext cx="2556000" cy="792000"/>
-          </a:xfrm>
-          <a:prstGeom prst="roundRect">
-            <a:avLst>
-              <a:gd name="adj" fmla="val 6000"/>
-            </a:avLst>
-          </a:prstGeom>
-          <a:solidFill>
-            <a:srgbClr val="F4F6F8"/>
-          </a:solidFill>
-          <a:ln w="12700">
-            <a:solidFill>
-              <a:srgbClr val="8A939E"/>
-            </a:solidFill>
-          </a:ln>
-          <a:effectLst/>
-        </p:spPr>
-        <p:style>
-          <a:lnRef idx="1">
-            <a:schemeClr val="accent1"/>
-          </a:lnRef>
-          <a:fillRef idx="3">
-            <a:schemeClr val="accent1"/>
-          </a:fillRef>
-          <a:effectRef idx="2">
-            <a:schemeClr val="accent1"/>
-          </a:effectRef>
-          <a:fontRef idx="minor">
-            <a:schemeClr val="lt1"/>
-          </a:fontRef>
-        </p:style>
-        <p:txBody>
-          <a:bodyPr rtlCol="0" anchor="ctr" wrap="square" lIns="54000" rIns="54000" tIns="28800" bIns="28800"/>
-          <a:lstStyle/>
-          <a:p>
-            <a:pPr algn="l">
-              <a:lnSpc>
-                <a:spcPct val="105000"/>
-              </a:lnSpc>
-              <a:spcAft>
-                <a:spcPts val="200"/>
-              </a:spcAft>
-            </a:pPr>
-            <a:r>
-              <a:rPr sz="900" b="1">
-                <a:solidFill>
-                  <a:srgbClr val="1F2937"/>
-                </a:solidFill>
-                <a:latin typeface="Meiryo UI"/>
-                <a:ea typeface="Meiryo UI"/>
-              </a:rPr>
-              <a:t>こたエール＝東京都のネット・スマホ</a:t>
-            </a:r>
-          </a:p>
-          <a:p>
-            <a:pPr algn="l">
-              <a:lnSpc>
-                <a:spcPct val="105000"/>
-              </a:lnSpc>
-              <a:spcAft>
-                <a:spcPts val="200"/>
-              </a:spcAft>
-            </a:pPr>
-            <a:r>
-              <a:rPr sz="900" b="0">
-                <a:solidFill>
-                  <a:srgbClr val="1F2937"/>
-                </a:solidFill>
-                <a:latin typeface="Meiryo UI"/>
-                <a:ea typeface="Meiryo UI"/>
-              </a:rPr>
-              <a:t>トラブル相談窓口。都内在住・在学・在勤の子供等が電話・メール・LINEで相談できる。</a:t>
             </a:r>
           </a:p>
         </p:txBody>
       </p:sp>
       <p:cxnSp>
         <p:nvCxnSpPr>
-          <p:cNvPr id="12" name="Connector 11"/>
+          <p:cNvPr id="9" name="Connector 8"/>
           <p:cNvCxnSpPr/>
           <p:nvPr/>
         </p:nvCxnSpPr>
         <p:spPr>
           <a:xfrm>
-            <a:off x="4464000" y="2591999"/>
-            <a:ext cx="180000" cy="0"/>
+            <a:off x="1935000" y="2340000"/>
+            <a:ext cx="0" cy="144000"/>
           </a:xfrm>
           <a:prstGeom prst="line">
             <a:avLst/>
           </a:prstGeom>
-          <a:ln w="12700">
+          <a:ln w="22225">
             <a:solidFill>
-              <a:srgbClr val="8A939E"/>
+              <a:srgbClr val="37475A"/>
             </a:solidFill>
-            <a:prstDash val="dash"/>
+            <a:tailEnd type="triangle" w="med" len="med"/>
           </a:ln>
           <a:effectLst/>
         </p:spPr>
@@ -3774,57 +3570,20 @@
           </a:fontRef>
         </p:style>
       </p:cxnSp>
-      <p:cxnSp>
-        <p:nvCxnSpPr>
-          <p:cNvPr id="13" name="Connector 12"/>
-          <p:cNvCxnSpPr/>
-          <p:nvPr/>
-        </p:nvCxnSpPr>
-        <p:spPr>
-          <a:xfrm>
-            <a:off x="2412000" y="2988000"/>
-            <a:ext cx="0" cy="162000"/>
-          </a:xfrm>
-          <a:prstGeom prst="line">
-            <a:avLst/>
-          </a:prstGeom>
-          <a:ln w="25400">
-            <a:solidFill>
-              <a:srgbClr val="37475A"/>
-            </a:solidFill>
-            <a:tailEnd type="triangle" w="med" len="med"/>
-          </a:ln>
-          <a:effectLst/>
-        </p:spPr>
-        <p:style>
-          <a:lnRef idx="2">
-            <a:schemeClr val="accent1"/>
-          </a:lnRef>
-          <a:fillRef idx="0">
-            <a:schemeClr val="accent1"/>
-          </a:fillRef>
-          <a:effectRef idx="1">
-            <a:schemeClr val="accent1"/>
-          </a:effectRef>
-          <a:fontRef idx="minor">
-            <a:schemeClr val="tx1"/>
-          </a:fontRef>
-        </p:style>
-      </p:cxnSp>
-      <p:sp>
-        <p:nvSpPr>
-          <p:cNvPr id="14" name="Rounded Rectangle 13"/>
+      <p:sp>
+        <p:nvSpPr>
+          <p:cNvPr id="10" name="Rounded Rectangle 9"/>
           <p:cNvSpPr/>
           <p:nvPr/>
         </p:nvSpPr>
         <p:spPr>
           <a:xfrm>
-            <a:off x="360000" y="3150000"/>
-            <a:ext cx="4104000" cy="972000"/>
+            <a:off x="306000" y="2466000"/>
+            <a:ext cx="3258000" cy="1080000"/>
           </a:xfrm>
           <a:prstGeom prst="roundRect">
             <a:avLst>
-              <a:gd name="adj" fmla="val 8000"/>
+              <a:gd name="adj" fmla="val 9000"/>
             </a:avLst>
           </a:prstGeom>
           <a:solidFill>
@@ -3852,19 +3611,19 @@
           </a:fontRef>
         </p:style>
         <p:txBody>
-          <a:bodyPr rtlCol="0" anchor="ctr" wrap="square" lIns="54000" rIns="54000" tIns="28800" bIns="28800"/>
+          <a:bodyPr rtlCol="0" anchor="ctr" wrap="square" lIns="46800" rIns="46800" tIns="21600" bIns="21600"/>
           <a:lstStyle/>
           <a:p>
             <a:pPr algn="l">
               <a:lnSpc>
-                <a:spcPct val="105000"/>
+                <a:spcPct val="102000"/>
               </a:lnSpc>
               <a:spcAft>
-                <a:spcPts val="200"/>
+                <a:spcPts val="100"/>
               </a:spcAft>
             </a:pPr>
             <a:r>
-              <a:rPr sz="950" b="1">
+              <a:rPr sz="850" b="1">
                 <a:solidFill>
                   <a:srgbClr val="21618C"/>
                 </a:solidFill>
@@ -3877,14 +3636,14 @@
           <a:p>
             <a:pPr algn="l">
               <a:lnSpc>
-                <a:spcPct val="105000"/>
+                <a:spcPct val="102000"/>
               </a:lnSpc>
               <a:spcAft>
-                <a:spcPts val="200"/>
+                <a:spcPts val="100"/>
               </a:spcAft>
             </a:pPr>
             <a:r>
-              <a:rPr sz="1100" b="1">
+              <a:rPr sz="1000" b="1">
                 <a:solidFill>
                   <a:srgbClr val="1F2937"/>
                 </a:solidFill>
@@ -3897,35 +3656,55 @@
           <a:p>
             <a:pPr algn="l">
               <a:lnSpc>
-                <a:spcPct val="105000"/>
+                <a:spcPct val="102000"/>
               </a:lnSpc>
               <a:spcAft>
-                <a:spcPts val="200"/>
+                <a:spcPts val="100"/>
               </a:spcAft>
             </a:pPr>
             <a:r>
-              <a:rPr sz="1000" b="0">
+              <a:rPr sz="900" b="0">
                 <a:solidFill>
                   <a:srgbClr val="1F2937"/>
                 </a:solidFill>
                 <a:latin typeface="Meiryo UI"/>
                 <a:ea typeface="Meiryo UI"/>
               </a:rPr>
-              <a:t>※区貸与アカウントは外部からのメール受信が制限されており、こたエールから本人に返信できないため、教育委員会へ連絡が入る。</a:t>
-            </a:r>
-          </a:p>
-        </p:txBody>
-      </p:sp>
-      <p:sp>
-        <p:nvSpPr>
-          <p:cNvPr id="15" name="Oval 14"/>
+              <a:t>※区貸与アカウントは外部からの受信が制限され、本人に返信できないため。</a:t>
+            </a:r>
+          </a:p>
+          <a:p>
+            <a:pPr algn="l">
+              <a:lnSpc>
+                <a:spcPct val="102000"/>
+              </a:lnSpc>
+              <a:spcAft>
+                <a:spcPts val="100"/>
+              </a:spcAft>
+            </a:pPr>
+            <a:r>
+              <a:rPr sz="850" b="0">
+                <a:solidFill>
+                  <a:srgbClr val="2F5496"/>
+                </a:solidFill>
+                <a:latin typeface="Meiryo UI"/>
+                <a:ea typeface="Meiryo UI"/>
+              </a:rPr>
+              <a:t>聞き取り：□アドレス □受信日時 □内容（方法・時期の具体性＝切迫度）□氏名・学校の手がかり □折返し先</a:t>
+            </a:r>
+          </a:p>
+        </p:txBody>
+      </p:sp>
+      <p:sp>
+        <p:nvSpPr>
+          <p:cNvPr id="11" name="Oval 10"/>
           <p:cNvSpPr/>
           <p:nvPr/>
         </p:nvSpPr>
         <p:spPr>
           <a:xfrm>
-            <a:off x="32399" y="3495599"/>
-            <a:ext cx="280800" cy="280800"/>
+            <a:off x="35999" y="2894399"/>
+            <a:ext cx="223200" cy="223200"/>
           </a:xfrm>
           <a:prstGeom prst="ellipse">
             <a:avLst/>
@@ -3933,7 +3712,7 @@
           <a:solidFill>
             <a:srgbClr val="2F5496"/>
           </a:solidFill>
-          <a:ln w="19050">
+          <a:ln w="15875">
             <a:solidFill>
               <a:srgbClr val="FFFFFF"/>
             </a:solidFill>
@@ -3955,19 +3734,19 @@
           </a:fontRef>
         </p:style>
         <p:txBody>
-          <a:bodyPr rtlCol="0" anchor="ctr" wrap="none" lIns="54000" rIns="54000" tIns="28800" bIns="28800"/>
+          <a:bodyPr rtlCol="0" anchor="ctr" wrap="none" lIns="46800" rIns="46800" tIns="21600" bIns="21600"/>
           <a:lstStyle/>
           <a:p>
             <a:pPr algn="ctr">
               <a:lnSpc>
-                <a:spcPct val="105000"/>
+                <a:spcPct val="102000"/>
               </a:lnSpc>
               <a:spcAft>
                 <a:spcPts val="200"/>
               </a:spcAft>
             </a:pPr>
             <a:r>
-              <a:rPr sz="1200" b="1">
+              <a:rPr sz="1000" b="1">
                 <a:solidFill>
                   <a:srgbClr val="FFFFFF"/>
                 </a:solidFill>
@@ -3975,158 +3754,29 @@
                 <a:ea typeface="Meiryo UI"/>
               </a:rPr>
               <a:t>2</a:t>
-            </a:r>
-          </a:p>
-        </p:txBody>
-      </p:sp>
-      <p:sp>
-        <p:nvSpPr>
-          <p:cNvPr id="16" name="Rounded Rectangle 15"/>
-          <p:cNvSpPr/>
-          <p:nvPr/>
-        </p:nvSpPr>
-        <p:spPr>
-          <a:xfrm>
-            <a:off x="4644000" y="3150000"/>
-            <a:ext cx="2556000" cy="1116000"/>
-          </a:xfrm>
-          <a:prstGeom prst="roundRect">
-            <a:avLst>
-              <a:gd name="adj" fmla="val 6000"/>
-            </a:avLst>
-          </a:prstGeom>
-          <a:solidFill>
-            <a:srgbClr val="F4F6F8"/>
-          </a:solidFill>
-          <a:ln w="12700">
-            <a:solidFill>
-              <a:srgbClr val="8A939E"/>
-            </a:solidFill>
-          </a:ln>
-          <a:effectLst/>
-        </p:spPr>
-        <p:style>
-          <a:lnRef idx="1">
-            <a:schemeClr val="accent1"/>
-          </a:lnRef>
-          <a:fillRef idx="3">
-            <a:schemeClr val="accent1"/>
-          </a:fillRef>
-          <a:effectRef idx="2">
-            <a:schemeClr val="accent1"/>
-          </a:effectRef>
-          <a:fontRef idx="minor">
-            <a:schemeClr val="lt1"/>
-          </a:fontRef>
-        </p:style>
-        <p:txBody>
-          <a:bodyPr rtlCol="0" anchor="ctr" wrap="square" lIns="54000" rIns="54000" tIns="28800" bIns="28800"/>
-          <a:lstStyle/>
-          <a:p>
-            <a:pPr algn="l">
-              <a:lnSpc>
-                <a:spcPct val="105000"/>
-              </a:lnSpc>
-              <a:spcAft>
-                <a:spcPts val="200"/>
-              </a:spcAft>
-            </a:pPr>
-            <a:r>
-              <a:rPr sz="950" b="1">
-                <a:solidFill>
-                  <a:srgbClr val="2F5496"/>
-                </a:solidFill>
-                <a:latin typeface="Meiryo UI"/>
-                <a:ea typeface="Meiryo UI"/>
-              </a:rPr>
-              <a:t>指導主事が聞き取ること</a:t>
-            </a:r>
-          </a:p>
-          <a:p>
-            <a:pPr algn="l">
-              <a:lnSpc>
-                <a:spcPct val="105000"/>
-              </a:lnSpc>
-              <a:spcAft>
-                <a:spcPts val="200"/>
-              </a:spcAft>
-            </a:pPr>
-            <a:r>
-              <a:rPr sz="900" b="0">
-                <a:solidFill>
-                  <a:srgbClr val="1F2937"/>
-                </a:solidFill>
-                <a:latin typeface="Meiryo UI"/>
-                <a:ea typeface="Meiryo UI"/>
-              </a:rPr>
-              <a:t>□ 相談メールのアドレス</a:t>
-            </a:r>
-            <a:br/>
-            <a:r>
-              <a:rPr sz="900" b="0">
-                <a:solidFill>
-                  <a:srgbClr val="1F2937"/>
-                </a:solidFill>
-                <a:latin typeface="Meiryo UI"/>
-                <a:ea typeface="Meiryo UI"/>
-              </a:rPr>
-              <a:t>□ 受信日時</a:t>
-            </a:r>
-            <a:br/>
-            <a:r>
-              <a:rPr sz="900" b="0">
-                <a:solidFill>
-                  <a:srgbClr val="1F2937"/>
-                </a:solidFill>
-                <a:latin typeface="Meiryo UI"/>
-                <a:ea typeface="Meiryo UI"/>
-              </a:rPr>
-              <a:t>□ 相談内容（方法・時期の具体性＝切迫度）</a:t>
-            </a:r>
-            <a:br/>
-            <a:r>
-              <a:rPr sz="900" b="0">
-                <a:solidFill>
-                  <a:srgbClr val="1F2937"/>
-                </a:solidFill>
-                <a:latin typeface="Meiryo UI"/>
-                <a:ea typeface="Meiryo UI"/>
-              </a:rPr>
-              <a:t>□ 氏名・学校名等の手がかり</a:t>
-            </a:r>
-            <a:br/>
-            <a:r>
-              <a:rPr sz="900" b="0">
-                <a:solidFill>
-                  <a:srgbClr val="1F2937"/>
-                </a:solidFill>
-                <a:latin typeface="Meiryo UI"/>
-                <a:ea typeface="Meiryo UI"/>
-              </a:rPr>
-              <a:t>□ こたエールの対応状況・折返し連絡先</a:t>
             </a:r>
           </a:p>
         </p:txBody>
       </p:sp>
       <p:cxnSp>
         <p:nvCxnSpPr>
-          <p:cNvPr id="17" name="Connector 16"/>
+          <p:cNvPr id="12" name="Connector 11"/>
           <p:cNvCxnSpPr/>
           <p:nvPr/>
         </p:nvCxnSpPr>
         <p:spPr>
           <a:xfrm>
-            <a:off x="4464000" y="3636000"/>
-            <a:ext cx="180000" cy="0"/>
+            <a:off x="1935000" y="3546000"/>
+            <a:ext cx="0" cy="125999"/>
           </a:xfrm>
           <a:prstGeom prst="line">
             <a:avLst/>
           </a:prstGeom>
-          <a:ln w="12700">
+          <a:ln w="22225">
             <a:solidFill>
-              <a:srgbClr val="8A939E"/>
+              <a:srgbClr val="37475A"/>
             </a:solidFill>
-            <a:prstDash val="dash"/>
+            <a:tailEnd type="triangle" w="med" len="med"/>
           </a:ln>
           <a:effectLst/>
         </p:spPr>
@@ -4145,57 +3795,20 @@
           </a:fontRef>
         </p:style>
       </p:cxnSp>
-      <p:cxnSp>
-        <p:nvCxnSpPr>
-          <p:cNvPr id="18" name="Connector 17"/>
-          <p:cNvCxnSpPr/>
-          <p:nvPr/>
-        </p:nvCxnSpPr>
-        <p:spPr>
-          <a:xfrm>
-            <a:off x="2412000" y="4266000"/>
-            <a:ext cx="0" cy="162000"/>
-          </a:xfrm>
-          <a:prstGeom prst="line">
-            <a:avLst/>
-          </a:prstGeom>
-          <a:ln w="25400">
-            <a:solidFill>
-              <a:srgbClr val="37475A"/>
-            </a:solidFill>
-            <a:tailEnd type="triangle" w="med" len="med"/>
-          </a:ln>
-          <a:effectLst/>
-        </p:spPr>
-        <p:style>
-          <a:lnRef idx="2">
-            <a:schemeClr val="accent1"/>
-          </a:lnRef>
-          <a:fillRef idx="0">
-            <a:schemeClr val="accent1"/>
-          </a:fillRef>
-          <a:effectRef idx="1">
-            <a:schemeClr val="accent1"/>
-          </a:effectRef>
-          <a:fontRef idx="minor">
-            <a:schemeClr val="tx1"/>
-          </a:fontRef>
-        </p:style>
-      </p:cxnSp>
-      <p:sp>
-        <p:nvSpPr>
-          <p:cNvPr id="19" name="Rounded Rectangle 18"/>
+      <p:sp>
+        <p:nvSpPr>
+          <p:cNvPr id="13" name="Rounded Rectangle 12"/>
           <p:cNvSpPr/>
           <p:nvPr/>
         </p:nvSpPr>
         <p:spPr>
           <a:xfrm>
-            <a:off x="360000" y="4428000"/>
-            <a:ext cx="4104000" cy="936000"/>
+            <a:off x="306000" y="3671999"/>
+            <a:ext cx="3258000" cy="936000"/>
           </a:xfrm>
           <a:prstGeom prst="roundRect">
             <a:avLst>
-              <a:gd name="adj" fmla="val 8000"/>
+              <a:gd name="adj" fmla="val 9000"/>
             </a:avLst>
           </a:prstGeom>
           <a:solidFill>
@@ -4223,19 +3836,19 @@
           </a:fontRef>
         </p:style>
         <p:txBody>
-          <a:bodyPr rtlCol="0" anchor="ctr" wrap="square" lIns="54000" rIns="54000" tIns="28800" bIns="28800"/>
+          <a:bodyPr rtlCol="0" anchor="ctr" wrap="square" lIns="46800" rIns="46800" tIns="21600" bIns="21600"/>
           <a:lstStyle/>
           <a:p>
             <a:pPr algn="l">
               <a:lnSpc>
-                <a:spcPct val="105000"/>
+                <a:spcPct val="102000"/>
               </a:lnSpc>
               <a:spcAft>
-                <a:spcPts val="200"/>
+                <a:spcPts val="100"/>
               </a:spcAft>
             </a:pPr>
             <a:r>
-              <a:rPr sz="950" b="1">
+              <a:rPr sz="850" b="1">
                 <a:solidFill>
                   <a:srgbClr val="6C3483"/>
                 </a:solidFill>
@@ -4248,55 +3861,55 @@
           <a:p>
             <a:pPr algn="l">
               <a:lnSpc>
-                <a:spcPct val="105000"/>
+                <a:spcPct val="102000"/>
               </a:lnSpc>
               <a:spcAft>
-                <a:spcPts val="200"/>
+                <a:spcPts val="100"/>
               </a:spcAft>
             </a:pPr>
             <a:r>
-              <a:rPr sz="1100" b="1">
+              <a:rPr sz="1000" b="1">
                 <a:solidFill>
                   <a:srgbClr val="1F2937"/>
                 </a:solidFill>
                 <a:latin typeface="Meiryo UI"/>
                 <a:ea typeface="Meiryo UI"/>
               </a:rPr>
-              <a:t>直ちに課内で共有（課長・統括指導主事へ報告）し、時系列記録を開始</a:t>
+              <a:t>直ちに課内で共有し、時系列記録を開始</a:t>
             </a:r>
           </a:p>
           <a:p>
             <a:pPr algn="l">
               <a:lnSpc>
-                <a:spcPct val="105000"/>
+                <a:spcPct val="102000"/>
               </a:lnSpc>
               <a:spcAft>
-                <a:spcPts val="200"/>
+                <a:spcPts val="100"/>
               </a:spcAft>
             </a:pPr>
             <a:r>
-              <a:rPr sz="1000" b="0">
+              <a:rPr sz="900" b="0">
                 <a:solidFill>
                   <a:srgbClr val="1F2937"/>
                 </a:solidFill>
                 <a:latin typeface="Meiryo UI"/>
                 <a:ea typeface="Meiryo UI"/>
               </a:rPr>
-              <a:t>以後の全てのやり取り（日時・相手・内容）を記録する。対応は必ず複数人で行う。</a:t>
-            </a:r>
-          </a:p>
-        </p:txBody>
-      </p:sp>
-      <p:sp>
-        <p:nvSpPr>
-          <p:cNvPr id="20" name="Oval 19"/>
+              <a:t>課長・統括指導主事へ即報告。対応は必ず複数人で。生命・身体の保護に必要な個人情報の提供・取得は本人同意不要（個人情報保護法27条1項2号）。</a:t>
+            </a:r>
+          </a:p>
+        </p:txBody>
+      </p:sp>
+      <p:sp>
+        <p:nvSpPr>
+          <p:cNvPr id="14" name="Oval 13"/>
           <p:cNvSpPr/>
           <p:nvPr/>
         </p:nvSpPr>
         <p:spPr>
           <a:xfrm>
-            <a:off x="32399" y="4755600"/>
-            <a:ext cx="280800" cy="280800"/>
+            <a:off x="35999" y="4028400"/>
+            <a:ext cx="223200" cy="223200"/>
           </a:xfrm>
           <a:prstGeom prst="ellipse">
             <a:avLst/>
@@ -4304,7 +3917,7 @@
           <a:solidFill>
             <a:srgbClr val="2F5496"/>
           </a:solidFill>
-          <a:ln w="19050">
+          <a:ln w="15875">
             <a:solidFill>
               <a:srgbClr val="FFFFFF"/>
             </a:solidFill>
@@ -4326,19 +3939,19 @@
           </a:fontRef>
         </p:style>
         <p:txBody>
-          <a:bodyPr rtlCol="0" anchor="ctr" wrap="none" lIns="54000" rIns="54000" tIns="28800" bIns="28800"/>
+          <a:bodyPr rtlCol="0" anchor="ctr" wrap="none" lIns="46800" rIns="46800" tIns="21600" bIns="21600"/>
           <a:lstStyle/>
           <a:p>
             <a:pPr algn="ctr">
               <a:lnSpc>
-                <a:spcPct val="105000"/>
+                <a:spcPct val="102000"/>
               </a:lnSpc>
               <a:spcAft>
                 <a:spcPts val="200"/>
               </a:spcAft>
             </a:pPr>
             <a:r>
-              <a:rPr sz="1200" b="1">
+              <a:rPr sz="1000" b="1">
                 <a:solidFill>
                   <a:srgbClr val="FFFFFF"/>
                 </a:solidFill>
@@ -4346,114 +3959,29 @@
                 <a:ea typeface="Meiryo UI"/>
               </a:rPr>
               <a:t>3</a:t>
-            </a:r>
-          </a:p>
-        </p:txBody>
-      </p:sp>
-      <p:sp>
-        <p:nvSpPr>
-          <p:cNvPr id="21" name="Rounded Rectangle 20"/>
-          <p:cNvSpPr/>
-          <p:nvPr/>
-        </p:nvSpPr>
-        <p:spPr>
-          <a:xfrm>
-            <a:off x="4644000" y="4428000"/>
-            <a:ext cx="2556000" cy="936000"/>
-          </a:xfrm>
-          <a:prstGeom prst="roundRect">
-            <a:avLst>
-              <a:gd name="adj" fmla="val 6000"/>
-            </a:avLst>
-          </a:prstGeom>
-          <a:solidFill>
-            <a:srgbClr val="F4F6F8"/>
-          </a:solidFill>
-          <a:ln w="12700">
-            <a:solidFill>
-              <a:srgbClr val="8A939E"/>
-            </a:solidFill>
-          </a:ln>
-          <a:effectLst/>
-        </p:spPr>
-        <p:style>
-          <a:lnRef idx="1">
-            <a:schemeClr val="accent1"/>
-          </a:lnRef>
-          <a:fillRef idx="3">
-            <a:schemeClr val="accent1"/>
-          </a:fillRef>
-          <a:effectRef idx="2">
-            <a:schemeClr val="accent1"/>
-          </a:effectRef>
-          <a:fontRef idx="minor">
-            <a:schemeClr val="lt1"/>
-          </a:fontRef>
-        </p:style>
-        <p:txBody>
-          <a:bodyPr rtlCol="0" anchor="ctr" wrap="square" lIns="54000" rIns="54000" tIns="28800" bIns="28800"/>
-          <a:lstStyle/>
-          <a:p>
-            <a:pPr algn="l">
-              <a:lnSpc>
-                <a:spcPct val="105000"/>
-              </a:lnSpc>
-              <a:spcAft>
-                <a:spcPts val="200"/>
-              </a:spcAft>
-            </a:pPr>
-            <a:r>
-              <a:rPr sz="950" b="1">
-                <a:solidFill>
-                  <a:srgbClr val="2F5496"/>
-                </a:solidFill>
-                <a:latin typeface="Meiryo UI"/>
-                <a:ea typeface="Meiryo UI"/>
-              </a:rPr>
-              <a:t>個人情報の共有はためらわない</a:t>
-            </a:r>
-          </a:p>
-          <a:p>
-            <a:pPr algn="l">
-              <a:lnSpc>
-                <a:spcPct val="105000"/>
-              </a:lnSpc>
-              <a:spcAft>
-                <a:spcPts val="200"/>
-              </a:spcAft>
-            </a:pPr>
-            <a:r>
-              <a:rPr sz="900" b="0">
-                <a:solidFill>
-                  <a:srgbClr val="1F2937"/>
-                </a:solidFill>
-                <a:latin typeface="Meiryo UI"/>
-                <a:ea typeface="Meiryo UI"/>
-              </a:rPr>
-              <a:t>人の生命・身体の保護のために必要がある場合、本人（保護者）の同意なく個人情報を提供・取得できる（個人情報保護法第27条第1項第2号）。</a:t>
             </a:r>
           </a:p>
         </p:txBody>
       </p:sp>
       <p:cxnSp>
         <p:nvCxnSpPr>
-          <p:cNvPr id="22" name="Connector 21"/>
+          <p:cNvPr id="15" name="Connector 14"/>
           <p:cNvCxnSpPr/>
           <p:nvPr/>
         </p:nvCxnSpPr>
         <p:spPr>
           <a:xfrm>
-            <a:off x="4464000" y="4896000"/>
-            <a:ext cx="180000" cy="0"/>
+            <a:off x="1935000" y="4608000"/>
+            <a:ext cx="0" cy="125999"/>
           </a:xfrm>
           <a:prstGeom prst="line">
             <a:avLst/>
           </a:prstGeom>
-          <a:ln w="12700">
+          <a:ln w="22225">
             <a:solidFill>
-              <a:srgbClr val="8A939E"/>
+              <a:srgbClr val="37475A"/>
             </a:solidFill>
-            <a:prstDash val="dash"/>
+            <a:tailEnd type="triangle" w="med" len="med"/>
           </a:ln>
           <a:effectLst/>
         </p:spPr>
@@ -4472,57 +4000,20 @@
           </a:fontRef>
         </p:style>
       </p:cxnSp>
-      <p:cxnSp>
-        <p:nvCxnSpPr>
-          <p:cNvPr id="23" name="Connector 22"/>
-          <p:cNvCxnSpPr/>
-          <p:nvPr/>
-        </p:nvCxnSpPr>
-        <p:spPr>
-          <a:xfrm>
-            <a:off x="2412000" y="5364000"/>
-            <a:ext cx="0" cy="162000"/>
-          </a:xfrm>
-          <a:prstGeom prst="line">
-            <a:avLst/>
-          </a:prstGeom>
-          <a:ln w="25400">
-            <a:solidFill>
-              <a:srgbClr val="37475A"/>
-            </a:solidFill>
-            <a:tailEnd type="triangle" w="med" len="med"/>
-          </a:ln>
-          <a:effectLst/>
-        </p:spPr>
-        <p:style>
-          <a:lnRef idx="2">
-            <a:schemeClr val="accent1"/>
-          </a:lnRef>
-          <a:fillRef idx="0">
-            <a:schemeClr val="accent1"/>
-          </a:fillRef>
-          <a:effectRef idx="1">
-            <a:schemeClr val="accent1"/>
-          </a:effectRef>
-          <a:fontRef idx="minor">
-            <a:schemeClr val="tx1"/>
-          </a:fontRef>
-        </p:style>
-      </p:cxnSp>
-      <p:sp>
-        <p:nvSpPr>
-          <p:cNvPr id="24" name="Rounded Rectangle 23"/>
+      <p:sp>
+        <p:nvSpPr>
+          <p:cNvPr id="16" name="Rounded Rectangle 15"/>
           <p:cNvSpPr/>
           <p:nvPr/>
         </p:nvSpPr>
         <p:spPr>
           <a:xfrm>
-            <a:off x="306000" y="5580000"/>
-            <a:ext cx="6948000" cy="1620000"/>
+            <a:off x="262800" y="4734000"/>
+            <a:ext cx="3344400" cy="2034000"/>
           </a:xfrm>
           <a:prstGeom prst="roundRect">
             <a:avLst>
-              <a:gd name="adj" fmla="val 4000"/>
+              <a:gd name="adj" fmla="val 5000"/>
             </a:avLst>
           </a:prstGeom>
           <a:noFill/>
@@ -4558,14 +4049,14 @@
       </p:sp>
       <p:sp>
         <p:nvSpPr>
-          <p:cNvPr id="25" name="Rounded Rectangle 24"/>
+          <p:cNvPr id="17" name="Rounded Rectangle 16"/>
           <p:cNvSpPr/>
           <p:nvPr/>
         </p:nvSpPr>
         <p:spPr>
           <a:xfrm>
-            <a:off x="468000" y="5454000"/>
-            <a:ext cx="1152000" cy="251999"/>
+            <a:off x="396000" y="4626000"/>
+            <a:ext cx="900000" cy="216000"/>
           </a:xfrm>
           <a:prstGeom prst="roundRect">
             <a:avLst/>
@@ -4595,19 +4086,19 @@
           </a:fontRef>
         </p:style>
         <p:txBody>
-          <a:bodyPr rtlCol="0" anchor="ctr" wrap="none" lIns="54000" rIns="54000" tIns="28800" bIns="28800"/>
+          <a:bodyPr rtlCol="0" anchor="ctr" wrap="none" lIns="46800" rIns="46800" tIns="21600" bIns="21600"/>
           <a:lstStyle/>
           <a:p>
             <a:pPr algn="ctr">
               <a:lnSpc>
-                <a:spcPct val="105000"/>
+                <a:spcPct val="102000"/>
               </a:lnSpc>
               <a:spcAft>
                 <a:spcPts val="200"/>
               </a:spcAft>
             </a:pPr>
             <a:r>
-              <a:rPr sz="1050" b="1">
+              <a:rPr sz="900" b="1">
                 <a:solidFill>
                   <a:srgbClr val="C0630C"/>
                 </a:solidFill>
@@ -4621,18 +4112,18 @@
       </p:sp>
       <p:sp>
         <p:nvSpPr>
-          <p:cNvPr id="26" name="Rounded Rectangle 25"/>
+          <p:cNvPr id="18" name="Rounded Rectangle 17"/>
           <p:cNvSpPr/>
           <p:nvPr/>
         </p:nvSpPr>
         <p:spPr>
           <a:xfrm>
-            <a:off x="450000" y="5832000"/>
-            <a:ext cx="3114000" cy="1224000"/>
+            <a:off x="396000" y="4896000"/>
+            <a:ext cx="3078000" cy="827999"/>
           </a:xfrm>
           <a:prstGeom prst="roundRect">
             <a:avLst>
-              <a:gd name="adj" fmla="val 8000"/>
+              <a:gd name="adj" fmla="val 9000"/>
             </a:avLst>
           </a:prstGeom>
           <a:solidFill>
@@ -4660,19 +4151,19 @@
           </a:fontRef>
         </p:style>
         <p:txBody>
-          <a:bodyPr rtlCol="0" anchor="ctr" wrap="square" lIns="54000" rIns="54000" tIns="28800" bIns="28800"/>
+          <a:bodyPr rtlCol="0" anchor="ctr" wrap="square" lIns="46800" rIns="46800" tIns="21600" bIns="21600"/>
           <a:lstStyle/>
           <a:p>
             <a:pPr algn="l">
               <a:lnSpc>
-                <a:spcPct val="105000"/>
+                <a:spcPct val="102000"/>
               </a:lnSpc>
               <a:spcAft>
-                <a:spcPts val="200"/>
+                <a:spcPts val="100"/>
               </a:spcAft>
             </a:pPr>
             <a:r>
-              <a:rPr sz="950" b="1">
+              <a:rPr sz="850" b="1">
                 <a:solidFill>
                   <a:srgbClr val="6C3483"/>
                 </a:solidFill>
@@ -4685,14 +4176,14 @@
           <a:p>
             <a:pPr algn="l">
               <a:lnSpc>
-                <a:spcPct val="105000"/>
+                <a:spcPct val="102000"/>
               </a:lnSpc>
               <a:spcAft>
-                <a:spcPts val="200"/>
+                <a:spcPts val="100"/>
               </a:spcAft>
             </a:pPr>
             <a:r>
-              <a:rPr sz="1050" b="1">
+              <a:rPr sz="1000" b="1">
                 <a:solidFill>
                   <a:srgbClr val="1F2937"/>
                 </a:solidFill>
@@ -4705,35 +4196,35 @@
           <a:p>
             <a:pPr algn="l">
               <a:lnSpc>
-                <a:spcPct val="105000"/>
+                <a:spcPct val="102000"/>
               </a:lnSpc>
               <a:spcAft>
-                <a:spcPts val="200"/>
+                <a:spcPts val="100"/>
               </a:spcAft>
             </a:pPr>
             <a:r>
-              <a:rPr sz="950" b="0">
+              <a:rPr sz="900" b="0">
                 <a:solidFill>
                   <a:srgbClr val="1F2937"/>
                 </a:solidFill>
                 <a:latin typeface="Meiryo UI"/>
                 <a:ea typeface="Meiryo UI"/>
               </a:rPr>
-              <a:t>こたエールから聞き取ったメールアドレスを伝える。区貸与アカウントのため、在籍校・学年・氏名を特定できる。</a:t>
-            </a:r>
-          </a:p>
-        </p:txBody>
-      </p:sp>
-      <p:sp>
-        <p:nvSpPr>
-          <p:cNvPr id="27" name="Oval 26"/>
+              <a:t>メールアドレスを伝達。区貸与アカウントのため在籍校・学年・氏名を特定できる。</a:t>
+            </a:r>
+          </a:p>
+        </p:txBody>
+      </p:sp>
+      <p:sp>
+        <p:nvSpPr>
+          <p:cNvPr id="19" name="Oval 18"/>
           <p:cNvSpPr/>
           <p:nvPr/>
         </p:nvSpPr>
         <p:spPr>
           <a:xfrm>
-            <a:off x="122399" y="6303599"/>
-            <a:ext cx="280800" cy="280800"/>
+            <a:off x="126000" y="5198400"/>
+            <a:ext cx="223200" cy="223200"/>
           </a:xfrm>
           <a:prstGeom prst="ellipse">
             <a:avLst/>
@@ -4741,7 +4232,7 @@
           <a:solidFill>
             <a:srgbClr val="2F5496"/>
           </a:solidFill>
-          <a:ln w="19050">
+          <a:ln w="15875">
             <a:solidFill>
               <a:srgbClr val="FFFFFF"/>
             </a:solidFill>
@@ -4763,19 +4254,19 @@
           </a:fontRef>
         </p:style>
         <p:txBody>
-          <a:bodyPr rtlCol="0" anchor="ctr" wrap="none" lIns="54000" rIns="54000" tIns="28800" bIns="28800"/>
+          <a:bodyPr rtlCol="0" anchor="ctr" wrap="none" lIns="46800" rIns="46800" tIns="21600" bIns="21600"/>
           <a:lstStyle/>
           <a:p>
             <a:pPr algn="ctr">
               <a:lnSpc>
-                <a:spcPct val="105000"/>
+                <a:spcPct val="102000"/>
               </a:lnSpc>
               <a:spcAft>
                 <a:spcPts val="200"/>
               </a:spcAft>
             </a:pPr>
             <a:r>
-              <a:rPr sz="1200" b="1">
+              <a:rPr sz="1000" b="1">
                 <a:solidFill>
                   <a:srgbClr val="FFFFFF"/>
                 </a:solidFill>
@@ -4789,18 +4280,18 @@
       </p:sp>
       <p:sp>
         <p:nvSpPr>
-          <p:cNvPr id="28" name="Rounded Rectangle 27"/>
+          <p:cNvPr id="20" name="Rounded Rectangle 19"/>
           <p:cNvSpPr/>
           <p:nvPr/>
         </p:nvSpPr>
         <p:spPr>
           <a:xfrm>
-            <a:off x="3996000" y="5832000"/>
-            <a:ext cx="3114000" cy="1224000"/>
+            <a:off x="396000" y="5813999"/>
+            <a:ext cx="3078000" cy="827999"/>
           </a:xfrm>
           <a:prstGeom prst="roundRect">
             <a:avLst>
-              <a:gd name="adj" fmla="val 8000"/>
+              <a:gd name="adj" fmla="val 9000"/>
             </a:avLst>
           </a:prstGeom>
           <a:solidFill>
@@ -4828,19 +4319,19 @@
           </a:fontRef>
         </p:style>
         <p:txBody>
-          <a:bodyPr rtlCol="0" anchor="ctr" wrap="square" lIns="54000" rIns="54000" tIns="28800" bIns="28800"/>
+          <a:bodyPr rtlCol="0" anchor="ctr" wrap="square" lIns="46800" rIns="46800" tIns="21600" bIns="21600"/>
           <a:lstStyle/>
           <a:p>
             <a:pPr algn="l">
               <a:lnSpc>
-                <a:spcPct val="105000"/>
+                <a:spcPct val="102000"/>
               </a:lnSpc>
               <a:spcAft>
-                <a:spcPts val="200"/>
+                <a:spcPts val="100"/>
               </a:spcAft>
             </a:pPr>
             <a:r>
-              <a:rPr sz="950" b="1">
+              <a:rPr sz="850" b="1">
                 <a:solidFill>
                   <a:srgbClr val="1E6641"/>
                 </a:solidFill>
@@ -4853,14 +4344,14 @@
           <a:p>
             <a:pPr algn="l">
               <a:lnSpc>
-                <a:spcPct val="105000"/>
+                <a:spcPct val="102000"/>
               </a:lnSpc>
               <a:spcAft>
-                <a:spcPts val="200"/>
+                <a:spcPts val="100"/>
               </a:spcAft>
             </a:pPr>
             <a:r>
-              <a:rPr sz="1050" b="1">
+              <a:rPr sz="1000" b="1">
                 <a:solidFill>
                   <a:srgbClr val="1F2937"/>
                 </a:solidFill>
@@ -4873,14 +4364,14 @@
           <a:p>
             <a:pPr algn="l">
               <a:lnSpc>
-                <a:spcPct val="105000"/>
+                <a:spcPct val="102000"/>
               </a:lnSpc>
               <a:spcAft>
-                <a:spcPts val="200"/>
+                <a:spcPts val="100"/>
               </a:spcAft>
             </a:pPr>
             <a:r>
-              <a:rPr sz="950" b="0">
+              <a:rPr sz="900" b="0">
                 <a:solidFill>
                   <a:srgbClr val="1F2937"/>
                 </a:solidFill>
@@ -4894,14 +4385,14 @@
       </p:sp>
       <p:sp>
         <p:nvSpPr>
-          <p:cNvPr id="29" name="Oval 28"/>
+          <p:cNvPr id="21" name="Oval 20"/>
           <p:cNvSpPr/>
           <p:nvPr/>
         </p:nvSpPr>
         <p:spPr>
           <a:xfrm>
-            <a:off x="3668400" y="6303599"/>
-            <a:ext cx="280800" cy="280800"/>
+            <a:off x="126000" y="6116399"/>
+            <a:ext cx="223200" cy="223200"/>
           </a:xfrm>
           <a:prstGeom prst="ellipse">
             <a:avLst/>
@@ -4909,7 +4400,7 @@
           <a:solidFill>
             <a:srgbClr val="2F5496"/>
           </a:solidFill>
-          <a:ln w="19050">
+          <a:ln w="15875">
             <a:solidFill>
               <a:srgbClr val="FFFFFF"/>
             </a:solidFill>
@@ -4931,19 +4422,19 @@
           </a:fontRef>
         </p:style>
         <p:txBody>
-          <a:bodyPr rtlCol="0" anchor="ctr" wrap="none" lIns="54000" rIns="54000" tIns="28800" bIns="28800"/>
+          <a:bodyPr rtlCol="0" anchor="ctr" wrap="none" lIns="46800" rIns="46800" tIns="21600" bIns="21600"/>
           <a:lstStyle/>
           <a:p>
             <a:pPr algn="ctr">
               <a:lnSpc>
-                <a:spcPct val="105000"/>
+                <a:spcPct val="102000"/>
               </a:lnSpc>
               <a:spcAft>
                 <a:spcPts val="200"/>
               </a:spcAft>
             </a:pPr>
             <a:r>
-              <a:rPr sz="1200" b="1">
+              <a:rPr sz="1000" b="1">
                 <a:solidFill>
                   <a:srgbClr val="FFFFFF"/>
                 </a:solidFill>
@@ -4957,19 +4448,19 @@
       </p:sp>
       <p:cxnSp>
         <p:nvCxnSpPr>
-          <p:cNvPr id="30" name="Connector 29"/>
+          <p:cNvPr id="22" name="Connector 21"/>
           <p:cNvCxnSpPr/>
           <p:nvPr/>
         </p:nvCxnSpPr>
         <p:spPr>
-          <a:xfrm flipH="1">
-            <a:off x="1980000" y="7200000"/>
-            <a:ext cx="27000" cy="324000"/>
+          <a:xfrm>
+            <a:off x="1935000" y="6768000"/>
+            <a:ext cx="0" cy="125999"/>
           </a:xfrm>
           <a:prstGeom prst="line">
             <a:avLst/>
           </a:prstGeom>
-          <a:ln w="25400">
+          <a:ln w="22225">
             <a:solidFill>
               <a:srgbClr val="37475A"/>
             </a:solidFill>
@@ -4992,21 +4483,180 @@
           </a:fontRef>
         </p:style>
       </p:cxnSp>
+      <p:sp>
+        <p:nvSpPr>
+          <p:cNvPr id="23" name="Diamond 22"/>
+          <p:cNvSpPr/>
+          <p:nvPr/>
+        </p:nvSpPr>
+        <p:spPr>
+          <a:xfrm>
+            <a:off x="567000" y="6893999"/>
+            <a:ext cx="2736000" cy="720000"/>
+          </a:xfrm>
+          <a:prstGeom prst="diamond">
+            <a:avLst/>
+          </a:prstGeom>
+          <a:solidFill>
+            <a:srgbClr val="FFFFFF"/>
+          </a:solidFill>
+          <a:ln w="19050">
+            <a:solidFill>
+              <a:srgbClr val="37475A"/>
+            </a:solidFill>
+          </a:ln>
+          <a:effectLst/>
+        </p:spPr>
+        <p:style>
+          <a:lnRef idx="1">
+            <a:schemeClr val="accent1"/>
+          </a:lnRef>
+          <a:fillRef idx="3">
+            <a:schemeClr val="accent1"/>
+          </a:fillRef>
+          <a:effectRef idx="2">
+            <a:schemeClr val="accent1"/>
+          </a:effectRef>
+          <a:fontRef idx="minor">
+            <a:schemeClr val="lt1"/>
+          </a:fontRef>
+        </p:style>
+        <p:txBody>
+          <a:bodyPr rtlCol="0" anchor="ctr" wrap="square" lIns="46800" rIns="46800" tIns="21600" bIns="21600"/>
+          <a:lstStyle/>
+          <a:p>
+            <a:pPr algn="ctr">
+              <a:lnSpc>
+                <a:spcPct val="102000"/>
+              </a:lnSpc>
+              <a:spcAft>
+                <a:spcPts val="200"/>
+              </a:spcAft>
+            </a:pPr>
+            <a:r>
+              <a:rPr sz="1000" b="1">
+                <a:solidFill>
+                  <a:srgbClr val="1F2937"/>
+                </a:solidFill>
+                <a:latin typeface="Meiryo UI"/>
+                <a:ea typeface="Meiryo UI"/>
+              </a:rPr>
+              <a:t>児童生徒を</a:t>
+            </a:r>
+            <a:br/>
+            <a:r>
+              <a:rPr sz="1000" b="1">
+                <a:solidFill>
+                  <a:srgbClr val="1F2937"/>
+                </a:solidFill>
+                <a:latin typeface="Meiryo UI"/>
+                <a:ea typeface="Meiryo UI"/>
+              </a:rPr>
+              <a:t>特定できたか</a:t>
+            </a:r>
+          </a:p>
+        </p:txBody>
+      </p:sp>
+      <p:sp>
+        <p:nvSpPr>
+          <p:cNvPr id="24" name="Rounded Rectangle 23"/>
+          <p:cNvSpPr/>
+          <p:nvPr/>
+        </p:nvSpPr>
+        <p:spPr>
+          <a:xfrm>
+            <a:off x="2015999" y="7740000"/>
+            <a:ext cx="1548000" cy="576000"/>
+          </a:xfrm>
+          <a:prstGeom prst="roundRect">
+            <a:avLst>
+              <a:gd name="adj" fmla="val 10000"/>
+            </a:avLst>
+          </a:prstGeom>
+          <a:solidFill>
+            <a:srgbClr val="F4F6F8"/>
+          </a:solidFill>
+          <a:ln w="12700">
+            <a:solidFill>
+              <a:srgbClr val="37475A"/>
+            </a:solidFill>
+          </a:ln>
+          <a:effectLst/>
+        </p:spPr>
+        <p:style>
+          <a:lnRef idx="1">
+            <a:schemeClr val="accent1"/>
+          </a:lnRef>
+          <a:fillRef idx="3">
+            <a:schemeClr val="accent1"/>
+          </a:fillRef>
+          <a:effectRef idx="2">
+            <a:schemeClr val="accent1"/>
+          </a:effectRef>
+          <a:fontRef idx="minor">
+            <a:schemeClr val="lt1"/>
+          </a:fontRef>
+        </p:style>
+        <p:txBody>
+          <a:bodyPr rtlCol="0" anchor="ctr" wrap="square" lIns="46800" rIns="46800" tIns="21600" bIns="21600"/>
+          <a:lstStyle/>
+          <a:p>
+            <a:pPr algn="l">
+              <a:lnSpc>
+                <a:spcPct val="102000"/>
+              </a:lnSpc>
+              <a:spcAft>
+                <a:spcPts val="200"/>
+              </a:spcAft>
+            </a:pPr>
+            <a:r>
+              <a:rPr sz="950" b="1">
+                <a:solidFill>
+                  <a:srgbClr val="1F2937"/>
+                </a:solidFill>
+                <a:latin typeface="Meiryo UI"/>
+                <a:ea typeface="Meiryo UI"/>
+              </a:rPr>
+              <a:t>照会結果を待つ</a:t>
+            </a:r>
+          </a:p>
+          <a:p>
+            <a:pPr algn="l">
+              <a:lnSpc>
+                <a:spcPct val="102000"/>
+              </a:lnSpc>
+              <a:spcAft>
+                <a:spcPts val="200"/>
+              </a:spcAft>
+            </a:pPr>
+            <a:r>
+              <a:rPr sz="850" b="0">
+                <a:solidFill>
+                  <a:srgbClr val="1F2937"/>
+                </a:solidFill>
+                <a:latin typeface="Meiryo UI"/>
+                <a:ea typeface="Meiryo UI"/>
+              </a:rPr>
+              <a:t>判明し次第、直ちに警察の担当者へ連絡する。</a:t>
+            </a:r>
+          </a:p>
+        </p:txBody>
+      </p:sp>
       <p:cxnSp>
         <p:nvCxnSpPr>
-          <p:cNvPr id="31" name="Connector 30"/>
+          <p:cNvPr id="25" name="Connector 24"/>
           <p:cNvCxnSpPr/>
           <p:nvPr/>
         </p:nvCxnSpPr>
         <p:spPr>
           <a:xfrm flipH="1">
-            <a:off x="2844000" y="7200000"/>
-            <a:ext cx="2709000" cy="324000"/>
+            <a:off x="2790000" y="7253999"/>
+            <a:ext cx="513000" cy="486001"/>
           </a:xfrm>
           <a:prstGeom prst="line">
             <a:avLst/>
           </a:prstGeom>
-          <a:ln w="25400">
+          <a:ln w="22225">
             <a:solidFill>
               <a:srgbClr val="37475A"/>
             </a:solidFill>
@@ -5031,178 +4681,62 @@
       </p:cxnSp>
       <p:sp>
         <p:nvSpPr>
-          <p:cNvPr id="32" name="Diamond 31"/>
-          <p:cNvSpPr/>
+          <p:cNvPr id="26" name="TextBox 25"/>
+          <p:cNvSpPr txBox="1"/>
           <p:nvPr/>
         </p:nvSpPr>
         <p:spPr>
           <a:xfrm>
-            <a:off x="720000" y="7398000"/>
-            <a:ext cx="3384000" cy="972000"/>
-          </a:xfrm>
-          <a:prstGeom prst="diamond">
+            <a:off x="3249000" y="7433999"/>
+            <a:ext cx="648000" cy="180000"/>
+          </a:xfrm>
+          <a:prstGeom prst="rect">
             <a:avLst/>
           </a:prstGeom>
-          <a:solidFill>
-            <a:srgbClr val="FFFFFF"/>
-          </a:solidFill>
-          <a:ln w="22225">
-            <a:solidFill>
-              <a:srgbClr val="37475A"/>
-            </a:solidFill>
-          </a:ln>
-          <a:effectLst/>
-        </p:spPr>
-        <p:style>
-          <a:lnRef idx="1">
-            <a:schemeClr val="accent1"/>
-          </a:lnRef>
-          <a:fillRef idx="3">
-            <a:schemeClr val="accent1"/>
-          </a:fillRef>
-          <a:effectRef idx="2">
-            <a:schemeClr val="accent1"/>
-          </a:effectRef>
-          <a:fontRef idx="minor">
-            <a:schemeClr val="lt1"/>
-          </a:fontRef>
-        </p:style>
-        <p:txBody>
-          <a:bodyPr rtlCol="0" anchor="ctr" wrap="square" lIns="54000" rIns="54000" tIns="28800" bIns="28800"/>
-          <a:lstStyle/>
-          <a:p>
-            <a:pPr algn="ctr">
+          <a:noFill/>
+        </p:spPr>
+        <p:txBody>
+          <a:bodyPr wrap="none" anchor="t" lIns="46800" rIns="46800" tIns="21600" bIns="21600">
+            <a:spAutoFit/>
+          </a:bodyPr>
+          <a:lstStyle/>
+          <a:p>
+            <a:pPr algn="l">
               <a:lnSpc>
-                <a:spcPct val="105000"/>
+                <a:spcPct val="102000"/>
               </a:lnSpc>
               <a:spcAft>
                 <a:spcPts val="200"/>
               </a:spcAft>
             </a:pPr>
             <a:r>
-              <a:rPr sz="1100" b="1">
+              <a:rPr sz="900" b="1">
                 <a:solidFill>
                   <a:srgbClr val="1F2937"/>
                 </a:solidFill>
                 <a:latin typeface="Meiryo UI"/>
                 <a:ea typeface="Meiryo UI"/>
               </a:rPr>
-              <a:t>この時点で児童生徒を</a:t>
-            </a:r>
-            <a:br/>
-            <a:r>
-              <a:rPr sz="1100" b="1">
-                <a:solidFill>
-                  <a:srgbClr val="1F2937"/>
-                </a:solidFill>
-                <a:latin typeface="Meiryo UI"/>
-                <a:ea typeface="Meiryo UI"/>
-              </a:rPr>
-              <a:t>特定できているか</a:t>
-            </a:r>
-          </a:p>
-        </p:txBody>
-      </p:sp>
-      <p:sp>
-        <p:nvSpPr>
-          <p:cNvPr id="33" name="Rounded Rectangle 32"/>
-          <p:cNvSpPr/>
-          <p:nvPr/>
-        </p:nvSpPr>
-        <p:spPr>
-          <a:xfrm>
-            <a:off x="5580000" y="7452000"/>
-            <a:ext cx="1620000" cy="864000"/>
-          </a:xfrm>
-          <a:prstGeom prst="roundRect">
-            <a:avLst>
-              <a:gd name="adj" fmla="val 8000"/>
-            </a:avLst>
-          </a:prstGeom>
-          <a:solidFill>
-            <a:srgbClr val="F4F6F8"/>
-          </a:solidFill>
-          <a:ln w="15875">
-            <a:solidFill>
-              <a:srgbClr val="37475A"/>
-            </a:solidFill>
-          </a:ln>
-          <a:effectLst/>
-        </p:spPr>
-        <p:style>
-          <a:lnRef idx="1">
-            <a:schemeClr val="accent1"/>
-          </a:lnRef>
-          <a:fillRef idx="3">
-            <a:schemeClr val="accent1"/>
-          </a:fillRef>
-          <a:effectRef idx="2">
-            <a:schemeClr val="accent1"/>
-          </a:effectRef>
-          <a:fontRef idx="minor">
-            <a:schemeClr val="lt1"/>
-          </a:fontRef>
-        </p:style>
-        <p:txBody>
-          <a:bodyPr rtlCol="0" anchor="ctr" wrap="square" lIns="54000" rIns="54000" tIns="28800" bIns="28800"/>
-          <a:lstStyle/>
-          <a:p>
-            <a:pPr algn="l">
-              <a:lnSpc>
-                <a:spcPct val="105000"/>
-              </a:lnSpc>
-              <a:spcAft>
-                <a:spcPts val="200"/>
-              </a:spcAft>
-            </a:pPr>
-            <a:r>
-              <a:rPr sz="1050" b="1">
-                <a:solidFill>
-                  <a:srgbClr val="1F2937"/>
-                </a:solidFill>
-                <a:latin typeface="Meiryo UI"/>
-                <a:ea typeface="Meiryo UI"/>
-              </a:rPr>
-              <a:t>照会結果を待つ</a:t>
-            </a:r>
-          </a:p>
-          <a:p>
-            <a:pPr algn="l">
-              <a:lnSpc>
-                <a:spcPct val="105000"/>
-              </a:lnSpc>
-              <a:spcAft>
-                <a:spcPts val="200"/>
-              </a:spcAft>
-            </a:pPr>
-            <a:r>
-              <a:rPr sz="950" b="0">
-                <a:solidFill>
-                  <a:srgbClr val="1F2937"/>
-                </a:solidFill>
-                <a:latin typeface="Meiryo UI"/>
-                <a:ea typeface="Meiryo UI"/>
-              </a:rPr>
-              <a:t>判明し次第、直ちに警察の担当者へ連絡する。</a:t>
+              <a:t>いいえ</a:t>
             </a:r>
           </a:p>
         </p:txBody>
       </p:sp>
       <p:cxnSp>
         <p:nvCxnSpPr>
-          <p:cNvPr id="34" name="Connector 33"/>
+          <p:cNvPr id="27" name="Connector 26"/>
           <p:cNvCxnSpPr/>
           <p:nvPr/>
         </p:nvCxnSpPr>
         <p:spPr>
           <a:xfrm>
-            <a:off x="4104000" y="7884000"/>
-            <a:ext cx="1476000" cy="0"/>
+            <a:off x="1395000" y="7613999"/>
+            <a:ext cx="0" cy="792001"/>
           </a:xfrm>
           <a:prstGeom prst="line">
             <a:avLst/>
           </a:prstGeom>
-          <a:ln w="25400">
+          <a:ln w="22225">
             <a:solidFill>
               <a:srgbClr val="37475A"/>
             </a:solidFill>
@@ -5227,14 +4761,14 @@
       </p:cxnSp>
       <p:sp>
         <p:nvSpPr>
-          <p:cNvPr id="35" name="TextBox 34"/>
+          <p:cNvPr id="28" name="TextBox 27"/>
           <p:cNvSpPr txBox="1"/>
           <p:nvPr/>
         </p:nvSpPr>
         <p:spPr>
           <a:xfrm>
-            <a:off x="4140000" y="7614000"/>
-            <a:ext cx="720000" cy="198000"/>
+            <a:off x="855000" y="7757999"/>
+            <a:ext cx="503999" cy="180000"/>
           </a:xfrm>
           <a:prstGeom prst="rect">
             <a:avLst/>
@@ -5242,47 +4776,47 @@
           <a:noFill/>
         </p:spPr>
         <p:txBody>
-          <a:bodyPr wrap="none" anchor="t" lIns="54000" rIns="54000" tIns="28800" bIns="28800">
+          <a:bodyPr wrap="none" anchor="t" lIns="46800" rIns="46800" tIns="21600" bIns="21600">
             <a:spAutoFit/>
           </a:bodyPr>
           <a:lstStyle/>
           <a:p>
-            <a:pPr algn="l">
+            <a:pPr algn="r">
               <a:lnSpc>
-                <a:spcPct val="105000"/>
+                <a:spcPct val="102000"/>
               </a:lnSpc>
               <a:spcAft>
                 <a:spcPts val="200"/>
               </a:spcAft>
             </a:pPr>
             <a:r>
-              <a:rPr sz="1000" b="1">
+              <a:rPr sz="900" b="1">
                 <a:solidFill>
                   <a:srgbClr val="1F2937"/>
                 </a:solidFill>
                 <a:latin typeface="Meiryo UI"/>
                 <a:ea typeface="Meiryo UI"/>
               </a:rPr>
-              <a:t>いいえ</a:t>
+              <a:t>はい</a:t>
             </a:r>
           </a:p>
         </p:txBody>
       </p:sp>
       <p:cxnSp>
         <p:nvCxnSpPr>
-          <p:cNvPr id="36" name="Connector 35"/>
+          <p:cNvPr id="29" name="Connector 28"/>
           <p:cNvCxnSpPr/>
           <p:nvPr/>
         </p:nvCxnSpPr>
         <p:spPr>
           <a:xfrm>
-            <a:off x="2412000" y="8370000"/>
-            <a:ext cx="0" cy="324000"/>
+            <a:off x="2790000" y="8315999"/>
+            <a:ext cx="0" cy="72001"/>
           </a:xfrm>
           <a:prstGeom prst="line">
             <a:avLst/>
           </a:prstGeom>
-          <a:ln w="25400">
+          <a:ln w="22225">
             <a:solidFill>
               <a:srgbClr val="37475A"/>
             </a:solidFill>
@@ -5307,94 +4841,14 @@
       </p:cxnSp>
       <p:sp>
         <p:nvSpPr>
-          <p:cNvPr id="37" name="TextBox 36"/>
-          <p:cNvSpPr txBox="1"/>
-          <p:nvPr/>
-        </p:nvSpPr>
-        <p:spPr>
-          <a:xfrm>
-            <a:off x="2466000" y="8406000"/>
-            <a:ext cx="900000" cy="216000"/>
-          </a:xfrm>
-          <a:prstGeom prst="rect">
-            <a:avLst/>
-          </a:prstGeom>
-          <a:noFill/>
-        </p:spPr>
-        <p:txBody>
-          <a:bodyPr wrap="none" anchor="t" lIns="54000" rIns="54000" tIns="28800" bIns="28800">
-            <a:spAutoFit/>
-          </a:bodyPr>
-          <a:lstStyle/>
-          <a:p>
-            <a:pPr algn="l">
-              <a:lnSpc>
-                <a:spcPct val="105000"/>
-              </a:lnSpc>
-              <a:spcAft>
-                <a:spcPts val="200"/>
-              </a:spcAft>
-            </a:pPr>
-            <a:r>
-              <a:rPr sz="1000" b="1">
-                <a:solidFill>
-                  <a:srgbClr val="1F2937"/>
-                </a:solidFill>
-                <a:latin typeface="Meiryo UI"/>
-                <a:ea typeface="Meiryo UI"/>
-              </a:rPr>
-              <a:t>はい</a:t>
-            </a:r>
-          </a:p>
-        </p:txBody>
-      </p:sp>
-      <p:cxnSp>
-        <p:nvCxnSpPr>
-          <p:cNvPr id="38" name="Connector 37"/>
-          <p:cNvCxnSpPr/>
-          <p:nvPr/>
-        </p:nvCxnSpPr>
-        <p:spPr>
-          <a:xfrm flipH="1">
-            <a:off x="4031999" y="8316000"/>
-            <a:ext cx="2358001" cy="360000"/>
-          </a:xfrm>
-          <a:prstGeom prst="line">
-            <a:avLst/>
-          </a:prstGeom>
-          <a:ln w="25400">
-            <a:solidFill>
-              <a:srgbClr val="37475A"/>
-            </a:solidFill>
-            <a:tailEnd type="triangle" w="med" len="med"/>
-          </a:ln>
-          <a:effectLst/>
-        </p:spPr>
-        <p:style>
-          <a:lnRef idx="2">
-            <a:schemeClr val="accent1"/>
-          </a:lnRef>
-          <a:fillRef idx="0">
-            <a:schemeClr val="accent1"/>
-          </a:fillRef>
-          <a:effectRef idx="1">
-            <a:schemeClr val="accent1"/>
-          </a:effectRef>
-          <a:fontRef idx="minor">
-            <a:schemeClr val="tx1"/>
-          </a:fontRef>
-        </p:style>
-      </p:cxnSp>
-      <p:sp>
-        <p:nvSpPr>
-          <p:cNvPr id="39" name="Pentagon 38"/>
+          <p:cNvPr id="30" name="Pentagon 29"/>
           <p:cNvSpPr/>
           <p:nvPr/>
         </p:nvSpPr>
         <p:spPr>
           <a:xfrm>
-            <a:off x="432000" y="8694000"/>
-            <a:ext cx="3960000" cy="413999"/>
+            <a:off x="306000" y="8406000"/>
+            <a:ext cx="3258000" cy="342000"/>
           </a:xfrm>
           <a:prstGeom prst="homePlate">
             <a:avLst/>
@@ -5422,207 +4876,40 @@
           </a:fontRef>
         </p:style>
         <p:txBody>
-          <a:bodyPr rtlCol="0" anchor="ctr" wrap="square" lIns="54000" rIns="54000" tIns="28800" bIns="28800"/>
+          <a:bodyPr rtlCol="0" anchor="ctr" wrap="square" lIns="46800" rIns="46800" tIns="21600" bIns="21600"/>
           <a:lstStyle/>
           <a:p>
             <a:pPr algn="ctr">
               <a:lnSpc>
-                <a:spcPct val="105000"/>
+                <a:spcPct val="102000"/>
               </a:lnSpc>
               <a:spcAft>
                 <a:spcPts val="200"/>
               </a:spcAft>
             </a:pPr>
             <a:r>
-              <a:rPr sz="1150" b="1">
+              <a:rPr sz="1050" b="1">
                 <a:solidFill>
                   <a:srgbClr val="FFFFFF"/>
                 </a:solidFill>
                 <a:latin typeface="Meiryo UI"/>
                 <a:ea typeface="Meiryo UI"/>
               </a:rPr>
-              <a:t>特定できたら → フェーズ2（次ページ）へ</a:t>
-            </a:r>
-          </a:p>
-        </p:txBody>
-      </p:sp>
-      <p:sp>
-        <p:nvSpPr>
-          <p:cNvPr id="40" name="TextBox 39"/>
-          <p:cNvSpPr txBox="1"/>
-          <p:nvPr/>
-        </p:nvSpPr>
-        <p:spPr>
-          <a:xfrm>
-            <a:off x="360000" y="9252000"/>
-            <a:ext cx="6840000" cy="936000"/>
-          </a:xfrm>
-          <a:prstGeom prst="rect">
-            <a:avLst/>
-          </a:prstGeom>
-          <a:noFill/>
-        </p:spPr>
-        <p:txBody>
-          <a:bodyPr wrap="square" anchor="t" lIns="54000" rIns="54000" tIns="28800" bIns="28800">
-            <a:spAutoFit/>
-          </a:bodyPr>
-          <a:lstStyle/>
-          <a:p>
-            <a:pPr algn="l">
-              <a:lnSpc>
-                <a:spcPct val="105000"/>
-              </a:lnSpc>
-              <a:spcAft>
-                <a:spcPts val="200"/>
-              </a:spcAft>
-            </a:pPr>
-            <a:r>
-              <a:rPr sz="950" b="0">
-                <a:solidFill>
-                  <a:srgbClr val="1F2937"/>
-                </a:solidFill>
-                <a:latin typeface="Meiryo UI"/>
-                <a:ea typeface="Meiryo UI"/>
-              </a:rPr>
-              <a:t>※ 児童生徒の特定を待つ間も、警察・こたエールとの連絡体制を維持する。特定に時間を要する場合は、その旨を警察に伝える。</a:t>
-            </a:r>
-          </a:p>
-          <a:p>
-            <a:pPr algn="l">
-              <a:lnSpc>
-                <a:spcPct val="105000"/>
-              </a:lnSpc>
-              <a:spcAft>
-                <a:spcPts val="200"/>
-              </a:spcAft>
-            </a:pPr>
-            <a:r>
-              <a:rPr sz="950" b="0">
-                <a:solidFill>
-                  <a:srgbClr val="1F2937"/>
-                </a:solidFill>
-                <a:latin typeface="Meiryo UI"/>
-                <a:ea typeface="Meiryo UI"/>
-              </a:rPr>
-              <a:t>※ 電話でのやり取りは、聞き取った内容を復唱して確認し、直後に記録する。</a:t>
-            </a:r>
-          </a:p>
-        </p:txBody>
-      </p:sp>
-    </p:spTree>
-  </p:cSld>
-  <p:clrMapOvr>
-    <a:masterClrMapping/>
-  </p:clrMapOvr>
-</p:sld>
-</file>
-
-<file path=ppt/slides/slide2.xml><?xml version="1.0" encoding="utf-8"?>
-<p:sld xmlns:a="http://schemas.openxmlformats.org/drawingml/2006/main" xmlns:p="http://schemas.openxmlformats.org/presentationml/2006/main" xmlns:r="http://schemas.openxmlformats.org/officeDocument/2006/relationships">
-  <p:cSld>
-    <p:spTree>
-      <p:nvGrpSpPr>
-        <p:cNvPr id="1" name=""/>
-        <p:cNvGrpSpPr/>
-        <p:nvPr/>
-      </p:nvGrpSpPr>
-      <p:grpSpPr/>
-      <p:sp>
-        <p:nvSpPr>
-          <p:cNvPr id="2" name="TextBox 1"/>
-          <p:cNvSpPr txBox="1"/>
-          <p:nvPr/>
-        </p:nvSpPr>
-        <p:spPr>
-          <a:xfrm>
-            <a:off x="360000" y="144000"/>
-            <a:ext cx="6840000" cy="360000"/>
-          </a:xfrm>
-          <a:prstGeom prst="rect">
-            <a:avLst/>
-          </a:prstGeom>
-          <a:noFill/>
-        </p:spPr>
-        <p:txBody>
-          <a:bodyPr wrap="square" anchor="t" lIns="54000" rIns="54000" tIns="28800" bIns="28800">
-            <a:spAutoFit/>
-          </a:bodyPr>
-          <a:lstStyle/>
-          <a:p>
-            <a:pPr algn="ctr">
-              <a:lnSpc>
-                <a:spcPct val="105000"/>
-              </a:lnSpc>
-              <a:spcAft>
-                <a:spcPts val="200"/>
-              </a:spcAft>
-            </a:pPr>
-            <a:r>
-              <a:rPr sz="1600" b="1">
-                <a:solidFill>
-                  <a:srgbClr val="1F2937"/>
-                </a:solidFill>
-                <a:latin typeface="Meiryo UI"/>
-                <a:ea typeface="Meiryo UI"/>
-              </a:rPr>
-              <a:t>児童生徒の自殺企図に関する相談対応フロー</a:t>
-            </a:r>
-          </a:p>
-        </p:txBody>
-      </p:sp>
-      <p:sp>
-        <p:nvSpPr>
-          <p:cNvPr id="3" name="TextBox 2"/>
-          <p:cNvSpPr txBox="1"/>
-          <p:nvPr/>
-        </p:nvSpPr>
-        <p:spPr>
-          <a:xfrm>
-            <a:off x="360000" y="486000"/>
-            <a:ext cx="6840000" cy="216000"/>
-          </a:xfrm>
-          <a:prstGeom prst="rect">
-            <a:avLst/>
-          </a:prstGeom>
-          <a:noFill/>
-        </p:spPr>
-        <p:txBody>
-          <a:bodyPr wrap="square" anchor="t" lIns="54000" rIns="54000" tIns="28800" bIns="28800">
-            <a:spAutoFit/>
-          </a:bodyPr>
-          <a:lstStyle/>
-          <a:p>
-            <a:pPr algn="ctr">
-              <a:lnSpc>
-                <a:spcPct val="105000"/>
-              </a:lnSpc>
-              <a:spcAft>
-                <a:spcPts val="200"/>
-              </a:spcAft>
-            </a:pPr>
-            <a:r>
-              <a:rPr sz="1000" b="0">
-                <a:solidFill>
-                  <a:srgbClr val="1F2937"/>
-                </a:solidFill>
-                <a:latin typeface="Meiryo UI"/>
-                <a:ea typeface="Meiryo UI"/>
-              </a:rPr>
-              <a:t>〜こたエール（東京都）にメールで相談が入った場合〜</a:t>
-            </a:r>
-          </a:p>
-        </p:txBody>
-      </p:sp>
-      <p:sp>
-        <p:nvSpPr>
-          <p:cNvPr id="4" name="Rectangle 3"/>
+              <a:t>特定できたら → 右の列(フェーズ2)へ</a:t>
+            </a:r>
+          </a:p>
+        </p:txBody>
+      </p:sp>
+      <p:sp>
+        <p:nvSpPr>
+          <p:cNvPr id="31" name="Rectangle 30"/>
           <p:cNvSpPr/>
           <p:nvPr/>
         </p:nvSpPr>
         <p:spPr>
           <a:xfrm>
-            <a:off x="360000" y="737999"/>
-            <a:ext cx="6840000" cy="342000"/>
+            <a:off x="3888000" y="1278000"/>
+            <a:ext cx="3366000" cy="270000"/>
           </a:xfrm>
           <a:prstGeom prst="rect">
             <a:avLst/>
@@ -5650,42 +4937,1591 @@
           </a:fontRef>
         </p:style>
         <p:txBody>
-          <a:bodyPr rtlCol="0" anchor="ctr" wrap="square" lIns="54000" rIns="54000" tIns="28800" bIns="28800"/>
+          <a:bodyPr rtlCol="0" anchor="ctr" wrap="none" lIns="46800" rIns="46800" tIns="21600" bIns="21600"/>
           <a:lstStyle/>
           <a:p>
             <a:pPr algn="ctr">
               <a:lnSpc>
-                <a:spcPct val="105000"/>
+                <a:spcPct val="102000"/>
               </a:lnSpc>
               <a:spcAft>
                 <a:spcPts val="200"/>
               </a:spcAft>
             </a:pPr>
             <a:r>
-              <a:rPr sz="1250" b="1">
+              <a:rPr sz="1000" b="1">
                 <a:solidFill>
                   <a:srgbClr val="FFFFFF"/>
                 </a:solidFill>
                 <a:latin typeface="Meiryo UI"/>
                 <a:ea typeface="Meiryo UI"/>
               </a:rPr>
-              <a:t>フェーズ2　警察との連携 〜 安否確認</a:t>
-            </a:r>
-          </a:p>
-        </p:txBody>
-      </p:sp>
-      <p:sp>
-        <p:nvSpPr>
-          <p:cNvPr id="5" name="Rounded Rectangle 4"/>
+              <a:t>フェーズ2　警察との連携 〜 安否確認（特定後 直ちに）</a:t>
+            </a:r>
+          </a:p>
+        </p:txBody>
+      </p:sp>
+      <p:cxnSp>
+        <p:nvCxnSpPr>
+          <p:cNvPr id="32" name="Connector 31"/>
+          <p:cNvCxnSpPr/>
+          <p:nvPr/>
+        </p:nvCxnSpPr>
+        <p:spPr>
+          <a:xfrm>
+            <a:off x="5571000" y="1548000"/>
+            <a:ext cx="0" cy="126000"/>
+          </a:xfrm>
+          <a:prstGeom prst="line">
+            <a:avLst/>
+          </a:prstGeom>
+          <a:ln w="22225">
+            <a:solidFill>
+              <a:srgbClr val="37475A"/>
+            </a:solidFill>
+            <a:tailEnd type="triangle" w="med" len="med"/>
+          </a:ln>
+          <a:effectLst/>
+        </p:spPr>
+        <p:style>
+          <a:lnRef idx="2">
+            <a:schemeClr val="accent1"/>
+          </a:lnRef>
+          <a:fillRef idx="0">
+            <a:schemeClr val="accent1"/>
+          </a:fillRef>
+          <a:effectRef idx="1">
+            <a:schemeClr val="accent1"/>
+          </a:effectRef>
+          <a:fontRef idx="minor">
+            <a:schemeClr val="tx1"/>
+          </a:fontRef>
+        </p:style>
+      </p:cxnSp>
+      <p:sp>
+        <p:nvSpPr>
+          <p:cNvPr id="33" name="Rounded Rectangle 32"/>
           <p:cNvSpPr/>
           <p:nvPr/>
         </p:nvSpPr>
         <p:spPr>
           <a:xfrm>
-            <a:off x="5903999" y="792000"/>
-            <a:ext cx="1224000" cy="234000"/>
+            <a:off x="3888000" y="1674000"/>
+            <a:ext cx="3366000" cy="1080000"/>
           </a:xfrm>
           <a:prstGeom prst="roundRect">
+            <a:avLst>
+              <a:gd name="adj" fmla="val 9000"/>
+            </a:avLst>
+          </a:prstGeom>
+          <a:solidFill>
+            <a:srgbClr val="E8DAEF"/>
+          </a:solidFill>
+          <a:ln w="19050">
+            <a:solidFill>
+              <a:srgbClr val="6C3483"/>
+            </a:solidFill>
+          </a:ln>
+          <a:effectLst/>
+        </p:spPr>
+        <p:style>
+          <a:lnRef idx="1">
+            <a:schemeClr val="accent1"/>
+          </a:lnRef>
+          <a:fillRef idx="3">
+            <a:schemeClr val="accent1"/>
+          </a:fillRef>
+          <a:effectRef idx="2">
+            <a:schemeClr val="accent1"/>
+          </a:effectRef>
+          <a:fontRef idx="minor">
+            <a:schemeClr val="lt1"/>
+          </a:fontRef>
+        </p:style>
+        <p:txBody>
+          <a:bodyPr rtlCol="0" anchor="ctr" wrap="square" lIns="46800" rIns="46800" tIns="21600" bIns="21600"/>
+          <a:lstStyle/>
+          <a:p>
+            <a:pPr algn="l">
+              <a:lnSpc>
+                <a:spcPct val="102000"/>
+              </a:lnSpc>
+              <a:spcAft>
+                <a:spcPts val="100"/>
+              </a:spcAft>
+            </a:pPr>
+            <a:r>
+              <a:rPr sz="850" b="1">
+                <a:solidFill>
+                  <a:srgbClr val="6C3483"/>
+                </a:solidFill>
+                <a:latin typeface="Meiryo UI"/>
+                <a:ea typeface="Meiryo UI"/>
+              </a:rPr>
+              <a:t>【教育指導課 指導主事】</a:t>
+            </a:r>
+          </a:p>
+          <a:p>
+            <a:pPr algn="l">
+              <a:lnSpc>
+                <a:spcPct val="102000"/>
+              </a:lnSpc>
+              <a:spcAft>
+                <a:spcPts val="100"/>
+              </a:spcAft>
+            </a:pPr>
+            <a:r>
+              <a:rPr sz="1000" b="1">
+                <a:solidFill>
+                  <a:srgbClr val="1F2937"/>
+                </a:solidFill>
+                <a:latin typeface="Meiryo UI"/>
+                <a:ea typeface="Meiryo UI"/>
+              </a:rPr>
+              <a:t>警察へ ①学校名 ②学年 ③氏名 を伝える</a:t>
+            </a:r>
+          </a:p>
+          <a:p>
+            <a:pPr algn="l">
+              <a:lnSpc>
+                <a:spcPct val="102000"/>
+              </a:lnSpc>
+              <a:spcAft>
+                <a:spcPts val="100"/>
+              </a:spcAft>
+            </a:pPr>
+            <a:r>
+              <a:rPr sz="900" b="0">
+                <a:solidFill>
+                  <a:srgbClr val="1F2937"/>
+                </a:solidFill>
+                <a:latin typeface="Meiryo UI"/>
+                <a:ea typeface="Meiryo UI"/>
+              </a:rPr>
+              <a:t>警察が当該校へ連絡する前に、指導主事から当該校へ事前連絡する旨を伝え、当該校に何を伝えるべきか助言をもらう。</a:t>
+            </a:r>
+          </a:p>
+          <a:p>
+            <a:pPr algn="l">
+              <a:lnSpc>
+                <a:spcPct val="102000"/>
+              </a:lnSpc>
+              <a:spcAft>
+                <a:spcPts val="100"/>
+              </a:spcAft>
+            </a:pPr>
+            <a:r>
+              <a:rPr sz="850" b="0">
+                <a:solidFill>
+                  <a:srgbClr val="C0630C"/>
+                </a:solidFill>
+                <a:latin typeface="Meiryo UI"/>
+                <a:ea typeface="Meiryo UI"/>
+              </a:rPr>
+              <a:t>助言の例：事前に保護者に連絡しておく／保護者からの虐待が疑われるため、警察が連絡するまでは何もしない　等</a:t>
+            </a:r>
+          </a:p>
+        </p:txBody>
+      </p:sp>
+      <p:sp>
+        <p:nvSpPr>
+          <p:cNvPr id="34" name="Oval 33"/>
+          <p:cNvSpPr/>
+          <p:nvPr/>
+        </p:nvSpPr>
+        <p:spPr>
+          <a:xfrm>
+            <a:off x="3618000" y="2102400"/>
+            <a:ext cx="223200" cy="223200"/>
+          </a:xfrm>
+          <a:prstGeom prst="ellipse">
+            <a:avLst/>
+          </a:prstGeom>
+          <a:solidFill>
+            <a:srgbClr val="2F5496"/>
+          </a:solidFill>
+          <a:ln w="15875">
+            <a:solidFill>
+              <a:srgbClr val="FFFFFF"/>
+            </a:solidFill>
+          </a:ln>
+          <a:effectLst/>
+        </p:spPr>
+        <p:style>
+          <a:lnRef idx="1">
+            <a:schemeClr val="accent1"/>
+          </a:lnRef>
+          <a:fillRef idx="3">
+            <a:schemeClr val="accent1"/>
+          </a:fillRef>
+          <a:effectRef idx="2">
+            <a:schemeClr val="accent1"/>
+          </a:effectRef>
+          <a:fontRef idx="minor">
+            <a:schemeClr val="lt1"/>
+          </a:fontRef>
+        </p:style>
+        <p:txBody>
+          <a:bodyPr rtlCol="0" anchor="ctr" wrap="none" lIns="46800" rIns="46800" tIns="21600" bIns="21600"/>
+          <a:lstStyle/>
+          <a:p>
+            <a:pPr algn="ctr">
+              <a:lnSpc>
+                <a:spcPct val="102000"/>
+              </a:lnSpc>
+              <a:spcAft>
+                <a:spcPts val="200"/>
+              </a:spcAft>
+            </a:pPr>
+            <a:r>
+              <a:rPr sz="1000" b="1">
+                <a:solidFill>
+                  <a:srgbClr val="FFFFFF"/>
+                </a:solidFill>
+                <a:latin typeface="Meiryo UI"/>
+                <a:ea typeface="Meiryo UI"/>
+              </a:rPr>
+              <a:t>6</a:t>
+            </a:r>
+          </a:p>
+        </p:txBody>
+      </p:sp>
+      <p:cxnSp>
+        <p:nvCxnSpPr>
+          <p:cNvPr id="35" name="Connector 34"/>
+          <p:cNvCxnSpPr/>
+          <p:nvPr/>
+        </p:nvCxnSpPr>
+        <p:spPr>
+          <a:xfrm>
+            <a:off x="5571000" y="2754000"/>
+            <a:ext cx="0" cy="126000"/>
+          </a:xfrm>
+          <a:prstGeom prst="line">
+            <a:avLst/>
+          </a:prstGeom>
+          <a:ln w="22225">
+            <a:solidFill>
+              <a:srgbClr val="37475A"/>
+            </a:solidFill>
+            <a:tailEnd type="triangle" w="med" len="med"/>
+          </a:ln>
+          <a:effectLst/>
+        </p:spPr>
+        <p:style>
+          <a:lnRef idx="2">
+            <a:schemeClr val="accent1"/>
+          </a:lnRef>
+          <a:fillRef idx="0">
+            <a:schemeClr val="accent1"/>
+          </a:fillRef>
+          <a:effectRef idx="1">
+            <a:schemeClr val="accent1"/>
+          </a:effectRef>
+          <a:fontRef idx="minor">
+            <a:schemeClr val="tx1"/>
+          </a:fontRef>
+        </p:style>
+      </p:cxnSp>
+      <p:sp>
+        <p:nvSpPr>
+          <p:cNvPr id="36" name="Rounded Rectangle 35"/>
+          <p:cNvSpPr/>
+          <p:nvPr/>
+        </p:nvSpPr>
+        <p:spPr>
+          <a:xfrm>
+            <a:off x="3888000" y="2880000"/>
+            <a:ext cx="3366000" cy="1188000"/>
+          </a:xfrm>
+          <a:prstGeom prst="roundRect">
+            <a:avLst>
+              <a:gd name="adj" fmla="val 9000"/>
+            </a:avLst>
+          </a:prstGeom>
+          <a:solidFill>
+            <a:srgbClr val="E8DAEF"/>
+          </a:solidFill>
+          <a:ln w="19050">
+            <a:solidFill>
+              <a:srgbClr val="6C3483"/>
+            </a:solidFill>
+          </a:ln>
+          <a:effectLst/>
+        </p:spPr>
+        <p:style>
+          <a:lnRef idx="1">
+            <a:schemeClr val="accent1"/>
+          </a:lnRef>
+          <a:fillRef idx="3">
+            <a:schemeClr val="accent1"/>
+          </a:fillRef>
+          <a:effectRef idx="2">
+            <a:schemeClr val="accent1"/>
+          </a:effectRef>
+          <a:fontRef idx="minor">
+            <a:schemeClr val="lt1"/>
+          </a:fontRef>
+        </p:style>
+        <p:txBody>
+          <a:bodyPr rtlCol="0" anchor="ctr" wrap="square" lIns="46800" rIns="46800" tIns="21600" bIns="21600"/>
+          <a:lstStyle/>
+          <a:p>
+            <a:pPr algn="l">
+              <a:lnSpc>
+                <a:spcPct val="102000"/>
+              </a:lnSpc>
+              <a:spcAft>
+                <a:spcPts val="100"/>
+              </a:spcAft>
+            </a:pPr>
+            <a:r>
+              <a:rPr sz="850" b="1">
+                <a:solidFill>
+                  <a:srgbClr val="6C3483"/>
+                </a:solidFill>
+                <a:latin typeface="Meiryo UI"/>
+                <a:ea typeface="Meiryo UI"/>
+              </a:rPr>
+              <a:t>【教育指導課 指導主事】</a:t>
+            </a:r>
+          </a:p>
+          <a:p>
+            <a:pPr algn="l">
+              <a:lnSpc>
+                <a:spcPct val="102000"/>
+              </a:lnSpc>
+              <a:spcAft>
+                <a:spcPts val="100"/>
+              </a:spcAft>
+            </a:pPr>
+            <a:r>
+              <a:rPr sz="1000" b="1">
+                <a:solidFill>
+                  <a:srgbClr val="1F2937"/>
+                </a:solidFill>
+                <a:latin typeface="Meiryo UI"/>
+                <a:ea typeface="Meiryo UI"/>
+              </a:rPr>
+              <a:t>当該校の校長（不在時は副校長）へ電話で事前連絡</a:t>
+            </a:r>
+          </a:p>
+          <a:p>
+            <a:pPr algn="l">
+              <a:lnSpc>
+                <a:spcPct val="102000"/>
+              </a:lnSpc>
+              <a:spcAft>
+                <a:spcPts val="100"/>
+              </a:spcAft>
+            </a:pPr>
+            <a:r>
+              <a:rPr sz="900" b="0">
+                <a:solidFill>
+                  <a:srgbClr val="1F2937"/>
+                </a:solidFill>
+                <a:latin typeface="Meiryo UI"/>
+                <a:ea typeface="Meiryo UI"/>
+              </a:rPr>
+              <a:t>・警察から在籍確認の連絡が入ること</a:t>
+            </a:r>
+            <a:br/>
+            <a:r>
+              <a:rPr sz="900" b="0">
+                <a:solidFill>
+                  <a:srgbClr val="1F2937"/>
+                </a:solidFill>
+                <a:latin typeface="Meiryo UI"/>
+                <a:ea typeface="Meiryo UI"/>
+              </a:rPr>
+              <a:t>・警察の助言に基づく対応方法（保護者への連絡の要否 等）</a:t>
+            </a:r>
+            <a:br/>
+            <a:r>
+              <a:rPr sz="900" b="0">
+                <a:solidFill>
+                  <a:srgbClr val="1F2937"/>
+                </a:solidFill>
+                <a:latin typeface="Meiryo UI"/>
+                <a:ea typeface="Meiryo UI"/>
+              </a:rPr>
+              <a:t>・校内で知る教職員は必要最小限にとどめること</a:t>
+            </a:r>
+          </a:p>
+          <a:p>
+            <a:pPr algn="l">
+              <a:lnSpc>
+                <a:spcPct val="102000"/>
+              </a:lnSpc>
+              <a:spcAft>
+                <a:spcPts val="100"/>
+              </a:spcAft>
+            </a:pPr>
+            <a:r>
+              <a:rPr sz="850" b="0">
+                <a:solidFill>
+                  <a:srgbClr val="B02121"/>
+                </a:solidFill>
+                <a:latin typeface="Meiryo UI"/>
+                <a:ea typeface="Meiryo UI"/>
+              </a:rPr>
+              <a:t>※虐待疑い時は保護者に連絡せず、子供家庭支援センター・児童相談所へ通告（児童虐待防止法6条）</a:t>
+            </a:r>
+          </a:p>
+        </p:txBody>
+      </p:sp>
+      <p:sp>
+        <p:nvSpPr>
+          <p:cNvPr id="37" name="Oval 36"/>
+          <p:cNvSpPr/>
+          <p:nvPr/>
+        </p:nvSpPr>
+        <p:spPr>
+          <a:xfrm>
+            <a:off x="3618000" y="3362400"/>
+            <a:ext cx="223200" cy="223200"/>
+          </a:xfrm>
+          <a:prstGeom prst="ellipse">
+            <a:avLst/>
+          </a:prstGeom>
+          <a:solidFill>
+            <a:srgbClr val="2F5496"/>
+          </a:solidFill>
+          <a:ln w="15875">
+            <a:solidFill>
+              <a:srgbClr val="FFFFFF"/>
+            </a:solidFill>
+          </a:ln>
+          <a:effectLst/>
+        </p:spPr>
+        <p:style>
+          <a:lnRef idx="1">
+            <a:schemeClr val="accent1"/>
+          </a:lnRef>
+          <a:fillRef idx="3">
+            <a:schemeClr val="accent1"/>
+          </a:fillRef>
+          <a:effectRef idx="2">
+            <a:schemeClr val="accent1"/>
+          </a:effectRef>
+          <a:fontRef idx="minor">
+            <a:schemeClr val="lt1"/>
+          </a:fontRef>
+        </p:style>
+        <p:txBody>
+          <a:bodyPr rtlCol="0" anchor="ctr" wrap="none" lIns="46800" rIns="46800" tIns="21600" bIns="21600"/>
+          <a:lstStyle/>
+          <a:p>
+            <a:pPr algn="ctr">
+              <a:lnSpc>
+                <a:spcPct val="102000"/>
+              </a:lnSpc>
+              <a:spcAft>
+                <a:spcPts val="200"/>
+              </a:spcAft>
+            </a:pPr>
+            <a:r>
+              <a:rPr sz="1000" b="1">
+                <a:solidFill>
+                  <a:srgbClr val="FFFFFF"/>
+                </a:solidFill>
+                <a:latin typeface="Meiryo UI"/>
+                <a:ea typeface="Meiryo UI"/>
+              </a:rPr>
+              <a:t>7</a:t>
+            </a:r>
+          </a:p>
+        </p:txBody>
+      </p:sp>
+      <p:cxnSp>
+        <p:nvCxnSpPr>
+          <p:cNvPr id="38" name="Connector 37"/>
+          <p:cNvCxnSpPr/>
+          <p:nvPr/>
+        </p:nvCxnSpPr>
+        <p:spPr>
+          <a:xfrm>
+            <a:off x="5571000" y="4068000"/>
+            <a:ext cx="0" cy="126000"/>
+          </a:xfrm>
+          <a:prstGeom prst="line">
+            <a:avLst/>
+          </a:prstGeom>
+          <a:ln w="22225">
+            <a:solidFill>
+              <a:srgbClr val="37475A"/>
+            </a:solidFill>
+            <a:tailEnd type="triangle" w="med" len="med"/>
+          </a:ln>
+          <a:effectLst/>
+        </p:spPr>
+        <p:style>
+          <a:lnRef idx="2">
+            <a:schemeClr val="accent1"/>
+          </a:lnRef>
+          <a:fillRef idx="0">
+            <a:schemeClr val="accent1"/>
+          </a:fillRef>
+          <a:effectRef idx="1">
+            <a:schemeClr val="accent1"/>
+          </a:effectRef>
+          <a:fontRef idx="minor">
+            <a:schemeClr val="tx1"/>
+          </a:fontRef>
+        </p:style>
+      </p:cxnSp>
+      <p:sp>
+        <p:nvSpPr>
+          <p:cNvPr id="39" name="Rounded Rectangle 38"/>
+          <p:cNvSpPr/>
+          <p:nvPr/>
+        </p:nvSpPr>
+        <p:spPr>
+          <a:xfrm>
+            <a:off x="3888000" y="4194000"/>
+            <a:ext cx="3366000" cy="684000"/>
+          </a:xfrm>
+          <a:prstGeom prst="roundRect">
+            <a:avLst>
+              <a:gd name="adj" fmla="val 9000"/>
+            </a:avLst>
+          </a:prstGeom>
+          <a:solidFill>
+            <a:srgbClr val="D1E7DD"/>
+          </a:solidFill>
+          <a:ln w="19050">
+            <a:solidFill>
+              <a:srgbClr val="1E6641"/>
+            </a:solidFill>
+          </a:ln>
+          <a:effectLst/>
+        </p:spPr>
+        <p:style>
+          <a:lnRef idx="1">
+            <a:schemeClr val="accent1"/>
+          </a:lnRef>
+          <a:fillRef idx="3">
+            <a:schemeClr val="accent1"/>
+          </a:fillRef>
+          <a:effectRef idx="2">
+            <a:schemeClr val="accent1"/>
+          </a:effectRef>
+          <a:fontRef idx="minor">
+            <a:schemeClr val="lt1"/>
+          </a:fontRef>
+        </p:style>
+        <p:txBody>
+          <a:bodyPr rtlCol="0" anchor="ctr" wrap="square" lIns="46800" rIns="46800" tIns="21600" bIns="21600"/>
+          <a:lstStyle/>
+          <a:p>
+            <a:pPr algn="l">
+              <a:lnSpc>
+                <a:spcPct val="102000"/>
+              </a:lnSpc>
+              <a:spcAft>
+                <a:spcPts val="100"/>
+              </a:spcAft>
+            </a:pPr>
+            <a:r>
+              <a:rPr sz="850" b="1">
+                <a:solidFill>
+                  <a:srgbClr val="1E6641"/>
+                </a:solidFill>
+                <a:latin typeface="Meiryo UI"/>
+                <a:ea typeface="Meiryo UI"/>
+              </a:rPr>
+              <a:t>【警察署（練馬区内管轄）】</a:t>
+            </a:r>
+          </a:p>
+          <a:p>
+            <a:pPr algn="l">
+              <a:lnSpc>
+                <a:spcPct val="102000"/>
+              </a:lnSpc>
+              <a:spcAft>
+                <a:spcPts val="100"/>
+              </a:spcAft>
+            </a:pPr>
+            <a:r>
+              <a:rPr sz="1000" b="1">
+                <a:solidFill>
+                  <a:srgbClr val="1F2937"/>
+                </a:solidFill>
+                <a:latin typeface="Meiryo UI"/>
+                <a:ea typeface="Meiryo UI"/>
+              </a:rPr>
+              <a:t>当該校へ連絡し、在籍確認</a:t>
+            </a:r>
+          </a:p>
+          <a:p>
+            <a:pPr algn="l">
+              <a:lnSpc>
+                <a:spcPct val="102000"/>
+              </a:lnSpc>
+              <a:spcAft>
+                <a:spcPts val="100"/>
+              </a:spcAft>
+            </a:pPr>
+            <a:r>
+              <a:rPr sz="900" b="0">
+                <a:solidFill>
+                  <a:srgbClr val="1F2937"/>
+                </a:solidFill>
+                <a:latin typeface="Meiryo UI"/>
+                <a:ea typeface="Meiryo UI"/>
+              </a:rPr>
+              <a:t>在籍していれば ①氏名 ②保護者の連絡先 ③住所 を確認する。</a:t>
+            </a:r>
+          </a:p>
+        </p:txBody>
+      </p:sp>
+      <p:sp>
+        <p:nvSpPr>
+          <p:cNvPr id="40" name="Oval 39"/>
+          <p:cNvSpPr/>
+          <p:nvPr/>
+        </p:nvSpPr>
+        <p:spPr>
+          <a:xfrm>
+            <a:off x="3618000" y="4424400"/>
+            <a:ext cx="223200" cy="223200"/>
+          </a:xfrm>
+          <a:prstGeom prst="ellipse">
+            <a:avLst/>
+          </a:prstGeom>
+          <a:solidFill>
+            <a:srgbClr val="2F5496"/>
+          </a:solidFill>
+          <a:ln w="15875">
+            <a:solidFill>
+              <a:srgbClr val="FFFFFF"/>
+            </a:solidFill>
+          </a:ln>
+          <a:effectLst/>
+        </p:spPr>
+        <p:style>
+          <a:lnRef idx="1">
+            <a:schemeClr val="accent1"/>
+          </a:lnRef>
+          <a:fillRef idx="3">
+            <a:schemeClr val="accent1"/>
+          </a:fillRef>
+          <a:effectRef idx="2">
+            <a:schemeClr val="accent1"/>
+          </a:effectRef>
+          <a:fontRef idx="minor">
+            <a:schemeClr val="lt1"/>
+          </a:fontRef>
+        </p:style>
+        <p:txBody>
+          <a:bodyPr rtlCol="0" anchor="ctr" wrap="none" lIns="46800" rIns="46800" tIns="21600" bIns="21600"/>
+          <a:lstStyle/>
+          <a:p>
+            <a:pPr algn="ctr">
+              <a:lnSpc>
+                <a:spcPct val="102000"/>
+              </a:lnSpc>
+              <a:spcAft>
+                <a:spcPts val="200"/>
+              </a:spcAft>
+            </a:pPr>
+            <a:r>
+              <a:rPr sz="1000" b="1">
+                <a:solidFill>
+                  <a:srgbClr val="FFFFFF"/>
+                </a:solidFill>
+                <a:latin typeface="Meiryo UI"/>
+                <a:ea typeface="Meiryo UI"/>
+              </a:rPr>
+              <a:t>8</a:t>
+            </a:r>
+          </a:p>
+        </p:txBody>
+      </p:sp>
+      <p:cxnSp>
+        <p:nvCxnSpPr>
+          <p:cNvPr id="41" name="Connector 40"/>
+          <p:cNvCxnSpPr/>
+          <p:nvPr/>
+        </p:nvCxnSpPr>
+        <p:spPr>
+          <a:xfrm>
+            <a:off x="5571000" y="4878000"/>
+            <a:ext cx="0" cy="126000"/>
+          </a:xfrm>
+          <a:prstGeom prst="line">
+            <a:avLst/>
+          </a:prstGeom>
+          <a:ln w="22225">
+            <a:solidFill>
+              <a:srgbClr val="37475A"/>
+            </a:solidFill>
+            <a:tailEnd type="triangle" w="med" len="med"/>
+          </a:ln>
+          <a:effectLst/>
+        </p:spPr>
+        <p:style>
+          <a:lnRef idx="2">
+            <a:schemeClr val="accent1"/>
+          </a:lnRef>
+          <a:fillRef idx="0">
+            <a:schemeClr val="accent1"/>
+          </a:fillRef>
+          <a:effectRef idx="1">
+            <a:schemeClr val="accent1"/>
+          </a:effectRef>
+          <a:fontRef idx="minor">
+            <a:schemeClr val="tx1"/>
+          </a:fontRef>
+        </p:style>
+      </p:cxnSp>
+      <p:sp>
+        <p:nvSpPr>
+          <p:cNvPr id="42" name="Rounded Rectangle 41"/>
+          <p:cNvSpPr/>
+          <p:nvPr/>
+        </p:nvSpPr>
+        <p:spPr>
+          <a:xfrm>
+            <a:off x="3888000" y="5004000"/>
+            <a:ext cx="3366000" cy="827999"/>
+          </a:xfrm>
+          <a:prstGeom prst="roundRect">
+            <a:avLst>
+              <a:gd name="adj" fmla="val 9000"/>
+            </a:avLst>
+          </a:prstGeom>
+          <a:solidFill>
+            <a:srgbClr val="D1E7DD"/>
+          </a:solidFill>
+          <a:ln w="19050">
+            <a:solidFill>
+              <a:srgbClr val="1E6641"/>
+            </a:solidFill>
+          </a:ln>
+          <a:effectLst/>
+        </p:spPr>
+        <p:style>
+          <a:lnRef idx="1">
+            <a:schemeClr val="accent1"/>
+          </a:lnRef>
+          <a:fillRef idx="3">
+            <a:schemeClr val="accent1"/>
+          </a:fillRef>
+          <a:effectRef idx="2">
+            <a:schemeClr val="accent1"/>
+          </a:effectRef>
+          <a:fontRef idx="minor">
+            <a:schemeClr val="lt1"/>
+          </a:fontRef>
+        </p:style>
+        <p:txBody>
+          <a:bodyPr rtlCol="0" anchor="ctr" wrap="square" lIns="46800" rIns="46800" tIns="21600" bIns="21600"/>
+          <a:lstStyle/>
+          <a:p>
+            <a:pPr algn="l">
+              <a:lnSpc>
+                <a:spcPct val="102000"/>
+              </a:lnSpc>
+              <a:spcAft>
+                <a:spcPts val="100"/>
+              </a:spcAft>
+            </a:pPr>
+            <a:r>
+              <a:rPr sz="850" b="1">
+                <a:solidFill>
+                  <a:srgbClr val="1E6641"/>
+                </a:solidFill>
+                <a:latin typeface="Meiryo UI"/>
+                <a:ea typeface="Meiryo UI"/>
+              </a:rPr>
+              <a:t>【警察署（練馬区内管轄）】</a:t>
+            </a:r>
+          </a:p>
+          <a:p>
+            <a:pPr algn="l">
+              <a:lnSpc>
+                <a:spcPct val="102000"/>
+              </a:lnSpc>
+              <a:spcAft>
+                <a:spcPts val="100"/>
+              </a:spcAft>
+            </a:pPr>
+            <a:r>
+              <a:rPr sz="1000" b="1">
+                <a:solidFill>
+                  <a:srgbClr val="1F2937"/>
+                </a:solidFill>
+                <a:latin typeface="Meiryo UI"/>
+                <a:ea typeface="Meiryo UI"/>
+              </a:rPr>
+              <a:t>当該児童生徒の自宅を訪問し、安否確認</a:t>
+            </a:r>
+          </a:p>
+          <a:p>
+            <a:pPr algn="l">
+              <a:lnSpc>
+                <a:spcPct val="102000"/>
+              </a:lnSpc>
+              <a:spcAft>
+                <a:spcPts val="100"/>
+              </a:spcAft>
+            </a:pPr>
+            <a:r>
+              <a:rPr sz="900" b="0">
+                <a:solidFill>
+                  <a:srgbClr val="1F2937"/>
+                </a:solidFill>
+                <a:latin typeface="Meiryo UI"/>
+                <a:ea typeface="Meiryo UI"/>
+              </a:rPr>
+              <a:t>必要に応じ保護等の措置（警察官職務執行法3条）。完了まで指導主事・当該校とも電話を受けられる体制を維持する。</a:t>
+            </a:r>
+          </a:p>
+        </p:txBody>
+      </p:sp>
+      <p:sp>
+        <p:nvSpPr>
+          <p:cNvPr id="43" name="Oval 42"/>
+          <p:cNvSpPr/>
+          <p:nvPr/>
+        </p:nvSpPr>
+        <p:spPr>
+          <a:xfrm>
+            <a:off x="3618000" y="5306400"/>
+            <a:ext cx="223200" cy="223200"/>
+          </a:xfrm>
+          <a:prstGeom prst="ellipse">
+            <a:avLst/>
+          </a:prstGeom>
+          <a:solidFill>
+            <a:srgbClr val="2F5496"/>
+          </a:solidFill>
+          <a:ln w="15875">
+            <a:solidFill>
+              <a:srgbClr val="FFFFFF"/>
+            </a:solidFill>
+          </a:ln>
+          <a:effectLst/>
+        </p:spPr>
+        <p:style>
+          <a:lnRef idx="1">
+            <a:schemeClr val="accent1"/>
+          </a:lnRef>
+          <a:fillRef idx="3">
+            <a:schemeClr val="accent1"/>
+          </a:fillRef>
+          <a:effectRef idx="2">
+            <a:schemeClr val="accent1"/>
+          </a:effectRef>
+          <a:fontRef idx="minor">
+            <a:schemeClr val="lt1"/>
+          </a:fontRef>
+        </p:style>
+        <p:txBody>
+          <a:bodyPr rtlCol="0" anchor="ctr" wrap="none" lIns="46800" rIns="46800" tIns="21600" bIns="21600"/>
+          <a:lstStyle/>
+          <a:p>
+            <a:pPr algn="ctr">
+              <a:lnSpc>
+                <a:spcPct val="102000"/>
+              </a:lnSpc>
+              <a:spcAft>
+                <a:spcPts val="200"/>
+              </a:spcAft>
+            </a:pPr>
+            <a:r>
+              <a:rPr sz="1000" b="1">
+                <a:solidFill>
+                  <a:srgbClr val="FFFFFF"/>
+                </a:solidFill>
+                <a:latin typeface="Meiryo UI"/>
+                <a:ea typeface="Meiryo UI"/>
+              </a:rPr>
+              <a:t>9</a:t>
+            </a:r>
+          </a:p>
+        </p:txBody>
+      </p:sp>
+      <p:cxnSp>
+        <p:nvCxnSpPr>
+          <p:cNvPr id="44" name="Connector 43"/>
+          <p:cNvCxnSpPr/>
+          <p:nvPr/>
+        </p:nvCxnSpPr>
+        <p:spPr>
+          <a:xfrm>
+            <a:off x="5571000" y="5832000"/>
+            <a:ext cx="0" cy="126000"/>
+          </a:xfrm>
+          <a:prstGeom prst="line">
+            <a:avLst/>
+          </a:prstGeom>
+          <a:ln w="22225">
+            <a:solidFill>
+              <a:srgbClr val="37475A"/>
+            </a:solidFill>
+            <a:tailEnd type="triangle" w="med" len="med"/>
+          </a:ln>
+          <a:effectLst/>
+        </p:spPr>
+        <p:style>
+          <a:lnRef idx="2">
+            <a:schemeClr val="accent1"/>
+          </a:lnRef>
+          <a:fillRef idx="0">
+            <a:schemeClr val="accent1"/>
+          </a:fillRef>
+          <a:effectRef idx="1">
+            <a:schemeClr val="accent1"/>
+          </a:effectRef>
+          <a:fontRef idx="minor">
+            <a:schemeClr val="tx1"/>
+          </a:fontRef>
+        </p:style>
+      </p:cxnSp>
+      <p:sp>
+        <p:nvSpPr>
+          <p:cNvPr id="45" name="Rounded Rectangle 44"/>
+          <p:cNvSpPr/>
+          <p:nvPr/>
+        </p:nvSpPr>
+        <p:spPr>
+          <a:xfrm>
+            <a:off x="3888000" y="5958000"/>
+            <a:ext cx="3366000" cy="503999"/>
+          </a:xfrm>
+          <a:prstGeom prst="roundRect">
+            <a:avLst>
+              <a:gd name="adj" fmla="val 9000"/>
+            </a:avLst>
+          </a:prstGeom>
+          <a:solidFill>
+            <a:srgbClr val="D1E7DD"/>
+          </a:solidFill>
+          <a:ln w="19050">
+            <a:solidFill>
+              <a:srgbClr val="1E6641"/>
+            </a:solidFill>
+          </a:ln>
+          <a:effectLst/>
+        </p:spPr>
+        <p:style>
+          <a:lnRef idx="1">
+            <a:schemeClr val="accent1"/>
+          </a:lnRef>
+          <a:fillRef idx="3">
+            <a:schemeClr val="accent1"/>
+          </a:fillRef>
+          <a:effectRef idx="2">
+            <a:schemeClr val="accent1"/>
+          </a:effectRef>
+          <a:fontRef idx="minor">
+            <a:schemeClr val="lt1"/>
+          </a:fontRef>
+        </p:style>
+        <p:txBody>
+          <a:bodyPr rtlCol="0" anchor="ctr" wrap="square" lIns="46800" rIns="46800" tIns="21600" bIns="21600"/>
+          <a:lstStyle/>
+          <a:p>
+            <a:pPr algn="l">
+              <a:lnSpc>
+                <a:spcPct val="102000"/>
+              </a:lnSpc>
+              <a:spcAft>
+                <a:spcPts val="100"/>
+              </a:spcAft>
+            </a:pPr>
+            <a:r>
+              <a:rPr sz="850" b="1">
+                <a:solidFill>
+                  <a:srgbClr val="1E6641"/>
+                </a:solidFill>
+                <a:latin typeface="Meiryo UI"/>
+                <a:ea typeface="Meiryo UI"/>
+              </a:rPr>
+              <a:t>【警察署（練馬区内管轄）】</a:t>
+            </a:r>
+          </a:p>
+          <a:p>
+            <a:pPr algn="l">
+              <a:lnSpc>
+                <a:spcPct val="102000"/>
+              </a:lnSpc>
+              <a:spcAft>
+                <a:spcPts val="100"/>
+              </a:spcAft>
+            </a:pPr>
+            <a:r>
+              <a:rPr sz="1000" b="1">
+                <a:solidFill>
+                  <a:srgbClr val="1F2937"/>
+                </a:solidFill>
+                <a:latin typeface="Meiryo UI"/>
+                <a:ea typeface="Meiryo UI"/>
+              </a:rPr>
+              <a:t>安否確認の結果を当該校へ連絡</a:t>
+            </a:r>
+          </a:p>
+        </p:txBody>
+      </p:sp>
+      <p:sp>
+        <p:nvSpPr>
+          <p:cNvPr id="46" name="Oval 45"/>
+          <p:cNvSpPr/>
+          <p:nvPr/>
+        </p:nvSpPr>
+        <p:spPr>
+          <a:xfrm>
+            <a:off x="3618000" y="6098400"/>
+            <a:ext cx="223200" cy="223200"/>
+          </a:xfrm>
+          <a:prstGeom prst="ellipse">
+            <a:avLst/>
+          </a:prstGeom>
+          <a:solidFill>
+            <a:srgbClr val="2F5496"/>
+          </a:solidFill>
+          <a:ln w="15875">
+            <a:solidFill>
+              <a:srgbClr val="FFFFFF"/>
+            </a:solidFill>
+          </a:ln>
+          <a:effectLst/>
+        </p:spPr>
+        <p:style>
+          <a:lnRef idx="1">
+            <a:schemeClr val="accent1"/>
+          </a:lnRef>
+          <a:fillRef idx="3">
+            <a:schemeClr val="accent1"/>
+          </a:fillRef>
+          <a:effectRef idx="2">
+            <a:schemeClr val="accent1"/>
+          </a:effectRef>
+          <a:fontRef idx="minor">
+            <a:schemeClr val="lt1"/>
+          </a:fontRef>
+        </p:style>
+        <p:txBody>
+          <a:bodyPr rtlCol="0" anchor="ctr" wrap="none" lIns="46800" rIns="46800" tIns="21600" bIns="21600"/>
+          <a:lstStyle/>
+          <a:p>
+            <a:pPr algn="ctr">
+              <a:lnSpc>
+                <a:spcPct val="102000"/>
+              </a:lnSpc>
+              <a:spcAft>
+                <a:spcPts val="200"/>
+              </a:spcAft>
+            </a:pPr>
+            <a:r>
+              <a:rPr sz="1000" b="1">
+                <a:solidFill>
+                  <a:srgbClr val="FFFFFF"/>
+                </a:solidFill>
+                <a:latin typeface="Meiryo UI"/>
+                <a:ea typeface="Meiryo UI"/>
+              </a:rPr>
+              <a:t>10</a:t>
+            </a:r>
+          </a:p>
+        </p:txBody>
+      </p:sp>
+      <p:cxnSp>
+        <p:nvCxnSpPr>
+          <p:cNvPr id="47" name="Connector 46"/>
+          <p:cNvCxnSpPr/>
+          <p:nvPr/>
+        </p:nvCxnSpPr>
+        <p:spPr>
+          <a:xfrm>
+            <a:off x="5571000" y="6462000"/>
+            <a:ext cx="0" cy="126000"/>
+          </a:xfrm>
+          <a:prstGeom prst="line">
+            <a:avLst/>
+          </a:prstGeom>
+          <a:ln w="22225">
+            <a:solidFill>
+              <a:srgbClr val="37475A"/>
+            </a:solidFill>
+            <a:tailEnd type="triangle" w="med" len="med"/>
+          </a:ln>
+          <a:effectLst/>
+        </p:spPr>
+        <p:style>
+          <a:lnRef idx="2">
+            <a:schemeClr val="accent1"/>
+          </a:lnRef>
+          <a:fillRef idx="0">
+            <a:schemeClr val="accent1"/>
+          </a:fillRef>
+          <a:effectRef idx="1">
+            <a:schemeClr val="accent1"/>
+          </a:effectRef>
+          <a:fontRef idx="minor">
+            <a:schemeClr val="tx1"/>
+          </a:fontRef>
+        </p:style>
+      </p:cxnSp>
+      <p:sp>
+        <p:nvSpPr>
+          <p:cNvPr id="48" name="Rounded Rectangle 47"/>
+          <p:cNvSpPr/>
+          <p:nvPr/>
+        </p:nvSpPr>
+        <p:spPr>
+          <a:xfrm>
+            <a:off x="3888000" y="6588000"/>
+            <a:ext cx="3366000" cy="792000"/>
+          </a:xfrm>
+          <a:prstGeom prst="roundRect">
+            <a:avLst>
+              <a:gd name="adj" fmla="val 9000"/>
+            </a:avLst>
+          </a:prstGeom>
+          <a:solidFill>
+            <a:srgbClr val="FCF3CF"/>
+          </a:solidFill>
+          <a:ln w="19050">
+            <a:solidFill>
+              <a:srgbClr val="9A760A"/>
+            </a:solidFill>
+          </a:ln>
+          <a:effectLst/>
+        </p:spPr>
+        <p:style>
+          <a:lnRef idx="1">
+            <a:schemeClr val="accent1"/>
+          </a:lnRef>
+          <a:fillRef idx="3">
+            <a:schemeClr val="accent1"/>
+          </a:fillRef>
+          <a:effectRef idx="2">
+            <a:schemeClr val="accent1"/>
+          </a:effectRef>
+          <a:fontRef idx="minor">
+            <a:schemeClr val="lt1"/>
+          </a:fontRef>
+        </p:style>
+        <p:txBody>
+          <a:bodyPr rtlCol="0" anchor="ctr" wrap="square" lIns="46800" rIns="46800" tIns="21600" bIns="21600"/>
+          <a:lstStyle/>
+          <a:p>
+            <a:pPr algn="l">
+              <a:lnSpc>
+                <a:spcPct val="102000"/>
+              </a:lnSpc>
+              <a:spcAft>
+                <a:spcPts val="100"/>
+              </a:spcAft>
+            </a:pPr>
+            <a:r>
+              <a:rPr sz="850" b="1">
+                <a:solidFill>
+                  <a:srgbClr val="9A760A"/>
+                </a:solidFill>
+                <a:latin typeface="Meiryo UI"/>
+                <a:ea typeface="Meiryo UI"/>
+              </a:rPr>
+              <a:t>【当該校（校長・副校長）】</a:t>
+            </a:r>
+          </a:p>
+          <a:p>
+            <a:pPr algn="l">
+              <a:lnSpc>
+                <a:spcPct val="102000"/>
+              </a:lnSpc>
+              <a:spcAft>
+                <a:spcPts val="100"/>
+              </a:spcAft>
+            </a:pPr>
+            <a:r>
+              <a:rPr sz="1000" b="1">
+                <a:solidFill>
+                  <a:srgbClr val="1F2937"/>
+                </a:solidFill>
+                <a:latin typeface="Meiryo UI"/>
+                <a:ea typeface="Meiryo UI"/>
+              </a:rPr>
+              <a:t>警察からの情報を教育指導課へ報告</a:t>
+            </a:r>
+          </a:p>
+          <a:p>
+            <a:pPr algn="l">
+              <a:lnSpc>
+                <a:spcPct val="102000"/>
+              </a:lnSpc>
+              <a:spcAft>
+                <a:spcPts val="100"/>
+              </a:spcAft>
+            </a:pPr>
+            <a:r>
+              <a:rPr sz="900" b="0">
+                <a:solidFill>
+                  <a:srgbClr val="1F2937"/>
+                </a:solidFill>
+                <a:latin typeface="Meiryo UI"/>
+                <a:ea typeface="Meiryo UI"/>
+              </a:rPr>
+              <a:t>①安否・現在の状況　②警察がとった措置　③保護者の状況</a:t>
+            </a:r>
+            <a:br/>
+            <a:r>
+              <a:rPr sz="900" b="0">
+                <a:solidFill>
+                  <a:srgbClr val="1F2937"/>
+                </a:solidFill>
+                <a:latin typeface="Meiryo UI"/>
+                <a:ea typeface="Meiryo UI"/>
+              </a:rPr>
+              <a:t>④学校が把握している本人の様子（欠席・友人関係・いじめの有無等）</a:t>
+            </a:r>
+          </a:p>
+        </p:txBody>
+      </p:sp>
+      <p:sp>
+        <p:nvSpPr>
+          <p:cNvPr id="49" name="Oval 48"/>
+          <p:cNvSpPr/>
+          <p:nvPr/>
+        </p:nvSpPr>
+        <p:spPr>
+          <a:xfrm>
+            <a:off x="3618000" y="6872400"/>
+            <a:ext cx="223200" cy="223200"/>
+          </a:xfrm>
+          <a:prstGeom prst="ellipse">
+            <a:avLst/>
+          </a:prstGeom>
+          <a:solidFill>
+            <a:srgbClr val="2F5496"/>
+          </a:solidFill>
+          <a:ln w="15875">
+            <a:solidFill>
+              <a:srgbClr val="FFFFFF"/>
+            </a:solidFill>
+          </a:ln>
+          <a:effectLst/>
+        </p:spPr>
+        <p:style>
+          <a:lnRef idx="1">
+            <a:schemeClr val="accent1"/>
+          </a:lnRef>
+          <a:fillRef idx="3">
+            <a:schemeClr val="accent1"/>
+          </a:fillRef>
+          <a:effectRef idx="2">
+            <a:schemeClr val="accent1"/>
+          </a:effectRef>
+          <a:fontRef idx="minor">
+            <a:schemeClr val="lt1"/>
+          </a:fontRef>
+        </p:style>
+        <p:txBody>
+          <a:bodyPr rtlCol="0" anchor="ctr" wrap="none" lIns="46800" rIns="46800" tIns="21600" bIns="21600"/>
+          <a:lstStyle/>
+          <a:p>
+            <a:pPr algn="ctr">
+              <a:lnSpc>
+                <a:spcPct val="102000"/>
+              </a:lnSpc>
+              <a:spcAft>
+                <a:spcPts val="200"/>
+              </a:spcAft>
+            </a:pPr>
+            <a:r>
+              <a:rPr sz="1000" b="1">
+                <a:solidFill>
+                  <a:srgbClr val="FFFFFF"/>
+                </a:solidFill>
+                <a:latin typeface="Meiryo UI"/>
+                <a:ea typeface="Meiryo UI"/>
+              </a:rPr>
+              <a:t>11</a:t>
+            </a:r>
+          </a:p>
+        </p:txBody>
+      </p:sp>
+      <p:cxnSp>
+        <p:nvCxnSpPr>
+          <p:cNvPr id="50" name="Connector 49"/>
+          <p:cNvCxnSpPr/>
+          <p:nvPr/>
+        </p:nvCxnSpPr>
+        <p:spPr>
+          <a:xfrm>
+            <a:off x="5571000" y="7380000"/>
+            <a:ext cx="0" cy="126000"/>
+          </a:xfrm>
+          <a:prstGeom prst="line">
+            <a:avLst/>
+          </a:prstGeom>
+          <a:ln w="22225">
+            <a:solidFill>
+              <a:srgbClr val="37475A"/>
+            </a:solidFill>
+            <a:tailEnd type="triangle" w="med" len="med"/>
+          </a:ln>
+          <a:effectLst/>
+        </p:spPr>
+        <p:style>
+          <a:lnRef idx="2">
+            <a:schemeClr val="accent1"/>
+          </a:lnRef>
+          <a:fillRef idx="0">
+            <a:schemeClr val="accent1"/>
+          </a:fillRef>
+          <a:effectRef idx="1">
+            <a:schemeClr val="accent1"/>
+          </a:effectRef>
+          <a:fontRef idx="minor">
+            <a:schemeClr val="tx1"/>
+          </a:fontRef>
+        </p:style>
+      </p:cxnSp>
+      <p:sp>
+        <p:nvSpPr>
+          <p:cNvPr id="51" name="Rectangle 50"/>
+          <p:cNvSpPr/>
+          <p:nvPr/>
+        </p:nvSpPr>
+        <p:spPr>
+          <a:xfrm>
+            <a:off x="3888000" y="7506000"/>
+            <a:ext cx="3366000" cy="270000"/>
+          </a:xfrm>
+          <a:prstGeom prst="rect">
+            <a:avLst/>
+          </a:prstGeom>
+          <a:solidFill>
+            <a:srgbClr val="2F5496"/>
+          </a:solidFill>
+          <a:ln>
+            <a:noFill/>
+          </a:ln>
+          <a:effectLst/>
+        </p:spPr>
+        <p:style>
+          <a:lnRef idx="1">
+            <a:schemeClr val="accent1"/>
+          </a:lnRef>
+          <a:fillRef idx="3">
+            <a:schemeClr val="accent1"/>
+          </a:fillRef>
+          <a:effectRef idx="2">
+            <a:schemeClr val="accent1"/>
+          </a:effectRef>
+          <a:fontRef idx="minor">
+            <a:schemeClr val="lt1"/>
+          </a:fontRef>
+        </p:style>
+        <p:txBody>
+          <a:bodyPr rtlCol="0" anchor="ctr" wrap="none" lIns="46800" rIns="46800" tIns="21600" bIns="21600"/>
+          <a:lstStyle/>
+          <a:p>
+            <a:pPr algn="ctr">
+              <a:lnSpc>
+                <a:spcPct val="102000"/>
+              </a:lnSpc>
+              <a:spcAft>
+                <a:spcPts val="200"/>
+              </a:spcAft>
+            </a:pPr>
+            <a:r>
+              <a:rPr sz="1000" b="1">
+                <a:solidFill>
+                  <a:srgbClr val="FFFFFF"/>
+                </a:solidFill>
+                <a:latin typeface="Meiryo UI"/>
+                <a:ea typeface="Meiryo UI"/>
+              </a:rPr>
+              <a:t>フェーズ3　事後の支援（翌日以降・継続）</a:t>
+            </a:r>
+          </a:p>
+        </p:txBody>
+      </p:sp>
+      <p:sp>
+        <p:nvSpPr>
+          <p:cNvPr id="52" name="Rounded Rectangle 51"/>
+          <p:cNvSpPr/>
+          <p:nvPr/>
+        </p:nvSpPr>
+        <p:spPr>
+          <a:xfrm>
+            <a:off x="3888000" y="7776000"/>
+            <a:ext cx="3366000" cy="936000"/>
+          </a:xfrm>
+          <a:prstGeom prst="roundRect">
+            <a:avLst>
+              <a:gd name="adj" fmla="val 9000"/>
+            </a:avLst>
+          </a:prstGeom>
+          <a:solidFill>
+            <a:srgbClr val="E8DAEF"/>
+          </a:solidFill>
+          <a:ln w="19050">
+            <a:solidFill>
+              <a:srgbClr val="6C3483"/>
+            </a:solidFill>
+          </a:ln>
+          <a:effectLst/>
+        </p:spPr>
+        <p:style>
+          <a:lnRef idx="1">
+            <a:schemeClr val="accent1"/>
+          </a:lnRef>
+          <a:fillRef idx="3">
+            <a:schemeClr val="accent1"/>
+          </a:fillRef>
+          <a:effectRef idx="2">
+            <a:schemeClr val="accent1"/>
+          </a:effectRef>
+          <a:fontRef idx="minor">
+            <a:schemeClr val="lt1"/>
+          </a:fontRef>
+        </p:style>
+        <p:txBody>
+          <a:bodyPr rtlCol="0" anchor="ctr" wrap="square" lIns="46800" rIns="46800" tIns="21600" bIns="21600"/>
+          <a:lstStyle/>
+          <a:p>
+            <a:pPr algn="l">
+              <a:lnSpc>
+                <a:spcPct val="102000"/>
+              </a:lnSpc>
+              <a:spcAft>
+                <a:spcPts val="100"/>
+              </a:spcAft>
+            </a:pPr>
+            <a:r>
+              <a:rPr sz="850" b="1">
+                <a:solidFill>
+                  <a:srgbClr val="6C3483"/>
+                </a:solidFill>
+                <a:latin typeface="Meiryo UI"/>
+                <a:ea typeface="Meiryo UI"/>
+              </a:rPr>
+              <a:t>【当該校・教育指導課】</a:t>
+            </a:r>
+          </a:p>
+          <a:p>
+            <a:pPr algn="l">
+              <a:lnSpc>
+                <a:spcPct val="102000"/>
+              </a:lnSpc>
+              <a:spcAft>
+                <a:spcPts val="100"/>
+              </a:spcAft>
+            </a:pPr>
+            <a:r>
+              <a:rPr sz="1000" b="1">
+                <a:solidFill>
+                  <a:srgbClr val="1F2937"/>
+                </a:solidFill>
+                <a:latin typeface="Meiryo UI"/>
+                <a:ea typeface="Meiryo UI"/>
+              </a:rPr>
+              <a:t>校内支援体制を立ち上げ、継続的に支援</a:t>
+            </a:r>
+          </a:p>
+          <a:p>
+            <a:pPr algn="l">
+              <a:lnSpc>
+                <a:spcPct val="102000"/>
+              </a:lnSpc>
+              <a:spcAft>
+                <a:spcPts val="100"/>
+              </a:spcAft>
+            </a:pPr>
+            <a:r>
+              <a:rPr sz="900" b="0">
+                <a:solidFill>
+                  <a:srgbClr val="1F2937"/>
+                </a:solidFill>
+                <a:latin typeface="Meiryo UI"/>
+                <a:ea typeface="Meiryo UI"/>
+              </a:rPr>
+              <a:t>校内委員会（管理職・担任・養護教諭・SC・SSW）で支援方針を決定。保護者と連携し、必要に応じ医療機関へ接続。本人にはTALKの原則で関わり、経過を教育指導課へ定期報告。</a:t>
+            </a:r>
+          </a:p>
+        </p:txBody>
+      </p:sp>
+      <p:sp>
+        <p:nvSpPr>
+          <p:cNvPr id="53" name="Oval 52"/>
+          <p:cNvSpPr/>
+          <p:nvPr/>
+        </p:nvSpPr>
+        <p:spPr>
+          <a:xfrm>
+            <a:off x="3618000" y="8132400"/>
+            <a:ext cx="223200" cy="223200"/>
+          </a:xfrm>
+          <a:prstGeom prst="ellipse">
+            <a:avLst/>
+          </a:prstGeom>
+          <a:solidFill>
+            <a:srgbClr val="2F5496"/>
+          </a:solidFill>
+          <a:ln w="15875">
+            <a:solidFill>
+              <a:srgbClr val="FFFFFF"/>
+            </a:solidFill>
+          </a:ln>
+          <a:effectLst/>
+        </p:spPr>
+        <p:style>
+          <a:lnRef idx="1">
+            <a:schemeClr val="accent1"/>
+          </a:lnRef>
+          <a:fillRef idx="3">
+            <a:schemeClr val="accent1"/>
+          </a:fillRef>
+          <a:effectRef idx="2">
+            <a:schemeClr val="accent1"/>
+          </a:effectRef>
+          <a:fontRef idx="minor">
+            <a:schemeClr val="lt1"/>
+          </a:fontRef>
+        </p:style>
+        <p:txBody>
+          <a:bodyPr rtlCol="0" anchor="ctr" wrap="none" lIns="46800" rIns="46800" tIns="21600" bIns="21600"/>
+          <a:lstStyle/>
+          <a:p>
+            <a:pPr algn="ctr">
+              <a:lnSpc>
+                <a:spcPct val="102000"/>
+              </a:lnSpc>
+              <a:spcAft>
+                <a:spcPts val="200"/>
+              </a:spcAft>
+            </a:pPr>
+            <a:r>
+              <a:rPr sz="1000" b="1">
+                <a:solidFill>
+                  <a:srgbClr val="FFFFFF"/>
+                </a:solidFill>
+                <a:latin typeface="Meiryo UI"/>
+                <a:ea typeface="Meiryo UI"/>
+              </a:rPr>
+              <a:t>12</a:t>
+            </a:r>
+          </a:p>
+        </p:txBody>
+      </p:sp>
+      <p:sp>
+        <p:nvSpPr>
+          <p:cNvPr id="54" name="Rectangle 53"/>
+          <p:cNvSpPr/>
+          <p:nvPr/>
+        </p:nvSpPr>
+        <p:spPr>
+          <a:xfrm>
+            <a:off x="306000" y="8856000"/>
+            <a:ext cx="6966000" cy="1188000"/>
+          </a:xfrm>
+          <a:prstGeom prst="rect">
             <a:avLst/>
           </a:prstGeom>
           <a:solidFill>
@@ -5713,3287 +6549,149 @@
           </a:fontRef>
         </p:style>
         <p:txBody>
-          <a:bodyPr rtlCol="0" anchor="ctr" wrap="none" lIns="54000" rIns="54000" tIns="28800" bIns="28800"/>
-          <a:lstStyle/>
-          <a:p>
-            <a:pPr algn="ctr">
+          <a:bodyPr rtlCol="0" anchor="t" wrap="square" lIns="46800" rIns="46800" tIns="21600" bIns="21600"/>
+          <a:lstStyle/>
+          <a:p>
+            <a:pPr algn="l">
               <a:lnSpc>
-                <a:spcPct val="105000"/>
+                <a:spcPct val="102000"/>
               </a:lnSpc>
               <a:spcAft>
                 <a:spcPts val="200"/>
               </a:spcAft>
             </a:pPr>
             <a:r>
-              <a:rPr sz="850" b="1">
+              <a:rPr sz="900" b="1">
                 <a:solidFill>
                   <a:srgbClr val="2F5496"/>
                 </a:solidFill>
                 <a:latin typeface="Meiryo UI"/>
                 <a:ea typeface="Meiryo UI"/>
               </a:rPr>
-              <a:t>特定後 直ちに</a:t>
-            </a:r>
-          </a:p>
-        </p:txBody>
-      </p:sp>
-      <p:sp>
-        <p:nvSpPr>
-          <p:cNvPr id="6" name="TextBox 5"/>
-          <p:cNvSpPr txBox="1"/>
-          <p:nvPr/>
-        </p:nvSpPr>
-        <p:spPr>
-          <a:xfrm>
-            <a:off x="360000" y="10404000"/>
-            <a:ext cx="6840000" cy="216000"/>
-          </a:xfrm>
-          <a:prstGeom prst="rect">
-            <a:avLst/>
-          </a:prstGeom>
-          <a:noFill/>
-        </p:spPr>
-        <p:txBody>
-          <a:bodyPr wrap="square" anchor="t" lIns="54000" rIns="54000" tIns="28800" bIns="28800">
-            <a:spAutoFit/>
-          </a:bodyPr>
-          <a:lstStyle/>
-          <a:p>
-            <a:pPr algn="r">
+              <a:t>【根拠・参考資料】</a:t>
+            </a:r>
+          </a:p>
+          <a:p>
+            <a:pPr algn="l">
               <a:lnSpc>
-                <a:spcPct val="105000"/>
+                <a:spcPct val="102000"/>
               </a:lnSpc>
               <a:spcAft>
                 <a:spcPts val="200"/>
               </a:spcAft>
             </a:pPr>
             <a:r>
-              <a:rPr sz="850" b="0">
-                <a:solidFill>
-                  <a:srgbClr val="8A939E"/>
-                </a:solidFill>
-                <a:latin typeface="Meiryo UI"/>
-                <a:ea typeface="Meiryo UI"/>
-              </a:rPr>
-              <a:t>練馬区教育委員会 教育指導課　　2 / 3</a:t>
-            </a:r>
-          </a:p>
-        </p:txBody>
-      </p:sp>
-      <p:sp>
-        <p:nvSpPr>
-          <p:cNvPr id="7" name="Rounded Rectangle 6"/>
-          <p:cNvSpPr/>
-          <p:nvPr/>
-        </p:nvSpPr>
-        <p:spPr>
-          <a:xfrm>
-            <a:off x="360000" y="1260000"/>
-            <a:ext cx="4104000" cy="1080000"/>
-          </a:xfrm>
-          <a:prstGeom prst="roundRect">
-            <a:avLst>
-              <a:gd name="adj" fmla="val 8000"/>
-            </a:avLst>
-          </a:prstGeom>
-          <a:solidFill>
-            <a:srgbClr val="E8DAEF"/>
-          </a:solidFill>
-          <a:ln w="19050">
-            <a:solidFill>
-              <a:srgbClr val="6C3483"/>
-            </a:solidFill>
-          </a:ln>
-          <a:effectLst/>
-        </p:spPr>
-        <p:style>
-          <a:lnRef idx="1">
-            <a:schemeClr val="accent1"/>
-          </a:lnRef>
-          <a:fillRef idx="3">
-            <a:schemeClr val="accent1"/>
-          </a:fillRef>
-          <a:effectRef idx="2">
-            <a:schemeClr val="accent1"/>
-          </a:effectRef>
-          <a:fontRef idx="minor">
-            <a:schemeClr val="lt1"/>
-          </a:fontRef>
-        </p:style>
-        <p:txBody>
-          <a:bodyPr rtlCol="0" anchor="ctr" wrap="square" lIns="54000" rIns="54000" tIns="28800" bIns="28800"/>
-          <a:lstStyle/>
+              <a:rPr sz="800" b="0">
+                <a:solidFill>
+                  <a:srgbClr val="1F2937"/>
+                </a:solidFill>
+                <a:latin typeface="Meiryo UI"/>
+                <a:ea typeface="Meiryo UI"/>
+              </a:rPr>
+              <a:t>・文部科学省「教師が知っておきたい子どもの自殺予防」（平成21年3月）…組織的対応・記録・TALKの原則（Tell 心配を言葉で伝える／Ask 死にたい気持ちを率直に尋ねる／Listen 傾聴する／Keep safe 一人にせず安全を確保）</a:t>
+            </a:r>
+          </a:p>
           <a:p>
             <a:pPr algn="l">
               <a:lnSpc>
-                <a:spcPct val="105000"/>
+                <a:spcPct val="102000"/>
               </a:lnSpc>
               <a:spcAft>
                 <a:spcPts val="200"/>
               </a:spcAft>
             </a:pPr>
             <a:r>
-              <a:rPr sz="950" b="1">
-                <a:solidFill>
-                  <a:srgbClr val="6C3483"/>
-                </a:solidFill>
-                <a:latin typeface="Meiryo UI"/>
-                <a:ea typeface="Meiryo UI"/>
-              </a:rPr>
-              <a:t>【教育指導課 指導主事】</a:t>
+              <a:rPr sz="800" b="0">
+                <a:solidFill>
+                  <a:srgbClr val="1F2937"/>
+                </a:solidFill>
+                <a:latin typeface="Meiryo UI"/>
+                <a:ea typeface="Meiryo UI"/>
+              </a:rPr>
+              <a:t>・文部科学省「子供に伝えたい自殺予防」（平成26年7月）／自殺総合対策大綱（令和4年10月）／こどもの自殺対策緊急強化プラン（令和5年6月）／自殺対策基本法</a:t>
             </a:r>
           </a:p>
           <a:p>
             <a:pPr algn="l">
               <a:lnSpc>
-                <a:spcPct val="105000"/>
+                <a:spcPct val="102000"/>
               </a:lnSpc>
               <a:spcAft>
                 <a:spcPts val="200"/>
               </a:spcAft>
             </a:pPr>
             <a:r>
-              <a:rPr sz="1100" b="1">
+              <a:rPr sz="800" b="0">
                 <a:solidFill>
                   <a:srgbClr val="1F2937"/>
                 </a:solidFill>
                 <a:latin typeface="Meiryo UI"/>
                 <a:ea typeface="Meiryo UI"/>
               </a:rPr>
-              <a:t>警察へ ①学校名 ②学年 ③氏名 を伝える</a:t>
+              <a:t>・個人情報保護法27条1項2号（生命・身体の保護に必要な場合は本人同意なく第三者提供可）／児童虐待防止法6条（通告義務）／警察官職務執行法3条（保護）</a:t>
             </a:r>
           </a:p>
           <a:p>
             <a:pPr algn="l">
               <a:lnSpc>
-                <a:spcPct val="105000"/>
+                <a:spcPct val="102000"/>
               </a:lnSpc>
               <a:spcAft>
                 <a:spcPts val="200"/>
               </a:spcAft>
             </a:pPr>
             <a:r>
-              <a:rPr sz="1000" b="0">
+              <a:rPr sz="800" b="0">
                 <a:solidFill>
                   <a:srgbClr val="1F2937"/>
                 </a:solidFill>
                 <a:latin typeface="Meiryo UI"/>
                 <a:ea typeface="Meiryo UI"/>
               </a:rPr>
-              <a:t>あわせて、警察が当該校へ連絡する前に、指導主事から当該校へ事前連絡することを警察に伝え、当該校に何を伝えるべきか助言をもらう。</a:t>
-            </a:r>
-          </a:p>
-        </p:txBody>
-      </p:sp>
-      <p:sp>
-        <p:nvSpPr>
-          <p:cNvPr id="8" name="Oval 7"/>
-          <p:cNvSpPr/>
+              <a:t>※電話でのやり取りは復唱して確認し、直後に記録する。情報は「知る必要のある者」に限定して共有する。</a:t>
+            </a:r>
+          </a:p>
+        </p:txBody>
+      </p:sp>
+      <p:sp>
+        <p:nvSpPr>
+          <p:cNvPr id="55" name="TextBox 54"/>
+          <p:cNvSpPr txBox="1"/>
           <p:nvPr/>
         </p:nvSpPr>
         <p:spPr>
           <a:xfrm>
-            <a:off x="32399" y="1659600"/>
-            <a:ext cx="280800" cy="280800"/>
-          </a:xfrm>
-          <a:prstGeom prst="ellipse">
+            <a:off x="306000" y="10422000"/>
+            <a:ext cx="6966000" cy="198000"/>
+          </a:xfrm>
+          <a:prstGeom prst="rect">
             <a:avLst/>
           </a:prstGeom>
-          <a:solidFill>
-            <a:srgbClr val="2F5496"/>
-          </a:solidFill>
-          <a:ln w="19050">
-            <a:solidFill>
-              <a:srgbClr val="FFFFFF"/>
-            </a:solidFill>
-          </a:ln>
-          <a:effectLst/>
-        </p:spPr>
-        <p:style>
-          <a:lnRef idx="1">
-            <a:schemeClr val="accent1"/>
-          </a:lnRef>
-          <a:fillRef idx="3">
-            <a:schemeClr val="accent1"/>
-          </a:fillRef>
-          <a:effectRef idx="2">
-            <a:schemeClr val="accent1"/>
-          </a:effectRef>
-          <a:fontRef idx="minor">
-            <a:schemeClr val="lt1"/>
-          </a:fontRef>
-        </p:style>
-        <p:txBody>
-          <a:bodyPr rtlCol="0" anchor="ctr" wrap="none" lIns="54000" rIns="54000" tIns="28800" bIns="28800"/>
-          <a:lstStyle/>
-          <a:p>
-            <a:pPr algn="ctr">
+          <a:noFill/>
+        </p:spPr>
+        <p:txBody>
+          <a:bodyPr wrap="square" anchor="t" lIns="46800" rIns="46800" tIns="21600" bIns="21600">
+            <a:spAutoFit/>
+          </a:bodyPr>
+          <a:lstStyle/>
+          <a:p>
+            <a:pPr algn="r">
               <a:lnSpc>
-                <a:spcPct val="105000"/>
+                <a:spcPct val="102000"/>
               </a:lnSpc>
               <a:spcAft>
                 <a:spcPts val="200"/>
               </a:spcAft>
             </a:pPr>
             <a:r>
-              <a:rPr sz="1200" b="1">
-                <a:solidFill>
-                  <a:srgbClr val="FFFFFF"/>
-                </a:solidFill>
-                <a:latin typeface="Meiryo UI"/>
-                <a:ea typeface="Meiryo UI"/>
-              </a:rPr>
-              <a:t>6</a:t>
-            </a:r>
-          </a:p>
-        </p:txBody>
-      </p:sp>
-      <p:sp>
-        <p:nvSpPr>
-          <p:cNvPr id="9" name="Rounded Rectangle 8"/>
-          <p:cNvSpPr/>
-          <p:nvPr/>
-        </p:nvSpPr>
-        <p:spPr>
-          <a:xfrm>
-            <a:off x="4644000" y="1260000"/>
-            <a:ext cx="2556000" cy="1080000"/>
-          </a:xfrm>
-          <a:prstGeom prst="roundRect">
-            <a:avLst>
-              <a:gd name="adj" fmla="val 6000"/>
-            </a:avLst>
-          </a:prstGeom>
-          <a:solidFill>
-            <a:srgbClr val="F4F6F8"/>
-          </a:solidFill>
-          <a:ln w="12700">
-            <a:solidFill>
-              <a:srgbClr val="8A939E"/>
-            </a:solidFill>
-          </a:ln>
-          <a:effectLst/>
-        </p:spPr>
-        <p:style>
-          <a:lnRef idx="1">
-            <a:schemeClr val="accent1"/>
-          </a:lnRef>
-          <a:fillRef idx="3">
-            <a:schemeClr val="accent1"/>
-          </a:fillRef>
-          <a:effectRef idx="2">
-            <a:schemeClr val="accent1"/>
-          </a:effectRef>
-          <a:fontRef idx="minor">
-            <a:schemeClr val="lt1"/>
-          </a:fontRef>
-        </p:style>
-        <p:txBody>
-          <a:bodyPr rtlCol="0" anchor="ctr" wrap="square" lIns="54000" rIns="54000" tIns="28800" bIns="28800"/>
-          <a:lstStyle/>
-          <a:p>
-            <a:pPr algn="l">
-              <a:lnSpc>
-                <a:spcPct val="105000"/>
-              </a:lnSpc>
-              <a:spcAft>
-                <a:spcPts val="200"/>
-              </a:spcAft>
-            </a:pPr>
-            <a:r>
-              <a:rPr sz="950" b="1">
-                <a:solidFill>
-                  <a:srgbClr val="C0630C"/>
-                </a:solidFill>
-                <a:latin typeface="Meiryo UI"/>
-                <a:ea typeface="Meiryo UI"/>
-              </a:rPr>
-              <a:t>警察からの助言の例</a:t>
-            </a:r>
-          </a:p>
-          <a:p>
-            <a:pPr algn="l">
-              <a:lnSpc>
-                <a:spcPct val="105000"/>
-              </a:lnSpc>
-              <a:spcAft>
-                <a:spcPts val="200"/>
-              </a:spcAft>
-            </a:pPr>
-            <a:r>
-              <a:rPr sz="900" b="0">
-                <a:solidFill>
-                  <a:srgbClr val="1F2937"/>
-                </a:solidFill>
-                <a:latin typeface="Meiryo UI"/>
-                <a:ea typeface="Meiryo UI"/>
-              </a:rPr>
-              <a:t>・事前に保護者に連絡しておく</a:t>
-            </a:r>
-            <a:br/>
-            <a:r>
-              <a:rPr sz="900" b="0">
-                <a:solidFill>
-                  <a:srgbClr val="1F2937"/>
-                </a:solidFill>
-                <a:latin typeface="Meiryo UI"/>
-                <a:ea typeface="Meiryo UI"/>
-              </a:rPr>
-              <a:t>・保護者からの虐待が疑われるため、警察が連絡するまでは何もしない　等</a:t>
-            </a:r>
-            <a:br/>
-            <a:r>
-              <a:rPr sz="900" b="0">
-                <a:solidFill>
-                  <a:srgbClr val="1F2937"/>
-                </a:solidFill>
-                <a:latin typeface="Meiryo UI"/>
-                <a:ea typeface="Meiryo UI"/>
-              </a:rPr>
-              <a:t>→ 助言内容をそのまま記録し、当該校に正確に伝える。</a:t>
-            </a:r>
-          </a:p>
-        </p:txBody>
-      </p:sp>
-      <p:cxnSp>
-        <p:nvCxnSpPr>
-          <p:cNvPr id="10" name="Connector 9"/>
-          <p:cNvCxnSpPr/>
-          <p:nvPr/>
-        </p:nvCxnSpPr>
-        <p:spPr>
-          <a:xfrm>
-            <a:off x="4464000" y="1800000"/>
-            <a:ext cx="180000" cy="0"/>
-          </a:xfrm>
-          <a:prstGeom prst="line">
-            <a:avLst/>
-          </a:prstGeom>
-          <a:ln w="12700">
-            <a:solidFill>
-              <a:srgbClr val="8A939E"/>
-            </a:solidFill>
-            <a:prstDash val="dash"/>
-          </a:ln>
-          <a:effectLst/>
-        </p:spPr>
-        <p:style>
-          <a:lnRef idx="2">
-            <a:schemeClr val="accent1"/>
-          </a:lnRef>
-          <a:fillRef idx="0">
-            <a:schemeClr val="accent1"/>
-          </a:fillRef>
-          <a:effectRef idx="1">
-            <a:schemeClr val="accent1"/>
-          </a:effectRef>
-          <a:fontRef idx="minor">
-            <a:schemeClr val="tx1"/>
-          </a:fontRef>
-        </p:style>
-      </p:cxnSp>
-      <p:cxnSp>
-        <p:nvCxnSpPr>
-          <p:cNvPr id="11" name="Connector 10"/>
-          <p:cNvCxnSpPr/>
-          <p:nvPr/>
-        </p:nvCxnSpPr>
-        <p:spPr>
-          <a:xfrm>
-            <a:off x="2412000" y="2340000"/>
-            <a:ext cx="0" cy="162000"/>
-          </a:xfrm>
-          <a:prstGeom prst="line">
-            <a:avLst/>
-          </a:prstGeom>
-          <a:ln w="25400">
-            <a:solidFill>
-              <a:srgbClr val="37475A"/>
-            </a:solidFill>
-            <a:tailEnd type="triangle" w="med" len="med"/>
-          </a:ln>
-          <a:effectLst/>
-        </p:spPr>
-        <p:style>
-          <a:lnRef idx="2">
-            <a:schemeClr val="accent1"/>
-          </a:lnRef>
-          <a:fillRef idx="0">
-            <a:schemeClr val="accent1"/>
-          </a:fillRef>
-          <a:effectRef idx="1">
-            <a:schemeClr val="accent1"/>
-          </a:effectRef>
-          <a:fontRef idx="minor">
-            <a:schemeClr val="tx1"/>
-          </a:fontRef>
-        </p:style>
-      </p:cxnSp>
-      <p:sp>
-        <p:nvSpPr>
-          <p:cNvPr id="12" name="Rounded Rectangle 11"/>
-          <p:cNvSpPr/>
-          <p:nvPr/>
-        </p:nvSpPr>
-        <p:spPr>
-          <a:xfrm>
-            <a:off x="360000" y="2502000"/>
-            <a:ext cx="4104000" cy="1044000"/>
-          </a:xfrm>
-          <a:prstGeom prst="roundRect">
-            <a:avLst>
-              <a:gd name="adj" fmla="val 8000"/>
-            </a:avLst>
-          </a:prstGeom>
-          <a:solidFill>
-            <a:srgbClr val="E8DAEF"/>
-          </a:solidFill>
-          <a:ln w="19050">
-            <a:solidFill>
-              <a:srgbClr val="6C3483"/>
-            </a:solidFill>
-          </a:ln>
-          <a:effectLst/>
-        </p:spPr>
-        <p:style>
-          <a:lnRef idx="1">
-            <a:schemeClr val="accent1"/>
-          </a:lnRef>
-          <a:fillRef idx="3">
-            <a:schemeClr val="accent1"/>
-          </a:fillRef>
-          <a:effectRef idx="2">
-            <a:schemeClr val="accent1"/>
-          </a:effectRef>
-          <a:fontRef idx="minor">
-            <a:schemeClr val="lt1"/>
-          </a:fontRef>
-        </p:style>
-        <p:txBody>
-          <a:bodyPr rtlCol="0" anchor="ctr" wrap="square" lIns="54000" rIns="54000" tIns="28800" bIns="28800"/>
-          <a:lstStyle/>
-          <a:p>
-            <a:pPr algn="l">
-              <a:lnSpc>
-                <a:spcPct val="105000"/>
-              </a:lnSpc>
-              <a:spcAft>
-                <a:spcPts val="200"/>
-              </a:spcAft>
-            </a:pPr>
-            <a:r>
-              <a:rPr sz="950" b="1">
-                <a:solidFill>
-                  <a:srgbClr val="6C3483"/>
-                </a:solidFill>
-                <a:latin typeface="Meiryo UI"/>
-                <a:ea typeface="Meiryo UI"/>
-              </a:rPr>
-              <a:t>【教育指導課 指導主事】</a:t>
-            </a:r>
-          </a:p>
-          <a:p>
-            <a:pPr algn="l">
-              <a:lnSpc>
-                <a:spcPct val="105000"/>
-              </a:lnSpc>
-              <a:spcAft>
-                <a:spcPts val="200"/>
-              </a:spcAft>
-            </a:pPr>
-            <a:r>
-              <a:rPr sz="1100" b="1">
-                <a:solidFill>
-                  <a:srgbClr val="1F2937"/>
-                </a:solidFill>
-                <a:latin typeface="Meiryo UI"/>
-                <a:ea typeface="Meiryo UI"/>
-              </a:rPr>
-              <a:t>当該校の校長（不在時は副校長）へ電話で事前連絡</a:t>
-            </a:r>
-          </a:p>
-          <a:p>
-            <a:pPr algn="l">
-              <a:lnSpc>
-                <a:spcPct val="105000"/>
-              </a:lnSpc>
-              <a:spcAft>
-                <a:spcPts val="200"/>
-              </a:spcAft>
-            </a:pPr>
-            <a:r>
-              <a:rPr sz="1000" b="0">
-                <a:solidFill>
-                  <a:srgbClr val="1F2937"/>
-                </a:solidFill>
-                <a:latin typeface="Meiryo UI"/>
-                <a:ea typeface="Meiryo UI"/>
-              </a:rPr>
-              <a:t>・警察から在籍確認の連絡が入ること</a:t>
-            </a:r>
-            <a:br/>
-            <a:r>
-              <a:rPr sz="1000" b="0">
-                <a:solidFill>
-                  <a:srgbClr val="1F2937"/>
-                </a:solidFill>
-                <a:latin typeface="Meiryo UI"/>
-                <a:ea typeface="Meiryo UI"/>
-              </a:rPr>
-              <a:t>・警察の助言に基づく対応方法（保護者への連絡の要否 等）</a:t>
-            </a:r>
-            <a:br/>
-            <a:r>
-              <a:rPr sz="1000" b="0">
-                <a:solidFill>
-                  <a:srgbClr val="1F2937"/>
-                </a:solidFill>
-                <a:latin typeface="Meiryo UI"/>
-                <a:ea typeface="Meiryo UI"/>
-              </a:rPr>
-              <a:t>・校内で知る教職員は必要最小限にとどめること</a:t>
-            </a:r>
-          </a:p>
-        </p:txBody>
-      </p:sp>
-      <p:sp>
-        <p:nvSpPr>
-          <p:cNvPr id="13" name="Oval 12"/>
-          <p:cNvSpPr/>
-          <p:nvPr/>
-        </p:nvSpPr>
-        <p:spPr>
-          <a:xfrm>
-            <a:off x="32399" y="2883600"/>
-            <a:ext cx="280800" cy="280800"/>
-          </a:xfrm>
-          <a:prstGeom prst="ellipse">
-            <a:avLst/>
-          </a:prstGeom>
-          <a:solidFill>
-            <a:srgbClr val="2F5496"/>
-          </a:solidFill>
-          <a:ln w="19050">
-            <a:solidFill>
-              <a:srgbClr val="FFFFFF"/>
-            </a:solidFill>
-          </a:ln>
-          <a:effectLst/>
-        </p:spPr>
-        <p:style>
-          <a:lnRef idx="1">
-            <a:schemeClr val="accent1"/>
-          </a:lnRef>
-          <a:fillRef idx="3">
-            <a:schemeClr val="accent1"/>
-          </a:fillRef>
-          <a:effectRef idx="2">
-            <a:schemeClr val="accent1"/>
-          </a:effectRef>
-          <a:fontRef idx="minor">
-            <a:schemeClr val="lt1"/>
-          </a:fontRef>
-        </p:style>
-        <p:txBody>
-          <a:bodyPr rtlCol="0" anchor="ctr" wrap="none" lIns="54000" rIns="54000" tIns="28800" bIns="28800"/>
-          <a:lstStyle/>
-          <a:p>
-            <a:pPr algn="ctr">
-              <a:lnSpc>
-                <a:spcPct val="105000"/>
-              </a:lnSpc>
-              <a:spcAft>
-                <a:spcPts val="200"/>
-              </a:spcAft>
-            </a:pPr>
-            <a:r>
-              <a:rPr sz="1200" b="1">
-                <a:solidFill>
-                  <a:srgbClr val="FFFFFF"/>
-                </a:solidFill>
-                <a:latin typeface="Meiryo UI"/>
-                <a:ea typeface="Meiryo UI"/>
-              </a:rPr>
-              <a:t>7</a:t>
-            </a:r>
-          </a:p>
-        </p:txBody>
-      </p:sp>
-      <p:sp>
-        <p:nvSpPr>
-          <p:cNvPr id="14" name="Rounded Rectangle 13"/>
-          <p:cNvSpPr/>
-          <p:nvPr/>
-        </p:nvSpPr>
-        <p:spPr>
-          <a:xfrm>
-            <a:off x="4644000" y="2502000"/>
-            <a:ext cx="2556000" cy="1044000"/>
-          </a:xfrm>
-          <a:prstGeom prst="roundRect">
-            <a:avLst>
-              <a:gd name="adj" fmla="val 6000"/>
-            </a:avLst>
-          </a:prstGeom>
-          <a:solidFill>
-            <a:srgbClr val="F4F6F8"/>
-          </a:solidFill>
-          <a:ln w="12700">
-            <a:solidFill>
-              <a:srgbClr val="8A939E"/>
-            </a:solidFill>
-          </a:ln>
-          <a:effectLst/>
-        </p:spPr>
-        <p:style>
-          <a:lnRef idx="1">
-            <a:schemeClr val="accent1"/>
-          </a:lnRef>
-          <a:fillRef idx="3">
-            <a:schemeClr val="accent1"/>
-          </a:fillRef>
-          <a:effectRef idx="2">
-            <a:schemeClr val="accent1"/>
-          </a:effectRef>
-          <a:fontRef idx="minor">
-            <a:schemeClr val="lt1"/>
-          </a:fontRef>
-        </p:style>
-        <p:txBody>
-          <a:bodyPr rtlCol="0" anchor="ctr" wrap="square" lIns="54000" rIns="54000" tIns="28800" bIns="28800"/>
-          <a:lstStyle/>
-          <a:p>
-            <a:pPr algn="l">
-              <a:lnSpc>
-                <a:spcPct val="105000"/>
-              </a:lnSpc>
-              <a:spcAft>
-                <a:spcPts val="200"/>
-              </a:spcAft>
-            </a:pPr>
-            <a:r>
-              <a:rPr sz="950" b="1">
-                <a:solidFill>
-                  <a:srgbClr val="B02121"/>
-                </a:solidFill>
-                <a:latin typeface="Meiryo UI"/>
-                <a:ea typeface="Meiryo UI"/>
-              </a:rPr>
-              <a:t>虐待が疑われる場合</a:t>
-            </a:r>
-          </a:p>
-          <a:p>
-            <a:pPr algn="l">
-              <a:lnSpc>
-                <a:spcPct val="105000"/>
-              </a:lnSpc>
-              <a:spcAft>
-                <a:spcPts val="200"/>
-              </a:spcAft>
-            </a:pPr>
-            <a:r>
-              <a:rPr sz="900" b="0">
-                <a:solidFill>
-                  <a:srgbClr val="1F2937"/>
-                </a:solidFill>
-                <a:latin typeface="Meiryo UI"/>
-                <a:ea typeface="Meiryo UI"/>
-              </a:rPr>
-              <a:t>保護者への連絡は行わない。学校・教育委員会は子供家庭支援センター・児童相談所へ通告する（児童虐待防止法第6条）。</a:t>
-            </a:r>
-          </a:p>
-        </p:txBody>
-      </p:sp>
-      <p:cxnSp>
-        <p:nvCxnSpPr>
-          <p:cNvPr id="15" name="Connector 14"/>
-          <p:cNvCxnSpPr/>
-          <p:nvPr/>
-        </p:nvCxnSpPr>
-        <p:spPr>
-          <a:xfrm>
-            <a:off x="4464000" y="3024000"/>
-            <a:ext cx="180000" cy="0"/>
-          </a:xfrm>
-          <a:prstGeom prst="line">
-            <a:avLst/>
-          </a:prstGeom>
-          <a:ln w="12700">
-            <a:solidFill>
-              <a:srgbClr val="8A939E"/>
-            </a:solidFill>
-            <a:prstDash val="dash"/>
-          </a:ln>
-          <a:effectLst/>
-        </p:spPr>
-        <p:style>
-          <a:lnRef idx="2">
-            <a:schemeClr val="accent1"/>
-          </a:lnRef>
-          <a:fillRef idx="0">
-            <a:schemeClr val="accent1"/>
-          </a:fillRef>
-          <a:effectRef idx="1">
-            <a:schemeClr val="accent1"/>
-          </a:effectRef>
-          <a:fontRef idx="minor">
-            <a:schemeClr val="tx1"/>
-          </a:fontRef>
-        </p:style>
-      </p:cxnSp>
-      <p:cxnSp>
-        <p:nvCxnSpPr>
-          <p:cNvPr id="16" name="Connector 15"/>
-          <p:cNvCxnSpPr/>
-          <p:nvPr/>
-        </p:nvCxnSpPr>
-        <p:spPr>
-          <a:xfrm>
-            <a:off x="2412000" y="3546000"/>
-            <a:ext cx="0" cy="162000"/>
-          </a:xfrm>
-          <a:prstGeom prst="line">
-            <a:avLst/>
-          </a:prstGeom>
-          <a:ln w="25400">
-            <a:solidFill>
-              <a:srgbClr val="37475A"/>
-            </a:solidFill>
-            <a:tailEnd type="triangle" w="med" len="med"/>
-          </a:ln>
-          <a:effectLst/>
-        </p:spPr>
-        <p:style>
-          <a:lnRef idx="2">
-            <a:schemeClr val="accent1"/>
-          </a:lnRef>
-          <a:fillRef idx="0">
-            <a:schemeClr val="accent1"/>
-          </a:fillRef>
-          <a:effectRef idx="1">
-            <a:schemeClr val="accent1"/>
-          </a:effectRef>
-          <a:fontRef idx="minor">
-            <a:schemeClr val="tx1"/>
-          </a:fontRef>
-        </p:style>
-      </p:cxnSp>
-      <p:sp>
-        <p:nvSpPr>
-          <p:cNvPr id="17" name="Rounded Rectangle 16"/>
-          <p:cNvSpPr/>
-          <p:nvPr/>
-        </p:nvSpPr>
-        <p:spPr>
-          <a:xfrm>
-            <a:off x="360000" y="3708000"/>
-            <a:ext cx="4104000" cy="827999"/>
-          </a:xfrm>
-          <a:prstGeom prst="roundRect">
-            <a:avLst>
-              <a:gd name="adj" fmla="val 8000"/>
-            </a:avLst>
-          </a:prstGeom>
-          <a:solidFill>
-            <a:srgbClr val="D1E7DD"/>
-          </a:solidFill>
-          <a:ln w="19050">
-            <a:solidFill>
-              <a:srgbClr val="1E6641"/>
-            </a:solidFill>
-          </a:ln>
-          <a:effectLst/>
-        </p:spPr>
-        <p:style>
-          <a:lnRef idx="1">
-            <a:schemeClr val="accent1"/>
-          </a:lnRef>
-          <a:fillRef idx="3">
-            <a:schemeClr val="accent1"/>
-          </a:fillRef>
-          <a:effectRef idx="2">
-            <a:schemeClr val="accent1"/>
-          </a:effectRef>
-          <a:fontRef idx="minor">
-            <a:schemeClr val="lt1"/>
-          </a:fontRef>
-        </p:style>
-        <p:txBody>
-          <a:bodyPr rtlCol="0" anchor="ctr" wrap="square" lIns="54000" rIns="54000" tIns="28800" bIns="28800"/>
-          <a:lstStyle/>
-          <a:p>
-            <a:pPr algn="l">
-              <a:lnSpc>
-                <a:spcPct val="105000"/>
-              </a:lnSpc>
-              <a:spcAft>
-                <a:spcPts val="200"/>
-              </a:spcAft>
-            </a:pPr>
-            <a:r>
-              <a:rPr sz="950" b="1">
-                <a:solidFill>
-                  <a:srgbClr val="1E6641"/>
-                </a:solidFill>
-                <a:latin typeface="Meiryo UI"/>
-                <a:ea typeface="Meiryo UI"/>
-              </a:rPr>
-              <a:t>【警察署（練馬区内管轄）】</a:t>
-            </a:r>
-          </a:p>
-          <a:p>
-            <a:pPr algn="l">
-              <a:lnSpc>
-                <a:spcPct val="105000"/>
-              </a:lnSpc>
-              <a:spcAft>
-                <a:spcPts val="200"/>
-              </a:spcAft>
-            </a:pPr>
-            <a:r>
-              <a:rPr sz="1100" b="1">
-                <a:solidFill>
-                  <a:srgbClr val="1F2937"/>
-                </a:solidFill>
-                <a:latin typeface="Meiryo UI"/>
-                <a:ea typeface="Meiryo UI"/>
-              </a:rPr>
-              <a:t>当該校へ連絡し、在籍確認</a:t>
-            </a:r>
-          </a:p>
-          <a:p>
-            <a:pPr algn="l">
-              <a:lnSpc>
-                <a:spcPct val="105000"/>
-              </a:lnSpc>
-              <a:spcAft>
-                <a:spcPts val="200"/>
-              </a:spcAft>
-            </a:pPr>
-            <a:r>
-              <a:rPr sz="1000" b="0">
-                <a:solidFill>
-                  <a:srgbClr val="1F2937"/>
-                </a:solidFill>
-                <a:latin typeface="Meiryo UI"/>
-                <a:ea typeface="Meiryo UI"/>
-              </a:rPr>
-              <a:t>在籍していれば ①氏名 ②保護者の連絡先 ③住所 を確認する。</a:t>
-            </a:r>
-          </a:p>
-        </p:txBody>
-      </p:sp>
-      <p:sp>
-        <p:nvSpPr>
-          <p:cNvPr id="18" name="Oval 17"/>
-          <p:cNvSpPr/>
-          <p:nvPr/>
-        </p:nvSpPr>
-        <p:spPr>
-          <a:xfrm>
-            <a:off x="32399" y="3981600"/>
-            <a:ext cx="280800" cy="280800"/>
-          </a:xfrm>
-          <a:prstGeom prst="ellipse">
-            <a:avLst/>
-          </a:prstGeom>
-          <a:solidFill>
-            <a:srgbClr val="2F5496"/>
-          </a:solidFill>
-          <a:ln w="19050">
-            <a:solidFill>
-              <a:srgbClr val="FFFFFF"/>
-            </a:solidFill>
-          </a:ln>
-          <a:effectLst/>
-        </p:spPr>
-        <p:style>
-          <a:lnRef idx="1">
-            <a:schemeClr val="accent1"/>
-          </a:lnRef>
-          <a:fillRef idx="3">
-            <a:schemeClr val="accent1"/>
-          </a:fillRef>
-          <a:effectRef idx="2">
-            <a:schemeClr val="accent1"/>
-          </a:effectRef>
-          <a:fontRef idx="minor">
-            <a:schemeClr val="lt1"/>
-          </a:fontRef>
-        </p:style>
-        <p:txBody>
-          <a:bodyPr rtlCol="0" anchor="ctr" wrap="none" lIns="54000" rIns="54000" tIns="28800" bIns="28800"/>
-          <a:lstStyle/>
-          <a:p>
-            <a:pPr algn="ctr">
-              <a:lnSpc>
-                <a:spcPct val="105000"/>
-              </a:lnSpc>
-              <a:spcAft>
-                <a:spcPts val="200"/>
-              </a:spcAft>
-            </a:pPr>
-            <a:r>
-              <a:rPr sz="1200" b="1">
-                <a:solidFill>
-                  <a:srgbClr val="FFFFFF"/>
-                </a:solidFill>
-                <a:latin typeface="Meiryo UI"/>
-                <a:ea typeface="Meiryo UI"/>
-              </a:rPr>
-              <a:t>8</a:t>
-            </a:r>
-          </a:p>
-        </p:txBody>
-      </p:sp>
-      <p:sp>
-        <p:nvSpPr>
-          <p:cNvPr id="19" name="Rounded Rectangle 18"/>
-          <p:cNvSpPr/>
-          <p:nvPr/>
-        </p:nvSpPr>
-        <p:spPr>
-          <a:xfrm>
-            <a:off x="4644000" y="3708000"/>
-            <a:ext cx="2556000" cy="827999"/>
-          </a:xfrm>
-          <a:prstGeom prst="roundRect">
-            <a:avLst>
-              <a:gd name="adj" fmla="val 6000"/>
-            </a:avLst>
-          </a:prstGeom>
-          <a:solidFill>
-            <a:srgbClr val="F4F6F8"/>
-          </a:solidFill>
-          <a:ln w="12700">
-            <a:solidFill>
-              <a:srgbClr val="8A939E"/>
-            </a:solidFill>
-          </a:ln>
-          <a:effectLst/>
-        </p:spPr>
-        <p:style>
-          <a:lnRef idx="1">
-            <a:schemeClr val="accent1"/>
-          </a:lnRef>
-          <a:fillRef idx="3">
-            <a:schemeClr val="accent1"/>
-          </a:fillRef>
-          <a:effectRef idx="2">
-            <a:schemeClr val="accent1"/>
-          </a:effectRef>
-          <a:fontRef idx="minor">
-            <a:schemeClr val="lt1"/>
-          </a:fontRef>
-        </p:style>
-        <p:txBody>
-          <a:bodyPr rtlCol="0" anchor="ctr" wrap="square" lIns="54000" rIns="54000" tIns="28800" bIns="28800"/>
-          <a:lstStyle/>
-          <a:p>
-            <a:pPr algn="l">
-              <a:lnSpc>
-                <a:spcPct val="105000"/>
-              </a:lnSpc>
-              <a:spcAft>
-                <a:spcPts val="200"/>
-              </a:spcAft>
-            </a:pPr>
-            <a:r>
-              <a:rPr sz="950" b="1">
-                <a:solidFill>
-                  <a:srgbClr val="2F5496"/>
-                </a:solidFill>
-                <a:latin typeface="Meiryo UI"/>
-                <a:ea typeface="Meiryo UI"/>
-              </a:rPr>
-              <a:t>学校側の準備</a:t>
-            </a:r>
-          </a:p>
-          <a:p>
-            <a:pPr algn="l">
-              <a:lnSpc>
-                <a:spcPct val="105000"/>
-              </a:lnSpc>
-              <a:spcAft>
-                <a:spcPts val="200"/>
-              </a:spcAft>
-            </a:pPr>
-            <a:r>
-              <a:rPr sz="900" b="0">
-                <a:solidFill>
-                  <a:srgbClr val="1F2937"/>
-                </a:solidFill>
-                <a:latin typeface="Meiryo UI"/>
-                <a:ea typeface="Meiryo UI"/>
-              </a:rPr>
-              <a:t>指名された対応者（管理職）が指導要録・学籍情報をすぐ出せるよう手元に準備しておく。</a:t>
-            </a:r>
-          </a:p>
-        </p:txBody>
-      </p:sp>
-      <p:cxnSp>
-        <p:nvCxnSpPr>
-          <p:cNvPr id="20" name="Connector 19"/>
-          <p:cNvCxnSpPr/>
-          <p:nvPr/>
-        </p:nvCxnSpPr>
-        <p:spPr>
-          <a:xfrm>
-            <a:off x="4464000" y="4122000"/>
-            <a:ext cx="180000" cy="0"/>
-          </a:xfrm>
-          <a:prstGeom prst="line">
-            <a:avLst/>
-          </a:prstGeom>
-          <a:ln w="12700">
-            <a:solidFill>
-              <a:srgbClr val="8A939E"/>
-            </a:solidFill>
-            <a:prstDash val="dash"/>
-          </a:ln>
-          <a:effectLst/>
-        </p:spPr>
-        <p:style>
-          <a:lnRef idx="2">
-            <a:schemeClr val="accent1"/>
-          </a:lnRef>
-          <a:fillRef idx="0">
-            <a:schemeClr val="accent1"/>
-          </a:fillRef>
-          <a:effectRef idx="1">
-            <a:schemeClr val="accent1"/>
-          </a:effectRef>
-          <a:fontRef idx="minor">
-            <a:schemeClr val="tx1"/>
-          </a:fontRef>
-        </p:style>
-      </p:cxnSp>
-      <p:cxnSp>
-        <p:nvCxnSpPr>
-          <p:cNvPr id="21" name="Connector 20"/>
-          <p:cNvCxnSpPr/>
-          <p:nvPr/>
-        </p:nvCxnSpPr>
-        <p:spPr>
-          <a:xfrm>
-            <a:off x="2412000" y="4536000"/>
-            <a:ext cx="0" cy="162000"/>
-          </a:xfrm>
-          <a:prstGeom prst="line">
-            <a:avLst/>
-          </a:prstGeom>
-          <a:ln w="25400">
-            <a:solidFill>
-              <a:srgbClr val="37475A"/>
-            </a:solidFill>
-            <a:tailEnd type="triangle" w="med" len="med"/>
-          </a:ln>
-          <a:effectLst/>
-        </p:spPr>
-        <p:style>
-          <a:lnRef idx="2">
-            <a:schemeClr val="accent1"/>
-          </a:lnRef>
-          <a:fillRef idx="0">
-            <a:schemeClr val="accent1"/>
-          </a:fillRef>
-          <a:effectRef idx="1">
-            <a:schemeClr val="accent1"/>
-          </a:effectRef>
-          <a:fontRef idx="minor">
-            <a:schemeClr val="tx1"/>
-          </a:fontRef>
-        </p:style>
-      </p:cxnSp>
-      <p:sp>
-        <p:nvSpPr>
-          <p:cNvPr id="22" name="Rounded Rectangle 21"/>
-          <p:cNvSpPr/>
-          <p:nvPr/>
-        </p:nvSpPr>
-        <p:spPr>
-          <a:xfrm>
-            <a:off x="360000" y="4698000"/>
-            <a:ext cx="4104000" cy="792000"/>
-          </a:xfrm>
-          <a:prstGeom prst="roundRect">
-            <a:avLst>
-              <a:gd name="adj" fmla="val 8000"/>
-            </a:avLst>
-          </a:prstGeom>
-          <a:solidFill>
-            <a:srgbClr val="D1E7DD"/>
-          </a:solidFill>
-          <a:ln w="19050">
-            <a:solidFill>
-              <a:srgbClr val="1E6641"/>
-            </a:solidFill>
-          </a:ln>
-          <a:effectLst/>
-        </p:spPr>
-        <p:style>
-          <a:lnRef idx="1">
-            <a:schemeClr val="accent1"/>
-          </a:lnRef>
-          <a:fillRef idx="3">
-            <a:schemeClr val="accent1"/>
-          </a:fillRef>
-          <a:effectRef idx="2">
-            <a:schemeClr val="accent1"/>
-          </a:effectRef>
-          <a:fontRef idx="minor">
-            <a:schemeClr val="lt1"/>
-          </a:fontRef>
-        </p:style>
-        <p:txBody>
-          <a:bodyPr rtlCol="0" anchor="ctr" wrap="square" lIns="54000" rIns="54000" tIns="28800" bIns="28800"/>
-          <a:lstStyle/>
-          <a:p>
-            <a:pPr algn="l">
-              <a:lnSpc>
-                <a:spcPct val="105000"/>
-              </a:lnSpc>
-              <a:spcAft>
-                <a:spcPts val="200"/>
-              </a:spcAft>
-            </a:pPr>
-            <a:r>
-              <a:rPr sz="950" b="1">
-                <a:solidFill>
-                  <a:srgbClr val="1E6641"/>
-                </a:solidFill>
-                <a:latin typeface="Meiryo UI"/>
-                <a:ea typeface="Meiryo UI"/>
-              </a:rPr>
-              <a:t>【警察署（練馬区内管轄）】</a:t>
-            </a:r>
-          </a:p>
-          <a:p>
-            <a:pPr algn="l">
-              <a:lnSpc>
-                <a:spcPct val="105000"/>
-              </a:lnSpc>
-              <a:spcAft>
-                <a:spcPts val="200"/>
-              </a:spcAft>
-            </a:pPr>
-            <a:r>
-              <a:rPr sz="1100" b="1">
-                <a:solidFill>
-                  <a:srgbClr val="1F2937"/>
-                </a:solidFill>
-                <a:latin typeface="Meiryo UI"/>
-                <a:ea typeface="Meiryo UI"/>
-              </a:rPr>
-              <a:t>当該児童生徒の自宅を訪問し、安否確認</a:t>
-            </a:r>
-          </a:p>
-          <a:p>
-            <a:pPr algn="l">
-              <a:lnSpc>
-                <a:spcPct val="105000"/>
-              </a:lnSpc>
-              <a:spcAft>
-                <a:spcPts val="200"/>
-              </a:spcAft>
-            </a:pPr>
-            <a:r>
-              <a:rPr sz="1000" b="0">
-                <a:solidFill>
-                  <a:srgbClr val="1F2937"/>
-                </a:solidFill>
-                <a:latin typeface="Meiryo UI"/>
-                <a:ea typeface="Meiryo UI"/>
-              </a:rPr>
-              <a:t>必要に応じて保護・救急要請等の措置がとられる。</a:t>
-            </a:r>
-          </a:p>
-        </p:txBody>
-      </p:sp>
-      <p:sp>
-        <p:nvSpPr>
-          <p:cNvPr id="23" name="Oval 22"/>
-          <p:cNvSpPr/>
-          <p:nvPr/>
-        </p:nvSpPr>
-        <p:spPr>
-          <a:xfrm>
-            <a:off x="32399" y="4953600"/>
-            <a:ext cx="280800" cy="280800"/>
-          </a:xfrm>
-          <a:prstGeom prst="ellipse">
-            <a:avLst/>
-          </a:prstGeom>
-          <a:solidFill>
-            <a:srgbClr val="2F5496"/>
-          </a:solidFill>
-          <a:ln w="19050">
-            <a:solidFill>
-              <a:srgbClr val="FFFFFF"/>
-            </a:solidFill>
-          </a:ln>
-          <a:effectLst/>
-        </p:spPr>
-        <p:style>
-          <a:lnRef idx="1">
-            <a:schemeClr val="accent1"/>
-          </a:lnRef>
-          <a:fillRef idx="3">
-            <a:schemeClr val="accent1"/>
-          </a:fillRef>
-          <a:effectRef idx="2">
-            <a:schemeClr val="accent1"/>
-          </a:effectRef>
-          <a:fontRef idx="minor">
-            <a:schemeClr val="lt1"/>
-          </a:fontRef>
-        </p:style>
-        <p:txBody>
-          <a:bodyPr rtlCol="0" anchor="ctr" wrap="none" lIns="54000" rIns="54000" tIns="28800" bIns="28800"/>
-          <a:lstStyle/>
-          <a:p>
-            <a:pPr algn="ctr">
-              <a:lnSpc>
-                <a:spcPct val="105000"/>
-              </a:lnSpc>
-              <a:spcAft>
-                <a:spcPts val="200"/>
-              </a:spcAft>
-            </a:pPr>
-            <a:r>
-              <a:rPr sz="1200" b="1">
-                <a:solidFill>
-                  <a:srgbClr val="FFFFFF"/>
-                </a:solidFill>
-                <a:latin typeface="Meiryo UI"/>
-                <a:ea typeface="Meiryo UI"/>
-              </a:rPr>
-              <a:t>9</a:t>
-            </a:r>
-          </a:p>
-        </p:txBody>
-      </p:sp>
-      <p:sp>
-        <p:nvSpPr>
-          <p:cNvPr id="24" name="Rounded Rectangle 23"/>
-          <p:cNvSpPr/>
-          <p:nvPr/>
-        </p:nvSpPr>
-        <p:spPr>
-          <a:xfrm>
-            <a:off x="4644000" y="4698000"/>
-            <a:ext cx="2556000" cy="936000"/>
-          </a:xfrm>
-          <a:prstGeom prst="roundRect">
-            <a:avLst>
-              <a:gd name="adj" fmla="val 6000"/>
-            </a:avLst>
-          </a:prstGeom>
-          <a:solidFill>
-            <a:srgbClr val="F4F6F8"/>
-          </a:solidFill>
-          <a:ln w="12700">
-            <a:solidFill>
-              <a:srgbClr val="8A939E"/>
-            </a:solidFill>
-          </a:ln>
-          <a:effectLst/>
-        </p:spPr>
-        <p:style>
-          <a:lnRef idx="1">
-            <a:schemeClr val="accent1"/>
-          </a:lnRef>
-          <a:fillRef idx="3">
-            <a:schemeClr val="accent1"/>
-          </a:fillRef>
-          <a:effectRef idx="2">
-            <a:schemeClr val="accent1"/>
-          </a:effectRef>
-          <a:fontRef idx="minor">
-            <a:schemeClr val="lt1"/>
-          </a:fontRef>
-        </p:style>
-        <p:txBody>
-          <a:bodyPr rtlCol="0" anchor="ctr" wrap="square" lIns="54000" rIns="54000" tIns="28800" bIns="28800"/>
-          <a:lstStyle/>
-          <a:p>
-            <a:pPr algn="l">
-              <a:lnSpc>
-                <a:spcPct val="105000"/>
-              </a:lnSpc>
-              <a:spcAft>
-                <a:spcPts val="200"/>
-              </a:spcAft>
-            </a:pPr>
-            <a:r>
-              <a:rPr sz="950" b="1">
-                <a:solidFill>
-                  <a:srgbClr val="2F5496"/>
-                </a:solidFill>
-                <a:latin typeface="Meiryo UI"/>
-                <a:ea typeface="Meiryo UI"/>
-              </a:rPr>
-              <a:t>根拠</a:t>
-            </a:r>
-          </a:p>
-          <a:p>
-            <a:pPr algn="l">
-              <a:lnSpc>
-                <a:spcPct val="105000"/>
-              </a:lnSpc>
-              <a:spcAft>
-                <a:spcPts val="200"/>
-              </a:spcAft>
-            </a:pPr>
-            <a:r>
-              <a:rPr sz="900" b="0">
-                <a:solidFill>
-                  <a:srgbClr val="1F2937"/>
-                </a:solidFill>
-                <a:latin typeface="Meiryo UI"/>
-                <a:ea typeface="Meiryo UI"/>
-              </a:rPr>
-              <a:t>自殺企図のおそれのある者の保護は、警察官職務執行法第3条に基づき警察が行う。学校・教委は警察の活動を妨げない。</a:t>
-            </a:r>
-          </a:p>
-        </p:txBody>
-      </p:sp>
-      <p:cxnSp>
-        <p:nvCxnSpPr>
-          <p:cNvPr id="25" name="Connector 24"/>
-          <p:cNvCxnSpPr/>
-          <p:nvPr/>
-        </p:nvCxnSpPr>
-        <p:spPr>
-          <a:xfrm>
-            <a:off x="4464000" y="5094000"/>
-            <a:ext cx="180000" cy="0"/>
-          </a:xfrm>
-          <a:prstGeom prst="line">
-            <a:avLst/>
-          </a:prstGeom>
-          <a:ln w="12700">
-            <a:solidFill>
-              <a:srgbClr val="8A939E"/>
-            </a:solidFill>
-            <a:prstDash val="dash"/>
-          </a:ln>
-          <a:effectLst/>
-        </p:spPr>
-        <p:style>
-          <a:lnRef idx="2">
-            <a:schemeClr val="accent1"/>
-          </a:lnRef>
-          <a:fillRef idx="0">
-            <a:schemeClr val="accent1"/>
-          </a:fillRef>
-          <a:effectRef idx="1">
-            <a:schemeClr val="accent1"/>
-          </a:effectRef>
-          <a:fontRef idx="minor">
-            <a:schemeClr val="tx1"/>
-          </a:fontRef>
-        </p:style>
-      </p:cxnSp>
-      <p:cxnSp>
-        <p:nvCxnSpPr>
-          <p:cNvPr id="26" name="Connector 25"/>
-          <p:cNvCxnSpPr/>
-          <p:nvPr/>
-        </p:nvCxnSpPr>
-        <p:spPr>
-          <a:xfrm>
-            <a:off x="2412000" y="5634000"/>
-            <a:ext cx="0" cy="162000"/>
-          </a:xfrm>
-          <a:prstGeom prst="line">
-            <a:avLst/>
-          </a:prstGeom>
-          <a:ln w="25400">
-            <a:solidFill>
-              <a:srgbClr val="37475A"/>
-            </a:solidFill>
-            <a:tailEnd type="triangle" w="med" len="med"/>
-          </a:ln>
-          <a:effectLst/>
-        </p:spPr>
-        <p:style>
-          <a:lnRef idx="2">
-            <a:schemeClr val="accent1"/>
-          </a:lnRef>
-          <a:fillRef idx="0">
-            <a:schemeClr val="accent1"/>
-          </a:fillRef>
-          <a:effectRef idx="1">
-            <a:schemeClr val="accent1"/>
-          </a:effectRef>
-          <a:fontRef idx="minor">
-            <a:schemeClr val="tx1"/>
-          </a:fontRef>
-        </p:style>
-      </p:cxnSp>
-      <p:sp>
-        <p:nvSpPr>
-          <p:cNvPr id="27" name="Rounded Rectangle 26"/>
-          <p:cNvSpPr/>
-          <p:nvPr/>
-        </p:nvSpPr>
-        <p:spPr>
-          <a:xfrm>
-            <a:off x="360000" y="5796000"/>
-            <a:ext cx="4104000" cy="684000"/>
-          </a:xfrm>
-          <a:prstGeom prst="roundRect">
-            <a:avLst>
-              <a:gd name="adj" fmla="val 8000"/>
-            </a:avLst>
-          </a:prstGeom>
-          <a:solidFill>
-            <a:srgbClr val="D1E7DD"/>
-          </a:solidFill>
-          <a:ln w="19050">
-            <a:solidFill>
-              <a:srgbClr val="1E6641"/>
-            </a:solidFill>
-          </a:ln>
-          <a:effectLst/>
-        </p:spPr>
-        <p:style>
-          <a:lnRef idx="1">
-            <a:schemeClr val="accent1"/>
-          </a:lnRef>
-          <a:fillRef idx="3">
-            <a:schemeClr val="accent1"/>
-          </a:fillRef>
-          <a:effectRef idx="2">
-            <a:schemeClr val="accent1"/>
-          </a:effectRef>
-          <a:fontRef idx="minor">
-            <a:schemeClr val="lt1"/>
-          </a:fontRef>
-        </p:style>
-        <p:txBody>
-          <a:bodyPr rtlCol="0" anchor="ctr" wrap="square" lIns="54000" rIns="54000" tIns="28800" bIns="28800"/>
-          <a:lstStyle/>
-          <a:p>
-            <a:pPr algn="l">
-              <a:lnSpc>
-                <a:spcPct val="105000"/>
-              </a:lnSpc>
-              <a:spcAft>
-                <a:spcPts val="200"/>
-              </a:spcAft>
-            </a:pPr>
-            <a:r>
-              <a:rPr sz="950" b="1">
-                <a:solidFill>
-                  <a:srgbClr val="1E6641"/>
-                </a:solidFill>
-                <a:latin typeface="Meiryo UI"/>
-                <a:ea typeface="Meiryo UI"/>
-              </a:rPr>
-              <a:t>【警察署（練馬区内管轄）】</a:t>
-            </a:r>
-          </a:p>
-          <a:p>
-            <a:pPr algn="l">
-              <a:lnSpc>
-                <a:spcPct val="105000"/>
-              </a:lnSpc>
-              <a:spcAft>
-                <a:spcPts val="200"/>
-              </a:spcAft>
-            </a:pPr>
-            <a:r>
-              <a:rPr sz="1100" b="1">
-                <a:solidFill>
-                  <a:srgbClr val="1F2937"/>
-                </a:solidFill>
-                <a:latin typeface="Meiryo UI"/>
-                <a:ea typeface="Meiryo UI"/>
-              </a:rPr>
-              <a:t>安否確認の結果を当該校へ連絡</a:t>
-            </a:r>
-          </a:p>
-        </p:txBody>
-      </p:sp>
-      <p:sp>
-        <p:nvSpPr>
-          <p:cNvPr id="28" name="Oval 27"/>
-          <p:cNvSpPr/>
-          <p:nvPr/>
-        </p:nvSpPr>
-        <p:spPr>
-          <a:xfrm>
-            <a:off x="32399" y="5997600"/>
-            <a:ext cx="280800" cy="280800"/>
-          </a:xfrm>
-          <a:prstGeom prst="ellipse">
-            <a:avLst/>
-          </a:prstGeom>
-          <a:solidFill>
-            <a:srgbClr val="2F5496"/>
-          </a:solidFill>
-          <a:ln w="19050">
-            <a:solidFill>
-              <a:srgbClr val="FFFFFF"/>
-            </a:solidFill>
-          </a:ln>
-          <a:effectLst/>
-        </p:spPr>
-        <p:style>
-          <a:lnRef idx="1">
-            <a:schemeClr val="accent1"/>
-          </a:lnRef>
-          <a:fillRef idx="3">
-            <a:schemeClr val="accent1"/>
-          </a:fillRef>
-          <a:effectRef idx="2">
-            <a:schemeClr val="accent1"/>
-          </a:effectRef>
-          <a:fontRef idx="minor">
-            <a:schemeClr val="lt1"/>
-          </a:fontRef>
-        </p:style>
-        <p:txBody>
-          <a:bodyPr rtlCol="0" anchor="ctr" wrap="none" lIns="54000" rIns="54000" tIns="28800" bIns="28800"/>
-          <a:lstStyle/>
-          <a:p>
-            <a:pPr algn="ctr">
-              <a:lnSpc>
-                <a:spcPct val="105000"/>
-              </a:lnSpc>
-              <a:spcAft>
-                <a:spcPts val="200"/>
-              </a:spcAft>
-            </a:pPr>
-            <a:r>
-              <a:rPr sz="1200" b="1">
-                <a:solidFill>
-                  <a:srgbClr val="FFFFFF"/>
-                </a:solidFill>
-                <a:latin typeface="Meiryo UI"/>
-                <a:ea typeface="Meiryo UI"/>
-              </a:rPr>
-              <a:t>10</a:t>
-            </a:r>
-          </a:p>
-        </p:txBody>
-      </p:sp>
-      <p:cxnSp>
-        <p:nvCxnSpPr>
-          <p:cNvPr id="29" name="Connector 28"/>
-          <p:cNvCxnSpPr/>
-          <p:nvPr/>
-        </p:nvCxnSpPr>
-        <p:spPr>
-          <a:xfrm>
-            <a:off x="2412000" y="6480000"/>
-            <a:ext cx="0" cy="162000"/>
-          </a:xfrm>
-          <a:prstGeom prst="line">
-            <a:avLst/>
-          </a:prstGeom>
-          <a:ln w="25400">
-            <a:solidFill>
-              <a:srgbClr val="37475A"/>
-            </a:solidFill>
-            <a:tailEnd type="triangle" w="med" len="med"/>
-          </a:ln>
-          <a:effectLst/>
-        </p:spPr>
-        <p:style>
-          <a:lnRef idx="2">
-            <a:schemeClr val="accent1"/>
-          </a:lnRef>
-          <a:fillRef idx="0">
-            <a:schemeClr val="accent1"/>
-          </a:fillRef>
-          <a:effectRef idx="1">
-            <a:schemeClr val="accent1"/>
-          </a:effectRef>
-          <a:fontRef idx="minor">
-            <a:schemeClr val="tx1"/>
-          </a:fontRef>
-        </p:style>
-      </p:cxnSp>
-      <p:sp>
-        <p:nvSpPr>
-          <p:cNvPr id="30" name="Rounded Rectangle 29"/>
-          <p:cNvSpPr/>
-          <p:nvPr/>
-        </p:nvSpPr>
-        <p:spPr>
-          <a:xfrm>
-            <a:off x="360000" y="6642000"/>
-            <a:ext cx="4104000" cy="1116000"/>
-          </a:xfrm>
-          <a:prstGeom prst="roundRect">
-            <a:avLst>
-              <a:gd name="adj" fmla="val 8000"/>
-            </a:avLst>
-          </a:prstGeom>
-          <a:solidFill>
-            <a:srgbClr val="FCF3CF"/>
-          </a:solidFill>
-          <a:ln w="19050">
-            <a:solidFill>
-              <a:srgbClr val="9A760A"/>
-            </a:solidFill>
-          </a:ln>
-          <a:effectLst/>
-        </p:spPr>
-        <p:style>
-          <a:lnRef idx="1">
-            <a:schemeClr val="accent1"/>
-          </a:lnRef>
-          <a:fillRef idx="3">
-            <a:schemeClr val="accent1"/>
-          </a:fillRef>
-          <a:effectRef idx="2">
-            <a:schemeClr val="accent1"/>
-          </a:effectRef>
-          <a:fontRef idx="minor">
-            <a:schemeClr val="lt1"/>
-          </a:fontRef>
-        </p:style>
-        <p:txBody>
-          <a:bodyPr rtlCol="0" anchor="ctr" wrap="square" lIns="54000" rIns="54000" tIns="28800" bIns="28800"/>
-          <a:lstStyle/>
-          <a:p>
-            <a:pPr algn="l">
-              <a:lnSpc>
-                <a:spcPct val="105000"/>
-              </a:lnSpc>
-              <a:spcAft>
-                <a:spcPts val="200"/>
-              </a:spcAft>
-            </a:pPr>
-            <a:r>
-              <a:rPr sz="950" b="1">
-                <a:solidFill>
-                  <a:srgbClr val="9A760A"/>
-                </a:solidFill>
-                <a:latin typeface="Meiryo UI"/>
-                <a:ea typeface="Meiryo UI"/>
-              </a:rPr>
-              <a:t>【当該校（校長・副校長）】</a:t>
-            </a:r>
-          </a:p>
-          <a:p>
-            <a:pPr algn="l">
-              <a:lnSpc>
-                <a:spcPct val="105000"/>
-              </a:lnSpc>
-              <a:spcAft>
-                <a:spcPts val="200"/>
-              </a:spcAft>
-            </a:pPr>
-            <a:r>
-              <a:rPr sz="1100" b="1">
-                <a:solidFill>
-                  <a:srgbClr val="1F2937"/>
-                </a:solidFill>
-                <a:latin typeface="Meiryo UI"/>
-                <a:ea typeface="Meiryo UI"/>
-              </a:rPr>
-              <a:t>警察からの情報を教育指導課へ報告</a:t>
-            </a:r>
-          </a:p>
-          <a:p>
-            <a:pPr algn="l">
-              <a:lnSpc>
-                <a:spcPct val="105000"/>
-              </a:lnSpc>
-              <a:spcAft>
-                <a:spcPts val="200"/>
-              </a:spcAft>
-            </a:pPr>
-            <a:r>
-              <a:rPr sz="1000" b="0">
-                <a:solidFill>
-                  <a:srgbClr val="1F2937"/>
-                </a:solidFill>
-                <a:latin typeface="Meiryo UI"/>
-                <a:ea typeface="Meiryo UI"/>
-              </a:rPr>
-              <a:t>①安否・現在の状況　②警察がとった措置　③保護者の状況・受け止め</a:t>
-            </a:r>
-            <a:br/>
-            <a:r>
-              <a:rPr sz="1000" b="0">
-                <a:solidFill>
-                  <a:srgbClr val="1F2937"/>
-                </a:solidFill>
-                <a:latin typeface="Meiryo UI"/>
-                <a:ea typeface="Meiryo UI"/>
-              </a:rPr>
-              <a:t>④学校が把握している本人の様子（欠席・友人関係・いじめの有無 等）</a:t>
-            </a:r>
-          </a:p>
-        </p:txBody>
-      </p:sp>
-      <p:sp>
-        <p:nvSpPr>
-          <p:cNvPr id="31" name="Oval 30"/>
-          <p:cNvSpPr/>
-          <p:nvPr/>
-        </p:nvSpPr>
-        <p:spPr>
-          <a:xfrm>
-            <a:off x="32399" y="7059600"/>
-            <a:ext cx="280800" cy="280800"/>
-          </a:xfrm>
-          <a:prstGeom prst="ellipse">
-            <a:avLst/>
-          </a:prstGeom>
-          <a:solidFill>
-            <a:srgbClr val="2F5496"/>
-          </a:solidFill>
-          <a:ln w="19050">
-            <a:solidFill>
-              <a:srgbClr val="FFFFFF"/>
-            </a:solidFill>
-          </a:ln>
-          <a:effectLst/>
-        </p:spPr>
-        <p:style>
-          <a:lnRef idx="1">
-            <a:schemeClr val="accent1"/>
-          </a:lnRef>
-          <a:fillRef idx="3">
-            <a:schemeClr val="accent1"/>
-          </a:fillRef>
-          <a:effectRef idx="2">
-            <a:schemeClr val="accent1"/>
-          </a:effectRef>
-          <a:fontRef idx="minor">
-            <a:schemeClr val="lt1"/>
-          </a:fontRef>
-        </p:style>
-        <p:txBody>
-          <a:bodyPr rtlCol="0" anchor="ctr" wrap="none" lIns="54000" rIns="54000" tIns="28800" bIns="28800"/>
-          <a:lstStyle/>
-          <a:p>
-            <a:pPr algn="ctr">
-              <a:lnSpc>
-                <a:spcPct val="105000"/>
-              </a:lnSpc>
-              <a:spcAft>
-                <a:spcPts val="200"/>
-              </a:spcAft>
-            </a:pPr>
-            <a:r>
-              <a:rPr sz="1200" b="1">
-                <a:solidFill>
-                  <a:srgbClr val="FFFFFF"/>
-                </a:solidFill>
-                <a:latin typeface="Meiryo UI"/>
-                <a:ea typeface="Meiryo UI"/>
-              </a:rPr>
-              <a:t>11</a:t>
-            </a:r>
-          </a:p>
-        </p:txBody>
-      </p:sp>
-      <p:sp>
-        <p:nvSpPr>
-          <p:cNvPr id="32" name="Rounded Rectangle 31"/>
-          <p:cNvSpPr/>
-          <p:nvPr/>
-        </p:nvSpPr>
-        <p:spPr>
-          <a:xfrm>
-            <a:off x="4644000" y="6642000"/>
-            <a:ext cx="2556000" cy="936000"/>
-          </a:xfrm>
-          <a:prstGeom prst="roundRect">
-            <a:avLst>
-              <a:gd name="adj" fmla="val 6000"/>
-            </a:avLst>
-          </a:prstGeom>
-          <a:solidFill>
-            <a:srgbClr val="F4F6F8"/>
-          </a:solidFill>
-          <a:ln w="12700">
-            <a:solidFill>
-              <a:srgbClr val="8A939E"/>
-            </a:solidFill>
-          </a:ln>
-          <a:effectLst/>
-        </p:spPr>
-        <p:style>
-          <a:lnRef idx="1">
-            <a:schemeClr val="accent1"/>
-          </a:lnRef>
-          <a:fillRef idx="3">
-            <a:schemeClr val="accent1"/>
-          </a:fillRef>
-          <a:effectRef idx="2">
-            <a:schemeClr val="accent1"/>
-          </a:effectRef>
-          <a:fontRef idx="minor">
-            <a:schemeClr val="lt1"/>
-          </a:fontRef>
-        </p:style>
-        <p:txBody>
-          <a:bodyPr rtlCol="0" anchor="ctr" wrap="square" lIns="54000" rIns="54000" tIns="28800" bIns="28800"/>
-          <a:lstStyle/>
-          <a:p>
-            <a:pPr algn="l">
-              <a:lnSpc>
-                <a:spcPct val="105000"/>
-              </a:lnSpc>
-              <a:spcAft>
-                <a:spcPts val="200"/>
-              </a:spcAft>
-            </a:pPr>
-            <a:r>
-              <a:rPr sz="950" b="1">
-                <a:solidFill>
-                  <a:srgbClr val="2F5496"/>
-                </a:solidFill>
-                <a:latin typeface="Meiryo UI"/>
-                <a:ea typeface="Meiryo UI"/>
-              </a:rPr>
-              <a:t>報告を受けた指導主事は</a:t>
-            </a:r>
-          </a:p>
-          <a:p>
-            <a:pPr algn="l">
-              <a:lnSpc>
-                <a:spcPct val="105000"/>
-              </a:lnSpc>
-              <a:spcAft>
-                <a:spcPts val="200"/>
-              </a:spcAft>
-            </a:pPr>
-            <a:r>
-              <a:rPr sz="900" b="0">
-                <a:solidFill>
-                  <a:srgbClr val="1F2937"/>
-                </a:solidFill>
-                <a:latin typeface="Meiryo UI"/>
-                <a:ea typeface="Meiryo UI"/>
-              </a:rPr>
-              <a:t>課長へ報告し、記録を整理。学校の翌日以降の対応（フェーズ3）を校長と確認する。</a:t>
-            </a:r>
-          </a:p>
-        </p:txBody>
-      </p:sp>
-      <p:cxnSp>
-        <p:nvCxnSpPr>
-          <p:cNvPr id="33" name="Connector 32"/>
-          <p:cNvCxnSpPr/>
-          <p:nvPr/>
-        </p:nvCxnSpPr>
-        <p:spPr>
-          <a:xfrm>
-            <a:off x="4464000" y="7110000"/>
-            <a:ext cx="180000" cy="0"/>
-          </a:xfrm>
-          <a:prstGeom prst="line">
-            <a:avLst/>
-          </a:prstGeom>
-          <a:ln w="12700">
-            <a:solidFill>
-              <a:srgbClr val="8A939E"/>
-            </a:solidFill>
-            <a:prstDash val="dash"/>
-          </a:ln>
-          <a:effectLst/>
-        </p:spPr>
-        <p:style>
-          <a:lnRef idx="2">
-            <a:schemeClr val="accent1"/>
-          </a:lnRef>
-          <a:fillRef idx="0">
-            <a:schemeClr val="accent1"/>
-          </a:fillRef>
-          <a:effectRef idx="1">
-            <a:schemeClr val="accent1"/>
-          </a:effectRef>
-          <a:fontRef idx="minor">
-            <a:schemeClr val="tx1"/>
-          </a:fontRef>
-        </p:style>
-      </p:cxnSp>
-      <p:cxnSp>
-        <p:nvCxnSpPr>
-          <p:cNvPr id="34" name="Connector 33"/>
-          <p:cNvCxnSpPr/>
-          <p:nvPr/>
-        </p:nvCxnSpPr>
-        <p:spPr>
-          <a:xfrm>
-            <a:off x="2412000" y="7758000"/>
-            <a:ext cx="0" cy="180000"/>
-          </a:xfrm>
-          <a:prstGeom prst="line">
-            <a:avLst/>
-          </a:prstGeom>
-          <a:ln w="25400">
-            <a:solidFill>
-              <a:srgbClr val="37475A"/>
-            </a:solidFill>
-            <a:tailEnd type="triangle" w="med" len="med"/>
-          </a:ln>
-          <a:effectLst/>
-        </p:spPr>
-        <p:style>
-          <a:lnRef idx="2">
-            <a:schemeClr val="accent1"/>
-          </a:lnRef>
-          <a:fillRef idx="0">
-            <a:schemeClr val="accent1"/>
-          </a:fillRef>
-          <a:effectRef idx="1">
-            <a:schemeClr val="accent1"/>
-          </a:effectRef>
-          <a:fontRef idx="minor">
-            <a:schemeClr val="tx1"/>
-          </a:fontRef>
-        </p:style>
-      </p:cxnSp>
-      <p:sp>
-        <p:nvSpPr>
-          <p:cNvPr id="35" name="Pentagon 34"/>
-          <p:cNvSpPr/>
-          <p:nvPr/>
-        </p:nvSpPr>
-        <p:spPr>
-          <a:xfrm>
-            <a:off x="432000" y="7938000"/>
-            <a:ext cx="3960000" cy="413999"/>
-          </a:xfrm>
-          <a:prstGeom prst="homePlate">
-            <a:avLst/>
-          </a:prstGeom>
-          <a:solidFill>
-            <a:srgbClr val="37475A"/>
-          </a:solidFill>
-          <a:ln>
-            <a:noFill/>
-          </a:ln>
-          <a:effectLst/>
-        </p:spPr>
-        <p:style>
-          <a:lnRef idx="1">
-            <a:schemeClr val="accent1"/>
-          </a:lnRef>
-          <a:fillRef idx="3">
-            <a:schemeClr val="accent1"/>
-          </a:fillRef>
-          <a:effectRef idx="2">
-            <a:schemeClr val="accent1"/>
-          </a:effectRef>
-          <a:fontRef idx="minor">
-            <a:schemeClr val="lt1"/>
-          </a:fontRef>
-        </p:style>
-        <p:txBody>
-          <a:bodyPr rtlCol="0" anchor="ctr" wrap="square" lIns="54000" rIns="54000" tIns="28800" bIns="28800"/>
-          <a:lstStyle/>
-          <a:p>
-            <a:pPr algn="ctr">
-              <a:lnSpc>
-                <a:spcPct val="105000"/>
-              </a:lnSpc>
-              <a:spcAft>
-                <a:spcPts val="200"/>
-              </a:spcAft>
-            </a:pPr>
-            <a:r>
-              <a:rPr sz="1150" b="1">
-                <a:solidFill>
-                  <a:srgbClr val="FFFFFF"/>
-                </a:solidFill>
-                <a:latin typeface="Meiryo UI"/>
-                <a:ea typeface="Meiryo UI"/>
-              </a:rPr>
-              <a:t>フェーズ3（次ページ：事後の支援）へ</a:t>
-            </a:r>
-          </a:p>
-        </p:txBody>
-      </p:sp>
-      <p:sp>
-        <p:nvSpPr>
-          <p:cNvPr id="36" name="TextBox 35"/>
-          <p:cNvSpPr txBox="1"/>
-          <p:nvPr/>
-        </p:nvSpPr>
-        <p:spPr>
-          <a:xfrm>
-            <a:off x="360000" y="8568000"/>
-            <a:ext cx="6840000" cy="1260000"/>
-          </a:xfrm>
-          <a:prstGeom prst="rect">
-            <a:avLst/>
-          </a:prstGeom>
-          <a:noFill/>
-        </p:spPr>
-        <p:txBody>
-          <a:bodyPr wrap="square" anchor="t" lIns="54000" rIns="54000" tIns="28800" bIns="28800">
-            <a:spAutoFit/>
-          </a:bodyPr>
-          <a:lstStyle/>
-          <a:p>
-            <a:pPr algn="l">
-              <a:lnSpc>
-                <a:spcPct val="105000"/>
-              </a:lnSpc>
-              <a:spcAft>
-                <a:spcPts val="200"/>
-              </a:spcAft>
-            </a:pPr>
-            <a:r>
-              <a:rPr sz="950" b="0">
-                <a:solidFill>
-                  <a:srgbClr val="1F2937"/>
-                </a:solidFill>
-                <a:latin typeface="Meiryo UI"/>
-                <a:ea typeface="Meiryo UI"/>
-              </a:rPr>
-              <a:t>※ 安否確認が完了するまでは、指導主事・当該校とも電話が受けられる体制を維持する（勤務時間外に及ぶ場合は連絡先を警察・相互に共有）。</a:t>
-            </a:r>
-          </a:p>
-          <a:p>
-            <a:pPr algn="l">
-              <a:lnSpc>
-                <a:spcPct val="105000"/>
-              </a:lnSpc>
-              <a:spcAft>
-                <a:spcPts val="200"/>
-              </a:spcAft>
-            </a:pPr>
-            <a:r>
-              <a:rPr sz="950" b="0">
-                <a:solidFill>
-                  <a:srgbClr val="1F2937"/>
-                </a:solidFill>
-                <a:latin typeface="Meiryo UI"/>
-                <a:ea typeface="Meiryo UI"/>
-              </a:rPr>
-              <a:t>※ 本人・保護者への学校からの接触は、必ず警察の助言（手順6）に従う。独自の判断で先に連絡しない。</a:t>
-            </a:r>
-          </a:p>
-          <a:p>
-            <a:pPr algn="l">
-              <a:lnSpc>
-                <a:spcPct val="105000"/>
-              </a:lnSpc>
-              <a:spcAft>
-                <a:spcPts val="200"/>
-              </a:spcAft>
-            </a:pPr>
-            <a:r>
-              <a:rPr sz="950" b="0">
-                <a:solidFill>
-                  <a:srgbClr val="1F2937"/>
-                </a:solidFill>
-                <a:latin typeface="Meiryo UI"/>
-                <a:ea typeface="Meiryo UI"/>
-              </a:rPr>
-              <a:t>※ 校内・課内とも、情報は「知る必要のある者」に限定して共有し、憶測が広がらないよう管理する。</a:t>
-            </a:r>
-          </a:p>
-        </p:txBody>
-      </p:sp>
-    </p:spTree>
-  </p:cSld>
-  <p:clrMapOvr>
-    <a:masterClrMapping/>
-  </p:clrMapOvr>
-</p:sld>
-</file>
-
-<file path=ppt/slides/slide3.xml><?xml version="1.0" encoding="utf-8"?>
-<p:sld xmlns:a="http://schemas.openxmlformats.org/drawingml/2006/main" xmlns:p="http://schemas.openxmlformats.org/presentationml/2006/main" xmlns:r="http://schemas.openxmlformats.org/officeDocument/2006/relationships">
-  <p:cSld>
-    <p:spTree>
-      <p:nvGrpSpPr>
-        <p:cNvPr id="1" name=""/>
-        <p:cNvGrpSpPr/>
-        <p:nvPr/>
-      </p:nvGrpSpPr>
-      <p:grpSpPr/>
-      <p:sp>
-        <p:nvSpPr>
-          <p:cNvPr id="2" name="TextBox 1"/>
-          <p:cNvSpPr txBox="1"/>
-          <p:nvPr/>
-        </p:nvSpPr>
-        <p:spPr>
-          <a:xfrm>
-            <a:off x="360000" y="144000"/>
-            <a:ext cx="6840000" cy="360000"/>
-          </a:xfrm>
-          <a:prstGeom prst="rect">
-            <a:avLst/>
-          </a:prstGeom>
-          <a:noFill/>
-        </p:spPr>
-        <p:txBody>
-          <a:bodyPr wrap="square" anchor="t" lIns="54000" rIns="54000" tIns="28800" bIns="28800">
-            <a:spAutoFit/>
-          </a:bodyPr>
-          <a:lstStyle/>
-          <a:p>
-            <a:pPr algn="ctr">
-              <a:lnSpc>
-                <a:spcPct val="105000"/>
-              </a:lnSpc>
-              <a:spcAft>
-                <a:spcPts val="200"/>
-              </a:spcAft>
-            </a:pPr>
-            <a:r>
-              <a:rPr sz="1600" b="1">
-                <a:solidFill>
-                  <a:srgbClr val="1F2937"/>
-                </a:solidFill>
-                <a:latin typeface="Meiryo UI"/>
-                <a:ea typeface="Meiryo UI"/>
-              </a:rPr>
-              <a:t>児童生徒の自殺企図に関する相談対応フロー</a:t>
-            </a:r>
-          </a:p>
-        </p:txBody>
-      </p:sp>
-      <p:sp>
-        <p:nvSpPr>
-          <p:cNvPr id="3" name="TextBox 2"/>
-          <p:cNvSpPr txBox="1"/>
-          <p:nvPr/>
-        </p:nvSpPr>
-        <p:spPr>
-          <a:xfrm>
-            <a:off x="360000" y="486000"/>
-            <a:ext cx="6840000" cy="216000"/>
-          </a:xfrm>
-          <a:prstGeom prst="rect">
-            <a:avLst/>
-          </a:prstGeom>
-          <a:noFill/>
-        </p:spPr>
-        <p:txBody>
-          <a:bodyPr wrap="square" anchor="t" lIns="54000" rIns="54000" tIns="28800" bIns="28800">
-            <a:spAutoFit/>
-          </a:bodyPr>
-          <a:lstStyle/>
-          <a:p>
-            <a:pPr algn="ctr">
-              <a:lnSpc>
-                <a:spcPct val="105000"/>
-              </a:lnSpc>
-              <a:spcAft>
-                <a:spcPts val="200"/>
-              </a:spcAft>
-            </a:pPr>
-            <a:r>
-              <a:rPr sz="1000" b="0">
-                <a:solidFill>
-                  <a:srgbClr val="1F2937"/>
-                </a:solidFill>
-                <a:latin typeface="Meiryo UI"/>
-                <a:ea typeface="Meiryo UI"/>
-              </a:rPr>
-              <a:t>〜こたエール（東京都）にメールで相談が入った場合〜</a:t>
-            </a:r>
-          </a:p>
-        </p:txBody>
-      </p:sp>
-      <p:sp>
-        <p:nvSpPr>
-          <p:cNvPr id="4" name="Rectangle 3"/>
-          <p:cNvSpPr/>
-          <p:nvPr/>
-        </p:nvSpPr>
-        <p:spPr>
-          <a:xfrm>
-            <a:off x="360000" y="737999"/>
-            <a:ext cx="6840000" cy="342000"/>
-          </a:xfrm>
-          <a:prstGeom prst="rect">
-            <a:avLst/>
-          </a:prstGeom>
-          <a:solidFill>
-            <a:srgbClr val="2F5496"/>
-          </a:solidFill>
-          <a:ln>
-            <a:noFill/>
-          </a:ln>
-          <a:effectLst/>
-        </p:spPr>
-        <p:style>
-          <a:lnRef idx="1">
-            <a:schemeClr val="accent1"/>
-          </a:lnRef>
-          <a:fillRef idx="3">
-            <a:schemeClr val="accent1"/>
-          </a:fillRef>
-          <a:effectRef idx="2">
-            <a:schemeClr val="accent1"/>
-          </a:effectRef>
-          <a:fontRef idx="minor">
-            <a:schemeClr val="lt1"/>
-          </a:fontRef>
-        </p:style>
-        <p:txBody>
-          <a:bodyPr rtlCol="0" anchor="ctr" wrap="square" lIns="54000" rIns="54000" tIns="28800" bIns="28800"/>
-          <a:lstStyle/>
-          <a:p>
-            <a:pPr algn="ctr">
-              <a:lnSpc>
-                <a:spcPct val="105000"/>
-              </a:lnSpc>
-              <a:spcAft>
-                <a:spcPts val="200"/>
-              </a:spcAft>
-            </a:pPr>
-            <a:r>
-              <a:rPr sz="1250" b="1">
-                <a:solidFill>
-                  <a:srgbClr val="FFFFFF"/>
-                </a:solidFill>
-                <a:latin typeface="Meiryo UI"/>
-                <a:ea typeface="Meiryo UI"/>
-              </a:rPr>
-              <a:t>フェーズ3　事後の支援・継続的な見守り</a:t>
-            </a:r>
-          </a:p>
-        </p:txBody>
-      </p:sp>
-      <p:sp>
-        <p:nvSpPr>
-          <p:cNvPr id="5" name="Rounded Rectangle 4"/>
-          <p:cNvSpPr/>
-          <p:nvPr/>
-        </p:nvSpPr>
-        <p:spPr>
-          <a:xfrm>
-            <a:off x="5903999" y="792000"/>
-            <a:ext cx="1224000" cy="234000"/>
-          </a:xfrm>
-          <a:prstGeom prst="roundRect">
-            <a:avLst/>
-          </a:prstGeom>
-          <a:solidFill>
-            <a:srgbClr val="FFFFFF"/>
-          </a:solidFill>
-          <a:ln w="12700">
-            <a:solidFill>
-              <a:srgbClr val="2F5496"/>
-            </a:solidFill>
-          </a:ln>
-          <a:effectLst/>
-        </p:spPr>
-        <p:style>
-          <a:lnRef idx="1">
-            <a:schemeClr val="accent1"/>
-          </a:lnRef>
-          <a:fillRef idx="3">
-            <a:schemeClr val="accent1"/>
-          </a:fillRef>
-          <a:effectRef idx="2">
-            <a:schemeClr val="accent1"/>
-          </a:effectRef>
-          <a:fontRef idx="minor">
-            <a:schemeClr val="lt1"/>
-          </a:fontRef>
-        </p:style>
-        <p:txBody>
-          <a:bodyPr rtlCol="0" anchor="ctr" wrap="none" lIns="54000" rIns="54000" tIns="28800" bIns="28800"/>
-          <a:lstStyle/>
-          <a:p>
-            <a:pPr algn="ctr">
-              <a:lnSpc>
-                <a:spcPct val="105000"/>
-              </a:lnSpc>
-              <a:spcAft>
-                <a:spcPts val="200"/>
-              </a:spcAft>
-            </a:pPr>
-            <a:r>
-              <a:rPr sz="850" b="1">
-                <a:solidFill>
-                  <a:srgbClr val="2F5496"/>
-                </a:solidFill>
-                <a:latin typeface="Meiryo UI"/>
-                <a:ea typeface="Meiryo UI"/>
-              </a:rPr>
-              <a:t>翌日以降 継続</a:t>
-            </a:r>
-          </a:p>
-        </p:txBody>
-      </p:sp>
-      <p:sp>
-        <p:nvSpPr>
-          <p:cNvPr id="6" name="TextBox 5"/>
-          <p:cNvSpPr txBox="1"/>
-          <p:nvPr/>
-        </p:nvSpPr>
-        <p:spPr>
-          <a:xfrm>
-            <a:off x="360000" y="10404000"/>
-            <a:ext cx="6840000" cy="216000"/>
-          </a:xfrm>
-          <a:prstGeom prst="rect">
-            <a:avLst/>
-          </a:prstGeom>
-          <a:noFill/>
-        </p:spPr>
-        <p:txBody>
-          <a:bodyPr wrap="square" anchor="t" lIns="54000" rIns="54000" tIns="28800" bIns="28800">
-            <a:spAutoFit/>
-          </a:bodyPr>
-          <a:lstStyle/>
-          <a:p>
-            <a:pPr algn="r">
-              <a:lnSpc>
-                <a:spcPct val="105000"/>
-              </a:lnSpc>
-              <a:spcAft>
-                <a:spcPts val="200"/>
-              </a:spcAft>
-            </a:pPr>
-            <a:r>
-              <a:rPr sz="850" b="0">
+              <a:rPr sz="800" b="0">
                 <a:solidFill>
                   <a:srgbClr val="8A939E"/>
                 </a:solidFill>
                 <a:latin typeface="Meiryo UI"/>
                 <a:ea typeface="Meiryo UI"/>
               </a:rPr>
-              <a:t>練馬区教育委員会 教育指導課　　3 / 3</a:t>
-            </a:r>
-          </a:p>
-        </p:txBody>
-      </p:sp>
-      <p:sp>
-        <p:nvSpPr>
-          <p:cNvPr id="7" name="Rounded Rectangle 6"/>
-          <p:cNvSpPr/>
-          <p:nvPr/>
-        </p:nvSpPr>
-        <p:spPr>
-          <a:xfrm>
-            <a:off x="360000" y="1224000"/>
-            <a:ext cx="4104000" cy="1908000"/>
-          </a:xfrm>
-          <a:prstGeom prst="roundRect">
-            <a:avLst>
-              <a:gd name="adj" fmla="val 8000"/>
-            </a:avLst>
-          </a:prstGeom>
-          <a:solidFill>
-            <a:srgbClr val="E8DAEF"/>
-          </a:solidFill>
-          <a:ln w="19050">
-            <a:solidFill>
-              <a:srgbClr val="6C3483"/>
-            </a:solidFill>
-          </a:ln>
-          <a:effectLst/>
-        </p:spPr>
-        <p:style>
-          <a:lnRef idx="1">
-            <a:schemeClr val="accent1"/>
-          </a:lnRef>
-          <a:fillRef idx="3">
-            <a:schemeClr val="accent1"/>
-          </a:fillRef>
-          <a:effectRef idx="2">
-            <a:schemeClr val="accent1"/>
-          </a:effectRef>
-          <a:fontRef idx="minor">
-            <a:schemeClr val="lt1"/>
-          </a:fontRef>
-        </p:style>
-        <p:txBody>
-          <a:bodyPr rtlCol="0" anchor="ctr" wrap="square" lIns="54000" rIns="54000" tIns="28800" bIns="28800"/>
-          <a:lstStyle/>
-          <a:p>
-            <a:pPr algn="l">
-              <a:lnSpc>
-                <a:spcPct val="105000"/>
-              </a:lnSpc>
-              <a:spcAft>
-                <a:spcPts val="200"/>
-              </a:spcAft>
-            </a:pPr>
-            <a:r>
-              <a:rPr sz="950" b="1">
-                <a:solidFill>
-                  <a:srgbClr val="6C3483"/>
-                </a:solidFill>
-                <a:latin typeface="Meiryo UI"/>
-                <a:ea typeface="Meiryo UI"/>
-              </a:rPr>
-              <a:t>【当該校・教育指導課】</a:t>
-            </a:r>
-          </a:p>
-          <a:p>
-            <a:pPr algn="l">
-              <a:lnSpc>
-                <a:spcPct val="105000"/>
-              </a:lnSpc>
-              <a:spcAft>
-                <a:spcPts val="200"/>
-              </a:spcAft>
-            </a:pPr>
-            <a:r>
-              <a:rPr sz="1100" b="1">
-                <a:solidFill>
-                  <a:srgbClr val="1F2937"/>
-                </a:solidFill>
-                <a:latin typeface="Meiryo UI"/>
-                <a:ea typeface="Meiryo UI"/>
-              </a:rPr>
-              <a:t>校内支援体制を立ち上げ、継続的に支援する</a:t>
-            </a:r>
-          </a:p>
-          <a:p>
-            <a:pPr algn="l">
-              <a:lnSpc>
-                <a:spcPct val="105000"/>
-              </a:lnSpc>
-              <a:spcAft>
-                <a:spcPts val="200"/>
-              </a:spcAft>
-            </a:pPr>
-            <a:r>
-              <a:rPr sz="1000" b="0">
-                <a:solidFill>
-                  <a:srgbClr val="1F2937"/>
-                </a:solidFill>
-                <a:latin typeface="Meiryo UI"/>
-                <a:ea typeface="Meiryo UI"/>
-              </a:rPr>
-              <a:t>・校内委員会（管理職・担任・養護教諭・SC・SSW）で支援方針を決定</a:t>
-            </a:r>
-            <a:br/>
-            <a:r>
-              <a:rPr sz="1000" b="0">
-                <a:solidFill>
-                  <a:srgbClr val="1F2937"/>
-                </a:solidFill>
-                <a:latin typeface="Meiryo UI"/>
-                <a:ea typeface="Meiryo UI"/>
-              </a:rPr>
-              <a:t>・本人との面接（SC等）、保護者との連携、必要に応じ医療機関へ接続</a:t>
-            </a:r>
-            <a:br/>
-            <a:r>
-              <a:rPr sz="1000" b="0">
-                <a:solidFill>
-                  <a:srgbClr val="1F2937"/>
-                </a:solidFill>
-                <a:latin typeface="Meiryo UI"/>
-                <a:ea typeface="Meiryo UI"/>
-              </a:rPr>
-              <a:t>・背景にいじめ等が疑われる場合は、いじめ防止対策推進法に基づく対応を並行</a:t>
-            </a:r>
-            <a:br/>
-            <a:r>
-              <a:rPr sz="1000" b="0">
-                <a:solidFill>
-                  <a:srgbClr val="1F2937"/>
-                </a:solidFill>
-                <a:latin typeface="Meiryo UI"/>
-                <a:ea typeface="Meiryo UI"/>
-              </a:rPr>
-              <a:t>・経過を教育指導課へ定期的に報告（当面は毎日→安定後は週次など）</a:t>
-            </a:r>
-          </a:p>
-        </p:txBody>
-      </p:sp>
-      <p:sp>
-        <p:nvSpPr>
-          <p:cNvPr id="8" name="Oval 7"/>
-          <p:cNvSpPr/>
-          <p:nvPr/>
-        </p:nvSpPr>
-        <p:spPr>
-          <a:xfrm>
-            <a:off x="32399" y="2037600"/>
-            <a:ext cx="280800" cy="280800"/>
-          </a:xfrm>
-          <a:prstGeom prst="ellipse">
-            <a:avLst/>
-          </a:prstGeom>
-          <a:solidFill>
-            <a:srgbClr val="2F5496"/>
-          </a:solidFill>
-          <a:ln w="19050">
-            <a:solidFill>
-              <a:srgbClr val="FFFFFF"/>
-            </a:solidFill>
-          </a:ln>
-          <a:effectLst/>
-        </p:spPr>
-        <p:style>
-          <a:lnRef idx="1">
-            <a:schemeClr val="accent1"/>
-          </a:lnRef>
-          <a:fillRef idx="3">
-            <a:schemeClr val="accent1"/>
-          </a:fillRef>
-          <a:effectRef idx="2">
-            <a:schemeClr val="accent1"/>
-          </a:effectRef>
-          <a:fontRef idx="minor">
-            <a:schemeClr val="lt1"/>
-          </a:fontRef>
-        </p:style>
-        <p:txBody>
-          <a:bodyPr rtlCol="0" anchor="ctr" wrap="none" lIns="54000" rIns="54000" tIns="28800" bIns="28800"/>
-          <a:lstStyle/>
-          <a:p>
-            <a:pPr algn="ctr">
-              <a:lnSpc>
-                <a:spcPct val="105000"/>
-              </a:lnSpc>
-              <a:spcAft>
-                <a:spcPts val="200"/>
-              </a:spcAft>
-            </a:pPr>
-            <a:r>
-              <a:rPr sz="1200" b="1">
-                <a:solidFill>
-                  <a:srgbClr val="FFFFFF"/>
-                </a:solidFill>
-                <a:latin typeface="Meiryo UI"/>
-                <a:ea typeface="Meiryo UI"/>
-              </a:rPr>
-              <a:t>12</a:t>
-            </a:r>
-          </a:p>
-        </p:txBody>
-      </p:sp>
-      <p:sp>
-        <p:nvSpPr>
-          <p:cNvPr id="9" name="Rounded Rectangle 8"/>
-          <p:cNvSpPr/>
-          <p:nvPr/>
-        </p:nvSpPr>
-        <p:spPr>
-          <a:xfrm>
-            <a:off x="4644000" y="1224000"/>
-            <a:ext cx="2556000" cy="1224000"/>
-          </a:xfrm>
-          <a:prstGeom prst="roundRect">
-            <a:avLst>
-              <a:gd name="adj" fmla="val 6000"/>
-            </a:avLst>
-          </a:prstGeom>
-          <a:solidFill>
-            <a:srgbClr val="F4F6F8"/>
-          </a:solidFill>
-          <a:ln w="12700">
-            <a:solidFill>
-              <a:srgbClr val="8A939E"/>
-            </a:solidFill>
-          </a:ln>
-          <a:effectLst/>
-        </p:spPr>
-        <p:style>
-          <a:lnRef idx="1">
-            <a:schemeClr val="accent1"/>
-          </a:lnRef>
-          <a:fillRef idx="3">
-            <a:schemeClr val="accent1"/>
-          </a:fillRef>
-          <a:effectRef idx="2">
-            <a:schemeClr val="accent1"/>
-          </a:effectRef>
-          <a:fontRef idx="minor">
-            <a:schemeClr val="lt1"/>
-          </a:fontRef>
-        </p:style>
-        <p:txBody>
-          <a:bodyPr rtlCol="0" anchor="ctr" wrap="square" lIns="54000" rIns="54000" tIns="28800" bIns="28800"/>
-          <a:lstStyle/>
-          <a:p>
-            <a:pPr algn="l">
-              <a:lnSpc>
-                <a:spcPct val="105000"/>
-              </a:lnSpc>
-              <a:spcAft>
-                <a:spcPts val="200"/>
-              </a:spcAft>
-            </a:pPr>
-            <a:r>
-              <a:rPr sz="950" b="1">
-                <a:solidFill>
-                  <a:srgbClr val="2F5496"/>
-                </a:solidFill>
-                <a:latin typeface="Meiryo UI"/>
-                <a:ea typeface="Meiryo UI"/>
-              </a:rPr>
-              <a:t>TALKの原則（本人への関わり方）</a:t>
-            </a:r>
-          </a:p>
-          <a:p>
-            <a:pPr algn="l">
-              <a:lnSpc>
-                <a:spcPct val="105000"/>
-              </a:lnSpc>
-              <a:spcAft>
-                <a:spcPts val="200"/>
-              </a:spcAft>
-            </a:pPr>
-            <a:r>
-              <a:rPr sz="900" b="0">
-                <a:solidFill>
-                  <a:srgbClr val="1F2937"/>
-                </a:solidFill>
-                <a:latin typeface="Meiryo UI"/>
-                <a:ea typeface="Meiryo UI"/>
-              </a:rPr>
-              <a:t>Tell：心配していることを言葉で伝える</a:t>
-            </a:r>
-            <a:br/>
-            <a:r>
-              <a:rPr sz="900" b="0">
-                <a:solidFill>
-                  <a:srgbClr val="1F2937"/>
-                </a:solidFill>
-                <a:latin typeface="Meiryo UI"/>
-                <a:ea typeface="Meiryo UI"/>
-              </a:rPr>
-              <a:t>Ask：死にたい気持ちの有無を率直に尋ねる</a:t>
-            </a:r>
-            <a:br/>
-            <a:r>
-              <a:rPr sz="900" b="0">
-                <a:solidFill>
-                  <a:srgbClr val="1F2937"/>
-                </a:solidFill>
-                <a:latin typeface="Meiryo UI"/>
-                <a:ea typeface="Meiryo UI"/>
-              </a:rPr>
-              <a:t>Listen：批判せず、訴えを傾聴する</a:t>
-            </a:r>
-            <a:br/>
-            <a:r>
-              <a:rPr sz="900" b="0">
-                <a:solidFill>
-                  <a:srgbClr val="1F2937"/>
-                </a:solidFill>
-                <a:latin typeface="Meiryo UI"/>
-                <a:ea typeface="Meiryo UI"/>
-              </a:rPr>
-              <a:t>Keep safe：一人にせず、安全を確保する</a:t>
-            </a:r>
-          </a:p>
-        </p:txBody>
-      </p:sp>
-      <p:cxnSp>
-        <p:nvCxnSpPr>
-          <p:cNvPr id="10" name="Connector 9"/>
-          <p:cNvCxnSpPr/>
-          <p:nvPr/>
-        </p:nvCxnSpPr>
-        <p:spPr>
-          <a:xfrm>
-            <a:off x="4464000" y="1835999"/>
-            <a:ext cx="180000" cy="0"/>
-          </a:xfrm>
-          <a:prstGeom prst="line">
-            <a:avLst/>
-          </a:prstGeom>
-          <a:ln w="12700">
-            <a:solidFill>
-              <a:srgbClr val="8A939E"/>
-            </a:solidFill>
-            <a:prstDash val="dash"/>
-          </a:ln>
-          <a:effectLst/>
-        </p:spPr>
-        <p:style>
-          <a:lnRef idx="2">
-            <a:schemeClr val="accent1"/>
-          </a:lnRef>
-          <a:fillRef idx="0">
-            <a:schemeClr val="accent1"/>
-          </a:fillRef>
-          <a:effectRef idx="1">
-            <a:schemeClr val="accent1"/>
-          </a:effectRef>
-          <a:fontRef idx="minor">
-            <a:schemeClr val="tx1"/>
-          </a:fontRef>
-        </p:style>
-      </p:cxnSp>
-      <p:sp>
-        <p:nvSpPr>
-          <p:cNvPr id="11" name="Rectangle 10"/>
-          <p:cNvSpPr/>
-          <p:nvPr/>
-        </p:nvSpPr>
-        <p:spPr>
-          <a:xfrm>
-            <a:off x="360000" y="3276000"/>
-            <a:ext cx="6840000" cy="288000"/>
-          </a:xfrm>
-          <a:prstGeom prst="rect">
-            <a:avLst/>
-          </a:prstGeom>
-          <a:solidFill>
-            <a:srgbClr val="EAF0F8"/>
-          </a:solidFill>
-          <a:ln w="15875">
-            <a:solidFill>
-              <a:srgbClr val="2F5496"/>
-            </a:solidFill>
-          </a:ln>
-          <a:effectLst/>
-        </p:spPr>
-        <p:style>
-          <a:lnRef idx="1">
-            <a:schemeClr val="accent1"/>
-          </a:lnRef>
-          <a:fillRef idx="3">
-            <a:schemeClr val="accent1"/>
-          </a:fillRef>
-          <a:effectRef idx="2">
-            <a:schemeClr val="accent1"/>
-          </a:effectRef>
-          <a:fontRef idx="minor">
-            <a:schemeClr val="lt1"/>
-          </a:fontRef>
-        </p:style>
-        <p:txBody>
-          <a:bodyPr rtlCol="0" anchor="ctr" wrap="square" lIns="54000" rIns="54000" tIns="28800" bIns="28800"/>
-          <a:lstStyle/>
-          <a:p>
-            <a:pPr algn="ctr">
-              <a:lnSpc>
-                <a:spcPct val="105000"/>
-              </a:lnSpc>
-              <a:spcAft>
-                <a:spcPts val="200"/>
-              </a:spcAft>
-            </a:pPr>
-            <a:r>
-              <a:rPr sz="1200" b="1">
-                <a:solidFill>
-                  <a:srgbClr val="2F5496"/>
-                </a:solidFill>
-                <a:latin typeface="Meiryo UI"/>
-                <a:ea typeface="Meiryo UI"/>
-              </a:rPr>
-              <a:t>根拠・参考資料</a:t>
-            </a:r>
-          </a:p>
-        </p:txBody>
-      </p:sp>
-      <p:sp>
-        <p:nvSpPr>
-          <p:cNvPr id="12" name="Rectangle 11"/>
-          <p:cNvSpPr/>
-          <p:nvPr/>
-        </p:nvSpPr>
-        <p:spPr>
-          <a:xfrm>
-            <a:off x="360000" y="3564000"/>
-            <a:ext cx="6840000" cy="2664000"/>
-          </a:xfrm>
-          <a:prstGeom prst="rect">
-            <a:avLst/>
-          </a:prstGeom>
-          <a:solidFill>
-            <a:srgbClr val="FFFFFF"/>
-          </a:solidFill>
-          <a:ln w="15875">
-            <a:solidFill>
-              <a:srgbClr val="2F5496"/>
-            </a:solidFill>
-          </a:ln>
-          <a:effectLst/>
-        </p:spPr>
-        <p:style>
-          <a:lnRef idx="1">
-            <a:schemeClr val="accent1"/>
-          </a:lnRef>
-          <a:fillRef idx="3">
-            <a:schemeClr val="accent1"/>
-          </a:fillRef>
-          <a:effectRef idx="2">
-            <a:schemeClr val="accent1"/>
-          </a:effectRef>
-          <a:fontRef idx="minor">
-            <a:schemeClr val="lt1"/>
-          </a:fontRef>
-        </p:style>
-        <p:txBody>
-          <a:bodyPr rtlCol="0" anchor="t" wrap="square" lIns="54000" rIns="54000" tIns="28800" bIns="28800"/>
-          <a:lstStyle/>
-          <a:p>
-            <a:pPr algn="l">
-              <a:lnSpc>
-                <a:spcPct val="105000"/>
-              </a:lnSpc>
-              <a:spcAft>
-                <a:spcPts val="300"/>
-              </a:spcAft>
-            </a:pPr>
-            <a:r>
-              <a:rPr sz="1000" b="1">
-                <a:solidFill>
-                  <a:srgbClr val="1F2937"/>
-                </a:solidFill>
-                <a:latin typeface="Meiryo UI"/>
-                <a:ea typeface="Meiryo UI"/>
-              </a:rPr>
-              <a:t>【国の手引き・計画】</a:t>
-            </a:r>
-          </a:p>
-          <a:p>
-            <a:pPr algn="l">
-              <a:lnSpc>
-                <a:spcPct val="105000"/>
-              </a:lnSpc>
-              <a:spcAft>
-                <a:spcPts val="300"/>
-              </a:spcAft>
-            </a:pPr>
-            <a:r>
-              <a:rPr sz="950" b="0">
-                <a:solidFill>
-                  <a:srgbClr val="1F2937"/>
-                </a:solidFill>
-                <a:latin typeface="Meiryo UI"/>
-                <a:ea typeface="Meiryo UI"/>
-              </a:rPr>
-              <a:t>・文部科学省「教師が知っておきたい子どもの自殺予防」（平成21年3月）…TALKの原則、組織的対応、記録の重要性</a:t>
-            </a:r>
-          </a:p>
-          <a:p>
-            <a:pPr algn="l">
-              <a:lnSpc>
-                <a:spcPct val="105000"/>
-              </a:lnSpc>
-              <a:spcAft>
-                <a:spcPts val="300"/>
-              </a:spcAft>
-            </a:pPr>
-            <a:r>
-              <a:rPr sz="950" b="0">
-                <a:solidFill>
-                  <a:srgbClr val="1F2937"/>
-                </a:solidFill>
-                <a:latin typeface="Meiryo UI"/>
-                <a:ea typeface="Meiryo UI"/>
-              </a:rPr>
-              <a:t>・文部科学省「子供に伝えたい自殺予防（学校における自殺予防教育導入の手引）」（平成26年7月）</a:t>
-            </a:r>
-          </a:p>
-          <a:p>
-            <a:pPr algn="l">
-              <a:lnSpc>
-                <a:spcPct val="105000"/>
-              </a:lnSpc>
-              <a:spcAft>
-                <a:spcPts val="300"/>
-              </a:spcAft>
-            </a:pPr>
-            <a:r>
-              <a:rPr sz="950" b="0">
-                <a:solidFill>
-                  <a:srgbClr val="1F2937"/>
-                </a:solidFill>
-                <a:latin typeface="Meiryo UI"/>
-                <a:ea typeface="Meiryo UI"/>
-              </a:rPr>
-              <a:t>・自殺総合対策大綱（令和4年10月 閣議決定）</a:t>
-            </a:r>
-          </a:p>
-          <a:p>
-            <a:pPr algn="l">
-              <a:lnSpc>
-                <a:spcPct val="105000"/>
-              </a:lnSpc>
-              <a:spcAft>
-                <a:spcPts val="300"/>
-              </a:spcAft>
-            </a:pPr>
-            <a:r>
-              <a:rPr sz="950" b="0">
-                <a:solidFill>
-                  <a:srgbClr val="1F2937"/>
-                </a:solidFill>
-                <a:latin typeface="Meiryo UI"/>
-                <a:ea typeface="Meiryo UI"/>
-              </a:rPr>
-              <a:t>・こども家庭庁ほか「こどもの自殺対策緊急強化プラン」（令和5年6月）</a:t>
-            </a:r>
-          </a:p>
-          <a:p>
-            <a:pPr algn="l">
-              <a:lnSpc>
-                <a:spcPct val="105000"/>
-              </a:lnSpc>
-              <a:spcAft>
-                <a:spcPts val="300"/>
-              </a:spcAft>
-            </a:pPr>
-            <a:r>
-              <a:rPr sz="1000" b="1">
-                <a:solidFill>
-                  <a:srgbClr val="1F2937"/>
-                </a:solidFill>
-                <a:latin typeface="Meiryo UI"/>
-                <a:ea typeface="Meiryo UI"/>
-              </a:rPr>
-              <a:t>【法令】</a:t>
-            </a:r>
-          </a:p>
-          <a:p>
-            <a:pPr algn="l">
-              <a:lnSpc>
-                <a:spcPct val="105000"/>
-              </a:lnSpc>
-              <a:spcAft>
-                <a:spcPts val="300"/>
-              </a:spcAft>
-            </a:pPr>
-            <a:r>
-              <a:rPr sz="950" b="0">
-                <a:solidFill>
-                  <a:srgbClr val="1F2937"/>
-                </a:solidFill>
-                <a:latin typeface="Meiryo UI"/>
-                <a:ea typeface="Meiryo UI"/>
-              </a:rPr>
-              <a:t>・個人情報の保護に関する法律 第27条第1項第2号 …生命・身体の保護に必要な場合、本人同意なく第三者提供が可能</a:t>
-            </a:r>
-          </a:p>
-          <a:p>
-            <a:pPr algn="l">
-              <a:lnSpc>
-                <a:spcPct val="105000"/>
-              </a:lnSpc>
-              <a:spcAft>
-                <a:spcPts val="300"/>
-              </a:spcAft>
-            </a:pPr>
-            <a:r>
-              <a:rPr sz="950" b="0">
-                <a:solidFill>
-                  <a:srgbClr val="1F2937"/>
-                </a:solidFill>
-                <a:latin typeface="Meiryo UI"/>
-                <a:ea typeface="Meiryo UI"/>
-              </a:rPr>
-              <a:t>・児童虐待の防止等に関する法律 第6条 …虐待が疑われる場合の通告義務（子供家庭支援センター・児童相談所等へ）</a:t>
-            </a:r>
-          </a:p>
-          <a:p>
-            <a:pPr algn="l">
-              <a:lnSpc>
-                <a:spcPct val="105000"/>
-              </a:lnSpc>
-              <a:spcAft>
-                <a:spcPts val="300"/>
-              </a:spcAft>
-            </a:pPr>
-            <a:r>
-              <a:rPr sz="950" b="0">
-                <a:solidFill>
-                  <a:srgbClr val="1F2937"/>
-                </a:solidFill>
-                <a:latin typeface="Meiryo UI"/>
-                <a:ea typeface="Meiryo UI"/>
-              </a:rPr>
-              <a:t>・警察官職務執行法 第3条 …自殺企図のおそれのある者の保護</a:t>
-            </a:r>
-          </a:p>
-          <a:p>
-            <a:pPr algn="l">
-              <a:lnSpc>
-                <a:spcPct val="105000"/>
-              </a:lnSpc>
-              <a:spcAft>
-                <a:spcPts val="300"/>
-              </a:spcAft>
-            </a:pPr>
-            <a:r>
-              <a:rPr sz="950" b="0">
-                <a:solidFill>
-                  <a:srgbClr val="1F2937"/>
-                </a:solidFill>
-                <a:latin typeface="Meiryo UI"/>
-                <a:ea typeface="Meiryo UI"/>
-              </a:rPr>
-              <a:t>・自殺対策基本法（平成18年法律第85号）</a:t>
-            </a:r>
-          </a:p>
-          <a:p>
-            <a:pPr algn="l">
-              <a:lnSpc>
-                <a:spcPct val="105000"/>
-              </a:lnSpc>
-              <a:spcAft>
-                <a:spcPts val="300"/>
-              </a:spcAft>
-            </a:pPr>
-            <a:r>
-              <a:rPr sz="1000" b="1">
-                <a:solidFill>
-                  <a:srgbClr val="1F2937"/>
-                </a:solidFill>
-                <a:latin typeface="Meiryo UI"/>
-                <a:ea typeface="Meiryo UI"/>
-              </a:rPr>
-              <a:t>【相談窓口】</a:t>
-            </a:r>
-          </a:p>
-          <a:p>
-            <a:pPr algn="l">
-              <a:lnSpc>
-                <a:spcPct val="105000"/>
-              </a:lnSpc>
-              <a:spcAft>
-                <a:spcPts val="300"/>
-              </a:spcAft>
-            </a:pPr>
-            <a:r>
-              <a:rPr sz="950" b="0">
-                <a:solidFill>
-                  <a:srgbClr val="1F2937"/>
-                </a:solidFill>
-                <a:latin typeface="Meiryo UI"/>
-                <a:ea typeface="Meiryo UI"/>
-              </a:rPr>
-              <a:t>・こたエール（東京こどもネット・ケータイヘルプデスク）…東京都のネット・スマホトラブル相談窓口</a:t>
-            </a:r>
-          </a:p>
-        </p:txBody>
-      </p:sp>
-      <p:sp>
-        <p:nvSpPr>
-          <p:cNvPr id="13" name="Rectangle 12"/>
-          <p:cNvSpPr/>
-          <p:nvPr/>
-        </p:nvSpPr>
-        <p:spPr>
-          <a:xfrm>
-            <a:off x="360000" y="6443999"/>
-            <a:ext cx="6840000" cy="288000"/>
-          </a:xfrm>
-          <a:prstGeom prst="rect">
-            <a:avLst/>
-          </a:prstGeom>
-          <a:solidFill>
-            <a:srgbClr val="FDF3E7"/>
-          </a:solidFill>
-          <a:ln w="15875">
-            <a:solidFill>
-              <a:srgbClr val="C0630C"/>
-            </a:solidFill>
-          </a:ln>
-          <a:effectLst/>
-        </p:spPr>
-        <p:style>
-          <a:lnRef idx="1">
-            <a:schemeClr val="accent1"/>
-          </a:lnRef>
-          <a:fillRef idx="3">
-            <a:schemeClr val="accent1"/>
-          </a:fillRef>
-          <a:effectRef idx="2">
-            <a:schemeClr val="accent1"/>
-          </a:effectRef>
-          <a:fontRef idx="minor">
-            <a:schemeClr val="lt1"/>
-          </a:fontRef>
-        </p:style>
-        <p:txBody>
-          <a:bodyPr rtlCol="0" anchor="ctr" wrap="square" lIns="54000" rIns="54000" tIns="28800" bIns="28800"/>
-          <a:lstStyle/>
-          <a:p>
-            <a:pPr algn="ctr">
-              <a:lnSpc>
-                <a:spcPct val="105000"/>
-              </a:lnSpc>
-              <a:spcAft>
-                <a:spcPts val="200"/>
-              </a:spcAft>
-            </a:pPr>
-            <a:r>
-              <a:rPr sz="1200" b="1">
-                <a:solidFill>
-                  <a:srgbClr val="C0630C"/>
-                </a:solidFill>
-                <a:latin typeface="Meiryo UI"/>
-                <a:ea typeface="Meiryo UI"/>
-              </a:rPr>
-              <a:t>主な連絡先（年度当初に記入し、課内で共有しておく）</a:t>
-            </a:r>
-          </a:p>
-        </p:txBody>
-      </p:sp>
-      <p:sp>
-        <p:nvSpPr>
-          <p:cNvPr id="14" name="Rectangle 13"/>
-          <p:cNvSpPr/>
-          <p:nvPr/>
-        </p:nvSpPr>
-        <p:spPr>
-          <a:xfrm>
-            <a:off x="360000" y="6732000"/>
-            <a:ext cx="6840000" cy="1655999"/>
-          </a:xfrm>
-          <a:prstGeom prst="rect">
-            <a:avLst/>
-          </a:prstGeom>
-          <a:solidFill>
-            <a:srgbClr val="FFFFFF"/>
-          </a:solidFill>
-          <a:ln w="15875">
-            <a:solidFill>
-              <a:srgbClr val="C0630C"/>
-            </a:solidFill>
-          </a:ln>
-          <a:effectLst/>
-        </p:spPr>
-        <p:style>
-          <a:lnRef idx="1">
-            <a:schemeClr val="accent1"/>
-          </a:lnRef>
-          <a:fillRef idx="3">
-            <a:schemeClr val="accent1"/>
-          </a:fillRef>
-          <a:effectRef idx="2">
-            <a:schemeClr val="accent1"/>
-          </a:effectRef>
-          <a:fontRef idx="minor">
-            <a:schemeClr val="lt1"/>
-          </a:fontRef>
-        </p:style>
-        <p:txBody>
-          <a:bodyPr rtlCol="0" anchor="t" wrap="square" lIns="54000" rIns="54000" tIns="28800" bIns="28800"/>
-          <a:lstStyle/>
-          <a:p>
-            <a:pPr algn="l">
-              <a:lnSpc>
-                <a:spcPct val="105000"/>
-              </a:lnSpc>
-              <a:spcAft>
-                <a:spcPts val="600"/>
-              </a:spcAft>
-            </a:pPr>
-            <a:r>
-              <a:rPr sz="1000" b="0">
-                <a:solidFill>
-                  <a:srgbClr val="1F2937"/>
-                </a:solidFill>
-                <a:latin typeface="Meiryo UI"/>
-                <a:ea typeface="Meiryo UI"/>
-              </a:rPr>
-              <a:t>・こたエール　　　　　　　　　　　　　　TEL：　　　　　　　　　　担当：</a:t>
-            </a:r>
-          </a:p>
-          <a:p>
-            <a:pPr algn="l">
-              <a:lnSpc>
-                <a:spcPct val="105000"/>
-              </a:lnSpc>
-              <a:spcAft>
-                <a:spcPts val="600"/>
-              </a:spcAft>
-            </a:pPr>
-            <a:r>
-              <a:rPr sz="1000" b="0">
-                <a:solidFill>
-                  <a:srgbClr val="1F2937"/>
-                </a:solidFill>
-                <a:latin typeface="Meiryo UI"/>
-                <a:ea typeface="Meiryo UI"/>
-              </a:rPr>
-              <a:t>・管轄警察署（生活安全課等）　　　　　　TEL：　　　　　　　　　　担当：</a:t>
-            </a:r>
-          </a:p>
-          <a:p>
-            <a:pPr algn="l">
-              <a:lnSpc>
-                <a:spcPct val="105000"/>
-              </a:lnSpc>
-              <a:spcAft>
-                <a:spcPts val="600"/>
-              </a:spcAft>
-            </a:pPr>
-            <a:r>
-              <a:rPr sz="1000" b="0">
-                <a:solidFill>
-                  <a:srgbClr val="1F2937"/>
-                </a:solidFill>
-                <a:latin typeface="Meiryo UI"/>
-                <a:ea typeface="Meiryo UI"/>
-              </a:rPr>
-              <a:t>・教育ICT環境整備係（教育施設課）　　　 内線：　　　　　　　　　 担当：</a:t>
-            </a:r>
-          </a:p>
-          <a:p>
-            <a:pPr algn="l">
-              <a:lnSpc>
-                <a:spcPct val="105000"/>
-              </a:lnSpc>
-              <a:spcAft>
-                <a:spcPts val="600"/>
-              </a:spcAft>
-            </a:pPr>
-            <a:r>
-              <a:rPr sz="1000" b="0">
-                <a:solidFill>
-                  <a:srgbClr val="1F2937"/>
-                </a:solidFill>
-                <a:latin typeface="Meiryo UI"/>
-                <a:ea typeface="Meiryo UI"/>
-              </a:rPr>
-              <a:t>・子供家庭支援センター　　　　　　　　　TEL：　　　　　　　　　　担当：</a:t>
-            </a:r>
-          </a:p>
-          <a:p>
-            <a:pPr algn="l">
-              <a:lnSpc>
-                <a:spcPct val="105000"/>
-              </a:lnSpc>
-              <a:spcAft>
-                <a:spcPts val="600"/>
-              </a:spcAft>
-            </a:pPr>
-            <a:r>
-              <a:rPr sz="1000" b="0">
-                <a:solidFill>
-                  <a:srgbClr val="1F2937"/>
-                </a:solidFill>
-                <a:latin typeface="Meiryo UI"/>
-                <a:ea typeface="Meiryo UI"/>
-              </a:rPr>
-              <a:t>・児童相談所　　　　　　　　　　　　　　TEL：　　　　　　　　　　担当：</a:t>
-            </a:r>
-          </a:p>
-          <a:p>
-            <a:pPr algn="l">
-              <a:lnSpc>
-                <a:spcPct val="105000"/>
-              </a:lnSpc>
-              <a:spcAft>
-                <a:spcPts val="600"/>
-              </a:spcAft>
-            </a:pPr>
-            <a:r>
-              <a:rPr sz="1000" b="0">
-                <a:solidFill>
-                  <a:srgbClr val="1F2937"/>
-                </a:solidFill>
-                <a:latin typeface="Meiryo UI"/>
-                <a:ea typeface="Meiryo UI"/>
-              </a:rPr>
-              <a:t>・課長・統括指導主事（勤務時間外）　　　TEL：</a:t>
+              <a:t>練馬区教育委員会 教育指導課</a:t>
             </a:r>
           </a:p>
         </p:txBody>
